--- a/disciplina-01-estado-governo-mercado/materiais/03_Unidade_3_Matriz_Marxista.pptx
+++ b/disciplina-01-estado-governo-mercado/materiais/03_Unidade_3_Matriz_Marxista.pptx
@@ -1585,8 +1585,8 @@
         </p:nvSpPr>
         <p:spPr>
           <a:xfrm>
-            <a:off x="1188720" y="1828800"/>
-            <a:ext cx="7223760" cy="1463040"/>
+            <a:off x="1188720" y="1810512"/>
+            <a:ext cx="7223760" cy="365760"/>
           </a:xfrm>
           <a:prstGeom prst="rect">
             <a:avLst/>
@@ -1605,7 +1605,49 @@
               <a:buNone/>
             </a:pPr>
             <a:r>
-              <a:rPr lang="en-US" sz="4600" b="1" dirty="0">
+              <a:rPr lang="en-US" sz="2000" b="1" dirty="0">
+                <a:solidFill>
+                  <a:srgbClr val="2A8C85"/>
+                </a:solidFill>
+                <a:latin typeface="Calibri" pitchFamily="34" charset="0"/>
+                <a:ea typeface="Calibri" pitchFamily="34" charset="-122"/>
+                <a:cs typeface="Calibri" pitchFamily="34" charset="-120"/>
+              </a:rPr>
+              <a:t>Especialização em Gestão Pública</a:t>
+            </a:r>
+            <a:endParaRPr lang="en-US" sz="2000" dirty="0"/>
+          </a:p>
+        </p:txBody>
+      </p:sp>
+      <p:sp>
+        <p:nvSpPr>
+          <p:cNvPr id="6" name="Text 1"/>
+          <p:cNvSpPr txBox="1"/>
+          <p:nvPr/>
+        </p:nvSpPr>
+        <p:spPr>
+          <a:xfrm>
+            <a:off x="1188720" y="2157984"/>
+            <a:ext cx="7223760" cy="786384"/>
+          </a:xfrm>
+          <a:prstGeom prst="rect">
+            <a:avLst/>
+          </a:prstGeom>
+          <a:noFill/>
+          <a:ln/>
+        </p:spPr>
+        <p:txBody>
+          <a:bodyPr wrap="square" lIns="0" tIns="0" rIns="0" bIns="0" rtlCol="0" anchor="ctr"/>
+          <a:lstStyle/>
+          <a:p>
+            <a:pPr algn="l" indent="0" marL="0">
+              <a:lnSpc>
+                <a:spcPct val="100000"/>
+              </a:lnSpc>
+              <a:buNone/>
+            </a:pPr>
+            <a:r>
+              <a:rPr lang="en-US" sz="4800" b="1" dirty="0">
                 <a:solidFill>
                   <a:srgbClr val="13294B"/>
                 </a:solidFill>
@@ -1613,10 +1655,32 @@
                 <a:ea typeface="Calibri" pitchFamily="34" charset="-122"/>
                 <a:cs typeface="Calibri" pitchFamily="34" charset="-120"/>
               </a:rPr>
-              <a:t>Especialização em</a:t>
-            </a:r>
-            <a:endParaRPr lang="en-US" sz="4600" dirty="0"/>
-          </a:p>
+              <a:t>Estado, Governo e Mercado</a:t>
+            </a:r>
+            <a:endParaRPr lang="en-US" sz="4800" dirty="0"/>
+          </a:p>
+        </p:txBody>
+      </p:sp>
+      <p:sp>
+        <p:nvSpPr>
+          <p:cNvPr id="7" name="Text 2"/>
+          <p:cNvSpPr txBox="1"/>
+          <p:nvPr/>
+        </p:nvSpPr>
+        <p:spPr>
+          <a:xfrm>
+            <a:off x="1188720" y="2926080"/>
+            <a:ext cx="7223760" cy="384048"/>
+          </a:xfrm>
+          <a:prstGeom prst="rect">
+            <a:avLst/>
+          </a:prstGeom>
+          <a:noFill/>
+          <a:ln/>
+        </p:spPr>
+        <p:txBody>
+          <a:bodyPr wrap="square" lIns="0" tIns="0" rIns="0" bIns="0" rtlCol="0" anchor="ctr"/>
+          <a:lstStyle/>
           <a:p>
             <a:pPr algn="l" indent="0" marL="0">
               <a:lnSpc>
@@ -1625,30 +1689,30 @@
               <a:buNone/>
             </a:pPr>
             <a:r>
-              <a:rPr lang="en-US" sz="4600" b="1" dirty="0">
+              <a:rPr lang="en-US" sz="1900" dirty="0">
                 <a:solidFill>
-                  <a:srgbClr val="13294B"/>
+                  <a:srgbClr val="1F2A37"/>
                 </a:solidFill>
                 <a:latin typeface="Calibri" pitchFamily="34" charset="0"/>
                 <a:ea typeface="Calibri" pitchFamily="34" charset="-122"/>
                 <a:cs typeface="Calibri" pitchFamily="34" charset="-120"/>
               </a:rPr>
-              <a:t>Gestão Pública</a:t>
-            </a:r>
-            <a:endParaRPr lang="en-US" sz="4600" dirty="0"/>
+              <a:t>Unidade 3 · A matriz marxista e as mudanças do século XIX</a:t>
+            </a:r>
+            <a:endParaRPr lang="en-US" sz="1900" dirty="0"/>
           </a:p>
         </p:txBody>
       </p:sp>
       <p:sp>
         <p:nvSpPr>
-          <p:cNvPr id="6" name="Text 1"/>
+          <p:cNvPr id="8" name="Text 3"/>
           <p:cNvSpPr txBox="1"/>
           <p:nvPr/>
         </p:nvSpPr>
         <p:spPr>
           <a:xfrm>
-            <a:off x="1243584" y="3456432"/>
-            <a:ext cx="3017520" cy="420624"/>
+            <a:off x="1243584" y="3474720"/>
+            <a:ext cx="4572000" cy="420624"/>
           </a:xfrm>
           <a:prstGeom prst="roundRect">
             <a:avLst>
@@ -1679,7 +1743,7 @@
                 <a:ea typeface="Calibri" pitchFamily="34" charset="-122"/>
                 <a:cs typeface="Calibri" pitchFamily="34" charset="-120"/>
               </a:rPr>
-              <a:t>DEAD · UAB · Turma 2026/2</a:t>
+              <a:t>DEAD · UAB · Turma 2026/2 · Prof. Dr. Cleiton Franco</a:t>
             </a:r>
             <a:endParaRPr lang="en-US" sz="1500" dirty="0"/>
           </a:p>
@@ -1760,7 +1824,7 @@
                 <a:ea typeface="Calibri" pitchFamily="34" charset="-122"/>
                 <a:cs typeface="Calibri" pitchFamily="34" charset="-120"/>
               </a:rPr>
-              <a:t>Unidade 3</a:t>
+              <a:t>Estado, Governo e Mercado</a:t>
             </a:r>
             <a:endParaRPr lang="en-US" sz="3200" dirty="0"/>
           </a:p>
@@ -1774,8 +1838,8 @@
         </p:nvSpPr>
         <p:spPr>
           <a:xfrm>
-            <a:off x="1920240" y="969264"/>
-            <a:ext cx="5303520" cy="402336"/>
+            <a:off x="1371600" y="969264"/>
+            <a:ext cx="6400800" cy="402336"/>
           </a:xfrm>
           <a:prstGeom prst="roundRect">
             <a:avLst>
@@ -1806,7 +1870,7 @@
                 <a:ea typeface="Calibri" pitchFamily="34" charset="-122"/>
                 <a:cs typeface="Calibri" pitchFamily="34" charset="-120"/>
               </a:rPr>
-              <a:t>A matriz marxista e as mudanças do século XIX</a:t>
+              <a:t>Unidade 3 · A matriz marxista e as mudanças do século XIX</a:t>
             </a:r>
             <a:endParaRPr lang="en-US" sz="1500" dirty="0"/>
           </a:p>
@@ -2896,6 +2960,48 @@
           </a:p>
         </p:txBody>
       </p:sp>
+      <p:sp>
+        <p:nvSpPr>
+          <p:cNvPr id="9" name="Text 7"/>
+          <p:cNvSpPr txBox="1"/>
+          <p:nvPr/>
+        </p:nvSpPr>
+        <p:spPr>
+          <a:xfrm>
+            <a:off x="4206240" y="36576"/>
+            <a:ext cx="4800600" cy="219456"/>
+          </a:xfrm>
+          <a:prstGeom prst="rect">
+            <a:avLst/>
+          </a:prstGeom>
+          <a:noFill/>
+          <a:ln/>
+        </p:spPr>
+        <p:txBody>
+          <a:bodyPr wrap="square" lIns="0" tIns="0" rIns="0" bIns="0" rtlCol="0" anchor="ctr"/>
+          <a:lstStyle/>
+          <a:p>
+            <a:pPr algn="r" indent="0" marL="0">
+              <a:lnSpc>
+                <a:spcPct val="100000"/>
+              </a:lnSpc>
+              <a:buNone/>
+            </a:pPr>
+            <a:r>
+              <a:rPr lang="en-US" sz="950" dirty="0">
+                <a:solidFill>
+                  <a:srgbClr val="5B6770"/>
+                </a:solidFill>
+                <a:latin typeface="Calibri" pitchFamily="34" charset="0"/>
+                <a:ea typeface="Calibri" pitchFamily="34" charset="-122"/>
+                <a:cs typeface="Calibri" pitchFamily="34" charset="-120"/>
+              </a:rPr>
+              <a:t>Estado, Governo e Mercado · Unidade 3</a:t>
+            </a:r>
+            <a:endParaRPr lang="en-US" sz="950" dirty="0"/>
+          </a:p>
+        </p:txBody>
+      </p:sp>
     </p:spTree>
   </p:cSld>
   <p:clrMapOvr>
@@ -3313,6 +3419,48 @@
               <a:t>Sociedade sem classes, na qual o Estado se extingue.</a:t>
             </a:r>
             <a:endParaRPr lang="en-US" sz="1600" dirty="0"/>
+          </a:p>
+        </p:txBody>
+      </p:sp>
+      <p:sp>
+        <p:nvSpPr>
+          <p:cNvPr id="12" name="Text 8"/>
+          <p:cNvSpPr txBox="1"/>
+          <p:nvPr/>
+        </p:nvSpPr>
+        <p:spPr>
+          <a:xfrm>
+            <a:off x="4206240" y="36576"/>
+            <a:ext cx="4800600" cy="219456"/>
+          </a:xfrm>
+          <a:prstGeom prst="rect">
+            <a:avLst/>
+          </a:prstGeom>
+          <a:noFill/>
+          <a:ln/>
+        </p:spPr>
+        <p:txBody>
+          <a:bodyPr wrap="square" lIns="0" tIns="0" rIns="0" bIns="0" rtlCol="0" anchor="ctr"/>
+          <a:lstStyle/>
+          <a:p>
+            <a:pPr algn="r" indent="0" marL="0">
+              <a:lnSpc>
+                <a:spcPct val="100000"/>
+              </a:lnSpc>
+              <a:buNone/>
+            </a:pPr>
+            <a:r>
+              <a:rPr lang="en-US" sz="950" dirty="0">
+                <a:solidFill>
+                  <a:srgbClr val="5B6770"/>
+                </a:solidFill>
+                <a:latin typeface="Calibri" pitchFamily="34" charset="0"/>
+                <a:ea typeface="Calibri" pitchFamily="34" charset="-122"/>
+                <a:cs typeface="Calibri" pitchFamily="34" charset="-120"/>
+              </a:rPr>
+              <a:t>Estado, Governo e Mercado · Unidade 3</a:t>
+            </a:r>
+            <a:endParaRPr lang="en-US" sz="950" dirty="0"/>
           </a:p>
         </p:txBody>
       </p:sp>
@@ -4695,6 +4843,48 @@
           </a:graphicData>
         </a:graphic>
       </p:graphicFrame>
+      <p:sp>
+        <p:nvSpPr>
+          <p:cNvPr id="5" name="Text 2"/>
+          <p:cNvSpPr txBox="1"/>
+          <p:nvPr/>
+        </p:nvSpPr>
+        <p:spPr>
+          <a:xfrm>
+            <a:off x="4206240" y="36576"/>
+            <a:ext cx="4800600" cy="219456"/>
+          </a:xfrm>
+          <a:prstGeom prst="rect">
+            <a:avLst/>
+          </a:prstGeom>
+          <a:noFill/>
+          <a:ln/>
+        </p:spPr>
+        <p:txBody>
+          <a:bodyPr wrap="square" lIns="0" tIns="0" rIns="0" bIns="0" rtlCol="0" anchor="ctr"/>
+          <a:lstStyle/>
+          <a:p>
+            <a:pPr algn="r" indent="0" marL="0">
+              <a:lnSpc>
+                <a:spcPct val="100000"/>
+              </a:lnSpc>
+              <a:buNone/>
+            </a:pPr>
+            <a:r>
+              <a:rPr lang="en-US" sz="950" dirty="0">
+                <a:solidFill>
+                  <a:srgbClr val="5B6770"/>
+                </a:solidFill>
+                <a:latin typeface="Calibri" pitchFamily="34" charset="0"/>
+                <a:ea typeface="Calibri" pitchFamily="34" charset="-122"/>
+                <a:cs typeface="Calibri" pitchFamily="34" charset="-120"/>
+              </a:rPr>
+              <a:t>Estado, Governo e Mercado · Unidade 3</a:t>
+            </a:r>
+            <a:endParaRPr lang="en-US" sz="950" dirty="0"/>
+          </a:p>
+        </p:txBody>
+      </p:sp>
     </p:spTree>
   </p:cSld>
   <p:clrMapOvr>
@@ -5604,6 +5794,48 @@
           </a:p>
         </p:txBody>
       </p:sp>
+      <p:sp>
+        <p:nvSpPr>
+          <p:cNvPr id="27" name="Text 19"/>
+          <p:cNvSpPr txBox="1"/>
+          <p:nvPr/>
+        </p:nvSpPr>
+        <p:spPr>
+          <a:xfrm>
+            <a:off x="4206240" y="36576"/>
+            <a:ext cx="4800600" cy="219456"/>
+          </a:xfrm>
+          <a:prstGeom prst="rect">
+            <a:avLst/>
+          </a:prstGeom>
+          <a:noFill/>
+          <a:ln/>
+        </p:spPr>
+        <p:txBody>
+          <a:bodyPr wrap="square" lIns="0" tIns="0" rIns="0" bIns="0" rtlCol="0" anchor="ctr"/>
+          <a:lstStyle/>
+          <a:p>
+            <a:pPr algn="r" indent="0" marL="0">
+              <a:lnSpc>
+                <a:spcPct val="100000"/>
+              </a:lnSpc>
+              <a:buNone/>
+            </a:pPr>
+            <a:r>
+              <a:rPr lang="en-US" sz="950" dirty="0">
+                <a:solidFill>
+                  <a:srgbClr val="5B6770"/>
+                </a:solidFill>
+                <a:latin typeface="Calibri" pitchFamily="34" charset="0"/>
+                <a:ea typeface="Calibri" pitchFamily="34" charset="-122"/>
+                <a:cs typeface="Calibri" pitchFamily="34" charset="-120"/>
+              </a:rPr>
+              <a:t>Estado, Governo e Mercado · Unidade 3</a:t>
+            </a:r>
+            <a:endParaRPr lang="en-US" sz="950" dirty="0"/>
+          </a:p>
+        </p:txBody>
+      </p:sp>
     </p:spTree>
   </p:cSld>
   <p:clrMapOvr>
@@ -5983,6 +6215,48 @@
               <a:t>imperialismo (1916) e via revolucionária.</a:t>
             </a:r>
             <a:endParaRPr lang="en-US" sz="1200" dirty="0"/>
+          </a:p>
+        </p:txBody>
+      </p:sp>
+      <p:sp>
+        <p:nvSpPr>
+          <p:cNvPr id="5" name="Text 3"/>
+          <p:cNvSpPr txBox="1"/>
+          <p:nvPr/>
+        </p:nvSpPr>
+        <p:spPr>
+          <a:xfrm>
+            <a:off x="4206240" y="36576"/>
+            <a:ext cx="4800600" cy="219456"/>
+          </a:xfrm>
+          <a:prstGeom prst="rect">
+            <a:avLst/>
+          </a:prstGeom>
+          <a:noFill/>
+          <a:ln/>
+        </p:spPr>
+        <p:txBody>
+          <a:bodyPr wrap="square" lIns="0" tIns="0" rIns="0" bIns="0" rtlCol="0" anchor="ctr"/>
+          <a:lstStyle/>
+          <a:p>
+            <a:pPr algn="r" indent="0" marL="0">
+              <a:lnSpc>
+                <a:spcPct val="100000"/>
+              </a:lnSpc>
+              <a:buNone/>
+            </a:pPr>
+            <a:r>
+              <a:rPr lang="en-US" sz="950" dirty="0">
+                <a:solidFill>
+                  <a:srgbClr val="5B6770"/>
+                </a:solidFill>
+                <a:latin typeface="Calibri" pitchFamily="34" charset="0"/>
+                <a:ea typeface="Calibri" pitchFamily="34" charset="-122"/>
+                <a:cs typeface="Calibri" pitchFamily="34" charset="-120"/>
+              </a:rPr>
+              <a:t>Estado, Governo e Mercado · Unidade 3</a:t>
+            </a:r>
+            <a:endParaRPr lang="en-US" sz="950" dirty="0"/>
           </a:p>
         </p:txBody>
       </p:sp>
@@ -6734,6 +7008,48 @@
               <a:t>Próxima unidade: os modelos de Estado no século XX e o Estado brasileiro.</a:t>
             </a:r>
             <a:endParaRPr lang="en-US" sz="1350" dirty="0"/>
+          </a:p>
+        </p:txBody>
+      </p:sp>
+      <p:sp>
+        <p:nvSpPr>
+          <p:cNvPr id="6" name="Text 3"/>
+          <p:cNvSpPr txBox="1"/>
+          <p:nvPr/>
+        </p:nvSpPr>
+        <p:spPr>
+          <a:xfrm>
+            <a:off x="4206240" y="36576"/>
+            <a:ext cx="4800600" cy="219456"/>
+          </a:xfrm>
+          <a:prstGeom prst="rect">
+            <a:avLst/>
+          </a:prstGeom>
+          <a:noFill/>
+          <a:ln/>
+        </p:spPr>
+        <p:txBody>
+          <a:bodyPr wrap="square" lIns="0" tIns="0" rIns="0" bIns="0" rtlCol="0" anchor="ctr"/>
+          <a:lstStyle/>
+          <a:p>
+            <a:pPr algn="r" indent="0" marL="0">
+              <a:lnSpc>
+                <a:spcPct val="100000"/>
+              </a:lnSpc>
+              <a:buNone/>
+            </a:pPr>
+            <a:r>
+              <a:rPr lang="en-US" sz="950" dirty="0">
+                <a:solidFill>
+                  <a:srgbClr val="5B6770"/>
+                </a:solidFill>
+                <a:latin typeface="Calibri" pitchFamily="34" charset="0"/>
+                <a:ea typeface="Calibri" pitchFamily="34" charset="-122"/>
+                <a:cs typeface="Calibri" pitchFamily="34" charset="-120"/>
+              </a:rPr>
+              <a:t>Estado, Governo e Mercado · Unidade 3</a:t>
+            </a:r>
+            <a:endParaRPr lang="en-US" sz="950" dirty="0"/>
           </a:p>
         </p:txBody>
       </p:sp>

--- a/disciplina-01-estado-governo-mercado/materiais/03_Unidade_3_Matriz_Marxista.pptx
+++ b/disciplina-01-estado-governo-mercado/materiais/03_Unidade_3_Matriz_Marxista.pptx
@@ -8242,7 +8242,7 @@
                           <a:ea typeface="Calibri" pitchFamily="34" charset="-122"/>
                           <a:cs typeface="Calibri" pitchFamily="34" charset="-120"/>
                         </a:rPr>
-                        <a:t>3ª webaula, às 19h</a:t>
+                        <a:t>Encontro síncrono (Google Meet), 19h–20h30: revisão das Unidades 1 a 3 e orientações para A2 e A3</a:t>
                       </a:r>
                       <a:endParaRPr lang="en-US" sz="1350" dirty="0">
                         <a:latin typeface="Calibri" charset="0"/>
@@ -10775,7 +10775,7 @@
                 <a:ea typeface="Calibri" pitchFamily="34" charset="-122"/>
                 <a:cs typeface="Calibri" pitchFamily="34" charset="-120"/>
               </a:rPr>
-              <a:t>Página de conteúdos: Unidades 5 e 6 · Webaula: 28/10, 19h</a:t>
+              <a:t>Página de conteúdos: Unidades 5 e 6 · Encontro síncrono: 28/10, 19h</a:t>
             </a:r>
             <a:endParaRPr lang="en-US" sz="1500" dirty="0"/>
           </a:p>

--- a/disciplina-01-estado-governo-mercado/materiais/03_Unidade_3_Matriz_Marxista.pptx
+++ b/disciplina-01-estado-governo-mercado/materiais/03_Unidade_3_Matriz_Marxista.pptx
@@ -875,7 +875,7 @@
           <a:p>
             <a:r>
               <a:rPr lang="en-US" dirty="0"/>
-              <a:t/>
+              <a:t>Olá, turma! Chegamos à Unidade 3: a matriz marxista e as mudanças do capitalismo no final do século XIX. Se a matriz liberal vê o mercado como eficiente e natural, a matriz marxista faz uma crítica profunda ao capitalismo e ao papel do Estado. Conhecer as duas é essencial para analisar qualquer política pública com mais de um olhar.</a:t>
             </a:r>
             <a:endParaRPr lang="en-US" dirty="0"/>
           </a:p>
@@ -963,7 +963,7 @@
           <a:p>
             <a:r>
               <a:rPr lang="en-US" dirty="0"/>
-              <a:t/>
+              <a:t>Este quadro resume as duas matrizes. Sobre o mercado: para os liberais, é eficiente e natural; para os marxistas, é lugar de exploração e de crises. Sobre o Estado: para os liberais, garante direitos e deve ser limitado; para os marxistas, é instrumento de dominação de classe. A unidade de análise do liberalismo é o indivíduo; a do marxismo, as classes sociais. A propriedade privada é direito natural para uns e base da exploração para outros. E o horizonte: aperfeiçoar o capitalismo, de um lado, ou superá-lo, do outro. Este quadro é uma ótima ferramenta de revisão para a A2 e a A3.</a:t>
             </a:r>
             <a:endParaRPr lang="en-US" dirty="0"/>
           </a:p>
@@ -1051,7 +1051,7 @@
           <a:p>
             <a:r>
               <a:rPr lang="en-US" dirty="0"/>
-              <a:t/>
+              <a:t>Vamos aplicar as duas matrizes a uma política concreta: o aumento real do salário mínimo. A leitura liberal se preocupa com os custos: se o salário crescer acima da produtividade, pode haver menos contratações e mais informalidade, e o ideal seria o mercado definir os salários. A leitura marxista vê uma conquista da luta dos trabalhadores, que reduz a exploração e a desigualdade, embora não supere o capitalismo. As duas olham para a mesma política e chegam a avaliações diferentes. É exatamente isso que o fórum temático 2 vai pedir de você.</a:t>
             </a:r>
             <a:endParaRPr lang="en-US" dirty="0"/>
           </a:p>
@@ -1139,7 +1139,7 @@
           <a:p>
             <a:r>
               <a:rPr lang="en-US" dirty="0"/>
-              <a:t/>
+              <a:t>Parte 2: o capitalismo no final do século XIX. O capitalismo mudou muito entre 1870 e 1900, e essas mudanças abalaram tanto a matriz liberal quanto a marxista.</a:t>
             </a:r>
             <a:endParaRPr lang="en-US" dirty="0"/>
           </a:p>
@@ -1227,7 +1227,7 @@
           <a:p>
             <a:r>
               <a:rPr lang="en-US" dirty="0"/>
-              <a:t/>
+              <a:t>O que mudou? A Segunda Revolução Industrial trouxe o aço, a eletricidade, a química e o petróleo. Houve concentração: grandes empresas, trustes e cartéis. Surgiu o capital financeiro, com a fusão entre bancos e indústria. Os trabalhadores se organizaram em sindicatos e partidos operários. O direito de voto foi ampliado. E surgiram os primeiros seguros sociais, na Alemanha de Bismarck, na década de 1880. O capitalismo de pequenas empresas em livre concorrência, imaginado pelos clássicos, já não correspondia à realidade.</a:t>
             </a:r>
             <a:endParaRPr lang="en-US" dirty="0"/>
           </a:p>
@@ -1315,7 +1315,7 @@
           <a:p>
             <a:r>
               <a:rPr lang="en-US" dirty="0"/>
-              <a:t/>
+              <a:t>Os seguros sociais merecem destaque. Na Alemanha, em 1883, surge o seguro-doença obrigatório para os trabalhadores da indústria; em 1884, o seguro contra acidentes de trabalho; e em 1889, o seguro de invalidez e velhice. No Brasil, o marco é a Lei Eloy Chaves, de 1923, que criou as caixas de aposentadoria dos ferroviários, e depois a CLT, em 1943. Com isso, o Estado passa a proteger o trabalhador. É o começo da transição do Estado liberal para o Estado social.</a:t>
             </a:r>
             <a:endParaRPr lang="en-US" dirty="0"/>
           </a:p>
@@ -1403,7 +1403,7 @@
           <a:p>
             <a:r>
               <a:rPr lang="en-US" dirty="0"/>
-              <a:t/>
+              <a:t>Essas mudanças tiveram impacto nas duas matrizes. Na liberal, surge o liberalismo social: os monopólios desmentem a ideia de concorrência perfeita, e vêm as leis antitruste, como o Sherman Act, nos Estados Unidos, em 1890. John Stuart Mill defende a liberdade combinada com reformas sociais e educação. Na marxista, abre-se o debate entre reforma e revolução: Bernstein defende a social-democracia e as reformas graduais pela via eleitoral; Lênin defende a análise do imperialismo e a via revolucionária.</a:t>
             </a:r>
             <a:endParaRPr lang="en-US" dirty="0"/>
           </a:p>
@@ -1491,7 +1491,7 @@
           <a:p>
             <a:r>
               <a:rPr lang="en-US" dirty="0"/>
-              <a:t/>
+              <a:t>Vamos comparar esses dois caminhos. Eduard Bernstein, em Socialismo evolucionário, de 1899, aposta em reformas graduais, eleições e sindicatos, e vê o Estado como algo que pode ser usado para reformas sociais. Vladimir Lênin, em O Estado e a Revolução, de 1917, defende a revolução conduzida por um partido de vanguarda e um Estado que deve ser destruído e substituído. As heranças são diferentes: de Bernstein vem a social-democracia europeia; de Lênin, a Revolução Russa e o Estado soviético. A via social-democrata ajudou a construir o Estado de bem-estar; a revolucionária, o Estado socialista, que estudaremos na Unidade 4.</a:t>
             </a:r>
             <a:endParaRPr lang="en-US" dirty="0"/>
           </a:p>
@@ -1579,7 +1579,7 @@
           <a:p>
             <a:r>
               <a:rPr lang="en-US" dirty="0"/>
-              <a:t/>
+              <a:t>Atividades da Unidade 3. A partir de 26 de outubro, videoaula e leitura. No dia 28 de outubro, quarta-feira, das 19h às 20h30, teremos o encontro síncrono pelo Google Meet, com revisão das Unidades 1 a 3 e orientações para a A2 e a A3. Traga as suas dúvidas! E até 1º de novembro, participe do fórum temático 2: como um liberal e um marxista avaliariam uma mesma política pública? Na próxima unidade, os modelos de Estado do século XX e o Estado brasileiro.</a:t>
             </a:r>
             <a:endParaRPr lang="en-US" dirty="0"/>
           </a:p>
@@ -1667,7 +1667,7 @@
           <a:p>
             <a:r>
               <a:rPr lang="en-US" dirty="0"/>
-              <a:t/>
+              <a:t>Vamos ao quiz da Unidade 3: cinco perguntas. Pause, responda e confira no slide seguinte.</a:t>
             </a:r>
             <a:endParaRPr lang="en-US" dirty="0"/>
           </a:p>
@@ -1755,7 +1755,7 @@
           <a:p>
             <a:r>
               <a:rPr lang="en-US" dirty="0"/>
-              <a:t/>
+              <a:t>Pergunta 1. Para Marx, a base econômica (forças produtivas e relações de produção) condiciona: Letra a: A superestrutura jurídica, política e ideológica. Letra b: Apenas os preços dos produtos. Letra c: Somente o comércio exterior. Letra d: Nada: as ideias determinam a economia. Pause o vídeo e escolha a sua resposta.</a:t>
             </a:r>
             <a:endParaRPr lang="en-US" dirty="0"/>
           </a:p>
@@ -1843,7 +1843,7 @@
           <a:p>
             <a:r>
               <a:rPr lang="en-US" dirty="0"/>
-              <a:t/>
+              <a:t>Esta unidade vai de 26 de outubro a 1º de novembro. A leitura é o livro de Coelho, nas partes sobre a matriz marxista e as mudanças do século XIX, junto com as Unidades 5 e 6 da página de conteúdos. E atenção: no dia 28 de outubro, às 19h, temos o nosso encontro síncrono, o único da disciplina. A presença conta para a frequência.</a:t>
             </a:r>
             <a:endParaRPr lang="en-US" dirty="0"/>
           </a:p>
@@ -1931,7 +1931,7 @@
           <a:p>
             <a:r>
               <a:rPr lang="en-US" dirty="0"/>
-              <a:t/>
+              <a:t>A resposta correta é a letra a: A superestrutura jurídica, política e ideológica. É a tese do materialismo histórico: Estado, Direito e ideologias se apoiam na base econômica.</a:t>
             </a:r>
             <a:endParaRPr lang="en-US" dirty="0"/>
           </a:p>
@@ -2019,7 +2019,7 @@
           <a:p>
             <a:r>
               <a:rPr lang="en-US" dirty="0"/>
-              <a:t/>
+              <a:t>Pergunta 2. Numa jornada de 8 horas, o trabalhador produz em 4 horas o valor do seu salário. As outras 4 horas geram: Letra a: Salário. Letra b: Mais-valia. Letra c: Juros. Letra d: Aluguel. Pause o vídeo e escolha a sua resposta.</a:t>
             </a:r>
             <a:endParaRPr lang="en-US" dirty="0"/>
           </a:p>
@@ -2107,7 +2107,7 @@
           <a:p>
             <a:r>
               <a:rPr lang="en-US" dirty="0"/>
-              <a:t/>
+              <a:t>A resposta correta é a letra b: Mais-valia. O valor produzido no trabalho excedente é apropriado pelo capitalista: é a mais-valia, fonte do lucro.</a:t>
             </a:r>
             <a:endParaRPr lang="en-US" dirty="0"/>
           </a:p>
@@ -2195,7 +2195,7 @@
           <a:p>
             <a:r>
               <a:rPr lang="en-US" dirty="0"/>
-              <a:t/>
+              <a:t>Pergunta 3. Elevar a produtividade para reduzir o tempo de trabalho necessário gera mais-valia: Letra a: Absoluta. Letra b: Comercial. Letra c: Relativa. Letra d: Fictícia. Pause o vídeo e escolha a sua resposta.</a:t>
             </a:r>
             <a:endParaRPr lang="en-US" dirty="0"/>
           </a:p>
@@ -2283,7 +2283,7 @@
           <a:p>
             <a:r>
               <a:rPr lang="en-US" dirty="0"/>
-              <a:t/>
+              <a:t>A resposta correta é a letra c: Relativa. A mais-valia relativa vem do aumento da produtividade; a absoluta, do prolongamento da jornada.</a:t>
             </a:r>
             <a:endParaRPr lang="en-US" dirty="0"/>
           </a:p>
@@ -2371,7 +2371,7 @@
           <a:p>
             <a:r>
               <a:rPr lang="en-US" dirty="0"/>
-              <a:t/>
+              <a:t>Pergunta 4. Os primeiros seguros sociais estatais (doença, acidentes e velhice) foram criados: Letra a: Na Inglaterra de Thatcher. Letra b: Na Alemanha de Bismarck. Letra c: Nos EUA de Roosevelt. Letra d: Na União Soviética. Pause o vídeo e escolha a sua resposta.</a:t>
             </a:r>
             <a:endParaRPr lang="en-US" dirty="0"/>
           </a:p>
@@ -2459,7 +2459,7 @@
           <a:p>
             <a:r>
               <a:rPr lang="en-US" dirty="0"/>
-              <a:t/>
+              <a:t>A resposta correta é a letra b: Na Alemanha de Bismarck. Entre 1883 e 1889, na Alemanha de Bismarck: marco inicial da proteção social pelo Estado.</a:t>
             </a:r>
             <a:endParaRPr lang="en-US" dirty="0"/>
           </a:p>
@@ -2547,7 +2547,7 @@
           <a:p>
             <a:r>
               <a:rPr lang="en-US" dirty="0"/>
-              <a:t/>
+              <a:t>Pergunta 5. Reformas graduais pela via eleitoral e revolução por um partido de vanguarda são, respectivamente, estratégias de: Letra a: Bernstein e Lênin. Letra b: Lênin e Bernstein. Letra c: Smith e Marx. Letra d: Keynes e Hayek. Pause o vídeo e escolha a sua resposta.</a:t>
             </a:r>
             <a:endParaRPr lang="en-US" dirty="0"/>
           </a:p>
@@ -2635,7 +2635,7 @@
           <a:p>
             <a:r>
               <a:rPr lang="en-US" dirty="0"/>
-              <a:t/>
+              <a:t>A resposta correta é a letra a: Bernstein e Lênin. Bernstein representa o revisionismo social-democrata; Lênin, a via revolucionária. Encerramos a Unidade 3. Nos vemos no encontro síncrono do dia 28 de outubro, às 19h. Até lá!</a:t>
             </a:r>
             <a:endParaRPr lang="en-US" dirty="0"/>
           </a:p>
@@ -2723,7 +2723,7 @@
           <a:p>
             <a:r>
               <a:rPr lang="en-US" dirty="0"/>
-              <a:t/>
+              <a:t>Parte 1: a matriz marxista. Karl Marx e Friedrich Engels analisaram o capitalismo como um modo de produção histórico, que teve um começo e que, para eles, poderia ter um fim.</a:t>
             </a:r>
             <a:endParaRPr lang="en-US" dirty="0"/>
           </a:p>
@@ -2811,7 +2811,7 @@
           <a:p>
             <a:r>
               <a:rPr lang="en-US" dirty="0"/>
-              <a:t/>
+              <a:t>Quatro conceitos organizam a matriz marxista. O materialismo histórico: a base econômica condiciona a superestrutura jurídica, política e ideológica. A luta de classes: de um lado, a burguesia, dona dos meios de produção; do outro, o proletariado, que só tem a sua força de trabalho. A mais-valia: o valor que o trabalhador produz além do seu salário, fonte do lucro. E as crises, de superprodução e de concentração do capital. Como diz o Manifesto Comunista, de 1848: “A história de todas as sociedades até hoje existentes é a história das lutas de classes.”</a:t>
             </a:r>
             <a:endParaRPr lang="en-US" dirty="0"/>
           </a:p>
@@ -2899,7 +2899,7 @@
           <a:p>
             <a:r>
               <a:rPr lang="en-US" dirty="0"/>
-              <a:t/>
+              <a:t>Vamos entender o modo de produção. Na base, ou infraestrutura, estão as forças produtivas, isto é, o trabalho, as máquinas e as técnicas, e as relações de produção, que definem quem é dono dos meios de produção. Sobre essa base se ergue a superestrutura: o Estado, o Direito, a política, a religião e as ideologias. Para Marx, a história conhece vários modos de produção, como o escravista, o feudal e o capitalista, e cada um tem as suas classes e o seu tipo de Estado.</a:t>
             </a:r>
             <a:endParaRPr lang="en-US" dirty="0"/>
           </a:p>
@@ -2987,7 +2987,7 @@
           <a:p>
             <a:r>
               <a:rPr lang="en-US" dirty="0"/>
-              <a:t/>
+              <a:t>Vejamos a mais-valia com um exemplo. Numa jornada de 8 horas, suponha que nas primeiras 4 o trabalhador produza um valor igual ao seu salário: é o trabalho necessário. O valor produzido nas outras 4 horas, o trabalho excedente, fica com o capitalista: é a mais-valia, que para Marx é a fonte do lucro. Marx distingue duas formas de aumentá-la. A mais-valia absoluta vem de prolongar a jornada. A relativa vem de elevar a produtividade, reduzindo o tempo necessário para produzir o valor do salário.</a:t>
             </a:r>
             <a:endParaRPr lang="en-US" dirty="0"/>
           </a:p>
@@ -3075,7 +3075,7 @@
           <a:p>
             <a:r>
               <a:rPr lang="en-US" dirty="0"/>
-              <a:t/>
+              <a:t>O gráfico mostra as duas formas lado a lado. [Apontar para cada coluna.] Na primeira coluna, o ponto de partida: 4 horas pagam o salário e 4 geram mais-valia. Na segunda, a mais-valia absoluta: a jornada sobe para 10 horas, o trabalho necessário continua em 4 e o excedente sobe para 6. Na terceira, a relativa: a jornada continua em 8 horas, mas, com mais produtividade, o salário é produzido em 3 horas e o excedente sobe para 5. Isso ajuda a entender por que a luta pela redução da jornada foi tão central no movimento operário.</a:t>
             </a:r>
             <a:endParaRPr lang="en-US" dirty="0"/>
           </a:p>
@@ -3163,7 +3163,7 @@
           <a:p>
             <a:r>
               <a:rPr lang="en-US" dirty="0"/>
-              <a:t/>
+              <a:t>E o Estado, nessa visão? O Manifesto afirma que o executivo do Estado moderno não passa de um comitê para gerir os negócios comuns de toda a burguesia. Ou seja, o Estado não é neutro: ele expressa a dominação de classe. Para Marx e Engels, a superação do capitalismo passaria por uma fase de transição, o socialismo, com a socialização dos meios de produção e a ditadura do proletariado, até chegar ao comunismo: uma sociedade sem classes, em que o Estado se extingue.</a:t>
             </a:r>
             <a:endParaRPr lang="en-US" dirty="0"/>
           </a:p>
@@ -3251,7 +3251,7 @@
           <a:p>
             <a:r>
               <a:rPr lang="en-US" dirty="0"/>
-              <a:t/>
+              <a:t>Engels, em A origem da família, da propriedade privada e do Estado, de 1884, explica de onde vem o Estado em três passos. Primeiro: nas comunidades primitivas, sem classes, não havia Estado. Segundo: com o excedente e a propriedade privada, surgem classes com interesses opostos. Terceiro: surge o Estado, um poder que parece estar acima da sociedade, mas que garante a dominação da classe proprietária. Compare com o liberalismo: para os liberais, o Estado protege os direitos de todos; para os marxistas, protege sobretudo os interesses da classe dominante.</a:t>
             </a:r>
             <a:endParaRPr lang="en-US" dirty="0"/>
           </a:p>

--- a/disciplina-01-estado-governo-mercado/materiais/03_Unidade_3_Matriz_Marxista.pptx
+++ b/disciplina-01-estado-governo-mercado/materiais/03_Unidade_3_Matriz_Marxista.pptx
@@ -1052,7 +1052,7 @@
           <a:p>
             <a:r>
               <a:rPr lang="en-US" dirty="0"/>
-              <a:t>Este quadro resume as duas matrizes. Sobre o mercado: para os liberais, é eficiente e natural; para os marxistas, é lugar de exploração e de crises. Sobre o Estado: para os liberais, garante direitos e deve ser limitado; para os marxistas, é instrumento de dominação de classe. A unidade de análise do liberalismo é o indivíduo; a do marxismo, as classes sociais. A propriedade privada é direito natural para uns e base da exploração para outros. E o horizonte: aperfeiçoar o capitalismo, de um lado, ou superá-lo, do outro. Este quadro é uma ótima ferramenta de revisão para a A2 e a A3.</a:t>
+              <a:t>Este quadro resume as duas matrizes. Sobre o mercado: para os liberais, é eficiente e natural; para os marxistas, é lugar de exploração e de crises. Sobre o Estado: para os liberais, garante direitos e deve ser limitado; para os marxistas, é instrumento de dominação de classe. Quanto ao foco, o liberalismo olha para o indivíduo livre e proprietário; o marxismo, para as classes sociais e o seu conflito. A propriedade privada é direito natural e base da liberdade para os liberais; para os marxistas, é a base da exploração e deve ser socializada. E o horizonte: aperfeiçoar o capitalismo, de um lado, ou superá-lo, do outro. Este quadro é uma ótima ferramenta de revisão para a A2 e a A3.</a:t>
             </a:r>
             <a:endParaRPr lang="en-US" dirty="0"/>
           </a:p>
@@ -4796,17 +4796,17 @@
           </p:nvPr>
         </p:nvGraphicFramePr>
         <p:xfrm>
-          <a:off x="822960" y="1234440"/>
-          <a:ext cx="7498080" cy="914400"/>
+          <a:off x="685800" y="1188720"/>
+          <a:ext cx="7772400" cy="914400"/>
         </p:xfrm>
         <a:graphic>
           <a:graphicData uri="http://schemas.openxmlformats.org/drawingml/2006/table">
             <a:tbl>
               <a:tblPr/>
               <a:tblGrid>
-                <a:gridCol w="2103120"/>
-                <a:gridCol w="2697480"/>
-                <a:gridCol w="2697480"/>
+                <a:gridCol w="1737360"/>
+                <a:gridCol w="3017520"/>
+                <a:gridCol w="3017520"/>
               </a:tblGrid>
               <a:tr h="0">
                 <a:tc>
@@ -4817,7 +4817,7 @@
                       <a:pPr indent="0" marL="0">
                         <a:buNone/>
                       </a:pPr>
-                      <a:endParaRPr lang="en-US" sz="1400" dirty="0">
+                      <a:endParaRPr lang="en-US" sz="1600" dirty="0">
                         <a:latin typeface="Calibri" charset="0"/>
                         <a:ea typeface="Calibri" charset="0"/>
                         <a:cs typeface="Calibri" charset="0"/>
@@ -4875,7 +4875,7 @@
                         <a:buNone/>
                       </a:pPr>
                       <a:r>
-                        <a:rPr lang="en-US" sz="1400" b="1" dirty="0">
+                        <a:rPr lang="en-US" sz="1600" b="1" dirty="0">
                           <a:solidFill>
                             <a:srgbClr val="FFFFFF"/>
                           </a:solidFill>
@@ -4885,7 +4885,7 @@
                         </a:rPr>
                         <a:t>Matriz liberal</a:t>
                       </a:r>
-                      <a:endParaRPr lang="en-US" sz="1400" dirty="0">
+                      <a:endParaRPr lang="en-US" sz="1600" dirty="0">
                         <a:latin typeface="Calibri" charset="0"/>
                         <a:ea typeface="Calibri" charset="0"/>
                         <a:cs typeface="Calibri" charset="0"/>
@@ -4943,7 +4943,7 @@
                         <a:buNone/>
                       </a:pPr>
                       <a:r>
-                        <a:rPr lang="en-US" sz="1400" b="1" dirty="0">
+                        <a:rPr lang="en-US" sz="1600" b="1" dirty="0">
                           <a:solidFill>
                             <a:srgbClr val="FFFFFF"/>
                           </a:solidFill>
@@ -4953,7 +4953,7 @@
                         </a:rPr>
                         <a:t>Matriz marxista</a:t>
                       </a:r>
-                      <a:endParaRPr lang="en-US" sz="1400" dirty="0">
+                      <a:endParaRPr lang="en-US" sz="1600" dirty="0">
                         <a:latin typeface="Calibri" charset="0"/>
                         <a:ea typeface="Calibri" charset="0"/>
                         <a:cs typeface="Calibri" charset="0"/>
@@ -5013,7 +5013,7 @@
                         <a:buNone/>
                       </a:pPr>
                       <a:r>
-                        <a:rPr lang="en-US" sz="1400" b="1" dirty="0">
+                        <a:rPr lang="en-US" sz="1600" b="1" dirty="0">
                           <a:solidFill>
                             <a:srgbClr val="1F2A37"/>
                           </a:solidFill>
@@ -5023,7 +5023,7 @@
                         </a:rPr>
                         <a:t>Mercado</a:t>
                       </a:r>
-                      <a:endParaRPr lang="en-US" sz="1400" dirty="0">
+                      <a:endParaRPr lang="en-US" sz="1600" dirty="0">
                         <a:latin typeface="Calibri" charset="0"/>
                         <a:ea typeface="Calibri" charset="0"/>
                         <a:cs typeface="Calibri" charset="0"/>
@@ -5081,7 +5081,7 @@
                         <a:buNone/>
                       </a:pPr>
                       <a:r>
-                        <a:rPr lang="en-US" sz="1400" dirty="0">
+                        <a:rPr lang="en-US" sz="1600" dirty="0">
                           <a:solidFill>
                             <a:srgbClr val="1F2A37"/>
                           </a:solidFill>
@@ -5089,9 +5089,9 @@
                           <a:ea typeface="Calibri" pitchFamily="34" charset="-122"/>
                           <a:cs typeface="Calibri" pitchFamily="34" charset="-120"/>
                         </a:rPr>
-                        <a:t>Eficiente e natural</a:t>
+                        <a:t>Mecanismo eficiente e natural de coordenação</a:t>
                       </a:r>
-                      <a:endParaRPr lang="en-US" sz="1400" dirty="0">
+                      <a:endParaRPr lang="en-US" sz="1600" dirty="0">
                         <a:latin typeface="Calibri" charset="0"/>
                         <a:ea typeface="Calibri" charset="0"/>
                         <a:cs typeface="Calibri" charset="0"/>
@@ -5149,7 +5149,7 @@
                         <a:buNone/>
                       </a:pPr>
                       <a:r>
-                        <a:rPr lang="en-US" sz="1400" dirty="0">
+                        <a:rPr lang="en-US" sz="1600" dirty="0">
                           <a:solidFill>
                             <a:srgbClr val="1F2A37"/>
                           </a:solidFill>
@@ -5157,9 +5157,9 @@
                           <a:ea typeface="Calibri" pitchFamily="34" charset="-122"/>
                           <a:cs typeface="Calibri" pitchFamily="34" charset="-120"/>
                         </a:rPr>
-                        <a:t>Exploração e crises</a:t>
+                        <a:t>Espaço de exploração e fonte de crises</a:t>
                       </a:r>
-                      <a:endParaRPr lang="en-US" sz="1400" dirty="0">
+                      <a:endParaRPr lang="en-US" sz="1600" dirty="0">
                         <a:latin typeface="Calibri" charset="0"/>
                         <a:ea typeface="Calibri" charset="0"/>
                         <a:cs typeface="Calibri" charset="0"/>
@@ -5219,7 +5219,7 @@
                         <a:buNone/>
                       </a:pPr>
                       <a:r>
-                        <a:rPr lang="en-US" sz="1400" b="1" dirty="0">
+                        <a:rPr lang="en-US" sz="1600" b="1" dirty="0">
                           <a:solidFill>
                             <a:srgbClr val="1F2A37"/>
                           </a:solidFill>
@@ -5229,7 +5229,7 @@
                         </a:rPr>
                         <a:t>Estado</a:t>
                       </a:r>
-                      <a:endParaRPr lang="en-US" sz="1400" dirty="0">
+                      <a:endParaRPr lang="en-US" sz="1600" dirty="0">
                         <a:latin typeface="Calibri" charset="0"/>
                         <a:ea typeface="Calibri" charset="0"/>
                         <a:cs typeface="Calibri" charset="0"/>
@@ -5287,7 +5287,7 @@
                         <a:buNone/>
                       </a:pPr>
                       <a:r>
-                        <a:rPr lang="en-US" sz="1400" dirty="0">
+                        <a:rPr lang="en-US" sz="1600" dirty="0">
                           <a:solidFill>
                             <a:srgbClr val="1F2A37"/>
                           </a:solidFill>
@@ -5295,9 +5295,9 @@
                           <a:ea typeface="Calibri" pitchFamily="34" charset="-122"/>
                           <a:cs typeface="Calibri" pitchFamily="34" charset="-120"/>
                         </a:rPr>
-                        <a:t>Garante direitos; deve ser limitado</a:t>
+                        <a:t>Garantidor de direitos e contratos; deve ser limitado</a:t>
                       </a:r>
-                      <a:endParaRPr lang="en-US" sz="1400" dirty="0">
+                      <a:endParaRPr lang="en-US" sz="1600" dirty="0">
                         <a:latin typeface="Calibri" charset="0"/>
                         <a:ea typeface="Calibri" charset="0"/>
                         <a:cs typeface="Calibri" charset="0"/>
@@ -5355,7 +5355,7 @@
                         <a:buNone/>
                       </a:pPr>
                       <a:r>
-                        <a:rPr lang="en-US" sz="1400" dirty="0">
+                        <a:rPr lang="en-US" sz="1600" dirty="0">
                           <a:solidFill>
                             <a:srgbClr val="1F2A37"/>
                           </a:solidFill>
@@ -5363,9 +5363,9 @@
                           <a:ea typeface="Calibri" pitchFamily="34" charset="-122"/>
                           <a:cs typeface="Calibri" pitchFamily="34" charset="-120"/>
                         </a:rPr>
-                        <a:t>Instrumento de dominação de classe</a:t>
+                        <a:t>Instrumento de dominação da classe dominante</a:t>
                       </a:r>
-                      <a:endParaRPr lang="en-US" sz="1400" dirty="0">
+                      <a:endParaRPr lang="en-US" sz="1600" dirty="0">
                         <a:latin typeface="Calibri" charset="0"/>
                         <a:ea typeface="Calibri" charset="0"/>
                         <a:cs typeface="Calibri" charset="0"/>
@@ -5425,7 +5425,7 @@
                         <a:buNone/>
                       </a:pPr>
                       <a:r>
-                        <a:rPr lang="en-US" sz="1400" b="1" dirty="0">
+                        <a:rPr lang="en-US" sz="1600" b="1" dirty="0">
                           <a:solidFill>
                             <a:srgbClr val="1F2A37"/>
                           </a:solidFill>
@@ -5433,9 +5433,9 @@
                           <a:ea typeface="Calibri" pitchFamily="34" charset="-122"/>
                           <a:cs typeface="Calibri" pitchFamily="34" charset="-120"/>
                         </a:rPr>
-                        <a:t>Unidade de análise</a:t>
+                        <a:t>Indivíduo / classe</a:t>
                       </a:r>
-                      <a:endParaRPr lang="en-US" sz="1400" dirty="0">
+                      <a:endParaRPr lang="en-US" sz="1600" dirty="0">
                         <a:latin typeface="Calibri" charset="0"/>
                         <a:ea typeface="Calibri" charset="0"/>
                         <a:cs typeface="Calibri" charset="0"/>
@@ -5493,7 +5493,7 @@
                         <a:buNone/>
                       </a:pPr>
                       <a:r>
-                        <a:rPr lang="en-US" sz="1400" dirty="0">
+                        <a:rPr lang="en-US" sz="1600" dirty="0">
                           <a:solidFill>
                             <a:srgbClr val="1F2A37"/>
                           </a:solidFill>
@@ -5501,9 +5501,9 @@
                           <a:ea typeface="Calibri" pitchFamily="34" charset="-122"/>
                           <a:cs typeface="Calibri" pitchFamily="34" charset="-120"/>
                         </a:rPr>
-                        <a:t>Indivíduo</a:t>
+                        <a:t>Foco no indivíduo livre e proprietário</a:t>
                       </a:r>
-                      <a:endParaRPr lang="en-US" sz="1400" dirty="0">
+                      <a:endParaRPr lang="en-US" sz="1600" dirty="0">
                         <a:latin typeface="Calibri" charset="0"/>
                         <a:ea typeface="Calibri" charset="0"/>
                         <a:cs typeface="Calibri" charset="0"/>
@@ -5561,7 +5561,7 @@
                         <a:buNone/>
                       </a:pPr>
                       <a:r>
-                        <a:rPr lang="en-US" sz="1400" dirty="0">
+                        <a:rPr lang="en-US" sz="1600" dirty="0">
                           <a:solidFill>
                             <a:srgbClr val="1F2A37"/>
                           </a:solidFill>
@@ -5569,9 +5569,9 @@
                           <a:ea typeface="Calibri" pitchFamily="34" charset="-122"/>
                           <a:cs typeface="Calibri" pitchFamily="34" charset="-120"/>
                         </a:rPr>
-                        <a:t>Classes sociais</a:t>
+                        <a:t>Foco nas classes sociais e em seu conflito</a:t>
                       </a:r>
-                      <a:endParaRPr lang="en-US" sz="1400" dirty="0">
+                      <a:endParaRPr lang="en-US" sz="1600" dirty="0">
                         <a:latin typeface="Calibri" charset="0"/>
                         <a:ea typeface="Calibri" charset="0"/>
                         <a:cs typeface="Calibri" charset="0"/>
@@ -5631,7 +5631,7 @@
                         <a:buNone/>
                       </a:pPr>
                       <a:r>
-                        <a:rPr lang="en-US" sz="1400" b="1" dirty="0">
+                        <a:rPr lang="en-US" sz="1600" b="1" dirty="0">
                           <a:solidFill>
                             <a:srgbClr val="1F2A37"/>
                           </a:solidFill>
@@ -5641,7 +5641,7 @@
                         </a:rPr>
                         <a:t>Propriedade privada</a:t>
                       </a:r>
-                      <a:endParaRPr lang="en-US" sz="1400" dirty="0">
+                      <a:endParaRPr lang="en-US" sz="1600" dirty="0">
                         <a:latin typeface="Calibri" charset="0"/>
                         <a:ea typeface="Calibri" charset="0"/>
                         <a:cs typeface="Calibri" charset="0"/>
@@ -5699,7 +5699,7 @@
                         <a:buNone/>
                       </a:pPr>
                       <a:r>
-                        <a:rPr lang="en-US" sz="1400" dirty="0">
+                        <a:rPr lang="en-US" sz="1600" dirty="0">
                           <a:solidFill>
                             <a:srgbClr val="1F2A37"/>
                           </a:solidFill>
@@ -5707,9 +5707,9 @@
                           <a:ea typeface="Calibri" pitchFamily="34" charset="-122"/>
                           <a:cs typeface="Calibri" pitchFamily="34" charset="-120"/>
                         </a:rPr>
-                        <a:t>Direito natural</a:t>
+                        <a:t>Direito natural, base da liberdade</a:t>
                       </a:r>
-                      <a:endParaRPr lang="en-US" sz="1400" dirty="0">
+                      <a:endParaRPr lang="en-US" sz="1600" dirty="0">
                         <a:latin typeface="Calibri" charset="0"/>
                         <a:ea typeface="Calibri" charset="0"/>
                         <a:cs typeface="Calibri" charset="0"/>
@@ -5767,7 +5767,7 @@
                         <a:buNone/>
                       </a:pPr>
                       <a:r>
-                        <a:rPr lang="en-US" sz="1400" dirty="0">
+                        <a:rPr lang="en-US" sz="1600" dirty="0">
                           <a:solidFill>
                             <a:srgbClr val="1F2A37"/>
                           </a:solidFill>
@@ -5775,9 +5775,9 @@
                           <a:ea typeface="Calibri" pitchFamily="34" charset="-122"/>
                           <a:cs typeface="Calibri" pitchFamily="34" charset="-120"/>
                         </a:rPr>
-                        <a:t>Base da exploração</a:t>
+                        <a:t>Base da exploração, deve ser socializada</a:t>
                       </a:r>
-                      <a:endParaRPr lang="en-US" sz="1400" dirty="0">
+                      <a:endParaRPr lang="en-US" sz="1600" dirty="0">
                         <a:latin typeface="Calibri" charset="0"/>
                         <a:ea typeface="Calibri" charset="0"/>
                         <a:cs typeface="Calibri" charset="0"/>
@@ -5837,7 +5837,7 @@
                         <a:buNone/>
                       </a:pPr>
                       <a:r>
-                        <a:rPr lang="en-US" sz="1400" b="1" dirty="0">
+                        <a:rPr lang="en-US" sz="1600" b="1" dirty="0">
                           <a:solidFill>
                             <a:srgbClr val="1F2A37"/>
                           </a:solidFill>
@@ -5847,7 +5847,7 @@
                         </a:rPr>
                         <a:t>Horizonte</a:t>
                       </a:r>
-                      <a:endParaRPr lang="en-US" sz="1400" dirty="0">
+                      <a:endParaRPr lang="en-US" sz="1600" dirty="0">
                         <a:latin typeface="Calibri" charset="0"/>
                         <a:ea typeface="Calibri" charset="0"/>
                         <a:cs typeface="Calibri" charset="0"/>
@@ -5905,7 +5905,7 @@
                         <a:buNone/>
                       </a:pPr>
                       <a:r>
-                        <a:rPr lang="en-US" sz="1400" dirty="0">
+                        <a:rPr lang="en-US" sz="1600" dirty="0">
                           <a:solidFill>
                             <a:srgbClr val="1F2A37"/>
                           </a:solidFill>
@@ -5915,7 +5915,7 @@
                         </a:rPr>
                         <a:t>Aperfeiçoar o capitalismo</a:t>
                       </a:r>
-                      <a:endParaRPr lang="en-US" sz="1400" dirty="0">
+                      <a:endParaRPr lang="en-US" sz="1600" dirty="0">
                         <a:latin typeface="Calibri" charset="0"/>
                         <a:ea typeface="Calibri" charset="0"/>
                         <a:cs typeface="Calibri" charset="0"/>
@@ -5973,7 +5973,7 @@
                         <a:buNone/>
                       </a:pPr>
                       <a:r>
-                        <a:rPr lang="en-US" sz="1400" dirty="0">
+                        <a:rPr lang="en-US" sz="1600" dirty="0">
                           <a:solidFill>
                             <a:srgbClr val="1F2A37"/>
                           </a:solidFill>
@@ -5983,7 +5983,7 @@
                         </a:rPr>
                         <a:t>Superar o capitalismo</a:t>
                       </a:r>
-                      <a:endParaRPr lang="en-US" sz="1400" dirty="0">
+                      <a:endParaRPr lang="en-US" sz="1600" dirty="0">
                         <a:latin typeface="Calibri" charset="0"/>
                         <a:ea typeface="Calibri" charset="0"/>
                         <a:cs typeface="Calibri" charset="0"/>

--- a/disciplina-01-estado-governo-mercado/materiais/03_Unidade_3_Matriz_Marxista.pptx
+++ b/disciplina-01-estado-governo-mercado/materiais/03_Unidade_3_Matriz_Marxista.pptx
@@ -34,9 +34,10 @@
     <p:sldId id="282" r:id="rId28"/>
     <p:sldId id="283" r:id="rId29"/>
     <p:sldId id="284" r:id="rId30"/>
+    <p:sldId id="285" r:id="rId31"/>
   </p:sldIdLst>
   <p:notesMasterIdLst>
-    <p:notesMasterId r:id="rId31"/>
+    <p:notesMasterId r:id="rId32"/>
   </p:notesMasterIdLst>
   <p:sldSz cx="9144000" cy="5143500"/>
   <p:notesSz cx="5143500" cy="9144000"/>
@@ -2724,7 +2725,7 @@
           <a:p>
             <a:r>
               <a:rPr lang="en-US" dirty="0"/>
-              <a:t>A resposta correta é a letra a: Bernstein e Lênin. Bernstein representa o revisionismo social-democrata; Lênin, a via revolucionária. Encerramos a Unidade 3. Nos vemos no encontro síncrono do dia 28 de outubro, às 19h. Até lá!</a:t>
+              <a:t>A resposta correta é a letra a: Bernstein e Lênin. Bernstein representa o revisionismo social-democrata; Lênin, a via revolucionária.</a:t>
             </a:r>
             <a:endParaRPr lang="en-US" dirty="0"/>
           </a:p>
@@ -2836,6 +2837,94 @@
             <a:fld id="{F7021451-1387-4CA6-816F-3879F97B5CBC}" type="slidenum">
               <a:rPr lang="en-US"/>
               <a:t>3</a:t>
+            </a:fld>
+            <a:endParaRPr lang="en-US"/>
+          </a:p>
+        </p:txBody>
+      </p:sp>
+    </p:spTree>
+    <p:extLst>
+      <p:ext uri="{BB962C8B-B14F-4D97-AF65-F5344CB8AC3E}">
+        <p14:creationId xmlns:p14="http://schemas.microsoft.com/office/powerpoint/2010/main" val="1024086991"/>
+      </p:ext>
+    </p:extLst>
+  </p:cSld>
+  <p:clrMapOvr>
+    <a:masterClrMapping/>
+  </p:clrMapOvr>
+</p:notes>
+</file>
+
+<file path=ppt/notesSlides/notesSlide30.xml><?xml version="1.0" encoding="utf-8"?>
+<p:notes xmlns:a="http://schemas.openxmlformats.org/drawingml/2006/main" xmlns:r="http://schemas.openxmlformats.org/officeDocument/2006/relationships" xmlns:p="http://schemas.openxmlformats.org/presentationml/2006/main">
+  <p:cSld>
+    <p:spTree>
+      <p:nvGrpSpPr>
+        <p:cNvPr id="1" name=""/>
+        <p:cNvGrpSpPr/>
+        <p:nvPr/>
+      </p:nvGrpSpPr>
+      <p:grpSpPr>
+        <a:xfrm>
+          <a:off x="0" y="0"/>
+          <a:ext cx="0" cy="0"/>
+          <a:chOff x="0" y="0"/>
+          <a:chExt cx="0" cy="0"/>
+        </a:xfrm>
+      </p:grpSpPr>
+      <p:sp>
+        <p:nvSpPr>
+          <p:cNvPr id="2" name="Slide Image Placeholder 1"/>
+          <p:cNvSpPr>
+            <a:spLocks noGrp="1" noRot="1" noChangeAspect="1"/>
+          </p:cNvSpPr>
+          <p:nvPr>
+            <p:ph type="sldImg"/>
+          </p:nvPr>
+        </p:nvSpPr>
+        <p:spPr/>
+      </p:sp>
+      <p:sp>
+        <p:nvSpPr>
+          <p:cNvPr id="3" name="Notes Placeholder 2"/>
+          <p:cNvSpPr>
+            <a:spLocks noGrp="1"/>
+          </p:cNvSpPr>
+          <p:nvPr>
+            <p:ph type="body" idx="1"/>
+          </p:nvPr>
+        </p:nvSpPr>
+        <p:spPr/>
+        <p:txBody>
+          <a:bodyPr/>
+          <a:lstStyle/>
+          <a:p>
+            <a:r>
+              <a:rPr lang="en-US" dirty="0"/>
+              <a:t>Para fechar a Unidade 3, vamos recapitular. [Apontar para o quadro da esquerda.] No tópico 5, vimos que, para Marx e Engels, o capitalismo é um modo de produção histórico. Estudamos o materialismo histórico, a luta de classes e a mais-valia, absoluta e relativa, e a visão do Estado como instrumento de dominação de classe, com a transição ao socialismo e ao comunismo. Também comparamos as leituras liberal e marxista de uma mesma política. [Apontar para o quadro da direita.] No tópico 6, vimos as mudanças do final do século XIX: a Segunda Revolução Industrial, a concentração e o capital financeiro, os trabalhadores organizados e o voto ampliado, e os primeiros seguros sociais, na Alemanha de Bismarck e, no Brasil, com a Lei Eloy Chaves e a CLT. Essas mudanças produziram o liberalismo social, as leis antitruste e o debate entre reforma, com Bernstein, e revolução, com Lênin. Na próxima unidade, os modelos de Estado do século XX e o Estado brasileiro. Nos vemos no encontro síncrono do dia 28 de outubro, às 19h. Até lá!</a:t>
+            </a:r>
+            <a:endParaRPr lang="en-US" dirty="0"/>
+          </a:p>
+        </p:txBody>
+      </p:sp>
+      <p:sp>
+        <p:nvSpPr>
+          <p:cNvPr id="4" name="Slide Number Placeholder 3"/>
+          <p:cNvSpPr>
+            <a:spLocks noGrp="1"/>
+          </p:cNvSpPr>
+          <p:nvPr>
+            <p:ph type="sldNum" sz="quarter" idx="10"/>
+          </p:nvPr>
+        </p:nvSpPr>
+        <p:spPr/>
+        <p:txBody>
+          <a:bodyPr/>
+          <a:lstStyle/>
+          <a:p>
+            <a:fld id="{F7021451-1387-4CA6-816F-3879F97B5CBC}" type="slidenum">
+              <a:rPr lang="en-US"/>
+              <a:t>30</a:t>
             </a:fld>
             <a:endParaRPr lang="en-US"/>
           </a:p>
@@ -18911,6 +19000,581 @@
 </p:sld>
 </file>
 
+<file path=ppt/slides/slide30.xml><?xml version="1.0" encoding="utf-8"?>
+<p:sld xmlns:a="http://schemas.openxmlformats.org/drawingml/2006/main" xmlns:r="http://schemas.openxmlformats.org/officeDocument/2006/relationships" xmlns:p="http://schemas.openxmlformats.org/presentationml/2006/main">
+  <p:cSld name="Slide 30">
+    <p:bg>
+      <p:bgPr>
+        <a:blipFill dpi="0" rotWithShape="1">
+          <a:blip r:embed="rId1">
+            <a:lum/>
+          </a:blip>
+          <a:srcRect/>
+          <a:stretch>
+            <a:fillRect/>
+          </a:stretch>
+        </a:blipFill>
+        <a:effectLst/>
+      </p:bgPr>
+    </p:bg>
+    <p:spTree>
+      <p:nvGrpSpPr>
+        <p:cNvPr id="1" name=""/>
+        <p:cNvGrpSpPr/>
+        <p:nvPr/>
+      </p:nvGrpSpPr>
+      <p:grpSpPr>
+        <a:xfrm>
+          <a:off x="0" y="0"/>
+          <a:ext cx="0" cy="0"/>
+          <a:chOff x="0" y="0"/>
+          <a:chExt cx="0" cy="0"/>
+        </a:xfrm>
+      </p:grpSpPr>
+      <p:sp>
+        <p:nvSpPr>
+          <p:cNvPr id="2" name="Text 0"/>
+          <p:cNvSpPr txBox="1"/>
+          <p:nvPr/>
+        </p:nvSpPr>
+        <p:spPr>
+          <a:xfrm>
+            <a:off x="731520" y="256032"/>
+            <a:ext cx="7680960" cy="566928"/>
+          </a:xfrm>
+          <a:prstGeom prst="rect">
+            <a:avLst/>
+          </a:prstGeom>
+          <a:noFill/>
+          <a:ln/>
+        </p:spPr>
+        <p:txBody>
+          <a:bodyPr wrap="square" lIns="0" tIns="0" rIns="0" bIns="0" rtlCol="0" anchor="ctr"/>
+          <a:lstStyle/>
+          <a:p>
+            <a:pPr algn="ctr" indent="0" marL="0">
+              <a:lnSpc>
+                <a:spcPct val="100000"/>
+              </a:lnSpc>
+              <a:buNone/>
+            </a:pPr>
+            <a:r>
+              <a:rPr lang="en-US" sz="2800" b="1" dirty="0">
+                <a:solidFill>
+                  <a:srgbClr val="13294B"/>
+                </a:solidFill>
+                <a:latin typeface="Calibri" pitchFamily="34" charset="0"/>
+                <a:ea typeface="Calibri" pitchFamily="34" charset="-122"/>
+                <a:cs typeface="Calibri" pitchFamily="34" charset="-120"/>
+              </a:rPr>
+              <a:t>Resumo da Unidade 3</a:t>
+            </a:r>
+            <a:endParaRPr lang="en-US" sz="2800" dirty="0"/>
+          </a:p>
+        </p:txBody>
+      </p:sp>
+      <p:sp>
+        <p:nvSpPr>
+          <p:cNvPr id="3" name="Text 1"/>
+          <p:cNvSpPr txBox="1"/>
+          <p:nvPr/>
+        </p:nvSpPr>
+        <p:spPr>
+          <a:xfrm>
+            <a:off x="1005840" y="804672"/>
+            <a:ext cx="7132320" cy="329184"/>
+          </a:xfrm>
+          <a:prstGeom prst="rect">
+            <a:avLst/>
+          </a:prstGeom>
+          <a:noFill/>
+          <a:ln/>
+        </p:spPr>
+        <p:txBody>
+          <a:bodyPr wrap="square" lIns="0" tIns="0" rIns="0" bIns="0" rtlCol="0" anchor="ctr"/>
+          <a:lstStyle/>
+          <a:p>
+            <a:pPr algn="ctr" indent="0" marL="0">
+              <a:lnSpc>
+                <a:spcPct val="100000"/>
+              </a:lnSpc>
+              <a:buNone/>
+            </a:pPr>
+            <a:r>
+              <a:rPr lang="en-US" sz="1400" dirty="0">
+                <a:solidFill>
+                  <a:srgbClr val="5B6770"/>
+                </a:solidFill>
+                <a:latin typeface="Calibri" pitchFamily="34" charset="0"/>
+                <a:ea typeface="Calibri" pitchFamily="34" charset="-122"/>
+                <a:cs typeface="Calibri" pitchFamily="34" charset="-120"/>
+              </a:rPr>
+              <a:t>O que discutimos nesta unidade</a:t>
+            </a:r>
+            <a:endParaRPr lang="en-US" sz="1400" dirty="0"/>
+          </a:p>
+        </p:txBody>
+      </p:sp>
+      <p:sp>
+        <p:nvSpPr>
+          <p:cNvPr id="4" name="Text 2"/>
+          <p:cNvSpPr txBox="1"/>
+          <p:nvPr/>
+        </p:nvSpPr>
+        <p:spPr>
+          <a:xfrm>
+            <a:off x="685800" y="1170432"/>
+            <a:ext cx="3794760" cy="2743200"/>
+          </a:xfrm>
+          <a:prstGeom prst="roundRect">
+            <a:avLst>
+              <a:gd name="adj" fmla="val 2000"/>
+            </a:avLst>
+          </a:prstGeom>
+          <a:solidFill>
+            <a:srgbClr val="FFFFFF"/>
+          </a:solidFill>
+          <a:ln w="12700">
+            <a:solidFill>
+              <a:srgbClr val="DCD5C1"/>
+            </a:solidFill>
+          </a:ln>
+        </p:spPr>
+        <p:txBody>
+          <a:bodyPr wrap="square" lIns="114300" tIns="114300" rIns="114300" bIns="114300" rtlCol="0" anchor="t"/>
+          <a:lstStyle/>
+          <a:p>
+            <a:pPr algn="l" indent="0" marL="0">
+              <a:lnSpc>
+                <a:spcPct val="100000"/>
+              </a:lnSpc>
+              <a:spcAft>
+                <a:spcPts val="200"/>
+              </a:spcAft>
+              <a:buNone/>
+            </a:pPr>
+            <a:r>
+              <a:rPr lang="en-US" sz="1100" b="1" dirty="0">
+                <a:solidFill>
+                  <a:srgbClr val="2A8C85"/>
+                </a:solidFill>
+                <a:latin typeface="Calibri" pitchFamily="34" charset="0"/>
+                <a:ea typeface="Calibri" pitchFamily="34" charset="-122"/>
+                <a:cs typeface="Calibri" pitchFamily="34" charset="-120"/>
+              </a:rPr>
+              <a:t>PARTE 1 · TÓPICO 5</a:t>
+            </a:r>
+            <a:endParaRPr lang="en-US" sz="1100" dirty="0"/>
+          </a:p>
+          <a:p>
+            <a:pPr algn="l" indent="0" marL="0">
+              <a:lnSpc>
+                <a:spcPct val="100000"/>
+              </a:lnSpc>
+              <a:spcAft>
+                <a:spcPts val="400"/>
+              </a:spcAft>
+              <a:buNone/>
+            </a:pPr>
+            <a:r>
+              <a:rPr lang="en-US" sz="1450" b="1" dirty="0">
+                <a:solidFill>
+                  <a:srgbClr val="13294B"/>
+                </a:solidFill>
+                <a:latin typeface="Calibri" pitchFamily="34" charset="0"/>
+                <a:ea typeface="Calibri" pitchFamily="34" charset="-122"/>
+                <a:cs typeface="Calibri" pitchFamily="34" charset="-120"/>
+              </a:rPr>
+              <a:t>A matriz marxista</a:t>
+            </a:r>
+            <a:endParaRPr lang="en-US" sz="1100" dirty="0"/>
+          </a:p>
+          <a:p>
+            <a:pPr algn="l" marL="177800" indent="-177800">
+              <a:lnSpc>
+                <a:spcPct val="100000"/>
+              </a:lnSpc>
+              <a:spcAft>
+                <a:spcPts val="300"/>
+              </a:spcAft>
+              <a:buSzPct val="100000"/>
+              <a:buChar char="•"/>
+            </a:pPr>
+            <a:r>
+              <a:rPr lang="en-US" sz="1200" dirty="0">
+                <a:solidFill>
+                  <a:srgbClr val="1F2A37"/>
+                </a:solidFill>
+                <a:latin typeface="Calibri" pitchFamily="34" charset="0"/>
+                <a:ea typeface="Calibri" pitchFamily="34" charset="-122"/>
+                <a:cs typeface="Calibri" pitchFamily="34" charset="-120"/>
+              </a:rPr>
+              <a:t>Marx e Engels: o capitalismo é um modo de produção histórico.</a:t>
+            </a:r>
+            <a:endParaRPr lang="en-US" sz="1100" dirty="0"/>
+          </a:p>
+          <a:p>
+            <a:pPr algn="l" marL="177800" indent="-177800">
+              <a:lnSpc>
+                <a:spcPct val="100000"/>
+              </a:lnSpc>
+              <a:spcAft>
+                <a:spcPts val="300"/>
+              </a:spcAft>
+              <a:buSzPct val="100000"/>
+              <a:buChar char="•"/>
+            </a:pPr>
+            <a:r>
+              <a:rPr lang="en-US" sz="1200" dirty="0">
+                <a:solidFill>
+                  <a:srgbClr val="1F2A37"/>
+                </a:solidFill>
+                <a:latin typeface="Calibri" pitchFamily="34" charset="0"/>
+                <a:ea typeface="Calibri" pitchFamily="34" charset="-122"/>
+                <a:cs typeface="Calibri" pitchFamily="34" charset="-120"/>
+              </a:rPr>
+              <a:t>Materialismo histórico, luta de classes e mais-valia (absoluta e relativa).</a:t>
+            </a:r>
+            <a:endParaRPr lang="en-US" sz="1100" dirty="0"/>
+          </a:p>
+          <a:p>
+            <a:pPr algn="l" marL="177800" indent="-177800">
+              <a:lnSpc>
+                <a:spcPct val="100000"/>
+              </a:lnSpc>
+              <a:spcAft>
+                <a:spcPts val="300"/>
+              </a:spcAft>
+              <a:buSzPct val="100000"/>
+              <a:buChar char="•"/>
+            </a:pPr>
+            <a:r>
+              <a:rPr lang="en-US" sz="1200" dirty="0">
+                <a:solidFill>
+                  <a:srgbClr val="1F2A37"/>
+                </a:solidFill>
+                <a:latin typeface="Calibri" pitchFamily="34" charset="0"/>
+                <a:ea typeface="Calibri" pitchFamily="34" charset="-122"/>
+                <a:cs typeface="Calibri" pitchFamily="34" charset="-120"/>
+              </a:rPr>
+              <a:t>O Estado como instrumento de dominação de classe; socialismo e comunismo.</a:t>
+            </a:r>
+            <a:endParaRPr lang="en-US" sz="1100" dirty="0"/>
+          </a:p>
+          <a:p>
+            <a:pPr algn="l" marL="177800" indent="-177800">
+              <a:lnSpc>
+                <a:spcPct val="100000"/>
+              </a:lnSpc>
+              <a:spcAft>
+                <a:spcPts val="300"/>
+              </a:spcAft>
+              <a:buSzPct val="100000"/>
+              <a:buChar char="•"/>
+            </a:pPr>
+            <a:r>
+              <a:rPr lang="en-US" sz="1200" dirty="0">
+                <a:solidFill>
+                  <a:srgbClr val="1F2A37"/>
+                </a:solidFill>
+                <a:latin typeface="Calibri" pitchFamily="34" charset="0"/>
+                <a:ea typeface="Calibri" pitchFamily="34" charset="-122"/>
+                <a:cs typeface="Calibri" pitchFamily="34" charset="-120"/>
+              </a:rPr>
+              <a:t>Liberais e marxistas fazem leituras opostas de uma mesma política.</a:t>
+            </a:r>
+            <a:endParaRPr lang="en-US" sz="1100" dirty="0"/>
+          </a:p>
+        </p:txBody>
+      </p:sp>
+      <p:sp>
+        <p:nvSpPr>
+          <p:cNvPr id="5" name="Text 3"/>
+          <p:cNvSpPr txBox="1"/>
+          <p:nvPr/>
+        </p:nvSpPr>
+        <p:spPr>
+          <a:xfrm>
+            <a:off x="4663440" y="1170432"/>
+            <a:ext cx="3794760" cy="2743200"/>
+          </a:xfrm>
+          <a:prstGeom prst="roundRect">
+            <a:avLst>
+              <a:gd name="adj" fmla="val 2000"/>
+            </a:avLst>
+          </a:prstGeom>
+          <a:solidFill>
+            <a:srgbClr val="E6F2F0"/>
+          </a:solidFill>
+          <a:ln/>
+        </p:spPr>
+        <p:txBody>
+          <a:bodyPr wrap="square" lIns="114300" tIns="114300" rIns="114300" bIns="114300" rtlCol="0" anchor="t"/>
+          <a:lstStyle/>
+          <a:p>
+            <a:pPr algn="l" indent="0" marL="0">
+              <a:lnSpc>
+                <a:spcPct val="100000"/>
+              </a:lnSpc>
+              <a:spcAft>
+                <a:spcPts val="200"/>
+              </a:spcAft>
+              <a:buNone/>
+            </a:pPr>
+            <a:r>
+              <a:rPr lang="en-US" sz="1100" b="1" dirty="0">
+                <a:solidFill>
+                  <a:srgbClr val="2A8C85"/>
+                </a:solidFill>
+                <a:latin typeface="Calibri" pitchFamily="34" charset="0"/>
+                <a:ea typeface="Calibri" pitchFamily="34" charset="-122"/>
+                <a:cs typeface="Calibri" pitchFamily="34" charset="-120"/>
+              </a:rPr>
+              <a:t>PARTE 2 · TÓPICO 6</a:t>
+            </a:r>
+            <a:endParaRPr lang="en-US" sz="1100" dirty="0"/>
+          </a:p>
+          <a:p>
+            <a:pPr algn="l" indent="0" marL="0">
+              <a:lnSpc>
+                <a:spcPct val="100000"/>
+              </a:lnSpc>
+              <a:spcAft>
+                <a:spcPts val="400"/>
+              </a:spcAft>
+              <a:buNone/>
+            </a:pPr>
+            <a:r>
+              <a:rPr lang="en-US" sz="1450" b="1" dirty="0">
+                <a:solidFill>
+                  <a:srgbClr val="13294B"/>
+                </a:solidFill>
+                <a:latin typeface="Calibri" pitchFamily="34" charset="0"/>
+                <a:ea typeface="Calibri" pitchFamily="34" charset="-122"/>
+                <a:cs typeface="Calibri" pitchFamily="34" charset="-120"/>
+              </a:rPr>
+              <a:t>As mudanças do final do século XIX</a:t>
+            </a:r>
+            <a:endParaRPr lang="en-US" sz="1100" dirty="0"/>
+          </a:p>
+          <a:p>
+            <a:pPr algn="l" marL="177800" indent="-177800">
+              <a:lnSpc>
+                <a:spcPct val="100000"/>
+              </a:lnSpc>
+              <a:spcAft>
+                <a:spcPts val="300"/>
+              </a:spcAft>
+              <a:buSzPct val="100000"/>
+              <a:buChar char="•"/>
+            </a:pPr>
+            <a:r>
+              <a:rPr lang="en-US" sz="1200" dirty="0">
+                <a:solidFill>
+                  <a:srgbClr val="1F2A37"/>
+                </a:solidFill>
+                <a:latin typeface="Calibri" pitchFamily="34" charset="0"/>
+                <a:ea typeface="Calibri" pitchFamily="34" charset="-122"/>
+                <a:cs typeface="Calibri" pitchFamily="34" charset="-120"/>
+              </a:rPr>
+              <a:t>Segunda Revolução Industrial, concentração e capital financeiro.</a:t>
+            </a:r>
+            <a:endParaRPr lang="en-US" sz="1100" dirty="0"/>
+          </a:p>
+          <a:p>
+            <a:pPr algn="l" marL="177800" indent="-177800">
+              <a:lnSpc>
+                <a:spcPct val="100000"/>
+              </a:lnSpc>
+              <a:spcAft>
+                <a:spcPts val="300"/>
+              </a:spcAft>
+              <a:buSzPct val="100000"/>
+              <a:buChar char="•"/>
+            </a:pPr>
+            <a:r>
+              <a:rPr lang="en-US" sz="1200" dirty="0">
+                <a:solidFill>
+                  <a:srgbClr val="1F2A37"/>
+                </a:solidFill>
+                <a:latin typeface="Calibri" pitchFamily="34" charset="0"/>
+                <a:ea typeface="Calibri" pitchFamily="34" charset="-122"/>
+                <a:cs typeface="Calibri" pitchFamily="34" charset="-120"/>
+              </a:rPr>
+              <a:t>Trabalhadores organizados e ampliação do voto.</a:t>
+            </a:r>
+            <a:endParaRPr lang="en-US" sz="1100" dirty="0"/>
+          </a:p>
+          <a:p>
+            <a:pPr algn="l" marL="177800" indent="-177800">
+              <a:lnSpc>
+                <a:spcPct val="100000"/>
+              </a:lnSpc>
+              <a:spcAft>
+                <a:spcPts val="300"/>
+              </a:spcAft>
+              <a:buSzPct val="100000"/>
+              <a:buChar char="•"/>
+            </a:pPr>
+            <a:r>
+              <a:rPr lang="en-US" sz="1200" dirty="0">
+                <a:solidFill>
+                  <a:srgbClr val="1F2A37"/>
+                </a:solidFill>
+                <a:latin typeface="Calibri" pitchFamily="34" charset="0"/>
+                <a:ea typeface="Calibri" pitchFamily="34" charset="-122"/>
+                <a:cs typeface="Calibri" pitchFamily="34" charset="-120"/>
+              </a:rPr>
+              <a:t>Seguros sociais de Bismarck; no Brasil, Lei Eloy Chaves e CLT.</a:t>
+            </a:r>
+            <a:endParaRPr lang="en-US" sz="1100" dirty="0"/>
+          </a:p>
+          <a:p>
+            <a:pPr algn="l" marL="177800" indent="-177800">
+              <a:lnSpc>
+                <a:spcPct val="100000"/>
+              </a:lnSpc>
+              <a:spcAft>
+                <a:spcPts val="300"/>
+              </a:spcAft>
+              <a:buSzPct val="100000"/>
+              <a:buChar char="•"/>
+            </a:pPr>
+            <a:r>
+              <a:rPr lang="en-US" sz="1200" dirty="0">
+                <a:solidFill>
+                  <a:srgbClr val="1F2A37"/>
+                </a:solidFill>
+                <a:latin typeface="Calibri" pitchFamily="34" charset="0"/>
+                <a:ea typeface="Calibri" pitchFamily="34" charset="-122"/>
+                <a:cs typeface="Calibri" pitchFamily="34" charset="-120"/>
+              </a:rPr>
+              <a:t>Liberalismo social e leis antitruste.</a:t>
+            </a:r>
+            <a:endParaRPr lang="en-US" sz="1100" dirty="0"/>
+          </a:p>
+          <a:p>
+            <a:pPr algn="l" marL="177800" indent="-177800">
+              <a:lnSpc>
+                <a:spcPct val="100000"/>
+              </a:lnSpc>
+              <a:spcAft>
+                <a:spcPts val="300"/>
+              </a:spcAft>
+              <a:buSzPct val="100000"/>
+              <a:buChar char="•"/>
+            </a:pPr>
+            <a:r>
+              <a:rPr lang="en-US" sz="1200" dirty="0">
+                <a:solidFill>
+                  <a:srgbClr val="1F2A37"/>
+                </a:solidFill>
+                <a:latin typeface="Calibri" pitchFamily="34" charset="0"/>
+                <a:ea typeface="Calibri" pitchFamily="34" charset="-122"/>
+                <a:cs typeface="Calibri" pitchFamily="34" charset="-120"/>
+              </a:rPr>
+              <a:t>Reforma (Bernstein) × revolução (Lênin).</a:t>
+            </a:r>
+            <a:endParaRPr lang="en-US" sz="1100" dirty="0"/>
+          </a:p>
+        </p:txBody>
+      </p:sp>
+      <p:sp>
+        <p:nvSpPr>
+          <p:cNvPr id="6" name="Text 4"/>
+          <p:cNvSpPr txBox="1"/>
+          <p:nvPr/>
+        </p:nvSpPr>
+        <p:spPr>
+          <a:xfrm>
+            <a:off x="685800" y="3995928"/>
+            <a:ext cx="7772400" cy="484632"/>
+          </a:xfrm>
+          <a:prstGeom prst="roundRect">
+            <a:avLst>
+              <a:gd name="adj" fmla="val 15094"/>
+            </a:avLst>
+          </a:prstGeom>
+          <a:solidFill>
+            <a:srgbClr val="E6F2F0"/>
+          </a:solidFill>
+          <a:ln/>
+        </p:spPr>
+        <p:txBody>
+          <a:bodyPr wrap="square" lIns="127000" tIns="127000" rIns="127000" bIns="127000" rtlCol="0" anchor="ctr"/>
+          <a:lstStyle/>
+          <a:p>
+            <a:pPr algn="ctr" indent="0" marL="0">
+              <a:lnSpc>
+                <a:spcPct val="100000"/>
+              </a:lnSpc>
+              <a:buNone/>
+            </a:pPr>
+            <a:r>
+              <a:rPr lang="en-US" sz="1300" b="1" dirty="0">
+                <a:solidFill>
+                  <a:srgbClr val="13294B"/>
+                </a:solidFill>
+                <a:latin typeface="Calibri" pitchFamily="34" charset="0"/>
+                <a:ea typeface="Calibri" pitchFamily="34" charset="-122"/>
+                <a:cs typeface="Calibri" pitchFamily="34" charset="-120"/>
+              </a:rPr>
+              <a:t>Próxima unidade: os modelos de Estado do século XX e o Estado brasileiro.</a:t>
+            </a:r>
+            <a:endParaRPr lang="en-US" sz="1300" dirty="0"/>
+          </a:p>
+        </p:txBody>
+      </p:sp>
+      <p:sp>
+        <p:nvSpPr>
+          <p:cNvPr id="7" name="Text 5"/>
+          <p:cNvSpPr txBox="1"/>
+          <p:nvPr/>
+        </p:nvSpPr>
+        <p:spPr>
+          <a:xfrm>
+            <a:off x="4206240" y="36576"/>
+            <a:ext cx="4800600" cy="219456"/>
+          </a:xfrm>
+          <a:prstGeom prst="rect">
+            <a:avLst/>
+          </a:prstGeom>
+          <a:noFill/>
+          <a:ln/>
+        </p:spPr>
+        <p:txBody>
+          <a:bodyPr wrap="square" lIns="0" tIns="0" rIns="0" bIns="0" rtlCol="0" anchor="ctr"/>
+          <a:lstStyle/>
+          <a:p>
+            <a:pPr algn="r" indent="0" marL="0">
+              <a:lnSpc>
+                <a:spcPct val="100000"/>
+              </a:lnSpc>
+              <a:buNone/>
+            </a:pPr>
+            <a:r>
+              <a:rPr lang="en-US" sz="950" dirty="0">
+                <a:solidFill>
+                  <a:srgbClr val="5B6770"/>
+                </a:solidFill>
+                <a:latin typeface="Calibri" pitchFamily="34" charset="0"/>
+                <a:ea typeface="Calibri" pitchFamily="34" charset="-122"/>
+                <a:cs typeface="Calibri" pitchFamily="34" charset="-120"/>
+              </a:rPr>
+              <a:t>Estado, Governo e Mercado · Unidade 3</a:t>
+            </a:r>
+            <a:endParaRPr lang="en-US" sz="950" dirty="0"/>
+          </a:p>
+        </p:txBody>
+      </p:sp>
+    </p:spTree>
+  </p:cSld>
+  <p:clrMapOvr>
+    <a:masterClrMapping/>
+  </p:clrMapOvr>
+</p:sld>
+</file>
+
 <file path=ppt/slides/slide4.xml><?xml version="1.0" encoding="utf-8"?>
 <p:sld xmlns:a="http://schemas.openxmlformats.org/drawingml/2006/main" xmlns:r="http://schemas.openxmlformats.org/officeDocument/2006/relationships" xmlns:p="http://schemas.openxmlformats.org/presentationml/2006/main">
   <p:cSld name="Slide 4">

--- a/disciplina-01-estado-governo-mercado/materiais/03_Unidade_3_Matriz_Marxista.pptx
+++ b/disciplina-01-estado-governo-mercado/materiais/03_Unidade_3_Matriz_Marxista.pptx
@@ -136,7 +136,7 @@
 </p:presentation>
 </file>
 
-<file path=ppt/charts/chart5.xml><?xml version="1.0" encoding="utf-8"?>
+<file path=ppt/charts/chart7.xml><?xml version="1.0" encoding="utf-8"?>
 <c:chartSpace xmlns:c="http://schemas.openxmlformats.org/drawingml/2006/chart" xmlns:a="http://schemas.openxmlformats.org/drawingml/2006/main" xmlns:r="http://schemas.openxmlformats.org/officeDocument/2006/relationships">
   <c:date1904 val="0"/>
   <c:roundedCorners val="1"/>

--- a/disciplina-01-estado-governo-mercado/materiais/03_Unidade_3_Matriz_Marxista.pptx
+++ b/disciplina-01-estado-governo-mercado/materiais/03_Unidade_3_Matriz_Marxista.pptx
@@ -1669,7 +1669,7 @@
           <a:p>
             <a:r>
               <a:rPr lang="en-US" dirty="0"/>
-              <a:t>Atividades da Unidade 3. A partir de 26 de outubro, videoaula e leitura. No dia 28 de outubro, quarta-feira, das 19h às 20h30, teremos o encontro síncrono pelo Google Meet, com revisão das Unidades 1 a 3 e orientações para a A2 e a A3. Traga as suas dúvidas! E até 1º de novembro, participe do fórum temático 2: como um liberal e um marxista avaliariam uma mesma política pública? Na próxima unidade, os modelos de Estado do século XX e o Estado brasileiro.</a:t>
+              <a:t>Atividades da Unidade 3. A partir de 26 de outubro, videoaula e leitura. No próprio dia 26 de outubro, segunda-feira, das 19h às 20h30, teremos o encontro síncrono pelo Google Meet, o único da disciplina, com revisão das Unidades 1 e 2, a abertura desta unidade e orientações para a A2 e a A3. Traga as suas dúvidas! E até 1º de novembro, participe do fórum temático 2: como um liberal e um marxista avaliariam uma mesma política pública? Na próxima unidade, os modelos de Estado do século XX e o Estado brasileiro.</a:t>
             </a:r>
             <a:endParaRPr lang="en-US" dirty="0"/>
           </a:p>
@@ -1845,7 +1845,7 @@
           <a:p>
             <a:r>
               <a:rPr lang="en-US" dirty="0"/>
-              <a:t>Esta unidade vai de 26 de outubro a 1º de novembro. A leitura é o livro de Coelho, nas partes sobre a matriz marxista e as mudanças do século XIX, junto com os tópicos 5 e 6 do sumário da página de conteúdos. E atenção: no dia 28 de outubro, às 19h, temos o nosso encontro síncrono, o único da disciplina. A presença conta para a frequência.</a:t>
+              <a:t>Esta unidade vai de 26 de outubro a 1º de novembro. A leitura é o livro de Coelho, nas partes sobre a matriz marxista e as mudanças do século XIX, junto com os tópicos 5 e 6 do sumário da página de conteúdos. E atenção: hoje, segunda-feira, 26 de outubro, às 19h, temos o nosso encontro síncrono, o único da disciplina. A presença conta para a frequência.</a:t>
             </a:r>
             <a:endParaRPr lang="en-US" dirty="0"/>
           </a:p>
@@ -2901,7 +2901,7 @@
           <a:p>
             <a:r>
               <a:rPr lang="en-US" dirty="0"/>
-              <a:t>Para fechar a Unidade 3, vamos recapitular. [Apontar para o quadro da esquerda.] No tópico 5, vimos que, para Marx e Engels, o capitalismo é um modo de produção histórico. Estudamos o materialismo histórico, a luta de classes e a mais-valia, absoluta e relativa, e a visão do Estado como instrumento de dominação de classe, com a transição ao socialismo e ao comunismo. Também comparamos as leituras liberal e marxista de uma mesma política. [Apontar para o quadro da direita.] No tópico 6, vimos as mudanças do final do século XIX: a Segunda Revolução Industrial, a concentração e o capital financeiro, os trabalhadores organizados e o voto ampliado, e os primeiros seguros sociais, na Alemanha de Bismarck e, no Brasil, com a Lei Eloy Chaves e a CLT. Essas mudanças produziram o liberalismo social, as leis antitruste e o debate entre reforma, com Bernstein, e revolução, com Lênin. Na próxima unidade, os modelos de Estado do século XX e o Estado brasileiro. Nos vemos no encontro síncrono do dia 28 de outubro, às 19h. Até lá!</a:t>
+              <a:t>Para fechar a Unidade 3, vamos recapitular. [Apontar para o quadro da esquerda.] No tópico 5, vimos que, para Marx e Engels, o capitalismo é um modo de produção histórico. Estudamos o materialismo histórico, a luta de classes e a mais-valia, absoluta e relativa, e a visão do Estado como instrumento de dominação de classe, com a transição ao socialismo e ao comunismo. Também comparamos as leituras liberal e marxista de uma mesma política. [Apontar para o quadro da direita.] No tópico 6, vimos as mudanças do final do século XIX: a Segunda Revolução Industrial, a concentração e o capital financeiro, os trabalhadores organizados e o voto ampliado, e os primeiros seguros sociais, na Alemanha de Bismarck e, no Brasil, com a Lei Eloy Chaves e a CLT. Essas mudanças produziram o liberalismo social, as leis antitruste e o debate entre reforma, com Bernstein, e revolução, com Lênin. Na próxima unidade, os modelos de Estado do século XX e o Estado brasileiro. Até a próxima videoaula!</a:t>
             </a:r>
             <a:endParaRPr lang="en-US" dirty="0"/>
           </a:p>
@@ -10926,7 +10926,7 @@
                           <a:ea typeface="Calibri" pitchFamily="34" charset="-122"/>
                           <a:cs typeface="Calibri" pitchFamily="34" charset="-120"/>
                         </a:rPr>
-                        <a:t>28/10 (qua)</a:t>
+                        <a:t>26/10 (seg)</a:t>
                       </a:r>
                       <a:endParaRPr lang="en-US" sz="1350" dirty="0">
                         <a:latin typeface="Calibri" charset="0"/>
@@ -10994,7 +10994,7 @@
                           <a:ea typeface="Calibri" pitchFamily="34" charset="-122"/>
                           <a:cs typeface="Calibri" pitchFamily="34" charset="-120"/>
                         </a:rPr>
-                        <a:t>Encontro síncrono (Google Meet), 19h–20h30: revisão das Unidades 1 a 3 e orientações para A2 e A3</a:t>
+                        <a:t>Encontro síncrono único (Google Meet), 19h–20h30: revisão das Unidades 1 e 2, abertura da Unidade 3 e orientações para A2 e A3</a:t>
                       </a:r>
                       <a:endParaRPr lang="en-US" sz="1350" dirty="0">
                         <a:latin typeface="Calibri" charset="0"/>
@@ -12214,7 +12214,7 @@
                 <a:ea typeface="Calibri" pitchFamily="34" charset="-122"/>
                 <a:cs typeface="Calibri" pitchFamily="34" charset="-120"/>
               </a:rPr>
-              <a:t>Página de conteúdos: tópicos 5 e 6 do sumário · Encontro síncrono: 28/10, 19h</a:t>
+              <a:t>Página de conteúdos: tópicos 5 e 6 do sumário · Encontro síncrono: 26/10, 19h</a:t>
             </a:r>
             <a:endParaRPr lang="en-US" sz="1500" dirty="0"/>
           </a:p>

--- a/disciplina-01-estado-governo-mercado/materiais/03_Unidade_3_Matriz_Marxista.pptx
+++ b/disciplina-01-estado-governo-mercado/materiais/03_Unidade_3_Matriz_Marxista.pptx
@@ -24,20 +24,9 @@
     <p:sldId id="272" r:id="rId18"/>
     <p:sldId id="273" r:id="rId19"/>
     <p:sldId id="274" r:id="rId20"/>
-    <p:sldId id="275" r:id="rId21"/>
-    <p:sldId id="276" r:id="rId22"/>
-    <p:sldId id="277" r:id="rId23"/>
-    <p:sldId id="278" r:id="rId24"/>
-    <p:sldId id="279" r:id="rId25"/>
-    <p:sldId id="280" r:id="rId26"/>
-    <p:sldId id="281" r:id="rId27"/>
-    <p:sldId id="282" r:id="rId28"/>
-    <p:sldId id="283" r:id="rId29"/>
-    <p:sldId id="284" r:id="rId30"/>
-    <p:sldId id="285" r:id="rId31"/>
   </p:sldIdLst>
   <p:notesMasterIdLst>
-    <p:notesMasterId r:id="rId32"/>
+    <p:notesMasterId r:id="rId21"/>
   </p:notesMasterIdLst>
   <p:sldSz cx="9144000" cy="5143500"/>
   <p:notesSz cx="5143500" cy="9144000"/>
@@ -1669,7 +1658,7 @@
           <a:p>
             <a:r>
               <a:rPr lang="en-US" dirty="0"/>
-              <a:t>Atividades da Unidade 3. A partir de 26 de outubro, videoaula e leitura. No próprio dia 26 de outubro, segunda-feira, das 19h às 20h30, teremos o encontro síncrono pelo Google Meet, o único da disciplina, com revisão das Unidades 1 e 2, a abertura desta unidade e orientações para a A2 e a A3. Traga as suas dúvidas! E até 1º de novembro, participe do fórum temático 2: como um liberal e um marxista avaliariam uma mesma política pública? Na próxima unidade, os modelos de Estado do século XX e o Estado brasileiro.</a:t>
+              <a:t>Atividades da Unidade 3. A partir de 26 de outubro, videoaula e leitura. No próprio dia 26 de outubro, segunda-feira, das 19h às 20h30, teremos o encontro síncrono pelo Google Meet, o único da disciplina, com revisão das Unidades 1 e 2, a abertura desta unidade e orientações para a A2 e a A3. Traga as suas dúvidas! E até 1º de novembro, participe do fórum temático 2: como um liberal e um marxista avaliariam uma mesma política pública? Na próxima unidade, os modelos de Estado do século XX e o Estado brasileiro. E, para revisar, faça o quiz da Unidade 3 na página de conteúdos da disciplina: cinco perguntas com resposta comentada, sem nota.</a:t>
             </a:r>
             <a:endParaRPr lang="en-US" dirty="0"/>
           </a:p>
@@ -1757,7 +1746,7 @@
           <a:p>
             <a:r>
               <a:rPr lang="en-US" dirty="0"/>
-              <a:t>Vamos ao quiz da Unidade 3: cinco perguntas. Pause, responda e confira no slide seguinte.</a:t>
+              <a:t>Para fechar a Unidade 3, vamos recapitular. [Apontar para o quadro da esquerda.] No tópico 5, vimos que, para Marx e Engels, o capitalismo é um modo de produção histórico. Estudamos o materialismo histórico, a luta de classes e a mais-valia, absoluta e relativa, e a visão do Estado como instrumento de dominação de classe, com a transição ao socialismo e ao comunismo. Também comparamos as leituras liberal e marxista de uma mesma política. [Apontar para o quadro da direita.] No tópico 6, vimos as mudanças do final do século XIX: a Segunda Revolução Industrial, a concentração e o capital financeiro, os trabalhadores organizados e o voto ampliado, e os primeiros seguros sociais, na Alemanha de Bismarck e, no Brasil, com a Lei Eloy Chaves e a CLT. Essas mudanças produziram o liberalismo social, as leis antitruste e o debate entre reforma, com Bernstein, e revolução, com Lênin. Na próxima unidade, os modelos de Estado do século XX e o Estado brasileiro. Até a próxima videoaula!</a:t>
             </a:r>
             <a:endParaRPr lang="en-US" dirty="0"/>
           </a:p>
@@ -1887,886 +1876,6 @@
 </p:notes>
 </file>
 
-<file path=ppt/notesSlides/notesSlide20.xml><?xml version="1.0" encoding="utf-8"?>
-<p:notes xmlns:a="http://schemas.openxmlformats.org/drawingml/2006/main" xmlns:r="http://schemas.openxmlformats.org/officeDocument/2006/relationships" xmlns:p="http://schemas.openxmlformats.org/presentationml/2006/main">
-  <p:cSld>
-    <p:spTree>
-      <p:nvGrpSpPr>
-        <p:cNvPr id="1" name=""/>
-        <p:cNvGrpSpPr/>
-        <p:nvPr/>
-      </p:nvGrpSpPr>
-      <p:grpSpPr>
-        <a:xfrm>
-          <a:off x="0" y="0"/>
-          <a:ext cx="0" cy="0"/>
-          <a:chOff x="0" y="0"/>
-          <a:chExt cx="0" cy="0"/>
-        </a:xfrm>
-      </p:grpSpPr>
-      <p:sp>
-        <p:nvSpPr>
-          <p:cNvPr id="2" name="Slide Image Placeholder 1"/>
-          <p:cNvSpPr>
-            <a:spLocks noGrp="1" noRot="1" noChangeAspect="1"/>
-          </p:cNvSpPr>
-          <p:nvPr>
-            <p:ph type="sldImg"/>
-          </p:nvPr>
-        </p:nvSpPr>
-        <p:spPr/>
-      </p:sp>
-      <p:sp>
-        <p:nvSpPr>
-          <p:cNvPr id="3" name="Notes Placeholder 2"/>
-          <p:cNvSpPr>
-            <a:spLocks noGrp="1"/>
-          </p:cNvSpPr>
-          <p:nvPr>
-            <p:ph type="body" idx="1"/>
-          </p:nvPr>
-        </p:nvSpPr>
-        <p:spPr/>
-        <p:txBody>
-          <a:bodyPr/>
-          <a:lstStyle/>
-          <a:p>
-            <a:r>
-              <a:rPr lang="en-US" dirty="0"/>
-              <a:t>Pergunta 1. Para Marx, a base econômica (forças produtivas e relações de produção) condiciona: Letra a: A superestrutura jurídica, política e ideológica. Letra b: Apenas os preços dos produtos. Letra c: Somente o comércio exterior. Letra d: Nada: as ideias determinam a economia. Pause o vídeo e escolha a sua resposta.</a:t>
-            </a:r>
-            <a:endParaRPr lang="en-US" dirty="0"/>
-          </a:p>
-        </p:txBody>
-      </p:sp>
-      <p:sp>
-        <p:nvSpPr>
-          <p:cNvPr id="4" name="Slide Number Placeholder 3"/>
-          <p:cNvSpPr>
-            <a:spLocks noGrp="1"/>
-          </p:cNvSpPr>
-          <p:nvPr>
-            <p:ph type="sldNum" sz="quarter" idx="10"/>
-          </p:nvPr>
-        </p:nvSpPr>
-        <p:spPr/>
-        <p:txBody>
-          <a:bodyPr/>
-          <a:lstStyle/>
-          <a:p>
-            <a:fld id="{F7021451-1387-4CA6-816F-3879F97B5CBC}" type="slidenum">
-              <a:rPr lang="en-US"/>
-              <a:t>20</a:t>
-            </a:fld>
-            <a:endParaRPr lang="en-US"/>
-          </a:p>
-        </p:txBody>
-      </p:sp>
-    </p:spTree>
-    <p:extLst>
-      <p:ext uri="{BB962C8B-B14F-4D97-AF65-F5344CB8AC3E}">
-        <p14:creationId xmlns:p14="http://schemas.microsoft.com/office/powerpoint/2010/main" val="1024086991"/>
-      </p:ext>
-    </p:extLst>
-  </p:cSld>
-  <p:clrMapOvr>
-    <a:masterClrMapping/>
-  </p:clrMapOvr>
-</p:notes>
-</file>
-
-<file path=ppt/notesSlides/notesSlide21.xml><?xml version="1.0" encoding="utf-8"?>
-<p:notes xmlns:a="http://schemas.openxmlformats.org/drawingml/2006/main" xmlns:r="http://schemas.openxmlformats.org/officeDocument/2006/relationships" xmlns:p="http://schemas.openxmlformats.org/presentationml/2006/main">
-  <p:cSld>
-    <p:spTree>
-      <p:nvGrpSpPr>
-        <p:cNvPr id="1" name=""/>
-        <p:cNvGrpSpPr/>
-        <p:nvPr/>
-      </p:nvGrpSpPr>
-      <p:grpSpPr>
-        <a:xfrm>
-          <a:off x="0" y="0"/>
-          <a:ext cx="0" cy="0"/>
-          <a:chOff x="0" y="0"/>
-          <a:chExt cx="0" cy="0"/>
-        </a:xfrm>
-      </p:grpSpPr>
-      <p:sp>
-        <p:nvSpPr>
-          <p:cNvPr id="2" name="Slide Image Placeholder 1"/>
-          <p:cNvSpPr>
-            <a:spLocks noGrp="1" noRot="1" noChangeAspect="1"/>
-          </p:cNvSpPr>
-          <p:nvPr>
-            <p:ph type="sldImg"/>
-          </p:nvPr>
-        </p:nvSpPr>
-        <p:spPr/>
-      </p:sp>
-      <p:sp>
-        <p:nvSpPr>
-          <p:cNvPr id="3" name="Notes Placeholder 2"/>
-          <p:cNvSpPr>
-            <a:spLocks noGrp="1"/>
-          </p:cNvSpPr>
-          <p:nvPr>
-            <p:ph type="body" idx="1"/>
-          </p:nvPr>
-        </p:nvSpPr>
-        <p:spPr/>
-        <p:txBody>
-          <a:bodyPr/>
-          <a:lstStyle/>
-          <a:p>
-            <a:r>
-              <a:rPr lang="en-US" dirty="0"/>
-              <a:t>A resposta correta é a letra a: A superestrutura jurídica, política e ideológica. É a tese do materialismo histórico: Estado, Direito e ideologias se apoiam na base econômica.</a:t>
-            </a:r>
-            <a:endParaRPr lang="en-US" dirty="0"/>
-          </a:p>
-        </p:txBody>
-      </p:sp>
-      <p:sp>
-        <p:nvSpPr>
-          <p:cNvPr id="4" name="Slide Number Placeholder 3"/>
-          <p:cNvSpPr>
-            <a:spLocks noGrp="1"/>
-          </p:cNvSpPr>
-          <p:nvPr>
-            <p:ph type="sldNum" sz="quarter" idx="10"/>
-          </p:nvPr>
-        </p:nvSpPr>
-        <p:spPr/>
-        <p:txBody>
-          <a:bodyPr/>
-          <a:lstStyle/>
-          <a:p>
-            <a:fld id="{F7021451-1387-4CA6-816F-3879F97B5CBC}" type="slidenum">
-              <a:rPr lang="en-US"/>
-              <a:t>21</a:t>
-            </a:fld>
-            <a:endParaRPr lang="en-US"/>
-          </a:p>
-        </p:txBody>
-      </p:sp>
-    </p:spTree>
-    <p:extLst>
-      <p:ext uri="{BB962C8B-B14F-4D97-AF65-F5344CB8AC3E}">
-        <p14:creationId xmlns:p14="http://schemas.microsoft.com/office/powerpoint/2010/main" val="1024086991"/>
-      </p:ext>
-    </p:extLst>
-  </p:cSld>
-  <p:clrMapOvr>
-    <a:masterClrMapping/>
-  </p:clrMapOvr>
-</p:notes>
-</file>
-
-<file path=ppt/notesSlides/notesSlide22.xml><?xml version="1.0" encoding="utf-8"?>
-<p:notes xmlns:a="http://schemas.openxmlformats.org/drawingml/2006/main" xmlns:r="http://schemas.openxmlformats.org/officeDocument/2006/relationships" xmlns:p="http://schemas.openxmlformats.org/presentationml/2006/main">
-  <p:cSld>
-    <p:spTree>
-      <p:nvGrpSpPr>
-        <p:cNvPr id="1" name=""/>
-        <p:cNvGrpSpPr/>
-        <p:nvPr/>
-      </p:nvGrpSpPr>
-      <p:grpSpPr>
-        <a:xfrm>
-          <a:off x="0" y="0"/>
-          <a:ext cx="0" cy="0"/>
-          <a:chOff x="0" y="0"/>
-          <a:chExt cx="0" cy="0"/>
-        </a:xfrm>
-      </p:grpSpPr>
-      <p:sp>
-        <p:nvSpPr>
-          <p:cNvPr id="2" name="Slide Image Placeholder 1"/>
-          <p:cNvSpPr>
-            <a:spLocks noGrp="1" noRot="1" noChangeAspect="1"/>
-          </p:cNvSpPr>
-          <p:nvPr>
-            <p:ph type="sldImg"/>
-          </p:nvPr>
-        </p:nvSpPr>
-        <p:spPr/>
-      </p:sp>
-      <p:sp>
-        <p:nvSpPr>
-          <p:cNvPr id="3" name="Notes Placeholder 2"/>
-          <p:cNvSpPr>
-            <a:spLocks noGrp="1"/>
-          </p:cNvSpPr>
-          <p:nvPr>
-            <p:ph type="body" idx="1"/>
-          </p:nvPr>
-        </p:nvSpPr>
-        <p:spPr/>
-        <p:txBody>
-          <a:bodyPr/>
-          <a:lstStyle/>
-          <a:p>
-            <a:r>
-              <a:rPr lang="en-US" dirty="0"/>
-              <a:t>Pergunta 2. Numa jornada de 8 horas, o trabalhador produz em 4 horas o valor do seu salário. As outras 4 horas geram: Letra a: Salário. Letra b: Mais-valia. Letra c: Juros. Letra d: Aluguel. Pause o vídeo e escolha a sua resposta.</a:t>
-            </a:r>
-            <a:endParaRPr lang="en-US" dirty="0"/>
-          </a:p>
-        </p:txBody>
-      </p:sp>
-      <p:sp>
-        <p:nvSpPr>
-          <p:cNvPr id="4" name="Slide Number Placeholder 3"/>
-          <p:cNvSpPr>
-            <a:spLocks noGrp="1"/>
-          </p:cNvSpPr>
-          <p:nvPr>
-            <p:ph type="sldNum" sz="quarter" idx="10"/>
-          </p:nvPr>
-        </p:nvSpPr>
-        <p:spPr/>
-        <p:txBody>
-          <a:bodyPr/>
-          <a:lstStyle/>
-          <a:p>
-            <a:fld id="{F7021451-1387-4CA6-816F-3879F97B5CBC}" type="slidenum">
-              <a:rPr lang="en-US"/>
-              <a:t>22</a:t>
-            </a:fld>
-            <a:endParaRPr lang="en-US"/>
-          </a:p>
-        </p:txBody>
-      </p:sp>
-    </p:spTree>
-    <p:extLst>
-      <p:ext uri="{BB962C8B-B14F-4D97-AF65-F5344CB8AC3E}">
-        <p14:creationId xmlns:p14="http://schemas.microsoft.com/office/powerpoint/2010/main" val="1024086991"/>
-      </p:ext>
-    </p:extLst>
-  </p:cSld>
-  <p:clrMapOvr>
-    <a:masterClrMapping/>
-  </p:clrMapOvr>
-</p:notes>
-</file>
-
-<file path=ppt/notesSlides/notesSlide23.xml><?xml version="1.0" encoding="utf-8"?>
-<p:notes xmlns:a="http://schemas.openxmlformats.org/drawingml/2006/main" xmlns:r="http://schemas.openxmlformats.org/officeDocument/2006/relationships" xmlns:p="http://schemas.openxmlformats.org/presentationml/2006/main">
-  <p:cSld>
-    <p:spTree>
-      <p:nvGrpSpPr>
-        <p:cNvPr id="1" name=""/>
-        <p:cNvGrpSpPr/>
-        <p:nvPr/>
-      </p:nvGrpSpPr>
-      <p:grpSpPr>
-        <a:xfrm>
-          <a:off x="0" y="0"/>
-          <a:ext cx="0" cy="0"/>
-          <a:chOff x="0" y="0"/>
-          <a:chExt cx="0" cy="0"/>
-        </a:xfrm>
-      </p:grpSpPr>
-      <p:sp>
-        <p:nvSpPr>
-          <p:cNvPr id="2" name="Slide Image Placeholder 1"/>
-          <p:cNvSpPr>
-            <a:spLocks noGrp="1" noRot="1" noChangeAspect="1"/>
-          </p:cNvSpPr>
-          <p:nvPr>
-            <p:ph type="sldImg"/>
-          </p:nvPr>
-        </p:nvSpPr>
-        <p:spPr/>
-      </p:sp>
-      <p:sp>
-        <p:nvSpPr>
-          <p:cNvPr id="3" name="Notes Placeholder 2"/>
-          <p:cNvSpPr>
-            <a:spLocks noGrp="1"/>
-          </p:cNvSpPr>
-          <p:nvPr>
-            <p:ph type="body" idx="1"/>
-          </p:nvPr>
-        </p:nvSpPr>
-        <p:spPr/>
-        <p:txBody>
-          <a:bodyPr/>
-          <a:lstStyle/>
-          <a:p>
-            <a:r>
-              <a:rPr lang="en-US" dirty="0"/>
-              <a:t>A resposta correta é a letra b: Mais-valia. O valor produzido no trabalho excedente é apropriado pelo capitalista: é a mais-valia, fonte do lucro.</a:t>
-            </a:r>
-            <a:endParaRPr lang="en-US" dirty="0"/>
-          </a:p>
-        </p:txBody>
-      </p:sp>
-      <p:sp>
-        <p:nvSpPr>
-          <p:cNvPr id="4" name="Slide Number Placeholder 3"/>
-          <p:cNvSpPr>
-            <a:spLocks noGrp="1"/>
-          </p:cNvSpPr>
-          <p:nvPr>
-            <p:ph type="sldNum" sz="quarter" idx="10"/>
-          </p:nvPr>
-        </p:nvSpPr>
-        <p:spPr/>
-        <p:txBody>
-          <a:bodyPr/>
-          <a:lstStyle/>
-          <a:p>
-            <a:fld id="{F7021451-1387-4CA6-816F-3879F97B5CBC}" type="slidenum">
-              <a:rPr lang="en-US"/>
-              <a:t>23</a:t>
-            </a:fld>
-            <a:endParaRPr lang="en-US"/>
-          </a:p>
-        </p:txBody>
-      </p:sp>
-    </p:spTree>
-    <p:extLst>
-      <p:ext uri="{BB962C8B-B14F-4D97-AF65-F5344CB8AC3E}">
-        <p14:creationId xmlns:p14="http://schemas.microsoft.com/office/powerpoint/2010/main" val="1024086991"/>
-      </p:ext>
-    </p:extLst>
-  </p:cSld>
-  <p:clrMapOvr>
-    <a:masterClrMapping/>
-  </p:clrMapOvr>
-</p:notes>
-</file>
-
-<file path=ppt/notesSlides/notesSlide24.xml><?xml version="1.0" encoding="utf-8"?>
-<p:notes xmlns:a="http://schemas.openxmlformats.org/drawingml/2006/main" xmlns:r="http://schemas.openxmlformats.org/officeDocument/2006/relationships" xmlns:p="http://schemas.openxmlformats.org/presentationml/2006/main">
-  <p:cSld>
-    <p:spTree>
-      <p:nvGrpSpPr>
-        <p:cNvPr id="1" name=""/>
-        <p:cNvGrpSpPr/>
-        <p:nvPr/>
-      </p:nvGrpSpPr>
-      <p:grpSpPr>
-        <a:xfrm>
-          <a:off x="0" y="0"/>
-          <a:ext cx="0" cy="0"/>
-          <a:chOff x="0" y="0"/>
-          <a:chExt cx="0" cy="0"/>
-        </a:xfrm>
-      </p:grpSpPr>
-      <p:sp>
-        <p:nvSpPr>
-          <p:cNvPr id="2" name="Slide Image Placeholder 1"/>
-          <p:cNvSpPr>
-            <a:spLocks noGrp="1" noRot="1" noChangeAspect="1"/>
-          </p:cNvSpPr>
-          <p:nvPr>
-            <p:ph type="sldImg"/>
-          </p:nvPr>
-        </p:nvSpPr>
-        <p:spPr/>
-      </p:sp>
-      <p:sp>
-        <p:nvSpPr>
-          <p:cNvPr id="3" name="Notes Placeholder 2"/>
-          <p:cNvSpPr>
-            <a:spLocks noGrp="1"/>
-          </p:cNvSpPr>
-          <p:nvPr>
-            <p:ph type="body" idx="1"/>
-          </p:nvPr>
-        </p:nvSpPr>
-        <p:spPr/>
-        <p:txBody>
-          <a:bodyPr/>
-          <a:lstStyle/>
-          <a:p>
-            <a:r>
-              <a:rPr lang="en-US" dirty="0"/>
-              <a:t>Pergunta 3. Elevar a produtividade para reduzir o tempo de trabalho necessário gera mais-valia: Letra a: Absoluta. Letra b: Comercial. Letra c: Relativa. Letra d: Fictícia. Pause o vídeo e escolha a sua resposta.</a:t>
-            </a:r>
-            <a:endParaRPr lang="en-US" dirty="0"/>
-          </a:p>
-        </p:txBody>
-      </p:sp>
-      <p:sp>
-        <p:nvSpPr>
-          <p:cNvPr id="4" name="Slide Number Placeholder 3"/>
-          <p:cNvSpPr>
-            <a:spLocks noGrp="1"/>
-          </p:cNvSpPr>
-          <p:nvPr>
-            <p:ph type="sldNum" sz="quarter" idx="10"/>
-          </p:nvPr>
-        </p:nvSpPr>
-        <p:spPr/>
-        <p:txBody>
-          <a:bodyPr/>
-          <a:lstStyle/>
-          <a:p>
-            <a:fld id="{F7021451-1387-4CA6-816F-3879F97B5CBC}" type="slidenum">
-              <a:rPr lang="en-US"/>
-              <a:t>24</a:t>
-            </a:fld>
-            <a:endParaRPr lang="en-US"/>
-          </a:p>
-        </p:txBody>
-      </p:sp>
-    </p:spTree>
-    <p:extLst>
-      <p:ext uri="{BB962C8B-B14F-4D97-AF65-F5344CB8AC3E}">
-        <p14:creationId xmlns:p14="http://schemas.microsoft.com/office/powerpoint/2010/main" val="1024086991"/>
-      </p:ext>
-    </p:extLst>
-  </p:cSld>
-  <p:clrMapOvr>
-    <a:masterClrMapping/>
-  </p:clrMapOvr>
-</p:notes>
-</file>
-
-<file path=ppt/notesSlides/notesSlide25.xml><?xml version="1.0" encoding="utf-8"?>
-<p:notes xmlns:a="http://schemas.openxmlformats.org/drawingml/2006/main" xmlns:r="http://schemas.openxmlformats.org/officeDocument/2006/relationships" xmlns:p="http://schemas.openxmlformats.org/presentationml/2006/main">
-  <p:cSld>
-    <p:spTree>
-      <p:nvGrpSpPr>
-        <p:cNvPr id="1" name=""/>
-        <p:cNvGrpSpPr/>
-        <p:nvPr/>
-      </p:nvGrpSpPr>
-      <p:grpSpPr>
-        <a:xfrm>
-          <a:off x="0" y="0"/>
-          <a:ext cx="0" cy="0"/>
-          <a:chOff x="0" y="0"/>
-          <a:chExt cx="0" cy="0"/>
-        </a:xfrm>
-      </p:grpSpPr>
-      <p:sp>
-        <p:nvSpPr>
-          <p:cNvPr id="2" name="Slide Image Placeholder 1"/>
-          <p:cNvSpPr>
-            <a:spLocks noGrp="1" noRot="1" noChangeAspect="1"/>
-          </p:cNvSpPr>
-          <p:nvPr>
-            <p:ph type="sldImg"/>
-          </p:nvPr>
-        </p:nvSpPr>
-        <p:spPr/>
-      </p:sp>
-      <p:sp>
-        <p:nvSpPr>
-          <p:cNvPr id="3" name="Notes Placeholder 2"/>
-          <p:cNvSpPr>
-            <a:spLocks noGrp="1"/>
-          </p:cNvSpPr>
-          <p:nvPr>
-            <p:ph type="body" idx="1"/>
-          </p:nvPr>
-        </p:nvSpPr>
-        <p:spPr/>
-        <p:txBody>
-          <a:bodyPr/>
-          <a:lstStyle/>
-          <a:p>
-            <a:r>
-              <a:rPr lang="en-US" dirty="0"/>
-              <a:t>A resposta correta é a letra c: Relativa. A mais-valia relativa vem do aumento da produtividade; a absoluta, do prolongamento da jornada.</a:t>
-            </a:r>
-            <a:endParaRPr lang="en-US" dirty="0"/>
-          </a:p>
-        </p:txBody>
-      </p:sp>
-      <p:sp>
-        <p:nvSpPr>
-          <p:cNvPr id="4" name="Slide Number Placeholder 3"/>
-          <p:cNvSpPr>
-            <a:spLocks noGrp="1"/>
-          </p:cNvSpPr>
-          <p:nvPr>
-            <p:ph type="sldNum" sz="quarter" idx="10"/>
-          </p:nvPr>
-        </p:nvSpPr>
-        <p:spPr/>
-        <p:txBody>
-          <a:bodyPr/>
-          <a:lstStyle/>
-          <a:p>
-            <a:fld id="{F7021451-1387-4CA6-816F-3879F97B5CBC}" type="slidenum">
-              <a:rPr lang="en-US"/>
-              <a:t>25</a:t>
-            </a:fld>
-            <a:endParaRPr lang="en-US"/>
-          </a:p>
-        </p:txBody>
-      </p:sp>
-    </p:spTree>
-    <p:extLst>
-      <p:ext uri="{BB962C8B-B14F-4D97-AF65-F5344CB8AC3E}">
-        <p14:creationId xmlns:p14="http://schemas.microsoft.com/office/powerpoint/2010/main" val="1024086991"/>
-      </p:ext>
-    </p:extLst>
-  </p:cSld>
-  <p:clrMapOvr>
-    <a:masterClrMapping/>
-  </p:clrMapOvr>
-</p:notes>
-</file>
-
-<file path=ppt/notesSlides/notesSlide26.xml><?xml version="1.0" encoding="utf-8"?>
-<p:notes xmlns:a="http://schemas.openxmlformats.org/drawingml/2006/main" xmlns:r="http://schemas.openxmlformats.org/officeDocument/2006/relationships" xmlns:p="http://schemas.openxmlformats.org/presentationml/2006/main">
-  <p:cSld>
-    <p:spTree>
-      <p:nvGrpSpPr>
-        <p:cNvPr id="1" name=""/>
-        <p:cNvGrpSpPr/>
-        <p:nvPr/>
-      </p:nvGrpSpPr>
-      <p:grpSpPr>
-        <a:xfrm>
-          <a:off x="0" y="0"/>
-          <a:ext cx="0" cy="0"/>
-          <a:chOff x="0" y="0"/>
-          <a:chExt cx="0" cy="0"/>
-        </a:xfrm>
-      </p:grpSpPr>
-      <p:sp>
-        <p:nvSpPr>
-          <p:cNvPr id="2" name="Slide Image Placeholder 1"/>
-          <p:cNvSpPr>
-            <a:spLocks noGrp="1" noRot="1" noChangeAspect="1"/>
-          </p:cNvSpPr>
-          <p:nvPr>
-            <p:ph type="sldImg"/>
-          </p:nvPr>
-        </p:nvSpPr>
-        <p:spPr/>
-      </p:sp>
-      <p:sp>
-        <p:nvSpPr>
-          <p:cNvPr id="3" name="Notes Placeholder 2"/>
-          <p:cNvSpPr>
-            <a:spLocks noGrp="1"/>
-          </p:cNvSpPr>
-          <p:nvPr>
-            <p:ph type="body" idx="1"/>
-          </p:nvPr>
-        </p:nvSpPr>
-        <p:spPr/>
-        <p:txBody>
-          <a:bodyPr/>
-          <a:lstStyle/>
-          <a:p>
-            <a:r>
-              <a:rPr lang="en-US" dirty="0"/>
-              <a:t>Pergunta 4. Os primeiros seguros sociais estatais (doença, acidentes e velhice) foram criados: Letra a: Na Inglaterra de Thatcher. Letra b: Na Alemanha de Bismarck. Letra c: Nos EUA de Roosevelt. Letra d: Na União Soviética. Pause o vídeo e escolha a sua resposta.</a:t>
-            </a:r>
-            <a:endParaRPr lang="en-US" dirty="0"/>
-          </a:p>
-        </p:txBody>
-      </p:sp>
-      <p:sp>
-        <p:nvSpPr>
-          <p:cNvPr id="4" name="Slide Number Placeholder 3"/>
-          <p:cNvSpPr>
-            <a:spLocks noGrp="1"/>
-          </p:cNvSpPr>
-          <p:nvPr>
-            <p:ph type="sldNum" sz="quarter" idx="10"/>
-          </p:nvPr>
-        </p:nvSpPr>
-        <p:spPr/>
-        <p:txBody>
-          <a:bodyPr/>
-          <a:lstStyle/>
-          <a:p>
-            <a:fld id="{F7021451-1387-4CA6-816F-3879F97B5CBC}" type="slidenum">
-              <a:rPr lang="en-US"/>
-              <a:t>26</a:t>
-            </a:fld>
-            <a:endParaRPr lang="en-US"/>
-          </a:p>
-        </p:txBody>
-      </p:sp>
-    </p:spTree>
-    <p:extLst>
-      <p:ext uri="{BB962C8B-B14F-4D97-AF65-F5344CB8AC3E}">
-        <p14:creationId xmlns:p14="http://schemas.microsoft.com/office/powerpoint/2010/main" val="1024086991"/>
-      </p:ext>
-    </p:extLst>
-  </p:cSld>
-  <p:clrMapOvr>
-    <a:masterClrMapping/>
-  </p:clrMapOvr>
-</p:notes>
-</file>
-
-<file path=ppt/notesSlides/notesSlide27.xml><?xml version="1.0" encoding="utf-8"?>
-<p:notes xmlns:a="http://schemas.openxmlformats.org/drawingml/2006/main" xmlns:r="http://schemas.openxmlformats.org/officeDocument/2006/relationships" xmlns:p="http://schemas.openxmlformats.org/presentationml/2006/main">
-  <p:cSld>
-    <p:spTree>
-      <p:nvGrpSpPr>
-        <p:cNvPr id="1" name=""/>
-        <p:cNvGrpSpPr/>
-        <p:nvPr/>
-      </p:nvGrpSpPr>
-      <p:grpSpPr>
-        <a:xfrm>
-          <a:off x="0" y="0"/>
-          <a:ext cx="0" cy="0"/>
-          <a:chOff x="0" y="0"/>
-          <a:chExt cx="0" cy="0"/>
-        </a:xfrm>
-      </p:grpSpPr>
-      <p:sp>
-        <p:nvSpPr>
-          <p:cNvPr id="2" name="Slide Image Placeholder 1"/>
-          <p:cNvSpPr>
-            <a:spLocks noGrp="1" noRot="1" noChangeAspect="1"/>
-          </p:cNvSpPr>
-          <p:nvPr>
-            <p:ph type="sldImg"/>
-          </p:nvPr>
-        </p:nvSpPr>
-        <p:spPr/>
-      </p:sp>
-      <p:sp>
-        <p:nvSpPr>
-          <p:cNvPr id="3" name="Notes Placeholder 2"/>
-          <p:cNvSpPr>
-            <a:spLocks noGrp="1"/>
-          </p:cNvSpPr>
-          <p:nvPr>
-            <p:ph type="body" idx="1"/>
-          </p:nvPr>
-        </p:nvSpPr>
-        <p:spPr/>
-        <p:txBody>
-          <a:bodyPr/>
-          <a:lstStyle/>
-          <a:p>
-            <a:r>
-              <a:rPr lang="en-US" dirty="0"/>
-              <a:t>A resposta correta é a letra b: Na Alemanha de Bismarck. Entre 1883 e 1889, na Alemanha de Bismarck: marco inicial da proteção social pelo Estado.</a:t>
-            </a:r>
-            <a:endParaRPr lang="en-US" dirty="0"/>
-          </a:p>
-        </p:txBody>
-      </p:sp>
-      <p:sp>
-        <p:nvSpPr>
-          <p:cNvPr id="4" name="Slide Number Placeholder 3"/>
-          <p:cNvSpPr>
-            <a:spLocks noGrp="1"/>
-          </p:cNvSpPr>
-          <p:nvPr>
-            <p:ph type="sldNum" sz="quarter" idx="10"/>
-          </p:nvPr>
-        </p:nvSpPr>
-        <p:spPr/>
-        <p:txBody>
-          <a:bodyPr/>
-          <a:lstStyle/>
-          <a:p>
-            <a:fld id="{F7021451-1387-4CA6-816F-3879F97B5CBC}" type="slidenum">
-              <a:rPr lang="en-US"/>
-              <a:t>27</a:t>
-            </a:fld>
-            <a:endParaRPr lang="en-US"/>
-          </a:p>
-        </p:txBody>
-      </p:sp>
-    </p:spTree>
-    <p:extLst>
-      <p:ext uri="{BB962C8B-B14F-4D97-AF65-F5344CB8AC3E}">
-        <p14:creationId xmlns:p14="http://schemas.microsoft.com/office/powerpoint/2010/main" val="1024086991"/>
-      </p:ext>
-    </p:extLst>
-  </p:cSld>
-  <p:clrMapOvr>
-    <a:masterClrMapping/>
-  </p:clrMapOvr>
-</p:notes>
-</file>
-
-<file path=ppt/notesSlides/notesSlide28.xml><?xml version="1.0" encoding="utf-8"?>
-<p:notes xmlns:a="http://schemas.openxmlformats.org/drawingml/2006/main" xmlns:r="http://schemas.openxmlformats.org/officeDocument/2006/relationships" xmlns:p="http://schemas.openxmlformats.org/presentationml/2006/main">
-  <p:cSld>
-    <p:spTree>
-      <p:nvGrpSpPr>
-        <p:cNvPr id="1" name=""/>
-        <p:cNvGrpSpPr/>
-        <p:nvPr/>
-      </p:nvGrpSpPr>
-      <p:grpSpPr>
-        <a:xfrm>
-          <a:off x="0" y="0"/>
-          <a:ext cx="0" cy="0"/>
-          <a:chOff x="0" y="0"/>
-          <a:chExt cx="0" cy="0"/>
-        </a:xfrm>
-      </p:grpSpPr>
-      <p:sp>
-        <p:nvSpPr>
-          <p:cNvPr id="2" name="Slide Image Placeholder 1"/>
-          <p:cNvSpPr>
-            <a:spLocks noGrp="1" noRot="1" noChangeAspect="1"/>
-          </p:cNvSpPr>
-          <p:nvPr>
-            <p:ph type="sldImg"/>
-          </p:nvPr>
-        </p:nvSpPr>
-        <p:spPr/>
-      </p:sp>
-      <p:sp>
-        <p:nvSpPr>
-          <p:cNvPr id="3" name="Notes Placeholder 2"/>
-          <p:cNvSpPr>
-            <a:spLocks noGrp="1"/>
-          </p:cNvSpPr>
-          <p:nvPr>
-            <p:ph type="body" idx="1"/>
-          </p:nvPr>
-        </p:nvSpPr>
-        <p:spPr/>
-        <p:txBody>
-          <a:bodyPr/>
-          <a:lstStyle/>
-          <a:p>
-            <a:r>
-              <a:rPr lang="en-US" dirty="0"/>
-              <a:t>Pergunta 5. Reformas graduais pela via eleitoral e revolução por um partido de vanguarda são, respectivamente, estratégias de: Letra a: Bernstein e Lênin. Letra b: Lênin e Bernstein. Letra c: Smith e Marx. Letra d: Keynes e Hayek. Pause o vídeo e escolha a sua resposta.</a:t>
-            </a:r>
-            <a:endParaRPr lang="en-US" dirty="0"/>
-          </a:p>
-        </p:txBody>
-      </p:sp>
-      <p:sp>
-        <p:nvSpPr>
-          <p:cNvPr id="4" name="Slide Number Placeholder 3"/>
-          <p:cNvSpPr>
-            <a:spLocks noGrp="1"/>
-          </p:cNvSpPr>
-          <p:nvPr>
-            <p:ph type="sldNum" sz="quarter" idx="10"/>
-          </p:nvPr>
-        </p:nvSpPr>
-        <p:spPr/>
-        <p:txBody>
-          <a:bodyPr/>
-          <a:lstStyle/>
-          <a:p>
-            <a:fld id="{F7021451-1387-4CA6-816F-3879F97B5CBC}" type="slidenum">
-              <a:rPr lang="en-US"/>
-              <a:t>28</a:t>
-            </a:fld>
-            <a:endParaRPr lang="en-US"/>
-          </a:p>
-        </p:txBody>
-      </p:sp>
-    </p:spTree>
-    <p:extLst>
-      <p:ext uri="{BB962C8B-B14F-4D97-AF65-F5344CB8AC3E}">
-        <p14:creationId xmlns:p14="http://schemas.microsoft.com/office/powerpoint/2010/main" val="1024086991"/>
-      </p:ext>
-    </p:extLst>
-  </p:cSld>
-  <p:clrMapOvr>
-    <a:masterClrMapping/>
-  </p:clrMapOvr>
-</p:notes>
-</file>
-
-<file path=ppt/notesSlides/notesSlide29.xml><?xml version="1.0" encoding="utf-8"?>
-<p:notes xmlns:a="http://schemas.openxmlformats.org/drawingml/2006/main" xmlns:r="http://schemas.openxmlformats.org/officeDocument/2006/relationships" xmlns:p="http://schemas.openxmlformats.org/presentationml/2006/main">
-  <p:cSld>
-    <p:spTree>
-      <p:nvGrpSpPr>
-        <p:cNvPr id="1" name=""/>
-        <p:cNvGrpSpPr/>
-        <p:nvPr/>
-      </p:nvGrpSpPr>
-      <p:grpSpPr>
-        <a:xfrm>
-          <a:off x="0" y="0"/>
-          <a:ext cx="0" cy="0"/>
-          <a:chOff x="0" y="0"/>
-          <a:chExt cx="0" cy="0"/>
-        </a:xfrm>
-      </p:grpSpPr>
-      <p:sp>
-        <p:nvSpPr>
-          <p:cNvPr id="2" name="Slide Image Placeholder 1"/>
-          <p:cNvSpPr>
-            <a:spLocks noGrp="1" noRot="1" noChangeAspect="1"/>
-          </p:cNvSpPr>
-          <p:nvPr>
-            <p:ph type="sldImg"/>
-          </p:nvPr>
-        </p:nvSpPr>
-        <p:spPr/>
-      </p:sp>
-      <p:sp>
-        <p:nvSpPr>
-          <p:cNvPr id="3" name="Notes Placeholder 2"/>
-          <p:cNvSpPr>
-            <a:spLocks noGrp="1"/>
-          </p:cNvSpPr>
-          <p:nvPr>
-            <p:ph type="body" idx="1"/>
-          </p:nvPr>
-        </p:nvSpPr>
-        <p:spPr/>
-        <p:txBody>
-          <a:bodyPr/>
-          <a:lstStyle/>
-          <a:p>
-            <a:r>
-              <a:rPr lang="en-US" dirty="0"/>
-              <a:t>A resposta correta é a letra a: Bernstein e Lênin. Bernstein representa o revisionismo social-democrata; Lênin, a via revolucionária.</a:t>
-            </a:r>
-            <a:endParaRPr lang="en-US" dirty="0"/>
-          </a:p>
-        </p:txBody>
-      </p:sp>
-      <p:sp>
-        <p:nvSpPr>
-          <p:cNvPr id="4" name="Slide Number Placeholder 3"/>
-          <p:cNvSpPr>
-            <a:spLocks noGrp="1"/>
-          </p:cNvSpPr>
-          <p:nvPr>
-            <p:ph type="sldNum" sz="quarter" idx="10"/>
-          </p:nvPr>
-        </p:nvSpPr>
-        <p:spPr/>
-        <p:txBody>
-          <a:bodyPr/>
-          <a:lstStyle/>
-          <a:p>
-            <a:fld id="{F7021451-1387-4CA6-816F-3879F97B5CBC}" type="slidenum">
-              <a:rPr lang="en-US"/>
-              <a:t>29</a:t>
-            </a:fld>
-            <a:endParaRPr lang="en-US"/>
-          </a:p>
-        </p:txBody>
-      </p:sp>
-    </p:spTree>
-    <p:extLst>
-      <p:ext uri="{BB962C8B-B14F-4D97-AF65-F5344CB8AC3E}">
-        <p14:creationId xmlns:p14="http://schemas.microsoft.com/office/powerpoint/2010/main" val="1024086991"/>
-      </p:ext>
-    </p:extLst>
-  </p:cSld>
-  <p:clrMapOvr>
-    <a:masterClrMapping/>
-  </p:clrMapOvr>
-</p:notes>
-</file>
-
 <file path=ppt/notesSlides/notesSlide3.xml><?xml version="1.0" encoding="utf-8"?>
 <p:notes xmlns:a="http://schemas.openxmlformats.org/drawingml/2006/main" xmlns:r="http://schemas.openxmlformats.org/officeDocument/2006/relationships" xmlns:p="http://schemas.openxmlformats.org/presentationml/2006/main">
   <p:cSld>
@@ -2837,94 +1946,6 @@
             <a:fld id="{F7021451-1387-4CA6-816F-3879F97B5CBC}" type="slidenum">
               <a:rPr lang="en-US"/>
               <a:t>3</a:t>
-            </a:fld>
-            <a:endParaRPr lang="en-US"/>
-          </a:p>
-        </p:txBody>
-      </p:sp>
-    </p:spTree>
-    <p:extLst>
-      <p:ext uri="{BB962C8B-B14F-4D97-AF65-F5344CB8AC3E}">
-        <p14:creationId xmlns:p14="http://schemas.microsoft.com/office/powerpoint/2010/main" val="1024086991"/>
-      </p:ext>
-    </p:extLst>
-  </p:cSld>
-  <p:clrMapOvr>
-    <a:masterClrMapping/>
-  </p:clrMapOvr>
-</p:notes>
-</file>
-
-<file path=ppt/notesSlides/notesSlide30.xml><?xml version="1.0" encoding="utf-8"?>
-<p:notes xmlns:a="http://schemas.openxmlformats.org/drawingml/2006/main" xmlns:r="http://schemas.openxmlformats.org/officeDocument/2006/relationships" xmlns:p="http://schemas.openxmlformats.org/presentationml/2006/main">
-  <p:cSld>
-    <p:spTree>
-      <p:nvGrpSpPr>
-        <p:cNvPr id="1" name=""/>
-        <p:cNvGrpSpPr/>
-        <p:nvPr/>
-      </p:nvGrpSpPr>
-      <p:grpSpPr>
-        <a:xfrm>
-          <a:off x="0" y="0"/>
-          <a:ext cx="0" cy="0"/>
-          <a:chOff x="0" y="0"/>
-          <a:chExt cx="0" cy="0"/>
-        </a:xfrm>
-      </p:grpSpPr>
-      <p:sp>
-        <p:nvSpPr>
-          <p:cNvPr id="2" name="Slide Image Placeholder 1"/>
-          <p:cNvSpPr>
-            <a:spLocks noGrp="1" noRot="1" noChangeAspect="1"/>
-          </p:cNvSpPr>
-          <p:nvPr>
-            <p:ph type="sldImg"/>
-          </p:nvPr>
-        </p:nvSpPr>
-        <p:spPr/>
-      </p:sp>
-      <p:sp>
-        <p:nvSpPr>
-          <p:cNvPr id="3" name="Notes Placeholder 2"/>
-          <p:cNvSpPr>
-            <a:spLocks noGrp="1"/>
-          </p:cNvSpPr>
-          <p:nvPr>
-            <p:ph type="body" idx="1"/>
-          </p:nvPr>
-        </p:nvSpPr>
-        <p:spPr/>
-        <p:txBody>
-          <a:bodyPr/>
-          <a:lstStyle/>
-          <a:p>
-            <a:r>
-              <a:rPr lang="en-US" dirty="0"/>
-              <a:t>Para fechar a Unidade 3, vamos recapitular. [Apontar para o quadro da esquerda.] No tópico 5, vimos que, para Marx e Engels, o capitalismo é um modo de produção histórico. Estudamos o materialismo histórico, a luta de classes e a mais-valia, absoluta e relativa, e a visão do Estado como instrumento de dominação de classe, com a transição ao socialismo e ao comunismo. Também comparamos as leituras liberal e marxista de uma mesma política. [Apontar para o quadro da direita.] No tópico 6, vimos as mudanças do final do século XIX: a Segunda Revolução Industrial, a concentração e o capital financeiro, os trabalhadores organizados e o voto ampliado, e os primeiros seguros sociais, na Alemanha de Bismarck e, no Brasil, com a Lei Eloy Chaves e a CLT. Essas mudanças produziram o liberalismo social, as leis antitruste e o debate entre reforma, com Bernstein, e revolução, com Lênin. Na próxima unidade, os modelos de Estado do século XX e o Estado brasileiro. Até a próxima videoaula!</a:t>
-            </a:r>
-            <a:endParaRPr lang="en-US" dirty="0"/>
-          </a:p>
-        </p:txBody>
-      </p:sp>
-      <p:sp>
-        <p:nvSpPr>
-          <p:cNvPr id="4" name="Slide Number Placeholder 3"/>
-          <p:cNvSpPr>
-            <a:spLocks noGrp="1"/>
-          </p:cNvSpPr>
-          <p:nvPr>
-            <p:ph type="sldNum" sz="quarter" idx="10"/>
-          </p:nvPr>
-        </p:nvSpPr>
-        <p:spPr/>
-        <p:txBody>
-          <a:bodyPr/>
-          <a:lstStyle/>
-          <a:p>
-            <a:fld id="{F7021451-1387-4CA6-816F-3879F97B5CBC}" type="slidenum">
-              <a:rPr lang="en-US"/>
-              <a:t>30</a:t>
             </a:fld>
             <a:endParaRPr lang="en-US"/>
           </a:p>
@@ -11184,6 +10205,144 @@
                   </a:tcPr>
                 </a:tc>
               </a:tr>
+              <a:tr h="0">
+                <a:tc>
+                  <a:txBody>
+                    <a:bodyPr/>
+                    <a:lstStyle/>
+                    <a:p>
+                      <a:pPr indent="0" marL="0">
+                        <a:buNone/>
+                      </a:pPr>
+                      <a:r>
+                        <a:rPr lang="en-US" sz="1350" dirty="0">
+                          <a:solidFill>
+                            <a:srgbClr val="1F2A37"/>
+                          </a:solidFill>
+                          <a:latin typeface="Calibri" pitchFamily="34" charset="0"/>
+                          <a:ea typeface="Calibri" pitchFamily="34" charset="-122"/>
+                          <a:cs typeface="Calibri" pitchFamily="34" charset="-120"/>
+                        </a:rPr>
+                        <a:t>Na página</a:t>
+                      </a:r>
+                      <a:endParaRPr lang="en-US" sz="1350" dirty="0">
+                        <a:latin typeface="Calibri" charset="0"/>
+                        <a:ea typeface="Calibri" charset="0"/>
+                        <a:cs typeface="Calibri" charset="0"/>
+                      </a:endParaRPr>
+                    </a:p>
+                  </a:txBody>
+                  <a:tcPr marL="50800" marR="50800" marT="50800" marB="50800" anchor="ctr">
+                    <a:lnL w="9525" cap="flat" cmpd="sng" algn="ctr">
+                      <a:solidFill>
+                        <a:srgbClr val="DCD5C1"/>
+                      </a:solidFill>
+                      <a:prstDash val="solid"/>
+                      <a:round/>
+                      <a:headEnd type="none" w="med" len="med"/>
+                      <a:tailEnd type="none" w="med" len="med"/>
+                    </a:lnL>
+                    <a:lnR w="9525" cap="flat" cmpd="sng" algn="ctr">
+                      <a:solidFill>
+                        <a:srgbClr val="DCD5C1"/>
+                      </a:solidFill>
+                      <a:prstDash val="solid"/>
+                      <a:round/>
+                      <a:headEnd type="none" w="med" len="med"/>
+                      <a:tailEnd type="none" w="med" len="med"/>
+                    </a:lnR>
+                    <a:lnT w="9525" cap="flat" cmpd="sng" algn="ctr">
+                      <a:solidFill>
+                        <a:srgbClr val="DCD5C1"/>
+                      </a:solidFill>
+                      <a:prstDash val="solid"/>
+                      <a:round/>
+                      <a:headEnd type="none" w="med" len="med"/>
+                      <a:tailEnd type="none" w="med" len="med"/>
+                    </a:lnT>
+                    <a:lnB w="9525" cap="flat" cmpd="sng" algn="ctr">
+                      <a:solidFill>
+                        <a:srgbClr val="DCD5C1"/>
+                      </a:solidFill>
+                      <a:prstDash val="solid"/>
+                      <a:round/>
+                      <a:headEnd type="none" w="med" len="med"/>
+                      <a:tailEnd type="none" w="med" len="med"/>
+                    </a:lnB>
+                    <a:solidFill>
+                      <a:srgbClr val="F4F7F8"/>
+                    </a:solidFill>
+                  </a:tcPr>
+                </a:tc>
+                <a:tc>
+                  <a:txBody>
+                    <a:bodyPr/>
+                    <a:lstStyle/>
+                    <a:p>
+                      <a:pPr indent="0" marL="0">
+                        <a:buNone/>
+                      </a:pPr>
+                      <a:r>
+                        <a:rPr lang="en-US" sz="1350" dirty="0">
+                          <a:solidFill>
+                            <a:srgbClr val="1F2A37"/>
+                          </a:solidFill>
+                          <a:latin typeface="Calibri" pitchFamily="34" charset="0"/>
+                          <a:ea typeface="Calibri" pitchFamily="34" charset="-122"/>
+                          <a:cs typeface="Calibri" pitchFamily="34" charset="-120"/>
+                        </a:rPr>
+                        <a:t>Quiz de revisão da Unidade 3: 5 perguntas com resposta comentada (sem nota)</a:t>
+                      </a:r>
+                      <a:endParaRPr lang="en-US" sz="1350" dirty="0">
+                        <a:latin typeface="Calibri" charset="0"/>
+                        <a:ea typeface="Calibri" charset="0"/>
+                        <a:cs typeface="Calibri" charset="0"/>
+                      </a:endParaRPr>
+                    </a:p>
+                  </a:txBody>
+                  <a:tcPr marL="50800" marR="50800" marT="50800" marB="50800" anchor="ctr">
+                    <a:lnL w="9525" cap="flat" cmpd="sng" algn="ctr">
+                      <a:solidFill>
+                        <a:srgbClr val="DCD5C1"/>
+                      </a:solidFill>
+                      <a:prstDash val="solid"/>
+                      <a:round/>
+                      <a:headEnd type="none" w="med" len="med"/>
+                      <a:tailEnd type="none" w="med" len="med"/>
+                    </a:lnL>
+                    <a:lnR w="9525" cap="flat" cmpd="sng" algn="ctr">
+                      <a:solidFill>
+                        <a:srgbClr val="DCD5C1"/>
+                      </a:solidFill>
+                      <a:prstDash val="solid"/>
+                      <a:round/>
+                      <a:headEnd type="none" w="med" len="med"/>
+                      <a:tailEnd type="none" w="med" len="med"/>
+                    </a:lnR>
+                    <a:lnT w="9525" cap="flat" cmpd="sng" algn="ctr">
+                      <a:solidFill>
+                        <a:srgbClr val="DCD5C1"/>
+                      </a:solidFill>
+                      <a:prstDash val="solid"/>
+                      <a:round/>
+                      <a:headEnd type="none" w="med" len="med"/>
+                      <a:tailEnd type="none" w="med" len="med"/>
+                    </a:lnT>
+                    <a:lnB w="9525" cap="flat" cmpd="sng" algn="ctr">
+                      <a:solidFill>
+                        <a:srgbClr val="DCD5C1"/>
+                      </a:solidFill>
+                      <a:prstDash val="solid"/>
+                      <a:round/>
+                      <a:headEnd type="none" w="med" len="med"/>
+                      <a:tailEnd type="none" w="med" len="med"/>
+                    </a:lnB>
+                    <a:solidFill>
+                      <a:srgbClr val="F4F7F8"/>
+                    </a:solidFill>
+                  </a:tcPr>
+                </a:tc>
+              </a:tr>
             </a:tbl>
           </a:graphicData>
         </a:graphic>
@@ -11317,60 +10476,14 @@
       </p:grpSpPr>
       <p:sp>
         <p:nvSpPr>
-          <p:cNvPr id="2" name="Shape 0"/>
-          <p:cNvSpPr/>
-          <p:nvPr/>
-        </p:nvSpPr>
-        <p:spPr>
-          <a:xfrm>
-            <a:off x="4069080" y="1097280"/>
-            <a:ext cx="1005840" cy="1005840"/>
-          </a:xfrm>
-          <a:prstGeom prst="roundRect">
-            <a:avLst>
-              <a:gd name="adj" fmla="val 18182"/>
-            </a:avLst>
-          </a:prstGeom>
-          <a:solidFill>
-            <a:srgbClr val="2A8C85"/>
-          </a:solidFill>
-          <a:ln/>
-        </p:spPr>
-      </p:sp>
-      <p:pic>
-        <p:nvPicPr>
-          <p:cNvPr id="3" name="Image 0" descr="/tmp/claude-0/-home-user-zero-claude/d7e33190-c541-582c-a7cc-1156817732ce/scratchpad/deck/assets/icon_FaQuestion.png">    </p:cNvPr>
-          <p:cNvPicPr>
-            <a:picLocks noChangeAspect="1"/>
-          </p:cNvPicPr>
-          <p:nvPr/>
-        </p:nvPicPr>
-        <p:blipFill>
-          <a:blip r:embed="rId2"/>
-          <a:stretch>
-            <a:fillRect/>
-          </a:stretch>
-        </p:blipFill>
-        <p:spPr>
-          <a:xfrm>
-            <a:off x="4297680" y="1325880"/>
-            <a:ext cx="548640" cy="548640"/>
-          </a:xfrm>
-          <a:prstGeom prst="rect">
-            <a:avLst/>
-          </a:prstGeom>
-        </p:spPr>
-      </p:pic>
-      <p:sp>
-        <p:nvSpPr>
-          <p:cNvPr id="4" name="Text 1"/>
+          <p:cNvPr id="2" name="Text 0"/>
           <p:cNvSpPr txBox="1"/>
           <p:nvPr/>
         </p:nvSpPr>
         <p:spPr>
           <a:xfrm>
-            <a:off x="731520" y="2240280"/>
-            <a:ext cx="7680960" cy="731520"/>
+            <a:off x="731520" y="256032"/>
+            <a:ext cx="7680960" cy="566928"/>
           </a:xfrm>
           <a:prstGeom prst="rect">
             <a:avLst/>
@@ -11389,7 +10502,7 @@
               <a:buNone/>
             </a:pPr>
             <a:r>
-              <a:rPr lang="en-US" sz="3600" b="1" dirty="0">
+              <a:rPr lang="en-US" sz="2800" b="1" dirty="0">
                 <a:solidFill>
                   <a:srgbClr val="13294B"/>
                 </a:solidFill>
@@ -11397,22 +10510,22 @@
                 <a:ea typeface="Calibri" pitchFamily="34" charset="-122"/>
                 <a:cs typeface="Calibri" pitchFamily="34" charset="-120"/>
               </a:rPr>
-              <a:t>Quiz da Unidade 3</a:t>
-            </a:r>
-            <a:endParaRPr lang="en-US" sz="3600" dirty="0"/>
+              <a:t>Resumo da Unidade 3</a:t>
+            </a:r>
+            <a:endParaRPr lang="en-US" sz="2800" dirty="0"/>
           </a:p>
         </p:txBody>
       </p:sp>
       <p:sp>
         <p:nvSpPr>
-          <p:cNvPr id="5" name="Text 2"/>
+          <p:cNvPr id="3" name="Text 1"/>
           <p:cNvSpPr txBox="1"/>
           <p:nvPr/>
         </p:nvSpPr>
         <p:spPr>
           <a:xfrm>
-            <a:off x="1188720" y="2926080"/>
-            <a:ext cx="6766560" cy="822960"/>
+            <a:off x="1005840" y="804672"/>
+            <a:ext cx="7132320" cy="329184"/>
           </a:xfrm>
           <a:prstGeom prst="rect">
             <a:avLst/>
@@ -11421,7 +10534,7 @@
           <a:ln/>
         </p:spPr>
         <p:txBody>
-          <a:bodyPr wrap="square" lIns="0" tIns="0" rIns="0" bIns="0" rtlCol="0" anchor="t"/>
+          <a:bodyPr wrap="square" lIns="0" tIns="0" rIns="0" bIns="0" rtlCol="0" anchor="ctr"/>
           <a:lstStyle/>
           <a:p>
             <a:pPr algn="ctr" indent="0" marL="0">
@@ -11431,7 +10544,7 @@
               <a:buNone/>
             </a:pPr>
             <a:r>
-              <a:rPr lang="en-US" sz="1600" dirty="0">
+              <a:rPr lang="en-US" sz="1400" dirty="0">
                 <a:solidFill>
                   <a:srgbClr val="5B6770"/>
                 </a:solidFill>
@@ -11439,15 +10552,425 @@
                 <a:ea typeface="Calibri" pitchFamily="34" charset="-122"/>
                 <a:cs typeface="Calibri" pitchFamily="34" charset="-120"/>
               </a:rPr>
-              <a:t>5 perguntas para revisar a unidade. Pause o vídeo, escolha sua resposta e confira no slide seguinte.</a:t>
-            </a:r>
-            <a:endParaRPr lang="en-US" sz="1600" dirty="0"/>
+              <a:t>O que discutimos nesta unidade</a:t>
+            </a:r>
+            <a:endParaRPr lang="en-US" sz="1400" dirty="0"/>
           </a:p>
         </p:txBody>
       </p:sp>
       <p:sp>
         <p:nvSpPr>
-          <p:cNvPr id="6" name="Text 3"/>
+          <p:cNvPr id="4" name="Text 2"/>
+          <p:cNvSpPr txBox="1"/>
+          <p:nvPr/>
+        </p:nvSpPr>
+        <p:spPr>
+          <a:xfrm>
+            <a:off x="685800" y="1170432"/>
+            <a:ext cx="3794760" cy="2743200"/>
+          </a:xfrm>
+          <a:prstGeom prst="roundRect">
+            <a:avLst>
+              <a:gd name="adj" fmla="val 2000"/>
+            </a:avLst>
+          </a:prstGeom>
+          <a:solidFill>
+            <a:srgbClr val="FFFFFF"/>
+          </a:solidFill>
+          <a:ln w="12700">
+            <a:solidFill>
+              <a:srgbClr val="DCD5C1"/>
+            </a:solidFill>
+          </a:ln>
+        </p:spPr>
+        <p:txBody>
+          <a:bodyPr wrap="square" lIns="114300" tIns="114300" rIns="114300" bIns="114300" rtlCol="0" anchor="t"/>
+          <a:lstStyle/>
+          <a:p>
+            <a:pPr algn="l" indent="0" marL="0">
+              <a:lnSpc>
+                <a:spcPct val="100000"/>
+              </a:lnSpc>
+              <a:spcAft>
+                <a:spcPts val="200"/>
+              </a:spcAft>
+              <a:buNone/>
+            </a:pPr>
+            <a:r>
+              <a:rPr lang="en-US" sz="1100" b="1" dirty="0">
+                <a:solidFill>
+                  <a:srgbClr val="2A8C85"/>
+                </a:solidFill>
+                <a:latin typeface="Calibri" pitchFamily="34" charset="0"/>
+                <a:ea typeface="Calibri" pitchFamily="34" charset="-122"/>
+                <a:cs typeface="Calibri" pitchFamily="34" charset="-120"/>
+              </a:rPr>
+              <a:t>PARTE 1 · TÓPICO 5</a:t>
+            </a:r>
+            <a:endParaRPr lang="en-US" sz="1100" dirty="0"/>
+          </a:p>
+          <a:p>
+            <a:pPr algn="l" indent="0" marL="0">
+              <a:lnSpc>
+                <a:spcPct val="100000"/>
+              </a:lnSpc>
+              <a:spcAft>
+                <a:spcPts val="400"/>
+              </a:spcAft>
+              <a:buNone/>
+            </a:pPr>
+            <a:r>
+              <a:rPr lang="en-US" sz="1450" b="1" dirty="0">
+                <a:solidFill>
+                  <a:srgbClr val="13294B"/>
+                </a:solidFill>
+                <a:latin typeface="Calibri" pitchFamily="34" charset="0"/>
+                <a:ea typeface="Calibri" pitchFamily="34" charset="-122"/>
+                <a:cs typeface="Calibri" pitchFamily="34" charset="-120"/>
+              </a:rPr>
+              <a:t>A matriz marxista</a:t>
+            </a:r>
+            <a:endParaRPr lang="en-US" sz="1100" dirty="0"/>
+          </a:p>
+          <a:p>
+            <a:pPr algn="l" marL="177800" indent="-177800">
+              <a:lnSpc>
+                <a:spcPct val="100000"/>
+              </a:lnSpc>
+              <a:spcAft>
+                <a:spcPts val="300"/>
+              </a:spcAft>
+              <a:buSzPct val="100000"/>
+              <a:buChar char="•"/>
+            </a:pPr>
+            <a:r>
+              <a:rPr lang="en-US" sz="1200" dirty="0">
+                <a:solidFill>
+                  <a:srgbClr val="1F2A37"/>
+                </a:solidFill>
+                <a:latin typeface="Calibri" pitchFamily="34" charset="0"/>
+                <a:ea typeface="Calibri" pitchFamily="34" charset="-122"/>
+                <a:cs typeface="Calibri" pitchFamily="34" charset="-120"/>
+              </a:rPr>
+              <a:t>Marx e Engels: o capitalismo é um modo de produção histórico.</a:t>
+            </a:r>
+            <a:endParaRPr lang="en-US" sz="1100" dirty="0"/>
+          </a:p>
+          <a:p>
+            <a:pPr algn="l" marL="177800" indent="-177800">
+              <a:lnSpc>
+                <a:spcPct val="100000"/>
+              </a:lnSpc>
+              <a:spcAft>
+                <a:spcPts val="300"/>
+              </a:spcAft>
+              <a:buSzPct val="100000"/>
+              <a:buChar char="•"/>
+            </a:pPr>
+            <a:r>
+              <a:rPr lang="en-US" sz="1200" dirty="0">
+                <a:solidFill>
+                  <a:srgbClr val="1F2A37"/>
+                </a:solidFill>
+                <a:latin typeface="Calibri" pitchFamily="34" charset="0"/>
+                <a:ea typeface="Calibri" pitchFamily="34" charset="-122"/>
+                <a:cs typeface="Calibri" pitchFamily="34" charset="-120"/>
+              </a:rPr>
+              <a:t>Materialismo histórico, luta de classes e mais-valia (absoluta e relativa).</a:t>
+            </a:r>
+            <a:endParaRPr lang="en-US" sz="1100" dirty="0"/>
+          </a:p>
+          <a:p>
+            <a:pPr algn="l" marL="177800" indent="-177800">
+              <a:lnSpc>
+                <a:spcPct val="100000"/>
+              </a:lnSpc>
+              <a:spcAft>
+                <a:spcPts val="300"/>
+              </a:spcAft>
+              <a:buSzPct val="100000"/>
+              <a:buChar char="•"/>
+            </a:pPr>
+            <a:r>
+              <a:rPr lang="en-US" sz="1200" dirty="0">
+                <a:solidFill>
+                  <a:srgbClr val="1F2A37"/>
+                </a:solidFill>
+                <a:latin typeface="Calibri" pitchFamily="34" charset="0"/>
+                <a:ea typeface="Calibri" pitchFamily="34" charset="-122"/>
+                <a:cs typeface="Calibri" pitchFamily="34" charset="-120"/>
+              </a:rPr>
+              <a:t>O Estado como instrumento de dominação de classe; socialismo e comunismo.</a:t>
+            </a:r>
+            <a:endParaRPr lang="en-US" sz="1100" dirty="0"/>
+          </a:p>
+          <a:p>
+            <a:pPr algn="l" marL="177800" indent="-177800">
+              <a:lnSpc>
+                <a:spcPct val="100000"/>
+              </a:lnSpc>
+              <a:spcAft>
+                <a:spcPts val="300"/>
+              </a:spcAft>
+              <a:buSzPct val="100000"/>
+              <a:buChar char="•"/>
+            </a:pPr>
+            <a:r>
+              <a:rPr lang="en-US" sz="1200" dirty="0">
+                <a:solidFill>
+                  <a:srgbClr val="1F2A37"/>
+                </a:solidFill>
+                <a:latin typeface="Calibri" pitchFamily="34" charset="0"/>
+                <a:ea typeface="Calibri" pitchFamily="34" charset="-122"/>
+                <a:cs typeface="Calibri" pitchFamily="34" charset="-120"/>
+              </a:rPr>
+              <a:t>Liberais e marxistas fazem leituras opostas de uma mesma política.</a:t>
+            </a:r>
+            <a:endParaRPr lang="en-US" sz="1100" dirty="0"/>
+          </a:p>
+        </p:txBody>
+      </p:sp>
+      <p:sp>
+        <p:nvSpPr>
+          <p:cNvPr id="5" name="Text 3"/>
+          <p:cNvSpPr txBox="1"/>
+          <p:nvPr/>
+        </p:nvSpPr>
+        <p:spPr>
+          <a:xfrm>
+            <a:off x="4663440" y="1170432"/>
+            <a:ext cx="3794760" cy="2743200"/>
+          </a:xfrm>
+          <a:prstGeom prst="roundRect">
+            <a:avLst>
+              <a:gd name="adj" fmla="val 2000"/>
+            </a:avLst>
+          </a:prstGeom>
+          <a:solidFill>
+            <a:srgbClr val="E6F2F0"/>
+          </a:solidFill>
+          <a:ln/>
+        </p:spPr>
+        <p:txBody>
+          <a:bodyPr wrap="square" lIns="114300" tIns="114300" rIns="114300" bIns="114300" rtlCol="0" anchor="t"/>
+          <a:lstStyle/>
+          <a:p>
+            <a:pPr algn="l" indent="0" marL="0">
+              <a:lnSpc>
+                <a:spcPct val="100000"/>
+              </a:lnSpc>
+              <a:spcAft>
+                <a:spcPts val="200"/>
+              </a:spcAft>
+              <a:buNone/>
+            </a:pPr>
+            <a:r>
+              <a:rPr lang="en-US" sz="1100" b="1" dirty="0">
+                <a:solidFill>
+                  <a:srgbClr val="2A8C85"/>
+                </a:solidFill>
+                <a:latin typeface="Calibri" pitchFamily="34" charset="0"/>
+                <a:ea typeface="Calibri" pitchFamily="34" charset="-122"/>
+                <a:cs typeface="Calibri" pitchFamily="34" charset="-120"/>
+              </a:rPr>
+              <a:t>PARTE 2 · TÓPICO 6</a:t>
+            </a:r>
+            <a:endParaRPr lang="en-US" sz="1100" dirty="0"/>
+          </a:p>
+          <a:p>
+            <a:pPr algn="l" indent="0" marL="0">
+              <a:lnSpc>
+                <a:spcPct val="100000"/>
+              </a:lnSpc>
+              <a:spcAft>
+                <a:spcPts val="400"/>
+              </a:spcAft>
+              <a:buNone/>
+            </a:pPr>
+            <a:r>
+              <a:rPr lang="en-US" sz="1450" b="1" dirty="0">
+                <a:solidFill>
+                  <a:srgbClr val="13294B"/>
+                </a:solidFill>
+                <a:latin typeface="Calibri" pitchFamily="34" charset="0"/>
+                <a:ea typeface="Calibri" pitchFamily="34" charset="-122"/>
+                <a:cs typeface="Calibri" pitchFamily="34" charset="-120"/>
+              </a:rPr>
+              <a:t>As mudanças do final do século XIX</a:t>
+            </a:r>
+            <a:endParaRPr lang="en-US" sz="1100" dirty="0"/>
+          </a:p>
+          <a:p>
+            <a:pPr algn="l" marL="177800" indent="-177800">
+              <a:lnSpc>
+                <a:spcPct val="100000"/>
+              </a:lnSpc>
+              <a:spcAft>
+                <a:spcPts val="300"/>
+              </a:spcAft>
+              <a:buSzPct val="100000"/>
+              <a:buChar char="•"/>
+            </a:pPr>
+            <a:r>
+              <a:rPr lang="en-US" sz="1200" dirty="0">
+                <a:solidFill>
+                  <a:srgbClr val="1F2A37"/>
+                </a:solidFill>
+                <a:latin typeface="Calibri" pitchFamily="34" charset="0"/>
+                <a:ea typeface="Calibri" pitchFamily="34" charset="-122"/>
+                <a:cs typeface="Calibri" pitchFamily="34" charset="-120"/>
+              </a:rPr>
+              <a:t>Segunda Revolução Industrial, concentração e capital financeiro.</a:t>
+            </a:r>
+            <a:endParaRPr lang="en-US" sz="1100" dirty="0"/>
+          </a:p>
+          <a:p>
+            <a:pPr algn="l" marL="177800" indent="-177800">
+              <a:lnSpc>
+                <a:spcPct val="100000"/>
+              </a:lnSpc>
+              <a:spcAft>
+                <a:spcPts val="300"/>
+              </a:spcAft>
+              <a:buSzPct val="100000"/>
+              <a:buChar char="•"/>
+            </a:pPr>
+            <a:r>
+              <a:rPr lang="en-US" sz="1200" dirty="0">
+                <a:solidFill>
+                  <a:srgbClr val="1F2A37"/>
+                </a:solidFill>
+                <a:latin typeface="Calibri" pitchFamily="34" charset="0"/>
+                <a:ea typeface="Calibri" pitchFamily="34" charset="-122"/>
+                <a:cs typeface="Calibri" pitchFamily="34" charset="-120"/>
+              </a:rPr>
+              <a:t>Trabalhadores organizados e ampliação do voto.</a:t>
+            </a:r>
+            <a:endParaRPr lang="en-US" sz="1100" dirty="0"/>
+          </a:p>
+          <a:p>
+            <a:pPr algn="l" marL="177800" indent="-177800">
+              <a:lnSpc>
+                <a:spcPct val="100000"/>
+              </a:lnSpc>
+              <a:spcAft>
+                <a:spcPts val="300"/>
+              </a:spcAft>
+              <a:buSzPct val="100000"/>
+              <a:buChar char="•"/>
+            </a:pPr>
+            <a:r>
+              <a:rPr lang="en-US" sz="1200" dirty="0">
+                <a:solidFill>
+                  <a:srgbClr val="1F2A37"/>
+                </a:solidFill>
+                <a:latin typeface="Calibri" pitchFamily="34" charset="0"/>
+                <a:ea typeface="Calibri" pitchFamily="34" charset="-122"/>
+                <a:cs typeface="Calibri" pitchFamily="34" charset="-120"/>
+              </a:rPr>
+              <a:t>Seguros sociais de Bismarck; no Brasil, Lei Eloy Chaves e CLT.</a:t>
+            </a:r>
+            <a:endParaRPr lang="en-US" sz="1100" dirty="0"/>
+          </a:p>
+          <a:p>
+            <a:pPr algn="l" marL="177800" indent="-177800">
+              <a:lnSpc>
+                <a:spcPct val="100000"/>
+              </a:lnSpc>
+              <a:spcAft>
+                <a:spcPts val="300"/>
+              </a:spcAft>
+              <a:buSzPct val="100000"/>
+              <a:buChar char="•"/>
+            </a:pPr>
+            <a:r>
+              <a:rPr lang="en-US" sz="1200" dirty="0">
+                <a:solidFill>
+                  <a:srgbClr val="1F2A37"/>
+                </a:solidFill>
+                <a:latin typeface="Calibri" pitchFamily="34" charset="0"/>
+                <a:ea typeface="Calibri" pitchFamily="34" charset="-122"/>
+                <a:cs typeface="Calibri" pitchFamily="34" charset="-120"/>
+              </a:rPr>
+              <a:t>Liberalismo social e leis antitruste.</a:t>
+            </a:r>
+            <a:endParaRPr lang="en-US" sz="1100" dirty="0"/>
+          </a:p>
+          <a:p>
+            <a:pPr algn="l" marL="177800" indent="-177800">
+              <a:lnSpc>
+                <a:spcPct val="100000"/>
+              </a:lnSpc>
+              <a:spcAft>
+                <a:spcPts val="300"/>
+              </a:spcAft>
+              <a:buSzPct val="100000"/>
+              <a:buChar char="•"/>
+            </a:pPr>
+            <a:r>
+              <a:rPr lang="en-US" sz="1200" dirty="0">
+                <a:solidFill>
+                  <a:srgbClr val="1F2A37"/>
+                </a:solidFill>
+                <a:latin typeface="Calibri" pitchFamily="34" charset="0"/>
+                <a:ea typeface="Calibri" pitchFamily="34" charset="-122"/>
+                <a:cs typeface="Calibri" pitchFamily="34" charset="-120"/>
+              </a:rPr>
+              <a:t>Reforma (Bernstein) × revolução (Lênin).</a:t>
+            </a:r>
+            <a:endParaRPr lang="en-US" sz="1100" dirty="0"/>
+          </a:p>
+        </p:txBody>
+      </p:sp>
+      <p:sp>
+        <p:nvSpPr>
+          <p:cNvPr id="6" name="Text 4"/>
+          <p:cNvSpPr txBox="1"/>
+          <p:nvPr/>
+        </p:nvSpPr>
+        <p:spPr>
+          <a:xfrm>
+            <a:off x="685800" y="3995928"/>
+            <a:ext cx="7772400" cy="484632"/>
+          </a:xfrm>
+          <a:prstGeom prst="roundRect">
+            <a:avLst>
+              <a:gd name="adj" fmla="val 15094"/>
+            </a:avLst>
+          </a:prstGeom>
+          <a:solidFill>
+            <a:srgbClr val="E6F2F0"/>
+          </a:solidFill>
+          <a:ln/>
+        </p:spPr>
+        <p:txBody>
+          <a:bodyPr wrap="square" lIns="127000" tIns="127000" rIns="127000" bIns="127000" rtlCol="0" anchor="ctr"/>
+          <a:lstStyle/>
+          <a:p>
+            <a:pPr algn="ctr" indent="0" marL="0">
+              <a:lnSpc>
+                <a:spcPct val="100000"/>
+              </a:lnSpc>
+              <a:buNone/>
+            </a:pPr>
+            <a:r>
+              <a:rPr lang="en-US" sz="1300" b="1" dirty="0">
+                <a:solidFill>
+                  <a:srgbClr val="13294B"/>
+                </a:solidFill>
+                <a:latin typeface="Calibri" pitchFamily="34" charset="0"/>
+                <a:ea typeface="Calibri" pitchFamily="34" charset="-122"/>
+                <a:cs typeface="Calibri" pitchFamily="34" charset="-120"/>
+              </a:rPr>
+              <a:t>Próxima unidade: os modelos de Estado do século XX e o Estado brasileiro.</a:t>
+            </a:r>
+            <a:endParaRPr lang="en-US" sz="1300" dirty="0"/>
+          </a:p>
+        </p:txBody>
+      </p:sp>
+      <p:sp>
+        <p:nvSpPr>
+          <p:cNvPr id="7" name="Text 5"/>
           <p:cNvSpPr txBox="1"/>
           <p:nvPr/>
         </p:nvSpPr>
@@ -12228,6571 +11751,6 @@
 </p:sld>
 </file>
 
-<file path=ppt/slides/slide20.xml><?xml version="1.0" encoding="utf-8"?>
-<p:sld xmlns:a="http://schemas.openxmlformats.org/drawingml/2006/main" xmlns:r="http://schemas.openxmlformats.org/officeDocument/2006/relationships" xmlns:p="http://schemas.openxmlformats.org/presentationml/2006/main">
-  <p:cSld name="Slide 20">
-    <p:bg>
-      <p:bgPr>
-        <a:blipFill dpi="0" rotWithShape="1">
-          <a:blip r:embed="rId1">
-            <a:lum/>
-          </a:blip>
-          <a:srcRect/>
-          <a:stretch>
-            <a:fillRect/>
-          </a:stretch>
-        </a:blipFill>
-        <a:effectLst/>
-      </p:bgPr>
-    </p:bg>
-    <p:spTree>
-      <p:nvGrpSpPr>
-        <p:cNvPr id="1" name=""/>
-        <p:cNvGrpSpPr/>
-        <p:nvPr/>
-      </p:nvGrpSpPr>
-      <p:grpSpPr>
-        <a:xfrm>
-          <a:off x="0" y="0"/>
-          <a:ext cx="0" cy="0"/>
-          <a:chOff x="0" y="0"/>
-          <a:chExt cx="0" cy="0"/>
-        </a:xfrm>
-      </p:grpSpPr>
-      <p:sp>
-        <p:nvSpPr>
-          <p:cNvPr id="2" name="Text 0"/>
-          <p:cNvSpPr txBox="1"/>
-          <p:nvPr/>
-        </p:nvSpPr>
-        <p:spPr>
-          <a:xfrm>
-            <a:off x="731520" y="274320"/>
-            <a:ext cx="7680960" cy="365760"/>
-          </a:xfrm>
-          <a:prstGeom prst="rect">
-            <a:avLst/>
-          </a:prstGeom>
-          <a:noFill/>
-          <a:ln/>
-        </p:spPr>
-        <p:txBody>
-          <a:bodyPr wrap="square" lIns="0" tIns="0" rIns="0" bIns="0" rtlCol="0" anchor="ctr"/>
-          <a:lstStyle/>
-          <a:p>
-            <a:pPr algn="ctr" indent="0" marL="0">
-              <a:lnSpc>
-                <a:spcPct val="100000"/>
-              </a:lnSpc>
-              <a:buNone/>
-            </a:pPr>
-            <a:r>
-              <a:rPr lang="en-US" sz="1250" b="1" dirty="0">
-                <a:solidFill>
-                  <a:srgbClr val="2A8C85"/>
-                </a:solidFill>
-                <a:latin typeface="Calibri" pitchFamily="34" charset="0"/>
-                <a:ea typeface="Calibri" pitchFamily="34" charset="-122"/>
-                <a:cs typeface="Calibri" pitchFamily="34" charset="-120"/>
-              </a:rPr>
-              <a:t>QUIZ DA UNIDADE 3 · PERGUNTA 1 DE 5</a:t>
-            </a:r>
-            <a:endParaRPr lang="en-US" sz="1250" dirty="0"/>
-          </a:p>
-        </p:txBody>
-      </p:sp>
-      <p:sp>
-        <p:nvSpPr>
-          <p:cNvPr id="3" name="Text 1"/>
-          <p:cNvSpPr txBox="1"/>
-          <p:nvPr/>
-        </p:nvSpPr>
-        <p:spPr>
-          <a:xfrm>
-            <a:off x="731520" y="658368"/>
-            <a:ext cx="7680960" cy="960120"/>
-          </a:xfrm>
-          <a:prstGeom prst="rect">
-            <a:avLst/>
-          </a:prstGeom>
-          <a:noFill/>
-          <a:ln/>
-        </p:spPr>
-        <p:txBody>
-          <a:bodyPr wrap="square" lIns="0" tIns="0" rIns="0" bIns="0" rtlCol="0" anchor="ctr"/>
-          <a:lstStyle/>
-          <a:p>
-            <a:pPr algn="ctr" indent="0" marL="0">
-              <a:lnSpc>
-                <a:spcPct val="100000"/>
-              </a:lnSpc>
-              <a:buNone/>
-            </a:pPr>
-            <a:r>
-              <a:rPr lang="en-US" sz="1900" b="1" dirty="0">
-                <a:solidFill>
-                  <a:srgbClr val="13294B"/>
-                </a:solidFill>
-                <a:latin typeface="Calibri" pitchFamily="34" charset="0"/>
-                <a:ea typeface="Calibri" pitchFamily="34" charset="-122"/>
-                <a:cs typeface="Calibri" pitchFamily="34" charset="-120"/>
-              </a:rPr>
-              <a:t>Para Marx, a base econômica (forças produtivas e relações de produção) condiciona:</a:t>
-            </a:r>
-            <a:endParaRPr lang="en-US" sz="1900" dirty="0"/>
-          </a:p>
-        </p:txBody>
-      </p:sp>
-      <p:sp>
-        <p:nvSpPr>
-          <p:cNvPr id="4" name="Shape 2"/>
-          <p:cNvSpPr/>
-          <p:nvPr/>
-        </p:nvSpPr>
-        <p:spPr>
-          <a:xfrm>
-            <a:off x="685800" y="1737360"/>
-            <a:ext cx="3794760" cy="914400"/>
-          </a:xfrm>
-          <a:prstGeom prst="roundRect">
-            <a:avLst>
-              <a:gd name="adj" fmla="val 8000"/>
-            </a:avLst>
-          </a:prstGeom>
-          <a:solidFill>
-            <a:srgbClr val="FFFFFF"/>
-          </a:solidFill>
-          <a:ln w="12700">
-            <a:solidFill>
-              <a:srgbClr val="DCD5C1"/>
-            </a:solidFill>
-            <a:prstDash val="solid"/>
-          </a:ln>
-        </p:spPr>
-      </p:sp>
-      <p:sp>
-        <p:nvSpPr>
-          <p:cNvPr id="5" name="Text 3"/>
-          <p:cNvSpPr txBox="1"/>
-          <p:nvPr/>
-        </p:nvSpPr>
-        <p:spPr>
-          <a:xfrm>
-            <a:off x="813816" y="1984248"/>
-            <a:ext cx="420624" cy="420624"/>
-          </a:xfrm>
-          <a:prstGeom prst="roundRect">
-            <a:avLst>
-              <a:gd name="adj" fmla="val 50000"/>
-            </a:avLst>
-          </a:prstGeom>
-          <a:solidFill>
-            <a:srgbClr val="13294B"/>
-          </a:solidFill>
-          <a:ln/>
-        </p:spPr>
-        <p:txBody>
-          <a:bodyPr wrap="square" lIns="0" tIns="0" rIns="0" bIns="0" rtlCol="0" anchor="ctr"/>
-          <a:lstStyle/>
-          <a:p>
-            <a:pPr algn="ctr" indent="0" marL="0">
-              <a:lnSpc>
-                <a:spcPct val="100000"/>
-              </a:lnSpc>
-              <a:buNone/>
-            </a:pPr>
-            <a:r>
-              <a:rPr lang="en-US" sz="1600" b="1" dirty="0">
-                <a:solidFill>
-                  <a:srgbClr val="FFFFFF"/>
-                </a:solidFill>
-                <a:latin typeface="Calibri" pitchFamily="34" charset="0"/>
-                <a:ea typeface="Calibri" pitchFamily="34" charset="-122"/>
-                <a:cs typeface="Calibri" pitchFamily="34" charset="-120"/>
-              </a:rPr>
-              <a:t>a</a:t>
-            </a:r>
-            <a:endParaRPr lang="en-US" sz="1600" dirty="0"/>
-          </a:p>
-        </p:txBody>
-      </p:sp>
-      <p:sp>
-        <p:nvSpPr>
-          <p:cNvPr id="6" name="Text 4"/>
-          <p:cNvSpPr txBox="1"/>
-          <p:nvPr/>
-        </p:nvSpPr>
-        <p:spPr>
-          <a:xfrm>
-            <a:off x="1344168" y="1773936"/>
-            <a:ext cx="3044952" cy="841248"/>
-          </a:xfrm>
-          <a:prstGeom prst="rect">
-            <a:avLst/>
-          </a:prstGeom>
-          <a:noFill/>
-          <a:ln/>
-        </p:spPr>
-        <p:txBody>
-          <a:bodyPr wrap="square" lIns="25400" tIns="25400" rIns="25400" bIns="25400" rtlCol="0" anchor="ctr"/>
-          <a:lstStyle/>
-          <a:p>
-            <a:pPr algn="l" indent="0" marL="0">
-              <a:lnSpc>
-                <a:spcPct val="100000"/>
-              </a:lnSpc>
-              <a:buNone/>
-            </a:pPr>
-            <a:r>
-              <a:rPr lang="en-US" sz="1400" dirty="0">
-                <a:solidFill>
-                  <a:srgbClr val="1F2A37"/>
-                </a:solidFill>
-                <a:latin typeface="Calibri" pitchFamily="34" charset="0"/>
-                <a:ea typeface="Calibri" pitchFamily="34" charset="-122"/>
-                <a:cs typeface="Calibri" pitchFamily="34" charset="-120"/>
-              </a:rPr>
-              <a:t>A superestrutura jurídica, política e ideológica</a:t>
-            </a:r>
-            <a:endParaRPr lang="en-US" sz="1400" dirty="0"/>
-          </a:p>
-        </p:txBody>
-      </p:sp>
-      <p:sp>
-        <p:nvSpPr>
-          <p:cNvPr id="7" name="Shape 5"/>
-          <p:cNvSpPr/>
-          <p:nvPr/>
-        </p:nvSpPr>
-        <p:spPr>
-          <a:xfrm>
-            <a:off x="4663440" y="1737360"/>
-            <a:ext cx="3794760" cy="914400"/>
-          </a:xfrm>
-          <a:prstGeom prst="roundRect">
-            <a:avLst>
-              <a:gd name="adj" fmla="val 8000"/>
-            </a:avLst>
-          </a:prstGeom>
-          <a:solidFill>
-            <a:srgbClr val="FFFFFF"/>
-          </a:solidFill>
-          <a:ln w="12700">
-            <a:solidFill>
-              <a:srgbClr val="DCD5C1"/>
-            </a:solidFill>
-            <a:prstDash val="solid"/>
-          </a:ln>
-        </p:spPr>
-      </p:sp>
-      <p:sp>
-        <p:nvSpPr>
-          <p:cNvPr id="8" name="Text 6"/>
-          <p:cNvSpPr txBox="1"/>
-          <p:nvPr/>
-        </p:nvSpPr>
-        <p:spPr>
-          <a:xfrm>
-            <a:off x="4791456" y="1984248"/>
-            <a:ext cx="420624" cy="420624"/>
-          </a:xfrm>
-          <a:prstGeom prst="roundRect">
-            <a:avLst>
-              <a:gd name="adj" fmla="val 50000"/>
-            </a:avLst>
-          </a:prstGeom>
-          <a:solidFill>
-            <a:srgbClr val="13294B"/>
-          </a:solidFill>
-          <a:ln/>
-        </p:spPr>
-        <p:txBody>
-          <a:bodyPr wrap="square" lIns="0" tIns="0" rIns="0" bIns="0" rtlCol="0" anchor="ctr"/>
-          <a:lstStyle/>
-          <a:p>
-            <a:pPr algn="ctr" indent="0" marL="0">
-              <a:lnSpc>
-                <a:spcPct val="100000"/>
-              </a:lnSpc>
-              <a:buNone/>
-            </a:pPr>
-            <a:r>
-              <a:rPr lang="en-US" sz="1600" b="1" dirty="0">
-                <a:solidFill>
-                  <a:srgbClr val="FFFFFF"/>
-                </a:solidFill>
-                <a:latin typeface="Calibri" pitchFamily="34" charset="0"/>
-                <a:ea typeface="Calibri" pitchFamily="34" charset="-122"/>
-                <a:cs typeface="Calibri" pitchFamily="34" charset="-120"/>
-              </a:rPr>
-              <a:t>b</a:t>
-            </a:r>
-            <a:endParaRPr lang="en-US" sz="1600" dirty="0"/>
-          </a:p>
-        </p:txBody>
-      </p:sp>
-      <p:sp>
-        <p:nvSpPr>
-          <p:cNvPr id="9" name="Text 7"/>
-          <p:cNvSpPr txBox="1"/>
-          <p:nvPr/>
-        </p:nvSpPr>
-        <p:spPr>
-          <a:xfrm>
-            <a:off x="5321808" y="1773936"/>
-            <a:ext cx="3044952" cy="841248"/>
-          </a:xfrm>
-          <a:prstGeom prst="rect">
-            <a:avLst/>
-          </a:prstGeom>
-          <a:noFill/>
-          <a:ln/>
-        </p:spPr>
-        <p:txBody>
-          <a:bodyPr wrap="square" lIns="25400" tIns="25400" rIns="25400" bIns="25400" rtlCol="0" anchor="ctr"/>
-          <a:lstStyle/>
-          <a:p>
-            <a:pPr algn="l" indent="0" marL="0">
-              <a:lnSpc>
-                <a:spcPct val="100000"/>
-              </a:lnSpc>
-              <a:buNone/>
-            </a:pPr>
-            <a:r>
-              <a:rPr lang="en-US" sz="1400" dirty="0">
-                <a:solidFill>
-                  <a:srgbClr val="1F2A37"/>
-                </a:solidFill>
-                <a:latin typeface="Calibri" pitchFamily="34" charset="0"/>
-                <a:ea typeface="Calibri" pitchFamily="34" charset="-122"/>
-                <a:cs typeface="Calibri" pitchFamily="34" charset="-120"/>
-              </a:rPr>
-              <a:t>Apenas os preços dos produtos</a:t>
-            </a:r>
-            <a:endParaRPr lang="en-US" sz="1400" dirty="0"/>
-          </a:p>
-        </p:txBody>
-      </p:sp>
-      <p:sp>
-        <p:nvSpPr>
-          <p:cNvPr id="10" name="Shape 8"/>
-          <p:cNvSpPr/>
-          <p:nvPr/>
-        </p:nvSpPr>
-        <p:spPr>
-          <a:xfrm>
-            <a:off x="685800" y="2798064"/>
-            <a:ext cx="3794760" cy="914400"/>
-          </a:xfrm>
-          <a:prstGeom prst="roundRect">
-            <a:avLst>
-              <a:gd name="adj" fmla="val 8000"/>
-            </a:avLst>
-          </a:prstGeom>
-          <a:solidFill>
-            <a:srgbClr val="FFFFFF"/>
-          </a:solidFill>
-          <a:ln w="12700">
-            <a:solidFill>
-              <a:srgbClr val="DCD5C1"/>
-            </a:solidFill>
-            <a:prstDash val="solid"/>
-          </a:ln>
-        </p:spPr>
-      </p:sp>
-      <p:sp>
-        <p:nvSpPr>
-          <p:cNvPr id="11" name="Text 9"/>
-          <p:cNvSpPr txBox="1"/>
-          <p:nvPr/>
-        </p:nvSpPr>
-        <p:spPr>
-          <a:xfrm>
-            <a:off x="813816" y="3044952"/>
-            <a:ext cx="420624" cy="420624"/>
-          </a:xfrm>
-          <a:prstGeom prst="roundRect">
-            <a:avLst>
-              <a:gd name="adj" fmla="val 50000"/>
-            </a:avLst>
-          </a:prstGeom>
-          <a:solidFill>
-            <a:srgbClr val="13294B"/>
-          </a:solidFill>
-          <a:ln/>
-        </p:spPr>
-        <p:txBody>
-          <a:bodyPr wrap="square" lIns="0" tIns="0" rIns="0" bIns="0" rtlCol="0" anchor="ctr"/>
-          <a:lstStyle/>
-          <a:p>
-            <a:pPr algn="ctr" indent="0" marL="0">
-              <a:lnSpc>
-                <a:spcPct val="100000"/>
-              </a:lnSpc>
-              <a:buNone/>
-            </a:pPr>
-            <a:r>
-              <a:rPr lang="en-US" sz="1600" b="1" dirty="0">
-                <a:solidFill>
-                  <a:srgbClr val="FFFFFF"/>
-                </a:solidFill>
-                <a:latin typeface="Calibri" pitchFamily="34" charset="0"/>
-                <a:ea typeface="Calibri" pitchFamily="34" charset="-122"/>
-                <a:cs typeface="Calibri" pitchFamily="34" charset="-120"/>
-              </a:rPr>
-              <a:t>c</a:t>
-            </a:r>
-            <a:endParaRPr lang="en-US" sz="1600" dirty="0"/>
-          </a:p>
-        </p:txBody>
-      </p:sp>
-      <p:sp>
-        <p:nvSpPr>
-          <p:cNvPr id="12" name="Text 10"/>
-          <p:cNvSpPr txBox="1"/>
-          <p:nvPr/>
-        </p:nvSpPr>
-        <p:spPr>
-          <a:xfrm>
-            <a:off x="1344168" y="2834640"/>
-            <a:ext cx="3044952" cy="841248"/>
-          </a:xfrm>
-          <a:prstGeom prst="rect">
-            <a:avLst/>
-          </a:prstGeom>
-          <a:noFill/>
-          <a:ln/>
-        </p:spPr>
-        <p:txBody>
-          <a:bodyPr wrap="square" lIns="25400" tIns="25400" rIns="25400" bIns="25400" rtlCol="0" anchor="ctr"/>
-          <a:lstStyle/>
-          <a:p>
-            <a:pPr algn="l" indent="0" marL="0">
-              <a:lnSpc>
-                <a:spcPct val="100000"/>
-              </a:lnSpc>
-              <a:buNone/>
-            </a:pPr>
-            <a:r>
-              <a:rPr lang="en-US" sz="1400" dirty="0">
-                <a:solidFill>
-                  <a:srgbClr val="1F2A37"/>
-                </a:solidFill>
-                <a:latin typeface="Calibri" pitchFamily="34" charset="0"/>
-                <a:ea typeface="Calibri" pitchFamily="34" charset="-122"/>
-                <a:cs typeface="Calibri" pitchFamily="34" charset="-120"/>
-              </a:rPr>
-              <a:t>Somente o comércio exterior</a:t>
-            </a:r>
-            <a:endParaRPr lang="en-US" sz="1400" dirty="0"/>
-          </a:p>
-        </p:txBody>
-      </p:sp>
-      <p:sp>
-        <p:nvSpPr>
-          <p:cNvPr id="13" name="Shape 11"/>
-          <p:cNvSpPr/>
-          <p:nvPr/>
-        </p:nvSpPr>
-        <p:spPr>
-          <a:xfrm>
-            <a:off x="4663440" y="2798064"/>
-            <a:ext cx="3794760" cy="914400"/>
-          </a:xfrm>
-          <a:prstGeom prst="roundRect">
-            <a:avLst>
-              <a:gd name="adj" fmla="val 8000"/>
-            </a:avLst>
-          </a:prstGeom>
-          <a:solidFill>
-            <a:srgbClr val="FFFFFF"/>
-          </a:solidFill>
-          <a:ln w="12700">
-            <a:solidFill>
-              <a:srgbClr val="DCD5C1"/>
-            </a:solidFill>
-            <a:prstDash val="solid"/>
-          </a:ln>
-        </p:spPr>
-      </p:sp>
-      <p:sp>
-        <p:nvSpPr>
-          <p:cNvPr id="14" name="Text 12"/>
-          <p:cNvSpPr txBox="1"/>
-          <p:nvPr/>
-        </p:nvSpPr>
-        <p:spPr>
-          <a:xfrm>
-            <a:off x="4791456" y="3044952"/>
-            <a:ext cx="420624" cy="420624"/>
-          </a:xfrm>
-          <a:prstGeom prst="roundRect">
-            <a:avLst>
-              <a:gd name="adj" fmla="val 50000"/>
-            </a:avLst>
-          </a:prstGeom>
-          <a:solidFill>
-            <a:srgbClr val="13294B"/>
-          </a:solidFill>
-          <a:ln/>
-        </p:spPr>
-        <p:txBody>
-          <a:bodyPr wrap="square" lIns="0" tIns="0" rIns="0" bIns="0" rtlCol="0" anchor="ctr"/>
-          <a:lstStyle/>
-          <a:p>
-            <a:pPr algn="ctr" indent="0" marL="0">
-              <a:lnSpc>
-                <a:spcPct val="100000"/>
-              </a:lnSpc>
-              <a:buNone/>
-            </a:pPr>
-            <a:r>
-              <a:rPr lang="en-US" sz="1600" b="1" dirty="0">
-                <a:solidFill>
-                  <a:srgbClr val="FFFFFF"/>
-                </a:solidFill>
-                <a:latin typeface="Calibri" pitchFamily="34" charset="0"/>
-                <a:ea typeface="Calibri" pitchFamily="34" charset="-122"/>
-                <a:cs typeface="Calibri" pitchFamily="34" charset="-120"/>
-              </a:rPr>
-              <a:t>d</a:t>
-            </a:r>
-            <a:endParaRPr lang="en-US" sz="1600" dirty="0"/>
-          </a:p>
-        </p:txBody>
-      </p:sp>
-      <p:sp>
-        <p:nvSpPr>
-          <p:cNvPr id="15" name="Text 13"/>
-          <p:cNvSpPr txBox="1"/>
-          <p:nvPr/>
-        </p:nvSpPr>
-        <p:spPr>
-          <a:xfrm>
-            <a:off x="5321808" y="2834640"/>
-            <a:ext cx="3044952" cy="841248"/>
-          </a:xfrm>
-          <a:prstGeom prst="rect">
-            <a:avLst/>
-          </a:prstGeom>
-          <a:noFill/>
-          <a:ln/>
-        </p:spPr>
-        <p:txBody>
-          <a:bodyPr wrap="square" lIns="25400" tIns="25400" rIns="25400" bIns="25400" rtlCol="0" anchor="ctr"/>
-          <a:lstStyle/>
-          <a:p>
-            <a:pPr algn="l" indent="0" marL="0">
-              <a:lnSpc>
-                <a:spcPct val="100000"/>
-              </a:lnSpc>
-              <a:buNone/>
-            </a:pPr>
-            <a:r>
-              <a:rPr lang="en-US" sz="1400" dirty="0">
-                <a:solidFill>
-                  <a:srgbClr val="1F2A37"/>
-                </a:solidFill>
-                <a:latin typeface="Calibri" pitchFamily="34" charset="0"/>
-                <a:ea typeface="Calibri" pitchFamily="34" charset="-122"/>
-                <a:cs typeface="Calibri" pitchFamily="34" charset="-120"/>
-              </a:rPr>
-              <a:t>Nada: as ideias determinam a economia</a:t>
-            </a:r>
-            <a:endParaRPr lang="en-US" sz="1400" dirty="0"/>
-          </a:p>
-        </p:txBody>
-      </p:sp>
-      <p:sp>
-        <p:nvSpPr>
-          <p:cNvPr id="16" name="Text 14"/>
-          <p:cNvSpPr txBox="1"/>
-          <p:nvPr/>
-        </p:nvSpPr>
-        <p:spPr>
-          <a:xfrm>
-            <a:off x="4206240" y="36576"/>
-            <a:ext cx="4800600" cy="219456"/>
-          </a:xfrm>
-          <a:prstGeom prst="rect">
-            <a:avLst/>
-          </a:prstGeom>
-          <a:noFill/>
-          <a:ln/>
-        </p:spPr>
-        <p:txBody>
-          <a:bodyPr wrap="square" lIns="0" tIns="0" rIns="0" bIns="0" rtlCol="0" anchor="ctr"/>
-          <a:lstStyle/>
-          <a:p>
-            <a:pPr algn="r" indent="0" marL="0">
-              <a:lnSpc>
-                <a:spcPct val="100000"/>
-              </a:lnSpc>
-              <a:buNone/>
-            </a:pPr>
-            <a:r>
-              <a:rPr lang="en-US" sz="950" dirty="0">
-                <a:solidFill>
-                  <a:srgbClr val="5B6770"/>
-                </a:solidFill>
-                <a:latin typeface="Calibri" pitchFamily="34" charset="0"/>
-                <a:ea typeface="Calibri" pitchFamily="34" charset="-122"/>
-                <a:cs typeface="Calibri" pitchFamily="34" charset="-120"/>
-              </a:rPr>
-              <a:t>Estado, Governo e Mercado · Unidade 3</a:t>
-            </a:r>
-            <a:endParaRPr lang="en-US" sz="950" dirty="0"/>
-          </a:p>
-        </p:txBody>
-      </p:sp>
-    </p:spTree>
-  </p:cSld>
-  <p:clrMapOvr>
-    <a:masterClrMapping/>
-  </p:clrMapOvr>
-</p:sld>
-</file>
-
-<file path=ppt/slides/slide21.xml><?xml version="1.0" encoding="utf-8"?>
-<p:sld xmlns:a="http://schemas.openxmlformats.org/drawingml/2006/main" xmlns:r="http://schemas.openxmlformats.org/officeDocument/2006/relationships" xmlns:p="http://schemas.openxmlformats.org/presentationml/2006/main">
-  <p:cSld name="Slide 21">
-    <p:bg>
-      <p:bgPr>
-        <a:blipFill dpi="0" rotWithShape="1">
-          <a:blip r:embed="rId1">
-            <a:lum/>
-          </a:blip>
-          <a:srcRect/>
-          <a:stretch>
-            <a:fillRect/>
-          </a:stretch>
-        </a:blipFill>
-        <a:effectLst/>
-      </p:bgPr>
-    </p:bg>
-    <p:spTree>
-      <p:nvGrpSpPr>
-        <p:cNvPr id="1" name=""/>
-        <p:cNvGrpSpPr/>
-        <p:nvPr/>
-      </p:nvGrpSpPr>
-      <p:grpSpPr>
-        <a:xfrm>
-          <a:off x="0" y="0"/>
-          <a:ext cx="0" cy="0"/>
-          <a:chOff x="0" y="0"/>
-          <a:chExt cx="0" cy="0"/>
-        </a:xfrm>
-      </p:grpSpPr>
-      <p:sp>
-        <p:nvSpPr>
-          <p:cNvPr id="2" name="Text 0"/>
-          <p:cNvSpPr txBox="1"/>
-          <p:nvPr/>
-        </p:nvSpPr>
-        <p:spPr>
-          <a:xfrm>
-            <a:off x="731520" y="274320"/>
-            <a:ext cx="7680960" cy="365760"/>
-          </a:xfrm>
-          <a:prstGeom prst="rect">
-            <a:avLst/>
-          </a:prstGeom>
-          <a:noFill/>
-          <a:ln/>
-        </p:spPr>
-        <p:txBody>
-          <a:bodyPr wrap="square" lIns="0" tIns="0" rIns="0" bIns="0" rtlCol="0" anchor="ctr"/>
-          <a:lstStyle/>
-          <a:p>
-            <a:pPr algn="ctr" indent="0" marL="0">
-              <a:lnSpc>
-                <a:spcPct val="100000"/>
-              </a:lnSpc>
-              <a:buNone/>
-            </a:pPr>
-            <a:r>
-              <a:rPr lang="en-US" sz="1250" b="1" dirty="0">
-                <a:solidFill>
-                  <a:srgbClr val="2A8C85"/>
-                </a:solidFill>
-                <a:latin typeface="Calibri" pitchFamily="34" charset="0"/>
-                <a:ea typeface="Calibri" pitchFamily="34" charset="-122"/>
-                <a:cs typeface="Calibri" pitchFamily="34" charset="-120"/>
-              </a:rPr>
-              <a:t>QUIZ DA UNIDADE 3 · PERGUNTA 1 DE 5 · RESPOSTA</a:t>
-            </a:r>
-            <a:endParaRPr lang="en-US" sz="1250" dirty="0"/>
-          </a:p>
-        </p:txBody>
-      </p:sp>
-      <p:sp>
-        <p:nvSpPr>
-          <p:cNvPr id="3" name="Text 1"/>
-          <p:cNvSpPr txBox="1"/>
-          <p:nvPr/>
-        </p:nvSpPr>
-        <p:spPr>
-          <a:xfrm>
-            <a:off x="731520" y="658368"/>
-            <a:ext cx="7680960" cy="960120"/>
-          </a:xfrm>
-          <a:prstGeom prst="rect">
-            <a:avLst/>
-          </a:prstGeom>
-          <a:noFill/>
-          <a:ln/>
-        </p:spPr>
-        <p:txBody>
-          <a:bodyPr wrap="square" lIns="0" tIns="0" rIns="0" bIns="0" rtlCol="0" anchor="ctr"/>
-          <a:lstStyle/>
-          <a:p>
-            <a:pPr algn="ctr" indent="0" marL="0">
-              <a:lnSpc>
-                <a:spcPct val="100000"/>
-              </a:lnSpc>
-              <a:buNone/>
-            </a:pPr>
-            <a:r>
-              <a:rPr lang="en-US" sz="1900" b="1" dirty="0">
-                <a:solidFill>
-                  <a:srgbClr val="13294B"/>
-                </a:solidFill>
-                <a:latin typeface="Calibri" pitchFamily="34" charset="0"/>
-                <a:ea typeface="Calibri" pitchFamily="34" charset="-122"/>
-                <a:cs typeface="Calibri" pitchFamily="34" charset="-120"/>
-              </a:rPr>
-              <a:t>Para Marx, a base econômica (forças produtivas e relações de produção) condiciona:</a:t>
-            </a:r>
-            <a:endParaRPr lang="en-US" sz="1900" dirty="0"/>
-          </a:p>
-        </p:txBody>
-      </p:sp>
-      <p:sp>
-        <p:nvSpPr>
-          <p:cNvPr id="4" name="Shape 2"/>
-          <p:cNvSpPr/>
-          <p:nvPr/>
-        </p:nvSpPr>
-        <p:spPr>
-          <a:xfrm>
-            <a:off x="685800" y="1737360"/>
-            <a:ext cx="3794760" cy="749808"/>
-          </a:xfrm>
-          <a:prstGeom prst="roundRect">
-            <a:avLst>
-              <a:gd name="adj" fmla="val 9756"/>
-            </a:avLst>
-          </a:prstGeom>
-          <a:solidFill>
-            <a:srgbClr val="E3F2E8"/>
-          </a:solidFill>
-          <a:ln w="25400">
-            <a:solidFill>
-              <a:srgbClr val="2E7D4F"/>
-            </a:solidFill>
-            <a:prstDash val="solid"/>
-          </a:ln>
-        </p:spPr>
-      </p:sp>
-      <p:sp>
-        <p:nvSpPr>
-          <p:cNvPr id="5" name="Text 3"/>
-          <p:cNvSpPr txBox="1"/>
-          <p:nvPr/>
-        </p:nvSpPr>
-        <p:spPr>
-          <a:xfrm>
-            <a:off x="813816" y="1901952"/>
-            <a:ext cx="420624" cy="420624"/>
-          </a:xfrm>
-          <a:prstGeom prst="roundRect">
-            <a:avLst>
-              <a:gd name="adj" fmla="val 50000"/>
-            </a:avLst>
-          </a:prstGeom>
-          <a:solidFill>
-            <a:srgbClr val="2E7D4F"/>
-          </a:solidFill>
-          <a:ln/>
-        </p:spPr>
-        <p:txBody>
-          <a:bodyPr wrap="square" lIns="0" tIns="0" rIns="0" bIns="0" rtlCol="0" anchor="ctr"/>
-          <a:lstStyle/>
-          <a:p>
-            <a:pPr algn="ctr" indent="0" marL="0">
-              <a:lnSpc>
-                <a:spcPct val="100000"/>
-              </a:lnSpc>
-              <a:buNone/>
-            </a:pPr>
-            <a:r>
-              <a:rPr lang="en-US" sz="1600" b="1" dirty="0">
-                <a:solidFill>
-                  <a:srgbClr val="FFFFFF"/>
-                </a:solidFill>
-                <a:latin typeface="Calibri" pitchFamily="34" charset="0"/>
-                <a:ea typeface="Calibri" pitchFamily="34" charset="-122"/>
-                <a:cs typeface="Calibri" pitchFamily="34" charset="-120"/>
-              </a:rPr>
-              <a:t>a</a:t>
-            </a:r>
-            <a:endParaRPr lang="en-US" sz="1600" dirty="0"/>
-          </a:p>
-        </p:txBody>
-      </p:sp>
-      <p:sp>
-        <p:nvSpPr>
-          <p:cNvPr id="6" name="Text 4"/>
-          <p:cNvSpPr txBox="1"/>
-          <p:nvPr/>
-        </p:nvSpPr>
-        <p:spPr>
-          <a:xfrm>
-            <a:off x="1344168" y="1773936"/>
-            <a:ext cx="3044952" cy="676656"/>
-          </a:xfrm>
-          <a:prstGeom prst="rect">
-            <a:avLst/>
-          </a:prstGeom>
-          <a:noFill/>
-          <a:ln/>
-        </p:spPr>
-        <p:txBody>
-          <a:bodyPr wrap="square" lIns="25400" tIns="25400" rIns="25400" bIns="25400" rtlCol="0" anchor="ctr"/>
-          <a:lstStyle/>
-          <a:p>
-            <a:pPr algn="l" indent="0" marL="0">
-              <a:lnSpc>
-                <a:spcPct val="100000"/>
-              </a:lnSpc>
-              <a:buNone/>
-            </a:pPr>
-            <a:r>
-              <a:rPr lang="en-US" sz="1400" b="1" dirty="0">
-                <a:solidFill>
-                  <a:srgbClr val="1F2A37"/>
-                </a:solidFill>
-                <a:latin typeface="Calibri" pitchFamily="34" charset="0"/>
-                <a:ea typeface="Calibri" pitchFamily="34" charset="-122"/>
-                <a:cs typeface="Calibri" pitchFamily="34" charset="-120"/>
-              </a:rPr>
-              <a:t>A superestrutura jurídica, política e ideológica</a:t>
-            </a:r>
-            <a:endParaRPr lang="en-US" sz="1400" dirty="0"/>
-          </a:p>
-        </p:txBody>
-      </p:sp>
-      <p:sp>
-        <p:nvSpPr>
-          <p:cNvPr id="7" name="Shape 5"/>
-          <p:cNvSpPr/>
-          <p:nvPr/>
-        </p:nvSpPr>
-        <p:spPr>
-          <a:xfrm>
-            <a:off x="4663440" y="1737360"/>
-            <a:ext cx="3794760" cy="749808"/>
-          </a:xfrm>
-          <a:prstGeom prst="roundRect">
-            <a:avLst>
-              <a:gd name="adj" fmla="val 9756"/>
-            </a:avLst>
-          </a:prstGeom>
-          <a:solidFill>
-            <a:srgbClr val="FFFFFF"/>
-          </a:solidFill>
-          <a:ln w="12700">
-            <a:solidFill>
-              <a:srgbClr val="DCD5C1"/>
-            </a:solidFill>
-            <a:prstDash val="solid"/>
-          </a:ln>
-        </p:spPr>
-      </p:sp>
-      <p:sp>
-        <p:nvSpPr>
-          <p:cNvPr id="8" name="Text 6"/>
-          <p:cNvSpPr txBox="1"/>
-          <p:nvPr/>
-        </p:nvSpPr>
-        <p:spPr>
-          <a:xfrm>
-            <a:off x="4791456" y="1901952"/>
-            <a:ext cx="420624" cy="420624"/>
-          </a:xfrm>
-          <a:prstGeom prst="roundRect">
-            <a:avLst>
-              <a:gd name="adj" fmla="val 50000"/>
-            </a:avLst>
-          </a:prstGeom>
-          <a:solidFill>
-            <a:srgbClr val="9AA3AB"/>
-          </a:solidFill>
-          <a:ln/>
-        </p:spPr>
-        <p:txBody>
-          <a:bodyPr wrap="square" lIns="0" tIns="0" rIns="0" bIns="0" rtlCol="0" anchor="ctr"/>
-          <a:lstStyle/>
-          <a:p>
-            <a:pPr algn="ctr" indent="0" marL="0">
-              <a:lnSpc>
-                <a:spcPct val="100000"/>
-              </a:lnSpc>
-              <a:buNone/>
-            </a:pPr>
-            <a:r>
-              <a:rPr lang="en-US" sz="1600" b="1" dirty="0">
-                <a:solidFill>
-                  <a:srgbClr val="FFFFFF"/>
-                </a:solidFill>
-                <a:latin typeface="Calibri" pitchFamily="34" charset="0"/>
-                <a:ea typeface="Calibri" pitchFamily="34" charset="-122"/>
-                <a:cs typeface="Calibri" pitchFamily="34" charset="-120"/>
-              </a:rPr>
-              <a:t>b</a:t>
-            </a:r>
-            <a:endParaRPr lang="en-US" sz="1600" dirty="0"/>
-          </a:p>
-        </p:txBody>
-      </p:sp>
-      <p:sp>
-        <p:nvSpPr>
-          <p:cNvPr id="9" name="Text 7"/>
-          <p:cNvSpPr txBox="1"/>
-          <p:nvPr/>
-        </p:nvSpPr>
-        <p:spPr>
-          <a:xfrm>
-            <a:off x="5321808" y="1773936"/>
-            <a:ext cx="3044952" cy="676656"/>
-          </a:xfrm>
-          <a:prstGeom prst="rect">
-            <a:avLst/>
-          </a:prstGeom>
-          <a:noFill/>
-          <a:ln/>
-        </p:spPr>
-        <p:txBody>
-          <a:bodyPr wrap="square" lIns="25400" tIns="25400" rIns="25400" bIns="25400" rtlCol="0" anchor="ctr"/>
-          <a:lstStyle/>
-          <a:p>
-            <a:pPr algn="l" indent="0" marL="0">
-              <a:lnSpc>
-                <a:spcPct val="100000"/>
-              </a:lnSpc>
-              <a:buNone/>
-            </a:pPr>
-            <a:r>
-              <a:rPr lang="en-US" sz="1400" dirty="0">
-                <a:solidFill>
-                  <a:srgbClr val="5B6770"/>
-                </a:solidFill>
-                <a:latin typeface="Calibri" pitchFamily="34" charset="0"/>
-                <a:ea typeface="Calibri" pitchFamily="34" charset="-122"/>
-                <a:cs typeface="Calibri" pitchFamily="34" charset="-120"/>
-              </a:rPr>
-              <a:t>Apenas os preços dos produtos</a:t>
-            </a:r>
-            <a:endParaRPr lang="en-US" sz="1400" dirty="0"/>
-          </a:p>
-        </p:txBody>
-      </p:sp>
-      <p:sp>
-        <p:nvSpPr>
-          <p:cNvPr id="10" name="Shape 8"/>
-          <p:cNvSpPr/>
-          <p:nvPr/>
-        </p:nvSpPr>
-        <p:spPr>
-          <a:xfrm>
-            <a:off x="685800" y="2633472"/>
-            <a:ext cx="3794760" cy="749808"/>
-          </a:xfrm>
-          <a:prstGeom prst="roundRect">
-            <a:avLst>
-              <a:gd name="adj" fmla="val 9756"/>
-            </a:avLst>
-          </a:prstGeom>
-          <a:solidFill>
-            <a:srgbClr val="FFFFFF"/>
-          </a:solidFill>
-          <a:ln w="12700">
-            <a:solidFill>
-              <a:srgbClr val="DCD5C1"/>
-            </a:solidFill>
-            <a:prstDash val="solid"/>
-          </a:ln>
-        </p:spPr>
-      </p:sp>
-      <p:sp>
-        <p:nvSpPr>
-          <p:cNvPr id="11" name="Text 9"/>
-          <p:cNvSpPr txBox="1"/>
-          <p:nvPr/>
-        </p:nvSpPr>
-        <p:spPr>
-          <a:xfrm>
-            <a:off x="813816" y="2798064"/>
-            <a:ext cx="420624" cy="420624"/>
-          </a:xfrm>
-          <a:prstGeom prst="roundRect">
-            <a:avLst>
-              <a:gd name="adj" fmla="val 50000"/>
-            </a:avLst>
-          </a:prstGeom>
-          <a:solidFill>
-            <a:srgbClr val="9AA3AB"/>
-          </a:solidFill>
-          <a:ln/>
-        </p:spPr>
-        <p:txBody>
-          <a:bodyPr wrap="square" lIns="0" tIns="0" rIns="0" bIns="0" rtlCol="0" anchor="ctr"/>
-          <a:lstStyle/>
-          <a:p>
-            <a:pPr algn="ctr" indent="0" marL="0">
-              <a:lnSpc>
-                <a:spcPct val="100000"/>
-              </a:lnSpc>
-              <a:buNone/>
-            </a:pPr>
-            <a:r>
-              <a:rPr lang="en-US" sz="1600" b="1" dirty="0">
-                <a:solidFill>
-                  <a:srgbClr val="FFFFFF"/>
-                </a:solidFill>
-                <a:latin typeface="Calibri" pitchFamily="34" charset="0"/>
-                <a:ea typeface="Calibri" pitchFamily="34" charset="-122"/>
-                <a:cs typeface="Calibri" pitchFamily="34" charset="-120"/>
-              </a:rPr>
-              <a:t>c</a:t>
-            </a:r>
-            <a:endParaRPr lang="en-US" sz="1600" dirty="0"/>
-          </a:p>
-        </p:txBody>
-      </p:sp>
-      <p:sp>
-        <p:nvSpPr>
-          <p:cNvPr id="12" name="Text 10"/>
-          <p:cNvSpPr txBox="1"/>
-          <p:nvPr/>
-        </p:nvSpPr>
-        <p:spPr>
-          <a:xfrm>
-            <a:off x="1344168" y="2670048"/>
-            <a:ext cx="3044952" cy="676656"/>
-          </a:xfrm>
-          <a:prstGeom prst="rect">
-            <a:avLst/>
-          </a:prstGeom>
-          <a:noFill/>
-          <a:ln/>
-        </p:spPr>
-        <p:txBody>
-          <a:bodyPr wrap="square" lIns="25400" tIns="25400" rIns="25400" bIns="25400" rtlCol="0" anchor="ctr"/>
-          <a:lstStyle/>
-          <a:p>
-            <a:pPr algn="l" indent="0" marL="0">
-              <a:lnSpc>
-                <a:spcPct val="100000"/>
-              </a:lnSpc>
-              <a:buNone/>
-            </a:pPr>
-            <a:r>
-              <a:rPr lang="en-US" sz="1400" dirty="0">
-                <a:solidFill>
-                  <a:srgbClr val="5B6770"/>
-                </a:solidFill>
-                <a:latin typeface="Calibri" pitchFamily="34" charset="0"/>
-                <a:ea typeface="Calibri" pitchFamily="34" charset="-122"/>
-                <a:cs typeface="Calibri" pitchFamily="34" charset="-120"/>
-              </a:rPr>
-              <a:t>Somente o comércio exterior</a:t>
-            </a:r>
-            <a:endParaRPr lang="en-US" sz="1400" dirty="0"/>
-          </a:p>
-        </p:txBody>
-      </p:sp>
-      <p:sp>
-        <p:nvSpPr>
-          <p:cNvPr id="13" name="Shape 11"/>
-          <p:cNvSpPr/>
-          <p:nvPr/>
-        </p:nvSpPr>
-        <p:spPr>
-          <a:xfrm>
-            <a:off x="4663440" y="2633472"/>
-            <a:ext cx="3794760" cy="749808"/>
-          </a:xfrm>
-          <a:prstGeom prst="roundRect">
-            <a:avLst>
-              <a:gd name="adj" fmla="val 9756"/>
-            </a:avLst>
-          </a:prstGeom>
-          <a:solidFill>
-            <a:srgbClr val="FFFFFF"/>
-          </a:solidFill>
-          <a:ln w="12700">
-            <a:solidFill>
-              <a:srgbClr val="DCD5C1"/>
-            </a:solidFill>
-            <a:prstDash val="solid"/>
-          </a:ln>
-        </p:spPr>
-      </p:sp>
-      <p:sp>
-        <p:nvSpPr>
-          <p:cNvPr id="14" name="Text 12"/>
-          <p:cNvSpPr txBox="1"/>
-          <p:nvPr/>
-        </p:nvSpPr>
-        <p:spPr>
-          <a:xfrm>
-            <a:off x="4791456" y="2798064"/>
-            <a:ext cx="420624" cy="420624"/>
-          </a:xfrm>
-          <a:prstGeom prst="roundRect">
-            <a:avLst>
-              <a:gd name="adj" fmla="val 50000"/>
-            </a:avLst>
-          </a:prstGeom>
-          <a:solidFill>
-            <a:srgbClr val="9AA3AB"/>
-          </a:solidFill>
-          <a:ln/>
-        </p:spPr>
-        <p:txBody>
-          <a:bodyPr wrap="square" lIns="0" tIns="0" rIns="0" bIns="0" rtlCol="0" anchor="ctr"/>
-          <a:lstStyle/>
-          <a:p>
-            <a:pPr algn="ctr" indent="0" marL="0">
-              <a:lnSpc>
-                <a:spcPct val="100000"/>
-              </a:lnSpc>
-              <a:buNone/>
-            </a:pPr>
-            <a:r>
-              <a:rPr lang="en-US" sz="1600" b="1" dirty="0">
-                <a:solidFill>
-                  <a:srgbClr val="FFFFFF"/>
-                </a:solidFill>
-                <a:latin typeface="Calibri" pitchFamily="34" charset="0"/>
-                <a:ea typeface="Calibri" pitchFamily="34" charset="-122"/>
-                <a:cs typeface="Calibri" pitchFamily="34" charset="-120"/>
-              </a:rPr>
-              <a:t>d</a:t>
-            </a:r>
-            <a:endParaRPr lang="en-US" sz="1600" dirty="0"/>
-          </a:p>
-        </p:txBody>
-      </p:sp>
-      <p:sp>
-        <p:nvSpPr>
-          <p:cNvPr id="15" name="Text 13"/>
-          <p:cNvSpPr txBox="1"/>
-          <p:nvPr/>
-        </p:nvSpPr>
-        <p:spPr>
-          <a:xfrm>
-            <a:off x="5321808" y="2670048"/>
-            <a:ext cx="3044952" cy="676656"/>
-          </a:xfrm>
-          <a:prstGeom prst="rect">
-            <a:avLst/>
-          </a:prstGeom>
-          <a:noFill/>
-          <a:ln/>
-        </p:spPr>
-        <p:txBody>
-          <a:bodyPr wrap="square" lIns="25400" tIns="25400" rIns="25400" bIns="25400" rtlCol="0" anchor="ctr"/>
-          <a:lstStyle/>
-          <a:p>
-            <a:pPr algn="l" indent="0" marL="0">
-              <a:lnSpc>
-                <a:spcPct val="100000"/>
-              </a:lnSpc>
-              <a:buNone/>
-            </a:pPr>
-            <a:r>
-              <a:rPr lang="en-US" sz="1400" dirty="0">
-                <a:solidFill>
-                  <a:srgbClr val="5B6770"/>
-                </a:solidFill>
-                <a:latin typeface="Calibri" pitchFamily="34" charset="0"/>
-                <a:ea typeface="Calibri" pitchFamily="34" charset="-122"/>
-                <a:cs typeface="Calibri" pitchFamily="34" charset="-120"/>
-              </a:rPr>
-              <a:t>Nada: as ideias determinam a economia</a:t>
-            </a:r>
-            <a:endParaRPr lang="en-US" sz="1400" dirty="0"/>
-          </a:p>
-        </p:txBody>
-      </p:sp>
-      <p:sp>
-        <p:nvSpPr>
-          <p:cNvPr id="16" name="Text 14"/>
-          <p:cNvSpPr txBox="1"/>
-          <p:nvPr/>
-        </p:nvSpPr>
-        <p:spPr>
-          <a:xfrm>
-            <a:off x="685800" y="3566160"/>
-            <a:ext cx="7772400" cy="841248"/>
-          </a:xfrm>
-          <a:prstGeom prst="roundRect">
-            <a:avLst>
-              <a:gd name="adj" fmla="val 8696"/>
-            </a:avLst>
-          </a:prstGeom>
-          <a:solidFill>
-            <a:srgbClr val="E6F2F0"/>
-          </a:solidFill>
-          <a:ln/>
-        </p:spPr>
-        <p:txBody>
-          <a:bodyPr wrap="square" lIns="114300" tIns="114300" rIns="114300" bIns="114300" rtlCol="0" anchor="ctr"/>
-          <a:lstStyle/>
-          <a:p>
-            <a:pPr algn="l" indent="0" marL="0">
-              <a:lnSpc>
-                <a:spcPct val="100000"/>
-              </a:lnSpc>
-              <a:buNone/>
-            </a:pPr>
-            <a:r>
-              <a:rPr lang="en-US" sz="1350" b="1" dirty="0">
-                <a:solidFill>
-                  <a:srgbClr val="2E7D4F"/>
-                </a:solidFill>
-                <a:latin typeface="Calibri" pitchFamily="34" charset="0"/>
-                <a:ea typeface="Calibri" pitchFamily="34" charset="-122"/>
-                <a:cs typeface="Calibri" pitchFamily="34" charset="-120"/>
-              </a:rPr>
-              <a:t>Resposta: a) </a:t>
-            </a:r>
-            <a:pPr algn="l" indent="0" marL="0">
-              <a:lnSpc>
-                <a:spcPct val="100000"/>
-              </a:lnSpc>
-              <a:buNone/>
-            </a:pPr>
-            <a:r>
-              <a:rPr lang="en-US" sz="1350" dirty="0">
-                <a:solidFill>
-                  <a:srgbClr val="1F2A37"/>
-                </a:solidFill>
-                <a:latin typeface="Calibri" pitchFamily="34" charset="0"/>
-                <a:ea typeface="Calibri" pitchFamily="34" charset="-122"/>
-                <a:cs typeface="Calibri" pitchFamily="34" charset="-120"/>
-              </a:rPr>
-              <a:t>É a tese do materialismo histórico: Estado, Direito e ideologias se apoiam na base econômica.</a:t>
-            </a:r>
-            <a:endParaRPr lang="en-US" sz="1350" dirty="0"/>
-          </a:p>
-        </p:txBody>
-      </p:sp>
-      <p:sp>
-        <p:nvSpPr>
-          <p:cNvPr id="17" name="Text 15"/>
-          <p:cNvSpPr txBox="1"/>
-          <p:nvPr/>
-        </p:nvSpPr>
-        <p:spPr>
-          <a:xfrm>
-            <a:off x="4206240" y="36576"/>
-            <a:ext cx="4800600" cy="219456"/>
-          </a:xfrm>
-          <a:prstGeom prst="rect">
-            <a:avLst/>
-          </a:prstGeom>
-          <a:noFill/>
-          <a:ln/>
-        </p:spPr>
-        <p:txBody>
-          <a:bodyPr wrap="square" lIns="0" tIns="0" rIns="0" bIns="0" rtlCol="0" anchor="ctr"/>
-          <a:lstStyle/>
-          <a:p>
-            <a:pPr algn="r" indent="0" marL="0">
-              <a:lnSpc>
-                <a:spcPct val="100000"/>
-              </a:lnSpc>
-              <a:buNone/>
-            </a:pPr>
-            <a:r>
-              <a:rPr lang="en-US" sz="950" dirty="0">
-                <a:solidFill>
-                  <a:srgbClr val="5B6770"/>
-                </a:solidFill>
-                <a:latin typeface="Calibri" pitchFamily="34" charset="0"/>
-                <a:ea typeface="Calibri" pitchFamily="34" charset="-122"/>
-                <a:cs typeface="Calibri" pitchFamily="34" charset="-120"/>
-              </a:rPr>
-              <a:t>Estado, Governo e Mercado · Unidade 3</a:t>
-            </a:r>
-            <a:endParaRPr lang="en-US" sz="950" dirty="0"/>
-          </a:p>
-        </p:txBody>
-      </p:sp>
-    </p:spTree>
-  </p:cSld>
-  <p:clrMapOvr>
-    <a:masterClrMapping/>
-  </p:clrMapOvr>
-</p:sld>
-</file>
-
-<file path=ppt/slides/slide22.xml><?xml version="1.0" encoding="utf-8"?>
-<p:sld xmlns:a="http://schemas.openxmlformats.org/drawingml/2006/main" xmlns:r="http://schemas.openxmlformats.org/officeDocument/2006/relationships" xmlns:p="http://schemas.openxmlformats.org/presentationml/2006/main">
-  <p:cSld name="Slide 22">
-    <p:bg>
-      <p:bgPr>
-        <a:blipFill dpi="0" rotWithShape="1">
-          <a:blip r:embed="rId1">
-            <a:lum/>
-          </a:blip>
-          <a:srcRect/>
-          <a:stretch>
-            <a:fillRect/>
-          </a:stretch>
-        </a:blipFill>
-        <a:effectLst/>
-      </p:bgPr>
-    </p:bg>
-    <p:spTree>
-      <p:nvGrpSpPr>
-        <p:cNvPr id="1" name=""/>
-        <p:cNvGrpSpPr/>
-        <p:nvPr/>
-      </p:nvGrpSpPr>
-      <p:grpSpPr>
-        <a:xfrm>
-          <a:off x="0" y="0"/>
-          <a:ext cx="0" cy="0"/>
-          <a:chOff x="0" y="0"/>
-          <a:chExt cx="0" cy="0"/>
-        </a:xfrm>
-      </p:grpSpPr>
-      <p:sp>
-        <p:nvSpPr>
-          <p:cNvPr id="2" name="Text 0"/>
-          <p:cNvSpPr txBox="1"/>
-          <p:nvPr/>
-        </p:nvSpPr>
-        <p:spPr>
-          <a:xfrm>
-            <a:off x="731520" y="274320"/>
-            <a:ext cx="7680960" cy="365760"/>
-          </a:xfrm>
-          <a:prstGeom prst="rect">
-            <a:avLst/>
-          </a:prstGeom>
-          <a:noFill/>
-          <a:ln/>
-        </p:spPr>
-        <p:txBody>
-          <a:bodyPr wrap="square" lIns="0" tIns="0" rIns="0" bIns="0" rtlCol="0" anchor="ctr"/>
-          <a:lstStyle/>
-          <a:p>
-            <a:pPr algn="ctr" indent="0" marL="0">
-              <a:lnSpc>
-                <a:spcPct val="100000"/>
-              </a:lnSpc>
-              <a:buNone/>
-            </a:pPr>
-            <a:r>
-              <a:rPr lang="en-US" sz="1250" b="1" dirty="0">
-                <a:solidFill>
-                  <a:srgbClr val="2A8C85"/>
-                </a:solidFill>
-                <a:latin typeface="Calibri" pitchFamily="34" charset="0"/>
-                <a:ea typeface="Calibri" pitchFamily="34" charset="-122"/>
-                <a:cs typeface="Calibri" pitchFamily="34" charset="-120"/>
-              </a:rPr>
-              <a:t>QUIZ DA UNIDADE 3 · PERGUNTA 2 DE 5</a:t>
-            </a:r>
-            <a:endParaRPr lang="en-US" sz="1250" dirty="0"/>
-          </a:p>
-        </p:txBody>
-      </p:sp>
-      <p:sp>
-        <p:nvSpPr>
-          <p:cNvPr id="3" name="Text 1"/>
-          <p:cNvSpPr txBox="1"/>
-          <p:nvPr/>
-        </p:nvSpPr>
-        <p:spPr>
-          <a:xfrm>
-            <a:off x="731520" y="658368"/>
-            <a:ext cx="7680960" cy="960120"/>
-          </a:xfrm>
-          <a:prstGeom prst="rect">
-            <a:avLst/>
-          </a:prstGeom>
-          <a:noFill/>
-          <a:ln/>
-        </p:spPr>
-        <p:txBody>
-          <a:bodyPr wrap="square" lIns="0" tIns="0" rIns="0" bIns="0" rtlCol="0" anchor="ctr"/>
-          <a:lstStyle/>
-          <a:p>
-            <a:pPr algn="ctr" indent="0" marL="0">
-              <a:lnSpc>
-                <a:spcPct val="100000"/>
-              </a:lnSpc>
-              <a:buNone/>
-            </a:pPr>
-            <a:r>
-              <a:rPr lang="en-US" sz="1900" b="1" dirty="0">
-                <a:solidFill>
-                  <a:srgbClr val="13294B"/>
-                </a:solidFill>
-                <a:latin typeface="Calibri" pitchFamily="34" charset="0"/>
-                <a:ea typeface="Calibri" pitchFamily="34" charset="-122"/>
-                <a:cs typeface="Calibri" pitchFamily="34" charset="-120"/>
-              </a:rPr>
-              <a:t>Numa jornada de 8 horas, o trabalhador produz em 4 horas o valor do seu salário. As outras 4 horas geram:</a:t>
-            </a:r>
-            <a:endParaRPr lang="en-US" sz="1900" dirty="0"/>
-          </a:p>
-        </p:txBody>
-      </p:sp>
-      <p:sp>
-        <p:nvSpPr>
-          <p:cNvPr id="4" name="Shape 2"/>
-          <p:cNvSpPr/>
-          <p:nvPr/>
-        </p:nvSpPr>
-        <p:spPr>
-          <a:xfrm>
-            <a:off x="685800" y="1737360"/>
-            <a:ext cx="3794760" cy="914400"/>
-          </a:xfrm>
-          <a:prstGeom prst="roundRect">
-            <a:avLst>
-              <a:gd name="adj" fmla="val 8000"/>
-            </a:avLst>
-          </a:prstGeom>
-          <a:solidFill>
-            <a:srgbClr val="FFFFFF"/>
-          </a:solidFill>
-          <a:ln w="12700">
-            <a:solidFill>
-              <a:srgbClr val="DCD5C1"/>
-            </a:solidFill>
-            <a:prstDash val="solid"/>
-          </a:ln>
-        </p:spPr>
-      </p:sp>
-      <p:sp>
-        <p:nvSpPr>
-          <p:cNvPr id="5" name="Text 3"/>
-          <p:cNvSpPr txBox="1"/>
-          <p:nvPr/>
-        </p:nvSpPr>
-        <p:spPr>
-          <a:xfrm>
-            <a:off x="813816" y="1984248"/>
-            <a:ext cx="420624" cy="420624"/>
-          </a:xfrm>
-          <a:prstGeom prst="roundRect">
-            <a:avLst>
-              <a:gd name="adj" fmla="val 50000"/>
-            </a:avLst>
-          </a:prstGeom>
-          <a:solidFill>
-            <a:srgbClr val="13294B"/>
-          </a:solidFill>
-          <a:ln/>
-        </p:spPr>
-        <p:txBody>
-          <a:bodyPr wrap="square" lIns="0" tIns="0" rIns="0" bIns="0" rtlCol="0" anchor="ctr"/>
-          <a:lstStyle/>
-          <a:p>
-            <a:pPr algn="ctr" indent="0" marL="0">
-              <a:lnSpc>
-                <a:spcPct val="100000"/>
-              </a:lnSpc>
-              <a:buNone/>
-            </a:pPr>
-            <a:r>
-              <a:rPr lang="en-US" sz="1600" b="1" dirty="0">
-                <a:solidFill>
-                  <a:srgbClr val="FFFFFF"/>
-                </a:solidFill>
-                <a:latin typeface="Calibri" pitchFamily="34" charset="0"/>
-                <a:ea typeface="Calibri" pitchFamily="34" charset="-122"/>
-                <a:cs typeface="Calibri" pitchFamily="34" charset="-120"/>
-              </a:rPr>
-              <a:t>a</a:t>
-            </a:r>
-            <a:endParaRPr lang="en-US" sz="1600" dirty="0"/>
-          </a:p>
-        </p:txBody>
-      </p:sp>
-      <p:sp>
-        <p:nvSpPr>
-          <p:cNvPr id="6" name="Text 4"/>
-          <p:cNvSpPr txBox="1"/>
-          <p:nvPr/>
-        </p:nvSpPr>
-        <p:spPr>
-          <a:xfrm>
-            <a:off x="1344168" y="1773936"/>
-            <a:ext cx="3044952" cy="841248"/>
-          </a:xfrm>
-          <a:prstGeom prst="rect">
-            <a:avLst/>
-          </a:prstGeom>
-          <a:noFill/>
-          <a:ln/>
-        </p:spPr>
-        <p:txBody>
-          <a:bodyPr wrap="square" lIns="25400" tIns="25400" rIns="25400" bIns="25400" rtlCol="0" anchor="ctr"/>
-          <a:lstStyle/>
-          <a:p>
-            <a:pPr algn="l" indent="0" marL="0">
-              <a:lnSpc>
-                <a:spcPct val="100000"/>
-              </a:lnSpc>
-              <a:buNone/>
-            </a:pPr>
-            <a:r>
-              <a:rPr lang="en-US" sz="1400" dirty="0">
-                <a:solidFill>
-                  <a:srgbClr val="1F2A37"/>
-                </a:solidFill>
-                <a:latin typeface="Calibri" pitchFamily="34" charset="0"/>
-                <a:ea typeface="Calibri" pitchFamily="34" charset="-122"/>
-                <a:cs typeface="Calibri" pitchFamily="34" charset="-120"/>
-              </a:rPr>
-              <a:t>Salário</a:t>
-            </a:r>
-            <a:endParaRPr lang="en-US" sz="1400" dirty="0"/>
-          </a:p>
-        </p:txBody>
-      </p:sp>
-      <p:sp>
-        <p:nvSpPr>
-          <p:cNvPr id="7" name="Shape 5"/>
-          <p:cNvSpPr/>
-          <p:nvPr/>
-        </p:nvSpPr>
-        <p:spPr>
-          <a:xfrm>
-            <a:off x="4663440" y="1737360"/>
-            <a:ext cx="3794760" cy="914400"/>
-          </a:xfrm>
-          <a:prstGeom prst="roundRect">
-            <a:avLst>
-              <a:gd name="adj" fmla="val 8000"/>
-            </a:avLst>
-          </a:prstGeom>
-          <a:solidFill>
-            <a:srgbClr val="FFFFFF"/>
-          </a:solidFill>
-          <a:ln w="12700">
-            <a:solidFill>
-              <a:srgbClr val="DCD5C1"/>
-            </a:solidFill>
-            <a:prstDash val="solid"/>
-          </a:ln>
-        </p:spPr>
-      </p:sp>
-      <p:sp>
-        <p:nvSpPr>
-          <p:cNvPr id="8" name="Text 6"/>
-          <p:cNvSpPr txBox="1"/>
-          <p:nvPr/>
-        </p:nvSpPr>
-        <p:spPr>
-          <a:xfrm>
-            <a:off x="4791456" y="1984248"/>
-            <a:ext cx="420624" cy="420624"/>
-          </a:xfrm>
-          <a:prstGeom prst="roundRect">
-            <a:avLst>
-              <a:gd name="adj" fmla="val 50000"/>
-            </a:avLst>
-          </a:prstGeom>
-          <a:solidFill>
-            <a:srgbClr val="13294B"/>
-          </a:solidFill>
-          <a:ln/>
-        </p:spPr>
-        <p:txBody>
-          <a:bodyPr wrap="square" lIns="0" tIns="0" rIns="0" bIns="0" rtlCol="0" anchor="ctr"/>
-          <a:lstStyle/>
-          <a:p>
-            <a:pPr algn="ctr" indent="0" marL="0">
-              <a:lnSpc>
-                <a:spcPct val="100000"/>
-              </a:lnSpc>
-              <a:buNone/>
-            </a:pPr>
-            <a:r>
-              <a:rPr lang="en-US" sz="1600" b="1" dirty="0">
-                <a:solidFill>
-                  <a:srgbClr val="FFFFFF"/>
-                </a:solidFill>
-                <a:latin typeface="Calibri" pitchFamily="34" charset="0"/>
-                <a:ea typeface="Calibri" pitchFamily="34" charset="-122"/>
-                <a:cs typeface="Calibri" pitchFamily="34" charset="-120"/>
-              </a:rPr>
-              <a:t>b</a:t>
-            </a:r>
-            <a:endParaRPr lang="en-US" sz="1600" dirty="0"/>
-          </a:p>
-        </p:txBody>
-      </p:sp>
-      <p:sp>
-        <p:nvSpPr>
-          <p:cNvPr id="9" name="Text 7"/>
-          <p:cNvSpPr txBox="1"/>
-          <p:nvPr/>
-        </p:nvSpPr>
-        <p:spPr>
-          <a:xfrm>
-            <a:off x="5321808" y="1773936"/>
-            <a:ext cx="3044952" cy="841248"/>
-          </a:xfrm>
-          <a:prstGeom prst="rect">
-            <a:avLst/>
-          </a:prstGeom>
-          <a:noFill/>
-          <a:ln/>
-        </p:spPr>
-        <p:txBody>
-          <a:bodyPr wrap="square" lIns="25400" tIns="25400" rIns="25400" bIns="25400" rtlCol="0" anchor="ctr"/>
-          <a:lstStyle/>
-          <a:p>
-            <a:pPr algn="l" indent="0" marL="0">
-              <a:lnSpc>
-                <a:spcPct val="100000"/>
-              </a:lnSpc>
-              <a:buNone/>
-            </a:pPr>
-            <a:r>
-              <a:rPr lang="en-US" sz="1400" dirty="0">
-                <a:solidFill>
-                  <a:srgbClr val="1F2A37"/>
-                </a:solidFill>
-                <a:latin typeface="Calibri" pitchFamily="34" charset="0"/>
-                <a:ea typeface="Calibri" pitchFamily="34" charset="-122"/>
-                <a:cs typeface="Calibri" pitchFamily="34" charset="-120"/>
-              </a:rPr>
-              <a:t>Mais-valia</a:t>
-            </a:r>
-            <a:endParaRPr lang="en-US" sz="1400" dirty="0"/>
-          </a:p>
-        </p:txBody>
-      </p:sp>
-      <p:sp>
-        <p:nvSpPr>
-          <p:cNvPr id="10" name="Shape 8"/>
-          <p:cNvSpPr/>
-          <p:nvPr/>
-        </p:nvSpPr>
-        <p:spPr>
-          <a:xfrm>
-            <a:off x="685800" y="2798064"/>
-            <a:ext cx="3794760" cy="914400"/>
-          </a:xfrm>
-          <a:prstGeom prst="roundRect">
-            <a:avLst>
-              <a:gd name="adj" fmla="val 8000"/>
-            </a:avLst>
-          </a:prstGeom>
-          <a:solidFill>
-            <a:srgbClr val="FFFFFF"/>
-          </a:solidFill>
-          <a:ln w="12700">
-            <a:solidFill>
-              <a:srgbClr val="DCD5C1"/>
-            </a:solidFill>
-            <a:prstDash val="solid"/>
-          </a:ln>
-        </p:spPr>
-      </p:sp>
-      <p:sp>
-        <p:nvSpPr>
-          <p:cNvPr id="11" name="Text 9"/>
-          <p:cNvSpPr txBox="1"/>
-          <p:nvPr/>
-        </p:nvSpPr>
-        <p:spPr>
-          <a:xfrm>
-            <a:off x="813816" y="3044952"/>
-            <a:ext cx="420624" cy="420624"/>
-          </a:xfrm>
-          <a:prstGeom prst="roundRect">
-            <a:avLst>
-              <a:gd name="adj" fmla="val 50000"/>
-            </a:avLst>
-          </a:prstGeom>
-          <a:solidFill>
-            <a:srgbClr val="13294B"/>
-          </a:solidFill>
-          <a:ln/>
-        </p:spPr>
-        <p:txBody>
-          <a:bodyPr wrap="square" lIns="0" tIns="0" rIns="0" bIns="0" rtlCol="0" anchor="ctr"/>
-          <a:lstStyle/>
-          <a:p>
-            <a:pPr algn="ctr" indent="0" marL="0">
-              <a:lnSpc>
-                <a:spcPct val="100000"/>
-              </a:lnSpc>
-              <a:buNone/>
-            </a:pPr>
-            <a:r>
-              <a:rPr lang="en-US" sz="1600" b="1" dirty="0">
-                <a:solidFill>
-                  <a:srgbClr val="FFFFFF"/>
-                </a:solidFill>
-                <a:latin typeface="Calibri" pitchFamily="34" charset="0"/>
-                <a:ea typeface="Calibri" pitchFamily="34" charset="-122"/>
-                <a:cs typeface="Calibri" pitchFamily="34" charset="-120"/>
-              </a:rPr>
-              <a:t>c</a:t>
-            </a:r>
-            <a:endParaRPr lang="en-US" sz="1600" dirty="0"/>
-          </a:p>
-        </p:txBody>
-      </p:sp>
-      <p:sp>
-        <p:nvSpPr>
-          <p:cNvPr id="12" name="Text 10"/>
-          <p:cNvSpPr txBox="1"/>
-          <p:nvPr/>
-        </p:nvSpPr>
-        <p:spPr>
-          <a:xfrm>
-            <a:off x="1344168" y="2834640"/>
-            <a:ext cx="3044952" cy="841248"/>
-          </a:xfrm>
-          <a:prstGeom prst="rect">
-            <a:avLst/>
-          </a:prstGeom>
-          <a:noFill/>
-          <a:ln/>
-        </p:spPr>
-        <p:txBody>
-          <a:bodyPr wrap="square" lIns="25400" tIns="25400" rIns="25400" bIns="25400" rtlCol="0" anchor="ctr"/>
-          <a:lstStyle/>
-          <a:p>
-            <a:pPr algn="l" indent="0" marL="0">
-              <a:lnSpc>
-                <a:spcPct val="100000"/>
-              </a:lnSpc>
-              <a:buNone/>
-            </a:pPr>
-            <a:r>
-              <a:rPr lang="en-US" sz="1400" dirty="0">
-                <a:solidFill>
-                  <a:srgbClr val="1F2A37"/>
-                </a:solidFill>
-                <a:latin typeface="Calibri" pitchFamily="34" charset="0"/>
-                <a:ea typeface="Calibri" pitchFamily="34" charset="-122"/>
-                <a:cs typeface="Calibri" pitchFamily="34" charset="-120"/>
-              </a:rPr>
-              <a:t>Juros</a:t>
-            </a:r>
-            <a:endParaRPr lang="en-US" sz="1400" dirty="0"/>
-          </a:p>
-        </p:txBody>
-      </p:sp>
-      <p:sp>
-        <p:nvSpPr>
-          <p:cNvPr id="13" name="Shape 11"/>
-          <p:cNvSpPr/>
-          <p:nvPr/>
-        </p:nvSpPr>
-        <p:spPr>
-          <a:xfrm>
-            <a:off x="4663440" y="2798064"/>
-            <a:ext cx="3794760" cy="914400"/>
-          </a:xfrm>
-          <a:prstGeom prst="roundRect">
-            <a:avLst>
-              <a:gd name="adj" fmla="val 8000"/>
-            </a:avLst>
-          </a:prstGeom>
-          <a:solidFill>
-            <a:srgbClr val="FFFFFF"/>
-          </a:solidFill>
-          <a:ln w="12700">
-            <a:solidFill>
-              <a:srgbClr val="DCD5C1"/>
-            </a:solidFill>
-            <a:prstDash val="solid"/>
-          </a:ln>
-        </p:spPr>
-      </p:sp>
-      <p:sp>
-        <p:nvSpPr>
-          <p:cNvPr id="14" name="Text 12"/>
-          <p:cNvSpPr txBox="1"/>
-          <p:nvPr/>
-        </p:nvSpPr>
-        <p:spPr>
-          <a:xfrm>
-            <a:off x="4791456" y="3044952"/>
-            <a:ext cx="420624" cy="420624"/>
-          </a:xfrm>
-          <a:prstGeom prst="roundRect">
-            <a:avLst>
-              <a:gd name="adj" fmla="val 50000"/>
-            </a:avLst>
-          </a:prstGeom>
-          <a:solidFill>
-            <a:srgbClr val="13294B"/>
-          </a:solidFill>
-          <a:ln/>
-        </p:spPr>
-        <p:txBody>
-          <a:bodyPr wrap="square" lIns="0" tIns="0" rIns="0" bIns="0" rtlCol="0" anchor="ctr"/>
-          <a:lstStyle/>
-          <a:p>
-            <a:pPr algn="ctr" indent="0" marL="0">
-              <a:lnSpc>
-                <a:spcPct val="100000"/>
-              </a:lnSpc>
-              <a:buNone/>
-            </a:pPr>
-            <a:r>
-              <a:rPr lang="en-US" sz="1600" b="1" dirty="0">
-                <a:solidFill>
-                  <a:srgbClr val="FFFFFF"/>
-                </a:solidFill>
-                <a:latin typeface="Calibri" pitchFamily="34" charset="0"/>
-                <a:ea typeface="Calibri" pitchFamily="34" charset="-122"/>
-                <a:cs typeface="Calibri" pitchFamily="34" charset="-120"/>
-              </a:rPr>
-              <a:t>d</a:t>
-            </a:r>
-            <a:endParaRPr lang="en-US" sz="1600" dirty="0"/>
-          </a:p>
-        </p:txBody>
-      </p:sp>
-      <p:sp>
-        <p:nvSpPr>
-          <p:cNvPr id="15" name="Text 13"/>
-          <p:cNvSpPr txBox="1"/>
-          <p:nvPr/>
-        </p:nvSpPr>
-        <p:spPr>
-          <a:xfrm>
-            <a:off x="5321808" y="2834640"/>
-            <a:ext cx="3044952" cy="841248"/>
-          </a:xfrm>
-          <a:prstGeom prst="rect">
-            <a:avLst/>
-          </a:prstGeom>
-          <a:noFill/>
-          <a:ln/>
-        </p:spPr>
-        <p:txBody>
-          <a:bodyPr wrap="square" lIns="25400" tIns="25400" rIns="25400" bIns="25400" rtlCol="0" anchor="ctr"/>
-          <a:lstStyle/>
-          <a:p>
-            <a:pPr algn="l" indent="0" marL="0">
-              <a:lnSpc>
-                <a:spcPct val="100000"/>
-              </a:lnSpc>
-              <a:buNone/>
-            </a:pPr>
-            <a:r>
-              <a:rPr lang="en-US" sz="1400" dirty="0">
-                <a:solidFill>
-                  <a:srgbClr val="1F2A37"/>
-                </a:solidFill>
-                <a:latin typeface="Calibri" pitchFamily="34" charset="0"/>
-                <a:ea typeface="Calibri" pitchFamily="34" charset="-122"/>
-                <a:cs typeface="Calibri" pitchFamily="34" charset="-120"/>
-              </a:rPr>
-              <a:t>Aluguel</a:t>
-            </a:r>
-            <a:endParaRPr lang="en-US" sz="1400" dirty="0"/>
-          </a:p>
-        </p:txBody>
-      </p:sp>
-      <p:sp>
-        <p:nvSpPr>
-          <p:cNvPr id="16" name="Text 14"/>
-          <p:cNvSpPr txBox="1"/>
-          <p:nvPr/>
-        </p:nvSpPr>
-        <p:spPr>
-          <a:xfrm>
-            <a:off x="4206240" y="36576"/>
-            <a:ext cx="4800600" cy="219456"/>
-          </a:xfrm>
-          <a:prstGeom prst="rect">
-            <a:avLst/>
-          </a:prstGeom>
-          <a:noFill/>
-          <a:ln/>
-        </p:spPr>
-        <p:txBody>
-          <a:bodyPr wrap="square" lIns="0" tIns="0" rIns="0" bIns="0" rtlCol="0" anchor="ctr"/>
-          <a:lstStyle/>
-          <a:p>
-            <a:pPr algn="r" indent="0" marL="0">
-              <a:lnSpc>
-                <a:spcPct val="100000"/>
-              </a:lnSpc>
-              <a:buNone/>
-            </a:pPr>
-            <a:r>
-              <a:rPr lang="en-US" sz="950" dirty="0">
-                <a:solidFill>
-                  <a:srgbClr val="5B6770"/>
-                </a:solidFill>
-                <a:latin typeface="Calibri" pitchFamily="34" charset="0"/>
-                <a:ea typeface="Calibri" pitchFamily="34" charset="-122"/>
-                <a:cs typeface="Calibri" pitchFamily="34" charset="-120"/>
-              </a:rPr>
-              <a:t>Estado, Governo e Mercado · Unidade 3</a:t>
-            </a:r>
-            <a:endParaRPr lang="en-US" sz="950" dirty="0"/>
-          </a:p>
-        </p:txBody>
-      </p:sp>
-    </p:spTree>
-  </p:cSld>
-  <p:clrMapOvr>
-    <a:masterClrMapping/>
-  </p:clrMapOvr>
-</p:sld>
-</file>
-
-<file path=ppt/slides/slide23.xml><?xml version="1.0" encoding="utf-8"?>
-<p:sld xmlns:a="http://schemas.openxmlformats.org/drawingml/2006/main" xmlns:r="http://schemas.openxmlformats.org/officeDocument/2006/relationships" xmlns:p="http://schemas.openxmlformats.org/presentationml/2006/main">
-  <p:cSld name="Slide 23">
-    <p:bg>
-      <p:bgPr>
-        <a:blipFill dpi="0" rotWithShape="1">
-          <a:blip r:embed="rId1">
-            <a:lum/>
-          </a:blip>
-          <a:srcRect/>
-          <a:stretch>
-            <a:fillRect/>
-          </a:stretch>
-        </a:blipFill>
-        <a:effectLst/>
-      </p:bgPr>
-    </p:bg>
-    <p:spTree>
-      <p:nvGrpSpPr>
-        <p:cNvPr id="1" name=""/>
-        <p:cNvGrpSpPr/>
-        <p:nvPr/>
-      </p:nvGrpSpPr>
-      <p:grpSpPr>
-        <a:xfrm>
-          <a:off x="0" y="0"/>
-          <a:ext cx="0" cy="0"/>
-          <a:chOff x="0" y="0"/>
-          <a:chExt cx="0" cy="0"/>
-        </a:xfrm>
-      </p:grpSpPr>
-      <p:sp>
-        <p:nvSpPr>
-          <p:cNvPr id="2" name="Text 0"/>
-          <p:cNvSpPr txBox="1"/>
-          <p:nvPr/>
-        </p:nvSpPr>
-        <p:spPr>
-          <a:xfrm>
-            <a:off x="731520" y="274320"/>
-            <a:ext cx="7680960" cy="365760"/>
-          </a:xfrm>
-          <a:prstGeom prst="rect">
-            <a:avLst/>
-          </a:prstGeom>
-          <a:noFill/>
-          <a:ln/>
-        </p:spPr>
-        <p:txBody>
-          <a:bodyPr wrap="square" lIns="0" tIns="0" rIns="0" bIns="0" rtlCol="0" anchor="ctr"/>
-          <a:lstStyle/>
-          <a:p>
-            <a:pPr algn="ctr" indent="0" marL="0">
-              <a:lnSpc>
-                <a:spcPct val="100000"/>
-              </a:lnSpc>
-              <a:buNone/>
-            </a:pPr>
-            <a:r>
-              <a:rPr lang="en-US" sz="1250" b="1" dirty="0">
-                <a:solidFill>
-                  <a:srgbClr val="2A8C85"/>
-                </a:solidFill>
-                <a:latin typeface="Calibri" pitchFamily="34" charset="0"/>
-                <a:ea typeface="Calibri" pitchFamily="34" charset="-122"/>
-                <a:cs typeface="Calibri" pitchFamily="34" charset="-120"/>
-              </a:rPr>
-              <a:t>QUIZ DA UNIDADE 3 · PERGUNTA 2 DE 5 · RESPOSTA</a:t>
-            </a:r>
-            <a:endParaRPr lang="en-US" sz="1250" dirty="0"/>
-          </a:p>
-        </p:txBody>
-      </p:sp>
-      <p:sp>
-        <p:nvSpPr>
-          <p:cNvPr id="3" name="Text 1"/>
-          <p:cNvSpPr txBox="1"/>
-          <p:nvPr/>
-        </p:nvSpPr>
-        <p:spPr>
-          <a:xfrm>
-            <a:off x="731520" y="658368"/>
-            <a:ext cx="7680960" cy="960120"/>
-          </a:xfrm>
-          <a:prstGeom prst="rect">
-            <a:avLst/>
-          </a:prstGeom>
-          <a:noFill/>
-          <a:ln/>
-        </p:spPr>
-        <p:txBody>
-          <a:bodyPr wrap="square" lIns="0" tIns="0" rIns="0" bIns="0" rtlCol="0" anchor="ctr"/>
-          <a:lstStyle/>
-          <a:p>
-            <a:pPr algn="ctr" indent="0" marL="0">
-              <a:lnSpc>
-                <a:spcPct val="100000"/>
-              </a:lnSpc>
-              <a:buNone/>
-            </a:pPr>
-            <a:r>
-              <a:rPr lang="en-US" sz="1900" b="1" dirty="0">
-                <a:solidFill>
-                  <a:srgbClr val="13294B"/>
-                </a:solidFill>
-                <a:latin typeface="Calibri" pitchFamily="34" charset="0"/>
-                <a:ea typeface="Calibri" pitchFamily="34" charset="-122"/>
-                <a:cs typeface="Calibri" pitchFamily="34" charset="-120"/>
-              </a:rPr>
-              <a:t>Numa jornada de 8 horas, o trabalhador produz em 4 horas o valor do seu salário. As outras 4 horas geram:</a:t>
-            </a:r>
-            <a:endParaRPr lang="en-US" sz="1900" dirty="0"/>
-          </a:p>
-        </p:txBody>
-      </p:sp>
-      <p:sp>
-        <p:nvSpPr>
-          <p:cNvPr id="4" name="Shape 2"/>
-          <p:cNvSpPr/>
-          <p:nvPr/>
-        </p:nvSpPr>
-        <p:spPr>
-          <a:xfrm>
-            <a:off x="685800" y="1737360"/>
-            <a:ext cx="3794760" cy="749808"/>
-          </a:xfrm>
-          <a:prstGeom prst="roundRect">
-            <a:avLst>
-              <a:gd name="adj" fmla="val 9756"/>
-            </a:avLst>
-          </a:prstGeom>
-          <a:solidFill>
-            <a:srgbClr val="FFFFFF"/>
-          </a:solidFill>
-          <a:ln w="12700">
-            <a:solidFill>
-              <a:srgbClr val="DCD5C1"/>
-            </a:solidFill>
-            <a:prstDash val="solid"/>
-          </a:ln>
-        </p:spPr>
-      </p:sp>
-      <p:sp>
-        <p:nvSpPr>
-          <p:cNvPr id="5" name="Text 3"/>
-          <p:cNvSpPr txBox="1"/>
-          <p:nvPr/>
-        </p:nvSpPr>
-        <p:spPr>
-          <a:xfrm>
-            <a:off x="813816" y="1901952"/>
-            <a:ext cx="420624" cy="420624"/>
-          </a:xfrm>
-          <a:prstGeom prst="roundRect">
-            <a:avLst>
-              <a:gd name="adj" fmla="val 50000"/>
-            </a:avLst>
-          </a:prstGeom>
-          <a:solidFill>
-            <a:srgbClr val="9AA3AB"/>
-          </a:solidFill>
-          <a:ln/>
-        </p:spPr>
-        <p:txBody>
-          <a:bodyPr wrap="square" lIns="0" tIns="0" rIns="0" bIns="0" rtlCol="0" anchor="ctr"/>
-          <a:lstStyle/>
-          <a:p>
-            <a:pPr algn="ctr" indent="0" marL="0">
-              <a:lnSpc>
-                <a:spcPct val="100000"/>
-              </a:lnSpc>
-              <a:buNone/>
-            </a:pPr>
-            <a:r>
-              <a:rPr lang="en-US" sz="1600" b="1" dirty="0">
-                <a:solidFill>
-                  <a:srgbClr val="FFFFFF"/>
-                </a:solidFill>
-                <a:latin typeface="Calibri" pitchFamily="34" charset="0"/>
-                <a:ea typeface="Calibri" pitchFamily="34" charset="-122"/>
-                <a:cs typeface="Calibri" pitchFamily="34" charset="-120"/>
-              </a:rPr>
-              <a:t>a</a:t>
-            </a:r>
-            <a:endParaRPr lang="en-US" sz="1600" dirty="0"/>
-          </a:p>
-        </p:txBody>
-      </p:sp>
-      <p:sp>
-        <p:nvSpPr>
-          <p:cNvPr id="6" name="Text 4"/>
-          <p:cNvSpPr txBox="1"/>
-          <p:nvPr/>
-        </p:nvSpPr>
-        <p:spPr>
-          <a:xfrm>
-            <a:off x="1344168" y="1773936"/>
-            <a:ext cx="3044952" cy="676656"/>
-          </a:xfrm>
-          <a:prstGeom prst="rect">
-            <a:avLst/>
-          </a:prstGeom>
-          <a:noFill/>
-          <a:ln/>
-        </p:spPr>
-        <p:txBody>
-          <a:bodyPr wrap="square" lIns="25400" tIns="25400" rIns="25400" bIns="25400" rtlCol="0" anchor="ctr"/>
-          <a:lstStyle/>
-          <a:p>
-            <a:pPr algn="l" indent="0" marL="0">
-              <a:lnSpc>
-                <a:spcPct val="100000"/>
-              </a:lnSpc>
-              <a:buNone/>
-            </a:pPr>
-            <a:r>
-              <a:rPr lang="en-US" sz="1400" dirty="0">
-                <a:solidFill>
-                  <a:srgbClr val="5B6770"/>
-                </a:solidFill>
-                <a:latin typeface="Calibri" pitchFamily="34" charset="0"/>
-                <a:ea typeface="Calibri" pitchFamily="34" charset="-122"/>
-                <a:cs typeface="Calibri" pitchFamily="34" charset="-120"/>
-              </a:rPr>
-              <a:t>Salário</a:t>
-            </a:r>
-            <a:endParaRPr lang="en-US" sz="1400" dirty="0"/>
-          </a:p>
-        </p:txBody>
-      </p:sp>
-      <p:sp>
-        <p:nvSpPr>
-          <p:cNvPr id="7" name="Shape 5"/>
-          <p:cNvSpPr/>
-          <p:nvPr/>
-        </p:nvSpPr>
-        <p:spPr>
-          <a:xfrm>
-            <a:off x="4663440" y="1737360"/>
-            <a:ext cx="3794760" cy="749808"/>
-          </a:xfrm>
-          <a:prstGeom prst="roundRect">
-            <a:avLst>
-              <a:gd name="adj" fmla="val 9756"/>
-            </a:avLst>
-          </a:prstGeom>
-          <a:solidFill>
-            <a:srgbClr val="E3F2E8"/>
-          </a:solidFill>
-          <a:ln w="25400">
-            <a:solidFill>
-              <a:srgbClr val="2E7D4F"/>
-            </a:solidFill>
-            <a:prstDash val="solid"/>
-          </a:ln>
-        </p:spPr>
-      </p:sp>
-      <p:sp>
-        <p:nvSpPr>
-          <p:cNvPr id="8" name="Text 6"/>
-          <p:cNvSpPr txBox="1"/>
-          <p:nvPr/>
-        </p:nvSpPr>
-        <p:spPr>
-          <a:xfrm>
-            <a:off x="4791456" y="1901952"/>
-            <a:ext cx="420624" cy="420624"/>
-          </a:xfrm>
-          <a:prstGeom prst="roundRect">
-            <a:avLst>
-              <a:gd name="adj" fmla="val 50000"/>
-            </a:avLst>
-          </a:prstGeom>
-          <a:solidFill>
-            <a:srgbClr val="2E7D4F"/>
-          </a:solidFill>
-          <a:ln/>
-        </p:spPr>
-        <p:txBody>
-          <a:bodyPr wrap="square" lIns="0" tIns="0" rIns="0" bIns="0" rtlCol="0" anchor="ctr"/>
-          <a:lstStyle/>
-          <a:p>
-            <a:pPr algn="ctr" indent="0" marL="0">
-              <a:lnSpc>
-                <a:spcPct val="100000"/>
-              </a:lnSpc>
-              <a:buNone/>
-            </a:pPr>
-            <a:r>
-              <a:rPr lang="en-US" sz="1600" b="1" dirty="0">
-                <a:solidFill>
-                  <a:srgbClr val="FFFFFF"/>
-                </a:solidFill>
-                <a:latin typeface="Calibri" pitchFamily="34" charset="0"/>
-                <a:ea typeface="Calibri" pitchFamily="34" charset="-122"/>
-                <a:cs typeface="Calibri" pitchFamily="34" charset="-120"/>
-              </a:rPr>
-              <a:t>b</a:t>
-            </a:r>
-            <a:endParaRPr lang="en-US" sz="1600" dirty="0"/>
-          </a:p>
-        </p:txBody>
-      </p:sp>
-      <p:sp>
-        <p:nvSpPr>
-          <p:cNvPr id="9" name="Text 7"/>
-          <p:cNvSpPr txBox="1"/>
-          <p:nvPr/>
-        </p:nvSpPr>
-        <p:spPr>
-          <a:xfrm>
-            <a:off x="5321808" y="1773936"/>
-            <a:ext cx="3044952" cy="676656"/>
-          </a:xfrm>
-          <a:prstGeom prst="rect">
-            <a:avLst/>
-          </a:prstGeom>
-          <a:noFill/>
-          <a:ln/>
-        </p:spPr>
-        <p:txBody>
-          <a:bodyPr wrap="square" lIns="25400" tIns="25400" rIns="25400" bIns="25400" rtlCol="0" anchor="ctr"/>
-          <a:lstStyle/>
-          <a:p>
-            <a:pPr algn="l" indent="0" marL="0">
-              <a:lnSpc>
-                <a:spcPct val="100000"/>
-              </a:lnSpc>
-              <a:buNone/>
-            </a:pPr>
-            <a:r>
-              <a:rPr lang="en-US" sz="1400" b="1" dirty="0">
-                <a:solidFill>
-                  <a:srgbClr val="1F2A37"/>
-                </a:solidFill>
-                <a:latin typeface="Calibri" pitchFamily="34" charset="0"/>
-                <a:ea typeface="Calibri" pitchFamily="34" charset="-122"/>
-                <a:cs typeface="Calibri" pitchFamily="34" charset="-120"/>
-              </a:rPr>
-              <a:t>Mais-valia</a:t>
-            </a:r>
-            <a:endParaRPr lang="en-US" sz="1400" dirty="0"/>
-          </a:p>
-        </p:txBody>
-      </p:sp>
-      <p:sp>
-        <p:nvSpPr>
-          <p:cNvPr id="10" name="Shape 8"/>
-          <p:cNvSpPr/>
-          <p:nvPr/>
-        </p:nvSpPr>
-        <p:spPr>
-          <a:xfrm>
-            <a:off x="685800" y="2633472"/>
-            <a:ext cx="3794760" cy="749808"/>
-          </a:xfrm>
-          <a:prstGeom prst="roundRect">
-            <a:avLst>
-              <a:gd name="adj" fmla="val 9756"/>
-            </a:avLst>
-          </a:prstGeom>
-          <a:solidFill>
-            <a:srgbClr val="FFFFFF"/>
-          </a:solidFill>
-          <a:ln w="12700">
-            <a:solidFill>
-              <a:srgbClr val="DCD5C1"/>
-            </a:solidFill>
-            <a:prstDash val="solid"/>
-          </a:ln>
-        </p:spPr>
-      </p:sp>
-      <p:sp>
-        <p:nvSpPr>
-          <p:cNvPr id="11" name="Text 9"/>
-          <p:cNvSpPr txBox="1"/>
-          <p:nvPr/>
-        </p:nvSpPr>
-        <p:spPr>
-          <a:xfrm>
-            <a:off x="813816" y="2798064"/>
-            <a:ext cx="420624" cy="420624"/>
-          </a:xfrm>
-          <a:prstGeom prst="roundRect">
-            <a:avLst>
-              <a:gd name="adj" fmla="val 50000"/>
-            </a:avLst>
-          </a:prstGeom>
-          <a:solidFill>
-            <a:srgbClr val="9AA3AB"/>
-          </a:solidFill>
-          <a:ln/>
-        </p:spPr>
-        <p:txBody>
-          <a:bodyPr wrap="square" lIns="0" tIns="0" rIns="0" bIns="0" rtlCol="0" anchor="ctr"/>
-          <a:lstStyle/>
-          <a:p>
-            <a:pPr algn="ctr" indent="0" marL="0">
-              <a:lnSpc>
-                <a:spcPct val="100000"/>
-              </a:lnSpc>
-              <a:buNone/>
-            </a:pPr>
-            <a:r>
-              <a:rPr lang="en-US" sz="1600" b="1" dirty="0">
-                <a:solidFill>
-                  <a:srgbClr val="FFFFFF"/>
-                </a:solidFill>
-                <a:latin typeface="Calibri" pitchFamily="34" charset="0"/>
-                <a:ea typeface="Calibri" pitchFamily="34" charset="-122"/>
-                <a:cs typeface="Calibri" pitchFamily="34" charset="-120"/>
-              </a:rPr>
-              <a:t>c</a:t>
-            </a:r>
-            <a:endParaRPr lang="en-US" sz="1600" dirty="0"/>
-          </a:p>
-        </p:txBody>
-      </p:sp>
-      <p:sp>
-        <p:nvSpPr>
-          <p:cNvPr id="12" name="Text 10"/>
-          <p:cNvSpPr txBox="1"/>
-          <p:nvPr/>
-        </p:nvSpPr>
-        <p:spPr>
-          <a:xfrm>
-            <a:off x="1344168" y="2670048"/>
-            <a:ext cx="3044952" cy="676656"/>
-          </a:xfrm>
-          <a:prstGeom prst="rect">
-            <a:avLst/>
-          </a:prstGeom>
-          <a:noFill/>
-          <a:ln/>
-        </p:spPr>
-        <p:txBody>
-          <a:bodyPr wrap="square" lIns="25400" tIns="25400" rIns="25400" bIns="25400" rtlCol="0" anchor="ctr"/>
-          <a:lstStyle/>
-          <a:p>
-            <a:pPr algn="l" indent="0" marL="0">
-              <a:lnSpc>
-                <a:spcPct val="100000"/>
-              </a:lnSpc>
-              <a:buNone/>
-            </a:pPr>
-            <a:r>
-              <a:rPr lang="en-US" sz="1400" dirty="0">
-                <a:solidFill>
-                  <a:srgbClr val="5B6770"/>
-                </a:solidFill>
-                <a:latin typeface="Calibri" pitchFamily="34" charset="0"/>
-                <a:ea typeface="Calibri" pitchFamily="34" charset="-122"/>
-                <a:cs typeface="Calibri" pitchFamily="34" charset="-120"/>
-              </a:rPr>
-              <a:t>Juros</a:t>
-            </a:r>
-            <a:endParaRPr lang="en-US" sz="1400" dirty="0"/>
-          </a:p>
-        </p:txBody>
-      </p:sp>
-      <p:sp>
-        <p:nvSpPr>
-          <p:cNvPr id="13" name="Shape 11"/>
-          <p:cNvSpPr/>
-          <p:nvPr/>
-        </p:nvSpPr>
-        <p:spPr>
-          <a:xfrm>
-            <a:off x="4663440" y="2633472"/>
-            <a:ext cx="3794760" cy="749808"/>
-          </a:xfrm>
-          <a:prstGeom prst="roundRect">
-            <a:avLst>
-              <a:gd name="adj" fmla="val 9756"/>
-            </a:avLst>
-          </a:prstGeom>
-          <a:solidFill>
-            <a:srgbClr val="FFFFFF"/>
-          </a:solidFill>
-          <a:ln w="12700">
-            <a:solidFill>
-              <a:srgbClr val="DCD5C1"/>
-            </a:solidFill>
-            <a:prstDash val="solid"/>
-          </a:ln>
-        </p:spPr>
-      </p:sp>
-      <p:sp>
-        <p:nvSpPr>
-          <p:cNvPr id="14" name="Text 12"/>
-          <p:cNvSpPr txBox="1"/>
-          <p:nvPr/>
-        </p:nvSpPr>
-        <p:spPr>
-          <a:xfrm>
-            <a:off x="4791456" y="2798064"/>
-            <a:ext cx="420624" cy="420624"/>
-          </a:xfrm>
-          <a:prstGeom prst="roundRect">
-            <a:avLst>
-              <a:gd name="adj" fmla="val 50000"/>
-            </a:avLst>
-          </a:prstGeom>
-          <a:solidFill>
-            <a:srgbClr val="9AA3AB"/>
-          </a:solidFill>
-          <a:ln/>
-        </p:spPr>
-        <p:txBody>
-          <a:bodyPr wrap="square" lIns="0" tIns="0" rIns="0" bIns="0" rtlCol="0" anchor="ctr"/>
-          <a:lstStyle/>
-          <a:p>
-            <a:pPr algn="ctr" indent="0" marL="0">
-              <a:lnSpc>
-                <a:spcPct val="100000"/>
-              </a:lnSpc>
-              <a:buNone/>
-            </a:pPr>
-            <a:r>
-              <a:rPr lang="en-US" sz="1600" b="1" dirty="0">
-                <a:solidFill>
-                  <a:srgbClr val="FFFFFF"/>
-                </a:solidFill>
-                <a:latin typeface="Calibri" pitchFamily="34" charset="0"/>
-                <a:ea typeface="Calibri" pitchFamily="34" charset="-122"/>
-                <a:cs typeface="Calibri" pitchFamily="34" charset="-120"/>
-              </a:rPr>
-              <a:t>d</a:t>
-            </a:r>
-            <a:endParaRPr lang="en-US" sz="1600" dirty="0"/>
-          </a:p>
-        </p:txBody>
-      </p:sp>
-      <p:sp>
-        <p:nvSpPr>
-          <p:cNvPr id="15" name="Text 13"/>
-          <p:cNvSpPr txBox="1"/>
-          <p:nvPr/>
-        </p:nvSpPr>
-        <p:spPr>
-          <a:xfrm>
-            <a:off x="5321808" y="2670048"/>
-            <a:ext cx="3044952" cy="676656"/>
-          </a:xfrm>
-          <a:prstGeom prst="rect">
-            <a:avLst/>
-          </a:prstGeom>
-          <a:noFill/>
-          <a:ln/>
-        </p:spPr>
-        <p:txBody>
-          <a:bodyPr wrap="square" lIns="25400" tIns="25400" rIns="25400" bIns="25400" rtlCol="0" anchor="ctr"/>
-          <a:lstStyle/>
-          <a:p>
-            <a:pPr algn="l" indent="0" marL="0">
-              <a:lnSpc>
-                <a:spcPct val="100000"/>
-              </a:lnSpc>
-              <a:buNone/>
-            </a:pPr>
-            <a:r>
-              <a:rPr lang="en-US" sz="1400" dirty="0">
-                <a:solidFill>
-                  <a:srgbClr val="5B6770"/>
-                </a:solidFill>
-                <a:latin typeface="Calibri" pitchFamily="34" charset="0"/>
-                <a:ea typeface="Calibri" pitchFamily="34" charset="-122"/>
-                <a:cs typeface="Calibri" pitchFamily="34" charset="-120"/>
-              </a:rPr>
-              <a:t>Aluguel</a:t>
-            </a:r>
-            <a:endParaRPr lang="en-US" sz="1400" dirty="0"/>
-          </a:p>
-        </p:txBody>
-      </p:sp>
-      <p:sp>
-        <p:nvSpPr>
-          <p:cNvPr id="16" name="Text 14"/>
-          <p:cNvSpPr txBox="1"/>
-          <p:nvPr/>
-        </p:nvSpPr>
-        <p:spPr>
-          <a:xfrm>
-            <a:off x="685800" y="3566160"/>
-            <a:ext cx="7772400" cy="841248"/>
-          </a:xfrm>
-          <a:prstGeom prst="roundRect">
-            <a:avLst>
-              <a:gd name="adj" fmla="val 8696"/>
-            </a:avLst>
-          </a:prstGeom>
-          <a:solidFill>
-            <a:srgbClr val="E6F2F0"/>
-          </a:solidFill>
-          <a:ln/>
-        </p:spPr>
-        <p:txBody>
-          <a:bodyPr wrap="square" lIns="114300" tIns="114300" rIns="114300" bIns="114300" rtlCol="0" anchor="ctr"/>
-          <a:lstStyle/>
-          <a:p>
-            <a:pPr algn="l" indent="0" marL="0">
-              <a:lnSpc>
-                <a:spcPct val="100000"/>
-              </a:lnSpc>
-              <a:buNone/>
-            </a:pPr>
-            <a:r>
-              <a:rPr lang="en-US" sz="1350" b="1" dirty="0">
-                <a:solidFill>
-                  <a:srgbClr val="2E7D4F"/>
-                </a:solidFill>
-                <a:latin typeface="Calibri" pitchFamily="34" charset="0"/>
-                <a:ea typeface="Calibri" pitchFamily="34" charset="-122"/>
-                <a:cs typeface="Calibri" pitchFamily="34" charset="-120"/>
-              </a:rPr>
-              <a:t>Resposta: b) </a:t>
-            </a:r>
-            <a:pPr algn="l" indent="0" marL="0">
-              <a:lnSpc>
-                <a:spcPct val="100000"/>
-              </a:lnSpc>
-              <a:buNone/>
-            </a:pPr>
-            <a:r>
-              <a:rPr lang="en-US" sz="1350" dirty="0">
-                <a:solidFill>
-                  <a:srgbClr val="1F2A37"/>
-                </a:solidFill>
-                <a:latin typeface="Calibri" pitchFamily="34" charset="0"/>
-                <a:ea typeface="Calibri" pitchFamily="34" charset="-122"/>
-                <a:cs typeface="Calibri" pitchFamily="34" charset="-120"/>
-              </a:rPr>
-              <a:t>O valor produzido no trabalho excedente é apropriado pelo capitalista: é a mais-valia, fonte do lucro.</a:t>
-            </a:r>
-            <a:endParaRPr lang="en-US" sz="1350" dirty="0"/>
-          </a:p>
-        </p:txBody>
-      </p:sp>
-      <p:sp>
-        <p:nvSpPr>
-          <p:cNvPr id="17" name="Text 15"/>
-          <p:cNvSpPr txBox="1"/>
-          <p:nvPr/>
-        </p:nvSpPr>
-        <p:spPr>
-          <a:xfrm>
-            <a:off x="4206240" y="36576"/>
-            <a:ext cx="4800600" cy="219456"/>
-          </a:xfrm>
-          <a:prstGeom prst="rect">
-            <a:avLst/>
-          </a:prstGeom>
-          <a:noFill/>
-          <a:ln/>
-        </p:spPr>
-        <p:txBody>
-          <a:bodyPr wrap="square" lIns="0" tIns="0" rIns="0" bIns="0" rtlCol="0" anchor="ctr"/>
-          <a:lstStyle/>
-          <a:p>
-            <a:pPr algn="r" indent="0" marL="0">
-              <a:lnSpc>
-                <a:spcPct val="100000"/>
-              </a:lnSpc>
-              <a:buNone/>
-            </a:pPr>
-            <a:r>
-              <a:rPr lang="en-US" sz="950" dirty="0">
-                <a:solidFill>
-                  <a:srgbClr val="5B6770"/>
-                </a:solidFill>
-                <a:latin typeface="Calibri" pitchFamily="34" charset="0"/>
-                <a:ea typeface="Calibri" pitchFamily="34" charset="-122"/>
-                <a:cs typeface="Calibri" pitchFamily="34" charset="-120"/>
-              </a:rPr>
-              <a:t>Estado, Governo e Mercado · Unidade 3</a:t>
-            </a:r>
-            <a:endParaRPr lang="en-US" sz="950" dirty="0"/>
-          </a:p>
-        </p:txBody>
-      </p:sp>
-    </p:spTree>
-  </p:cSld>
-  <p:clrMapOvr>
-    <a:masterClrMapping/>
-  </p:clrMapOvr>
-</p:sld>
-</file>
-
-<file path=ppt/slides/slide24.xml><?xml version="1.0" encoding="utf-8"?>
-<p:sld xmlns:a="http://schemas.openxmlformats.org/drawingml/2006/main" xmlns:r="http://schemas.openxmlformats.org/officeDocument/2006/relationships" xmlns:p="http://schemas.openxmlformats.org/presentationml/2006/main">
-  <p:cSld name="Slide 24">
-    <p:bg>
-      <p:bgPr>
-        <a:blipFill dpi="0" rotWithShape="1">
-          <a:blip r:embed="rId1">
-            <a:lum/>
-          </a:blip>
-          <a:srcRect/>
-          <a:stretch>
-            <a:fillRect/>
-          </a:stretch>
-        </a:blipFill>
-        <a:effectLst/>
-      </p:bgPr>
-    </p:bg>
-    <p:spTree>
-      <p:nvGrpSpPr>
-        <p:cNvPr id="1" name=""/>
-        <p:cNvGrpSpPr/>
-        <p:nvPr/>
-      </p:nvGrpSpPr>
-      <p:grpSpPr>
-        <a:xfrm>
-          <a:off x="0" y="0"/>
-          <a:ext cx="0" cy="0"/>
-          <a:chOff x="0" y="0"/>
-          <a:chExt cx="0" cy="0"/>
-        </a:xfrm>
-      </p:grpSpPr>
-      <p:sp>
-        <p:nvSpPr>
-          <p:cNvPr id="2" name="Text 0"/>
-          <p:cNvSpPr txBox="1"/>
-          <p:nvPr/>
-        </p:nvSpPr>
-        <p:spPr>
-          <a:xfrm>
-            <a:off x="731520" y="274320"/>
-            <a:ext cx="7680960" cy="365760"/>
-          </a:xfrm>
-          <a:prstGeom prst="rect">
-            <a:avLst/>
-          </a:prstGeom>
-          <a:noFill/>
-          <a:ln/>
-        </p:spPr>
-        <p:txBody>
-          <a:bodyPr wrap="square" lIns="0" tIns="0" rIns="0" bIns="0" rtlCol="0" anchor="ctr"/>
-          <a:lstStyle/>
-          <a:p>
-            <a:pPr algn="ctr" indent="0" marL="0">
-              <a:lnSpc>
-                <a:spcPct val="100000"/>
-              </a:lnSpc>
-              <a:buNone/>
-            </a:pPr>
-            <a:r>
-              <a:rPr lang="en-US" sz="1250" b="1" dirty="0">
-                <a:solidFill>
-                  <a:srgbClr val="2A8C85"/>
-                </a:solidFill>
-                <a:latin typeface="Calibri" pitchFamily="34" charset="0"/>
-                <a:ea typeface="Calibri" pitchFamily="34" charset="-122"/>
-                <a:cs typeface="Calibri" pitchFamily="34" charset="-120"/>
-              </a:rPr>
-              <a:t>QUIZ DA UNIDADE 3 · PERGUNTA 3 DE 5</a:t>
-            </a:r>
-            <a:endParaRPr lang="en-US" sz="1250" dirty="0"/>
-          </a:p>
-        </p:txBody>
-      </p:sp>
-      <p:sp>
-        <p:nvSpPr>
-          <p:cNvPr id="3" name="Text 1"/>
-          <p:cNvSpPr txBox="1"/>
-          <p:nvPr/>
-        </p:nvSpPr>
-        <p:spPr>
-          <a:xfrm>
-            <a:off x="731520" y="658368"/>
-            <a:ext cx="7680960" cy="960120"/>
-          </a:xfrm>
-          <a:prstGeom prst="rect">
-            <a:avLst/>
-          </a:prstGeom>
-          <a:noFill/>
-          <a:ln/>
-        </p:spPr>
-        <p:txBody>
-          <a:bodyPr wrap="square" lIns="0" tIns="0" rIns="0" bIns="0" rtlCol="0" anchor="ctr"/>
-          <a:lstStyle/>
-          <a:p>
-            <a:pPr algn="ctr" indent="0" marL="0">
-              <a:lnSpc>
-                <a:spcPct val="100000"/>
-              </a:lnSpc>
-              <a:buNone/>
-            </a:pPr>
-            <a:r>
-              <a:rPr lang="en-US" sz="1900" b="1" dirty="0">
-                <a:solidFill>
-                  <a:srgbClr val="13294B"/>
-                </a:solidFill>
-                <a:latin typeface="Calibri" pitchFamily="34" charset="0"/>
-                <a:ea typeface="Calibri" pitchFamily="34" charset="-122"/>
-                <a:cs typeface="Calibri" pitchFamily="34" charset="-120"/>
-              </a:rPr>
-              <a:t>Elevar a produtividade para reduzir o tempo de trabalho necessário gera mais-valia:</a:t>
-            </a:r>
-            <a:endParaRPr lang="en-US" sz="1900" dirty="0"/>
-          </a:p>
-        </p:txBody>
-      </p:sp>
-      <p:sp>
-        <p:nvSpPr>
-          <p:cNvPr id="4" name="Shape 2"/>
-          <p:cNvSpPr/>
-          <p:nvPr/>
-        </p:nvSpPr>
-        <p:spPr>
-          <a:xfrm>
-            <a:off x="685800" y="1737360"/>
-            <a:ext cx="3794760" cy="914400"/>
-          </a:xfrm>
-          <a:prstGeom prst="roundRect">
-            <a:avLst>
-              <a:gd name="adj" fmla="val 8000"/>
-            </a:avLst>
-          </a:prstGeom>
-          <a:solidFill>
-            <a:srgbClr val="FFFFFF"/>
-          </a:solidFill>
-          <a:ln w="12700">
-            <a:solidFill>
-              <a:srgbClr val="DCD5C1"/>
-            </a:solidFill>
-            <a:prstDash val="solid"/>
-          </a:ln>
-        </p:spPr>
-      </p:sp>
-      <p:sp>
-        <p:nvSpPr>
-          <p:cNvPr id="5" name="Text 3"/>
-          <p:cNvSpPr txBox="1"/>
-          <p:nvPr/>
-        </p:nvSpPr>
-        <p:spPr>
-          <a:xfrm>
-            <a:off x="813816" y="1984248"/>
-            <a:ext cx="420624" cy="420624"/>
-          </a:xfrm>
-          <a:prstGeom prst="roundRect">
-            <a:avLst>
-              <a:gd name="adj" fmla="val 50000"/>
-            </a:avLst>
-          </a:prstGeom>
-          <a:solidFill>
-            <a:srgbClr val="13294B"/>
-          </a:solidFill>
-          <a:ln/>
-        </p:spPr>
-        <p:txBody>
-          <a:bodyPr wrap="square" lIns="0" tIns="0" rIns="0" bIns="0" rtlCol="0" anchor="ctr"/>
-          <a:lstStyle/>
-          <a:p>
-            <a:pPr algn="ctr" indent="0" marL="0">
-              <a:lnSpc>
-                <a:spcPct val="100000"/>
-              </a:lnSpc>
-              <a:buNone/>
-            </a:pPr>
-            <a:r>
-              <a:rPr lang="en-US" sz="1600" b="1" dirty="0">
-                <a:solidFill>
-                  <a:srgbClr val="FFFFFF"/>
-                </a:solidFill>
-                <a:latin typeface="Calibri" pitchFamily="34" charset="0"/>
-                <a:ea typeface="Calibri" pitchFamily="34" charset="-122"/>
-                <a:cs typeface="Calibri" pitchFamily="34" charset="-120"/>
-              </a:rPr>
-              <a:t>a</a:t>
-            </a:r>
-            <a:endParaRPr lang="en-US" sz="1600" dirty="0"/>
-          </a:p>
-        </p:txBody>
-      </p:sp>
-      <p:sp>
-        <p:nvSpPr>
-          <p:cNvPr id="6" name="Text 4"/>
-          <p:cNvSpPr txBox="1"/>
-          <p:nvPr/>
-        </p:nvSpPr>
-        <p:spPr>
-          <a:xfrm>
-            <a:off x="1344168" y="1773936"/>
-            <a:ext cx="3044952" cy="841248"/>
-          </a:xfrm>
-          <a:prstGeom prst="rect">
-            <a:avLst/>
-          </a:prstGeom>
-          <a:noFill/>
-          <a:ln/>
-        </p:spPr>
-        <p:txBody>
-          <a:bodyPr wrap="square" lIns="25400" tIns="25400" rIns="25400" bIns="25400" rtlCol="0" anchor="ctr"/>
-          <a:lstStyle/>
-          <a:p>
-            <a:pPr algn="l" indent="0" marL="0">
-              <a:lnSpc>
-                <a:spcPct val="100000"/>
-              </a:lnSpc>
-              <a:buNone/>
-            </a:pPr>
-            <a:r>
-              <a:rPr lang="en-US" sz="1400" dirty="0">
-                <a:solidFill>
-                  <a:srgbClr val="1F2A37"/>
-                </a:solidFill>
-                <a:latin typeface="Calibri" pitchFamily="34" charset="0"/>
-                <a:ea typeface="Calibri" pitchFamily="34" charset="-122"/>
-                <a:cs typeface="Calibri" pitchFamily="34" charset="-120"/>
-              </a:rPr>
-              <a:t>Absoluta</a:t>
-            </a:r>
-            <a:endParaRPr lang="en-US" sz="1400" dirty="0"/>
-          </a:p>
-        </p:txBody>
-      </p:sp>
-      <p:sp>
-        <p:nvSpPr>
-          <p:cNvPr id="7" name="Shape 5"/>
-          <p:cNvSpPr/>
-          <p:nvPr/>
-        </p:nvSpPr>
-        <p:spPr>
-          <a:xfrm>
-            <a:off x="4663440" y="1737360"/>
-            <a:ext cx="3794760" cy="914400"/>
-          </a:xfrm>
-          <a:prstGeom prst="roundRect">
-            <a:avLst>
-              <a:gd name="adj" fmla="val 8000"/>
-            </a:avLst>
-          </a:prstGeom>
-          <a:solidFill>
-            <a:srgbClr val="FFFFFF"/>
-          </a:solidFill>
-          <a:ln w="12700">
-            <a:solidFill>
-              <a:srgbClr val="DCD5C1"/>
-            </a:solidFill>
-            <a:prstDash val="solid"/>
-          </a:ln>
-        </p:spPr>
-      </p:sp>
-      <p:sp>
-        <p:nvSpPr>
-          <p:cNvPr id="8" name="Text 6"/>
-          <p:cNvSpPr txBox="1"/>
-          <p:nvPr/>
-        </p:nvSpPr>
-        <p:spPr>
-          <a:xfrm>
-            <a:off x="4791456" y="1984248"/>
-            <a:ext cx="420624" cy="420624"/>
-          </a:xfrm>
-          <a:prstGeom prst="roundRect">
-            <a:avLst>
-              <a:gd name="adj" fmla="val 50000"/>
-            </a:avLst>
-          </a:prstGeom>
-          <a:solidFill>
-            <a:srgbClr val="13294B"/>
-          </a:solidFill>
-          <a:ln/>
-        </p:spPr>
-        <p:txBody>
-          <a:bodyPr wrap="square" lIns="0" tIns="0" rIns="0" bIns="0" rtlCol="0" anchor="ctr"/>
-          <a:lstStyle/>
-          <a:p>
-            <a:pPr algn="ctr" indent="0" marL="0">
-              <a:lnSpc>
-                <a:spcPct val="100000"/>
-              </a:lnSpc>
-              <a:buNone/>
-            </a:pPr>
-            <a:r>
-              <a:rPr lang="en-US" sz="1600" b="1" dirty="0">
-                <a:solidFill>
-                  <a:srgbClr val="FFFFFF"/>
-                </a:solidFill>
-                <a:latin typeface="Calibri" pitchFamily="34" charset="0"/>
-                <a:ea typeface="Calibri" pitchFamily="34" charset="-122"/>
-                <a:cs typeface="Calibri" pitchFamily="34" charset="-120"/>
-              </a:rPr>
-              <a:t>b</a:t>
-            </a:r>
-            <a:endParaRPr lang="en-US" sz="1600" dirty="0"/>
-          </a:p>
-        </p:txBody>
-      </p:sp>
-      <p:sp>
-        <p:nvSpPr>
-          <p:cNvPr id="9" name="Text 7"/>
-          <p:cNvSpPr txBox="1"/>
-          <p:nvPr/>
-        </p:nvSpPr>
-        <p:spPr>
-          <a:xfrm>
-            <a:off x="5321808" y="1773936"/>
-            <a:ext cx="3044952" cy="841248"/>
-          </a:xfrm>
-          <a:prstGeom prst="rect">
-            <a:avLst/>
-          </a:prstGeom>
-          <a:noFill/>
-          <a:ln/>
-        </p:spPr>
-        <p:txBody>
-          <a:bodyPr wrap="square" lIns="25400" tIns="25400" rIns="25400" bIns="25400" rtlCol="0" anchor="ctr"/>
-          <a:lstStyle/>
-          <a:p>
-            <a:pPr algn="l" indent="0" marL="0">
-              <a:lnSpc>
-                <a:spcPct val="100000"/>
-              </a:lnSpc>
-              <a:buNone/>
-            </a:pPr>
-            <a:r>
-              <a:rPr lang="en-US" sz="1400" dirty="0">
-                <a:solidFill>
-                  <a:srgbClr val="1F2A37"/>
-                </a:solidFill>
-                <a:latin typeface="Calibri" pitchFamily="34" charset="0"/>
-                <a:ea typeface="Calibri" pitchFamily="34" charset="-122"/>
-                <a:cs typeface="Calibri" pitchFamily="34" charset="-120"/>
-              </a:rPr>
-              <a:t>Comercial</a:t>
-            </a:r>
-            <a:endParaRPr lang="en-US" sz="1400" dirty="0"/>
-          </a:p>
-        </p:txBody>
-      </p:sp>
-      <p:sp>
-        <p:nvSpPr>
-          <p:cNvPr id="10" name="Shape 8"/>
-          <p:cNvSpPr/>
-          <p:nvPr/>
-        </p:nvSpPr>
-        <p:spPr>
-          <a:xfrm>
-            <a:off x="685800" y="2798064"/>
-            <a:ext cx="3794760" cy="914400"/>
-          </a:xfrm>
-          <a:prstGeom prst="roundRect">
-            <a:avLst>
-              <a:gd name="adj" fmla="val 8000"/>
-            </a:avLst>
-          </a:prstGeom>
-          <a:solidFill>
-            <a:srgbClr val="FFFFFF"/>
-          </a:solidFill>
-          <a:ln w="12700">
-            <a:solidFill>
-              <a:srgbClr val="DCD5C1"/>
-            </a:solidFill>
-            <a:prstDash val="solid"/>
-          </a:ln>
-        </p:spPr>
-      </p:sp>
-      <p:sp>
-        <p:nvSpPr>
-          <p:cNvPr id="11" name="Text 9"/>
-          <p:cNvSpPr txBox="1"/>
-          <p:nvPr/>
-        </p:nvSpPr>
-        <p:spPr>
-          <a:xfrm>
-            <a:off x="813816" y="3044952"/>
-            <a:ext cx="420624" cy="420624"/>
-          </a:xfrm>
-          <a:prstGeom prst="roundRect">
-            <a:avLst>
-              <a:gd name="adj" fmla="val 50000"/>
-            </a:avLst>
-          </a:prstGeom>
-          <a:solidFill>
-            <a:srgbClr val="13294B"/>
-          </a:solidFill>
-          <a:ln/>
-        </p:spPr>
-        <p:txBody>
-          <a:bodyPr wrap="square" lIns="0" tIns="0" rIns="0" bIns="0" rtlCol="0" anchor="ctr"/>
-          <a:lstStyle/>
-          <a:p>
-            <a:pPr algn="ctr" indent="0" marL="0">
-              <a:lnSpc>
-                <a:spcPct val="100000"/>
-              </a:lnSpc>
-              <a:buNone/>
-            </a:pPr>
-            <a:r>
-              <a:rPr lang="en-US" sz="1600" b="1" dirty="0">
-                <a:solidFill>
-                  <a:srgbClr val="FFFFFF"/>
-                </a:solidFill>
-                <a:latin typeface="Calibri" pitchFamily="34" charset="0"/>
-                <a:ea typeface="Calibri" pitchFamily="34" charset="-122"/>
-                <a:cs typeface="Calibri" pitchFamily="34" charset="-120"/>
-              </a:rPr>
-              <a:t>c</a:t>
-            </a:r>
-            <a:endParaRPr lang="en-US" sz="1600" dirty="0"/>
-          </a:p>
-        </p:txBody>
-      </p:sp>
-      <p:sp>
-        <p:nvSpPr>
-          <p:cNvPr id="12" name="Text 10"/>
-          <p:cNvSpPr txBox="1"/>
-          <p:nvPr/>
-        </p:nvSpPr>
-        <p:spPr>
-          <a:xfrm>
-            <a:off x="1344168" y="2834640"/>
-            <a:ext cx="3044952" cy="841248"/>
-          </a:xfrm>
-          <a:prstGeom prst="rect">
-            <a:avLst/>
-          </a:prstGeom>
-          <a:noFill/>
-          <a:ln/>
-        </p:spPr>
-        <p:txBody>
-          <a:bodyPr wrap="square" lIns="25400" tIns="25400" rIns="25400" bIns="25400" rtlCol="0" anchor="ctr"/>
-          <a:lstStyle/>
-          <a:p>
-            <a:pPr algn="l" indent="0" marL="0">
-              <a:lnSpc>
-                <a:spcPct val="100000"/>
-              </a:lnSpc>
-              <a:buNone/>
-            </a:pPr>
-            <a:r>
-              <a:rPr lang="en-US" sz="1400" dirty="0">
-                <a:solidFill>
-                  <a:srgbClr val="1F2A37"/>
-                </a:solidFill>
-                <a:latin typeface="Calibri" pitchFamily="34" charset="0"/>
-                <a:ea typeface="Calibri" pitchFamily="34" charset="-122"/>
-                <a:cs typeface="Calibri" pitchFamily="34" charset="-120"/>
-              </a:rPr>
-              <a:t>Relativa</a:t>
-            </a:r>
-            <a:endParaRPr lang="en-US" sz="1400" dirty="0"/>
-          </a:p>
-        </p:txBody>
-      </p:sp>
-      <p:sp>
-        <p:nvSpPr>
-          <p:cNvPr id="13" name="Shape 11"/>
-          <p:cNvSpPr/>
-          <p:nvPr/>
-        </p:nvSpPr>
-        <p:spPr>
-          <a:xfrm>
-            <a:off x="4663440" y="2798064"/>
-            <a:ext cx="3794760" cy="914400"/>
-          </a:xfrm>
-          <a:prstGeom prst="roundRect">
-            <a:avLst>
-              <a:gd name="adj" fmla="val 8000"/>
-            </a:avLst>
-          </a:prstGeom>
-          <a:solidFill>
-            <a:srgbClr val="FFFFFF"/>
-          </a:solidFill>
-          <a:ln w="12700">
-            <a:solidFill>
-              <a:srgbClr val="DCD5C1"/>
-            </a:solidFill>
-            <a:prstDash val="solid"/>
-          </a:ln>
-        </p:spPr>
-      </p:sp>
-      <p:sp>
-        <p:nvSpPr>
-          <p:cNvPr id="14" name="Text 12"/>
-          <p:cNvSpPr txBox="1"/>
-          <p:nvPr/>
-        </p:nvSpPr>
-        <p:spPr>
-          <a:xfrm>
-            <a:off x="4791456" y="3044952"/>
-            <a:ext cx="420624" cy="420624"/>
-          </a:xfrm>
-          <a:prstGeom prst="roundRect">
-            <a:avLst>
-              <a:gd name="adj" fmla="val 50000"/>
-            </a:avLst>
-          </a:prstGeom>
-          <a:solidFill>
-            <a:srgbClr val="13294B"/>
-          </a:solidFill>
-          <a:ln/>
-        </p:spPr>
-        <p:txBody>
-          <a:bodyPr wrap="square" lIns="0" tIns="0" rIns="0" bIns="0" rtlCol="0" anchor="ctr"/>
-          <a:lstStyle/>
-          <a:p>
-            <a:pPr algn="ctr" indent="0" marL="0">
-              <a:lnSpc>
-                <a:spcPct val="100000"/>
-              </a:lnSpc>
-              <a:buNone/>
-            </a:pPr>
-            <a:r>
-              <a:rPr lang="en-US" sz="1600" b="1" dirty="0">
-                <a:solidFill>
-                  <a:srgbClr val="FFFFFF"/>
-                </a:solidFill>
-                <a:latin typeface="Calibri" pitchFamily="34" charset="0"/>
-                <a:ea typeface="Calibri" pitchFamily="34" charset="-122"/>
-                <a:cs typeface="Calibri" pitchFamily="34" charset="-120"/>
-              </a:rPr>
-              <a:t>d</a:t>
-            </a:r>
-            <a:endParaRPr lang="en-US" sz="1600" dirty="0"/>
-          </a:p>
-        </p:txBody>
-      </p:sp>
-      <p:sp>
-        <p:nvSpPr>
-          <p:cNvPr id="15" name="Text 13"/>
-          <p:cNvSpPr txBox="1"/>
-          <p:nvPr/>
-        </p:nvSpPr>
-        <p:spPr>
-          <a:xfrm>
-            <a:off x="5321808" y="2834640"/>
-            <a:ext cx="3044952" cy="841248"/>
-          </a:xfrm>
-          <a:prstGeom prst="rect">
-            <a:avLst/>
-          </a:prstGeom>
-          <a:noFill/>
-          <a:ln/>
-        </p:spPr>
-        <p:txBody>
-          <a:bodyPr wrap="square" lIns="25400" tIns="25400" rIns="25400" bIns="25400" rtlCol="0" anchor="ctr"/>
-          <a:lstStyle/>
-          <a:p>
-            <a:pPr algn="l" indent="0" marL="0">
-              <a:lnSpc>
-                <a:spcPct val="100000"/>
-              </a:lnSpc>
-              <a:buNone/>
-            </a:pPr>
-            <a:r>
-              <a:rPr lang="en-US" sz="1400" dirty="0">
-                <a:solidFill>
-                  <a:srgbClr val="1F2A37"/>
-                </a:solidFill>
-                <a:latin typeface="Calibri" pitchFamily="34" charset="0"/>
-                <a:ea typeface="Calibri" pitchFamily="34" charset="-122"/>
-                <a:cs typeface="Calibri" pitchFamily="34" charset="-120"/>
-              </a:rPr>
-              <a:t>Fictícia</a:t>
-            </a:r>
-            <a:endParaRPr lang="en-US" sz="1400" dirty="0"/>
-          </a:p>
-        </p:txBody>
-      </p:sp>
-      <p:sp>
-        <p:nvSpPr>
-          <p:cNvPr id="16" name="Text 14"/>
-          <p:cNvSpPr txBox="1"/>
-          <p:nvPr/>
-        </p:nvSpPr>
-        <p:spPr>
-          <a:xfrm>
-            <a:off x="4206240" y="36576"/>
-            <a:ext cx="4800600" cy="219456"/>
-          </a:xfrm>
-          <a:prstGeom prst="rect">
-            <a:avLst/>
-          </a:prstGeom>
-          <a:noFill/>
-          <a:ln/>
-        </p:spPr>
-        <p:txBody>
-          <a:bodyPr wrap="square" lIns="0" tIns="0" rIns="0" bIns="0" rtlCol="0" anchor="ctr"/>
-          <a:lstStyle/>
-          <a:p>
-            <a:pPr algn="r" indent="0" marL="0">
-              <a:lnSpc>
-                <a:spcPct val="100000"/>
-              </a:lnSpc>
-              <a:buNone/>
-            </a:pPr>
-            <a:r>
-              <a:rPr lang="en-US" sz="950" dirty="0">
-                <a:solidFill>
-                  <a:srgbClr val="5B6770"/>
-                </a:solidFill>
-                <a:latin typeface="Calibri" pitchFamily="34" charset="0"/>
-                <a:ea typeface="Calibri" pitchFamily="34" charset="-122"/>
-                <a:cs typeface="Calibri" pitchFamily="34" charset="-120"/>
-              </a:rPr>
-              <a:t>Estado, Governo e Mercado · Unidade 3</a:t>
-            </a:r>
-            <a:endParaRPr lang="en-US" sz="950" dirty="0"/>
-          </a:p>
-        </p:txBody>
-      </p:sp>
-    </p:spTree>
-  </p:cSld>
-  <p:clrMapOvr>
-    <a:masterClrMapping/>
-  </p:clrMapOvr>
-</p:sld>
-</file>
-
-<file path=ppt/slides/slide25.xml><?xml version="1.0" encoding="utf-8"?>
-<p:sld xmlns:a="http://schemas.openxmlformats.org/drawingml/2006/main" xmlns:r="http://schemas.openxmlformats.org/officeDocument/2006/relationships" xmlns:p="http://schemas.openxmlformats.org/presentationml/2006/main">
-  <p:cSld name="Slide 25">
-    <p:bg>
-      <p:bgPr>
-        <a:blipFill dpi="0" rotWithShape="1">
-          <a:blip r:embed="rId1">
-            <a:lum/>
-          </a:blip>
-          <a:srcRect/>
-          <a:stretch>
-            <a:fillRect/>
-          </a:stretch>
-        </a:blipFill>
-        <a:effectLst/>
-      </p:bgPr>
-    </p:bg>
-    <p:spTree>
-      <p:nvGrpSpPr>
-        <p:cNvPr id="1" name=""/>
-        <p:cNvGrpSpPr/>
-        <p:nvPr/>
-      </p:nvGrpSpPr>
-      <p:grpSpPr>
-        <a:xfrm>
-          <a:off x="0" y="0"/>
-          <a:ext cx="0" cy="0"/>
-          <a:chOff x="0" y="0"/>
-          <a:chExt cx="0" cy="0"/>
-        </a:xfrm>
-      </p:grpSpPr>
-      <p:sp>
-        <p:nvSpPr>
-          <p:cNvPr id="2" name="Text 0"/>
-          <p:cNvSpPr txBox="1"/>
-          <p:nvPr/>
-        </p:nvSpPr>
-        <p:spPr>
-          <a:xfrm>
-            <a:off x="731520" y="274320"/>
-            <a:ext cx="7680960" cy="365760"/>
-          </a:xfrm>
-          <a:prstGeom prst="rect">
-            <a:avLst/>
-          </a:prstGeom>
-          <a:noFill/>
-          <a:ln/>
-        </p:spPr>
-        <p:txBody>
-          <a:bodyPr wrap="square" lIns="0" tIns="0" rIns="0" bIns="0" rtlCol="0" anchor="ctr"/>
-          <a:lstStyle/>
-          <a:p>
-            <a:pPr algn="ctr" indent="0" marL="0">
-              <a:lnSpc>
-                <a:spcPct val="100000"/>
-              </a:lnSpc>
-              <a:buNone/>
-            </a:pPr>
-            <a:r>
-              <a:rPr lang="en-US" sz="1250" b="1" dirty="0">
-                <a:solidFill>
-                  <a:srgbClr val="2A8C85"/>
-                </a:solidFill>
-                <a:latin typeface="Calibri" pitchFamily="34" charset="0"/>
-                <a:ea typeface="Calibri" pitchFamily="34" charset="-122"/>
-                <a:cs typeface="Calibri" pitchFamily="34" charset="-120"/>
-              </a:rPr>
-              <a:t>QUIZ DA UNIDADE 3 · PERGUNTA 3 DE 5 · RESPOSTA</a:t>
-            </a:r>
-            <a:endParaRPr lang="en-US" sz="1250" dirty="0"/>
-          </a:p>
-        </p:txBody>
-      </p:sp>
-      <p:sp>
-        <p:nvSpPr>
-          <p:cNvPr id="3" name="Text 1"/>
-          <p:cNvSpPr txBox="1"/>
-          <p:nvPr/>
-        </p:nvSpPr>
-        <p:spPr>
-          <a:xfrm>
-            <a:off x="731520" y="658368"/>
-            <a:ext cx="7680960" cy="960120"/>
-          </a:xfrm>
-          <a:prstGeom prst="rect">
-            <a:avLst/>
-          </a:prstGeom>
-          <a:noFill/>
-          <a:ln/>
-        </p:spPr>
-        <p:txBody>
-          <a:bodyPr wrap="square" lIns="0" tIns="0" rIns="0" bIns="0" rtlCol="0" anchor="ctr"/>
-          <a:lstStyle/>
-          <a:p>
-            <a:pPr algn="ctr" indent="0" marL="0">
-              <a:lnSpc>
-                <a:spcPct val="100000"/>
-              </a:lnSpc>
-              <a:buNone/>
-            </a:pPr>
-            <a:r>
-              <a:rPr lang="en-US" sz="1900" b="1" dirty="0">
-                <a:solidFill>
-                  <a:srgbClr val="13294B"/>
-                </a:solidFill>
-                <a:latin typeface="Calibri" pitchFamily="34" charset="0"/>
-                <a:ea typeface="Calibri" pitchFamily="34" charset="-122"/>
-                <a:cs typeface="Calibri" pitchFamily="34" charset="-120"/>
-              </a:rPr>
-              <a:t>Elevar a produtividade para reduzir o tempo de trabalho necessário gera mais-valia:</a:t>
-            </a:r>
-            <a:endParaRPr lang="en-US" sz="1900" dirty="0"/>
-          </a:p>
-        </p:txBody>
-      </p:sp>
-      <p:sp>
-        <p:nvSpPr>
-          <p:cNvPr id="4" name="Shape 2"/>
-          <p:cNvSpPr/>
-          <p:nvPr/>
-        </p:nvSpPr>
-        <p:spPr>
-          <a:xfrm>
-            <a:off x="685800" y="1737360"/>
-            <a:ext cx="3794760" cy="749808"/>
-          </a:xfrm>
-          <a:prstGeom prst="roundRect">
-            <a:avLst>
-              <a:gd name="adj" fmla="val 9756"/>
-            </a:avLst>
-          </a:prstGeom>
-          <a:solidFill>
-            <a:srgbClr val="FFFFFF"/>
-          </a:solidFill>
-          <a:ln w="12700">
-            <a:solidFill>
-              <a:srgbClr val="DCD5C1"/>
-            </a:solidFill>
-            <a:prstDash val="solid"/>
-          </a:ln>
-        </p:spPr>
-      </p:sp>
-      <p:sp>
-        <p:nvSpPr>
-          <p:cNvPr id="5" name="Text 3"/>
-          <p:cNvSpPr txBox="1"/>
-          <p:nvPr/>
-        </p:nvSpPr>
-        <p:spPr>
-          <a:xfrm>
-            <a:off x="813816" y="1901952"/>
-            <a:ext cx="420624" cy="420624"/>
-          </a:xfrm>
-          <a:prstGeom prst="roundRect">
-            <a:avLst>
-              <a:gd name="adj" fmla="val 50000"/>
-            </a:avLst>
-          </a:prstGeom>
-          <a:solidFill>
-            <a:srgbClr val="9AA3AB"/>
-          </a:solidFill>
-          <a:ln/>
-        </p:spPr>
-        <p:txBody>
-          <a:bodyPr wrap="square" lIns="0" tIns="0" rIns="0" bIns="0" rtlCol="0" anchor="ctr"/>
-          <a:lstStyle/>
-          <a:p>
-            <a:pPr algn="ctr" indent="0" marL="0">
-              <a:lnSpc>
-                <a:spcPct val="100000"/>
-              </a:lnSpc>
-              <a:buNone/>
-            </a:pPr>
-            <a:r>
-              <a:rPr lang="en-US" sz="1600" b="1" dirty="0">
-                <a:solidFill>
-                  <a:srgbClr val="FFFFFF"/>
-                </a:solidFill>
-                <a:latin typeface="Calibri" pitchFamily="34" charset="0"/>
-                <a:ea typeface="Calibri" pitchFamily="34" charset="-122"/>
-                <a:cs typeface="Calibri" pitchFamily="34" charset="-120"/>
-              </a:rPr>
-              <a:t>a</a:t>
-            </a:r>
-            <a:endParaRPr lang="en-US" sz="1600" dirty="0"/>
-          </a:p>
-        </p:txBody>
-      </p:sp>
-      <p:sp>
-        <p:nvSpPr>
-          <p:cNvPr id="6" name="Text 4"/>
-          <p:cNvSpPr txBox="1"/>
-          <p:nvPr/>
-        </p:nvSpPr>
-        <p:spPr>
-          <a:xfrm>
-            <a:off x="1344168" y="1773936"/>
-            <a:ext cx="3044952" cy="676656"/>
-          </a:xfrm>
-          <a:prstGeom prst="rect">
-            <a:avLst/>
-          </a:prstGeom>
-          <a:noFill/>
-          <a:ln/>
-        </p:spPr>
-        <p:txBody>
-          <a:bodyPr wrap="square" lIns="25400" tIns="25400" rIns="25400" bIns="25400" rtlCol="0" anchor="ctr"/>
-          <a:lstStyle/>
-          <a:p>
-            <a:pPr algn="l" indent="0" marL="0">
-              <a:lnSpc>
-                <a:spcPct val="100000"/>
-              </a:lnSpc>
-              <a:buNone/>
-            </a:pPr>
-            <a:r>
-              <a:rPr lang="en-US" sz="1400" dirty="0">
-                <a:solidFill>
-                  <a:srgbClr val="5B6770"/>
-                </a:solidFill>
-                <a:latin typeface="Calibri" pitchFamily="34" charset="0"/>
-                <a:ea typeface="Calibri" pitchFamily="34" charset="-122"/>
-                <a:cs typeface="Calibri" pitchFamily="34" charset="-120"/>
-              </a:rPr>
-              <a:t>Absoluta</a:t>
-            </a:r>
-            <a:endParaRPr lang="en-US" sz="1400" dirty="0"/>
-          </a:p>
-        </p:txBody>
-      </p:sp>
-      <p:sp>
-        <p:nvSpPr>
-          <p:cNvPr id="7" name="Shape 5"/>
-          <p:cNvSpPr/>
-          <p:nvPr/>
-        </p:nvSpPr>
-        <p:spPr>
-          <a:xfrm>
-            <a:off x="4663440" y="1737360"/>
-            <a:ext cx="3794760" cy="749808"/>
-          </a:xfrm>
-          <a:prstGeom prst="roundRect">
-            <a:avLst>
-              <a:gd name="adj" fmla="val 9756"/>
-            </a:avLst>
-          </a:prstGeom>
-          <a:solidFill>
-            <a:srgbClr val="FFFFFF"/>
-          </a:solidFill>
-          <a:ln w="12700">
-            <a:solidFill>
-              <a:srgbClr val="DCD5C1"/>
-            </a:solidFill>
-            <a:prstDash val="solid"/>
-          </a:ln>
-        </p:spPr>
-      </p:sp>
-      <p:sp>
-        <p:nvSpPr>
-          <p:cNvPr id="8" name="Text 6"/>
-          <p:cNvSpPr txBox="1"/>
-          <p:nvPr/>
-        </p:nvSpPr>
-        <p:spPr>
-          <a:xfrm>
-            <a:off x="4791456" y="1901952"/>
-            <a:ext cx="420624" cy="420624"/>
-          </a:xfrm>
-          <a:prstGeom prst="roundRect">
-            <a:avLst>
-              <a:gd name="adj" fmla="val 50000"/>
-            </a:avLst>
-          </a:prstGeom>
-          <a:solidFill>
-            <a:srgbClr val="9AA3AB"/>
-          </a:solidFill>
-          <a:ln/>
-        </p:spPr>
-        <p:txBody>
-          <a:bodyPr wrap="square" lIns="0" tIns="0" rIns="0" bIns="0" rtlCol="0" anchor="ctr"/>
-          <a:lstStyle/>
-          <a:p>
-            <a:pPr algn="ctr" indent="0" marL="0">
-              <a:lnSpc>
-                <a:spcPct val="100000"/>
-              </a:lnSpc>
-              <a:buNone/>
-            </a:pPr>
-            <a:r>
-              <a:rPr lang="en-US" sz="1600" b="1" dirty="0">
-                <a:solidFill>
-                  <a:srgbClr val="FFFFFF"/>
-                </a:solidFill>
-                <a:latin typeface="Calibri" pitchFamily="34" charset="0"/>
-                <a:ea typeface="Calibri" pitchFamily="34" charset="-122"/>
-                <a:cs typeface="Calibri" pitchFamily="34" charset="-120"/>
-              </a:rPr>
-              <a:t>b</a:t>
-            </a:r>
-            <a:endParaRPr lang="en-US" sz="1600" dirty="0"/>
-          </a:p>
-        </p:txBody>
-      </p:sp>
-      <p:sp>
-        <p:nvSpPr>
-          <p:cNvPr id="9" name="Text 7"/>
-          <p:cNvSpPr txBox="1"/>
-          <p:nvPr/>
-        </p:nvSpPr>
-        <p:spPr>
-          <a:xfrm>
-            <a:off x="5321808" y="1773936"/>
-            <a:ext cx="3044952" cy="676656"/>
-          </a:xfrm>
-          <a:prstGeom prst="rect">
-            <a:avLst/>
-          </a:prstGeom>
-          <a:noFill/>
-          <a:ln/>
-        </p:spPr>
-        <p:txBody>
-          <a:bodyPr wrap="square" lIns="25400" tIns="25400" rIns="25400" bIns="25400" rtlCol="0" anchor="ctr"/>
-          <a:lstStyle/>
-          <a:p>
-            <a:pPr algn="l" indent="0" marL="0">
-              <a:lnSpc>
-                <a:spcPct val="100000"/>
-              </a:lnSpc>
-              <a:buNone/>
-            </a:pPr>
-            <a:r>
-              <a:rPr lang="en-US" sz="1400" dirty="0">
-                <a:solidFill>
-                  <a:srgbClr val="5B6770"/>
-                </a:solidFill>
-                <a:latin typeface="Calibri" pitchFamily="34" charset="0"/>
-                <a:ea typeface="Calibri" pitchFamily="34" charset="-122"/>
-                <a:cs typeface="Calibri" pitchFamily="34" charset="-120"/>
-              </a:rPr>
-              <a:t>Comercial</a:t>
-            </a:r>
-            <a:endParaRPr lang="en-US" sz="1400" dirty="0"/>
-          </a:p>
-        </p:txBody>
-      </p:sp>
-      <p:sp>
-        <p:nvSpPr>
-          <p:cNvPr id="10" name="Shape 8"/>
-          <p:cNvSpPr/>
-          <p:nvPr/>
-        </p:nvSpPr>
-        <p:spPr>
-          <a:xfrm>
-            <a:off x="685800" y="2633472"/>
-            <a:ext cx="3794760" cy="749808"/>
-          </a:xfrm>
-          <a:prstGeom prst="roundRect">
-            <a:avLst>
-              <a:gd name="adj" fmla="val 9756"/>
-            </a:avLst>
-          </a:prstGeom>
-          <a:solidFill>
-            <a:srgbClr val="E3F2E8"/>
-          </a:solidFill>
-          <a:ln w="25400">
-            <a:solidFill>
-              <a:srgbClr val="2E7D4F"/>
-            </a:solidFill>
-            <a:prstDash val="solid"/>
-          </a:ln>
-        </p:spPr>
-      </p:sp>
-      <p:sp>
-        <p:nvSpPr>
-          <p:cNvPr id="11" name="Text 9"/>
-          <p:cNvSpPr txBox="1"/>
-          <p:nvPr/>
-        </p:nvSpPr>
-        <p:spPr>
-          <a:xfrm>
-            <a:off x="813816" y="2798064"/>
-            <a:ext cx="420624" cy="420624"/>
-          </a:xfrm>
-          <a:prstGeom prst="roundRect">
-            <a:avLst>
-              <a:gd name="adj" fmla="val 50000"/>
-            </a:avLst>
-          </a:prstGeom>
-          <a:solidFill>
-            <a:srgbClr val="2E7D4F"/>
-          </a:solidFill>
-          <a:ln/>
-        </p:spPr>
-        <p:txBody>
-          <a:bodyPr wrap="square" lIns="0" tIns="0" rIns="0" bIns="0" rtlCol="0" anchor="ctr"/>
-          <a:lstStyle/>
-          <a:p>
-            <a:pPr algn="ctr" indent="0" marL="0">
-              <a:lnSpc>
-                <a:spcPct val="100000"/>
-              </a:lnSpc>
-              <a:buNone/>
-            </a:pPr>
-            <a:r>
-              <a:rPr lang="en-US" sz="1600" b="1" dirty="0">
-                <a:solidFill>
-                  <a:srgbClr val="FFFFFF"/>
-                </a:solidFill>
-                <a:latin typeface="Calibri" pitchFamily="34" charset="0"/>
-                <a:ea typeface="Calibri" pitchFamily="34" charset="-122"/>
-                <a:cs typeface="Calibri" pitchFamily="34" charset="-120"/>
-              </a:rPr>
-              <a:t>c</a:t>
-            </a:r>
-            <a:endParaRPr lang="en-US" sz="1600" dirty="0"/>
-          </a:p>
-        </p:txBody>
-      </p:sp>
-      <p:sp>
-        <p:nvSpPr>
-          <p:cNvPr id="12" name="Text 10"/>
-          <p:cNvSpPr txBox="1"/>
-          <p:nvPr/>
-        </p:nvSpPr>
-        <p:spPr>
-          <a:xfrm>
-            <a:off x="1344168" y="2670048"/>
-            <a:ext cx="3044952" cy="676656"/>
-          </a:xfrm>
-          <a:prstGeom prst="rect">
-            <a:avLst/>
-          </a:prstGeom>
-          <a:noFill/>
-          <a:ln/>
-        </p:spPr>
-        <p:txBody>
-          <a:bodyPr wrap="square" lIns="25400" tIns="25400" rIns="25400" bIns="25400" rtlCol="0" anchor="ctr"/>
-          <a:lstStyle/>
-          <a:p>
-            <a:pPr algn="l" indent="0" marL="0">
-              <a:lnSpc>
-                <a:spcPct val="100000"/>
-              </a:lnSpc>
-              <a:buNone/>
-            </a:pPr>
-            <a:r>
-              <a:rPr lang="en-US" sz="1400" b="1" dirty="0">
-                <a:solidFill>
-                  <a:srgbClr val="1F2A37"/>
-                </a:solidFill>
-                <a:latin typeface="Calibri" pitchFamily="34" charset="0"/>
-                <a:ea typeface="Calibri" pitchFamily="34" charset="-122"/>
-                <a:cs typeface="Calibri" pitchFamily="34" charset="-120"/>
-              </a:rPr>
-              <a:t>Relativa</a:t>
-            </a:r>
-            <a:endParaRPr lang="en-US" sz="1400" dirty="0"/>
-          </a:p>
-        </p:txBody>
-      </p:sp>
-      <p:sp>
-        <p:nvSpPr>
-          <p:cNvPr id="13" name="Shape 11"/>
-          <p:cNvSpPr/>
-          <p:nvPr/>
-        </p:nvSpPr>
-        <p:spPr>
-          <a:xfrm>
-            <a:off x="4663440" y="2633472"/>
-            <a:ext cx="3794760" cy="749808"/>
-          </a:xfrm>
-          <a:prstGeom prst="roundRect">
-            <a:avLst>
-              <a:gd name="adj" fmla="val 9756"/>
-            </a:avLst>
-          </a:prstGeom>
-          <a:solidFill>
-            <a:srgbClr val="FFFFFF"/>
-          </a:solidFill>
-          <a:ln w="12700">
-            <a:solidFill>
-              <a:srgbClr val="DCD5C1"/>
-            </a:solidFill>
-            <a:prstDash val="solid"/>
-          </a:ln>
-        </p:spPr>
-      </p:sp>
-      <p:sp>
-        <p:nvSpPr>
-          <p:cNvPr id="14" name="Text 12"/>
-          <p:cNvSpPr txBox="1"/>
-          <p:nvPr/>
-        </p:nvSpPr>
-        <p:spPr>
-          <a:xfrm>
-            <a:off x="4791456" y="2798064"/>
-            <a:ext cx="420624" cy="420624"/>
-          </a:xfrm>
-          <a:prstGeom prst="roundRect">
-            <a:avLst>
-              <a:gd name="adj" fmla="val 50000"/>
-            </a:avLst>
-          </a:prstGeom>
-          <a:solidFill>
-            <a:srgbClr val="9AA3AB"/>
-          </a:solidFill>
-          <a:ln/>
-        </p:spPr>
-        <p:txBody>
-          <a:bodyPr wrap="square" lIns="0" tIns="0" rIns="0" bIns="0" rtlCol="0" anchor="ctr"/>
-          <a:lstStyle/>
-          <a:p>
-            <a:pPr algn="ctr" indent="0" marL="0">
-              <a:lnSpc>
-                <a:spcPct val="100000"/>
-              </a:lnSpc>
-              <a:buNone/>
-            </a:pPr>
-            <a:r>
-              <a:rPr lang="en-US" sz="1600" b="1" dirty="0">
-                <a:solidFill>
-                  <a:srgbClr val="FFFFFF"/>
-                </a:solidFill>
-                <a:latin typeface="Calibri" pitchFamily="34" charset="0"/>
-                <a:ea typeface="Calibri" pitchFamily="34" charset="-122"/>
-                <a:cs typeface="Calibri" pitchFamily="34" charset="-120"/>
-              </a:rPr>
-              <a:t>d</a:t>
-            </a:r>
-            <a:endParaRPr lang="en-US" sz="1600" dirty="0"/>
-          </a:p>
-        </p:txBody>
-      </p:sp>
-      <p:sp>
-        <p:nvSpPr>
-          <p:cNvPr id="15" name="Text 13"/>
-          <p:cNvSpPr txBox="1"/>
-          <p:nvPr/>
-        </p:nvSpPr>
-        <p:spPr>
-          <a:xfrm>
-            <a:off x="5321808" y="2670048"/>
-            <a:ext cx="3044952" cy="676656"/>
-          </a:xfrm>
-          <a:prstGeom prst="rect">
-            <a:avLst/>
-          </a:prstGeom>
-          <a:noFill/>
-          <a:ln/>
-        </p:spPr>
-        <p:txBody>
-          <a:bodyPr wrap="square" lIns="25400" tIns="25400" rIns="25400" bIns="25400" rtlCol="0" anchor="ctr"/>
-          <a:lstStyle/>
-          <a:p>
-            <a:pPr algn="l" indent="0" marL="0">
-              <a:lnSpc>
-                <a:spcPct val="100000"/>
-              </a:lnSpc>
-              <a:buNone/>
-            </a:pPr>
-            <a:r>
-              <a:rPr lang="en-US" sz="1400" dirty="0">
-                <a:solidFill>
-                  <a:srgbClr val="5B6770"/>
-                </a:solidFill>
-                <a:latin typeface="Calibri" pitchFamily="34" charset="0"/>
-                <a:ea typeface="Calibri" pitchFamily="34" charset="-122"/>
-                <a:cs typeface="Calibri" pitchFamily="34" charset="-120"/>
-              </a:rPr>
-              <a:t>Fictícia</a:t>
-            </a:r>
-            <a:endParaRPr lang="en-US" sz="1400" dirty="0"/>
-          </a:p>
-        </p:txBody>
-      </p:sp>
-      <p:sp>
-        <p:nvSpPr>
-          <p:cNvPr id="16" name="Text 14"/>
-          <p:cNvSpPr txBox="1"/>
-          <p:nvPr/>
-        </p:nvSpPr>
-        <p:spPr>
-          <a:xfrm>
-            <a:off x="685800" y="3566160"/>
-            <a:ext cx="7772400" cy="841248"/>
-          </a:xfrm>
-          <a:prstGeom prst="roundRect">
-            <a:avLst>
-              <a:gd name="adj" fmla="val 8696"/>
-            </a:avLst>
-          </a:prstGeom>
-          <a:solidFill>
-            <a:srgbClr val="E6F2F0"/>
-          </a:solidFill>
-          <a:ln/>
-        </p:spPr>
-        <p:txBody>
-          <a:bodyPr wrap="square" lIns="114300" tIns="114300" rIns="114300" bIns="114300" rtlCol="0" anchor="ctr"/>
-          <a:lstStyle/>
-          <a:p>
-            <a:pPr algn="l" indent="0" marL="0">
-              <a:lnSpc>
-                <a:spcPct val="100000"/>
-              </a:lnSpc>
-              <a:buNone/>
-            </a:pPr>
-            <a:r>
-              <a:rPr lang="en-US" sz="1350" b="1" dirty="0">
-                <a:solidFill>
-                  <a:srgbClr val="2E7D4F"/>
-                </a:solidFill>
-                <a:latin typeface="Calibri" pitchFamily="34" charset="0"/>
-                <a:ea typeface="Calibri" pitchFamily="34" charset="-122"/>
-                <a:cs typeface="Calibri" pitchFamily="34" charset="-120"/>
-              </a:rPr>
-              <a:t>Resposta: c) </a:t>
-            </a:r>
-            <a:pPr algn="l" indent="0" marL="0">
-              <a:lnSpc>
-                <a:spcPct val="100000"/>
-              </a:lnSpc>
-              <a:buNone/>
-            </a:pPr>
-            <a:r>
-              <a:rPr lang="en-US" sz="1350" dirty="0">
-                <a:solidFill>
-                  <a:srgbClr val="1F2A37"/>
-                </a:solidFill>
-                <a:latin typeface="Calibri" pitchFamily="34" charset="0"/>
-                <a:ea typeface="Calibri" pitchFamily="34" charset="-122"/>
-                <a:cs typeface="Calibri" pitchFamily="34" charset="-120"/>
-              </a:rPr>
-              <a:t>A mais-valia relativa vem do aumento da produtividade; a absoluta, do prolongamento da jornada.</a:t>
-            </a:r>
-            <a:endParaRPr lang="en-US" sz="1350" dirty="0"/>
-          </a:p>
-        </p:txBody>
-      </p:sp>
-      <p:sp>
-        <p:nvSpPr>
-          <p:cNvPr id="17" name="Text 15"/>
-          <p:cNvSpPr txBox="1"/>
-          <p:nvPr/>
-        </p:nvSpPr>
-        <p:spPr>
-          <a:xfrm>
-            <a:off x="4206240" y="36576"/>
-            <a:ext cx="4800600" cy="219456"/>
-          </a:xfrm>
-          <a:prstGeom prst="rect">
-            <a:avLst/>
-          </a:prstGeom>
-          <a:noFill/>
-          <a:ln/>
-        </p:spPr>
-        <p:txBody>
-          <a:bodyPr wrap="square" lIns="0" tIns="0" rIns="0" bIns="0" rtlCol="0" anchor="ctr"/>
-          <a:lstStyle/>
-          <a:p>
-            <a:pPr algn="r" indent="0" marL="0">
-              <a:lnSpc>
-                <a:spcPct val="100000"/>
-              </a:lnSpc>
-              <a:buNone/>
-            </a:pPr>
-            <a:r>
-              <a:rPr lang="en-US" sz="950" dirty="0">
-                <a:solidFill>
-                  <a:srgbClr val="5B6770"/>
-                </a:solidFill>
-                <a:latin typeface="Calibri" pitchFamily="34" charset="0"/>
-                <a:ea typeface="Calibri" pitchFamily="34" charset="-122"/>
-                <a:cs typeface="Calibri" pitchFamily="34" charset="-120"/>
-              </a:rPr>
-              <a:t>Estado, Governo e Mercado · Unidade 3</a:t>
-            </a:r>
-            <a:endParaRPr lang="en-US" sz="950" dirty="0"/>
-          </a:p>
-        </p:txBody>
-      </p:sp>
-    </p:spTree>
-  </p:cSld>
-  <p:clrMapOvr>
-    <a:masterClrMapping/>
-  </p:clrMapOvr>
-</p:sld>
-</file>
-
-<file path=ppt/slides/slide26.xml><?xml version="1.0" encoding="utf-8"?>
-<p:sld xmlns:a="http://schemas.openxmlformats.org/drawingml/2006/main" xmlns:r="http://schemas.openxmlformats.org/officeDocument/2006/relationships" xmlns:p="http://schemas.openxmlformats.org/presentationml/2006/main">
-  <p:cSld name="Slide 26">
-    <p:bg>
-      <p:bgPr>
-        <a:blipFill dpi="0" rotWithShape="1">
-          <a:blip r:embed="rId1">
-            <a:lum/>
-          </a:blip>
-          <a:srcRect/>
-          <a:stretch>
-            <a:fillRect/>
-          </a:stretch>
-        </a:blipFill>
-        <a:effectLst/>
-      </p:bgPr>
-    </p:bg>
-    <p:spTree>
-      <p:nvGrpSpPr>
-        <p:cNvPr id="1" name=""/>
-        <p:cNvGrpSpPr/>
-        <p:nvPr/>
-      </p:nvGrpSpPr>
-      <p:grpSpPr>
-        <a:xfrm>
-          <a:off x="0" y="0"/>
-          <a:ext cx="0" cy="0"/>
-          <a:chOff x="0" y="0"/>
-          <a:chExt cx="0" cy="0"/>
-        </a:xfrm>
-      </p:grpSpPr>
-      <p:sp>
-        <p:nvSpPr>
-          <p:cNvPr id="2" name="Text 0"/>
-          <p:cNvSpPr txBox="1"/>
-          <p:nvPr/>
-        </p:nvSpPr>
-        <p:spPr>
-          <a:xfrm>
-            <a:off x="731520" y="274320"/>
-            <a:ext cx="7680960" cy="365760"/>
-          </a:xfrm>
-          <a:prstGeom prst="rect">
-            <a:avLst/>
-          </a:prstGeom>
-          <a:noFill/>
-          <a:ln/>
-        </p:spPr>
-        <p:txBody>
-          <a:bodyPr wrap="square" lIns="0" tIns="0" rIns="0" bIns="0" rtlCol="0" anchor="ctr"/>
-          <a:lstStyle/>
-          <a:p>
-            <a:pPr algn="ctr" indent="0" marL="0">
-              <a:lnSpc>
-                <a:spcPct val="100000"/>
-              </a:lnSpc>
-              <a:buNone/>
-            </a:pPr>
-            <a:r>
-              <a:rPr lang="en-US" sz="1250" b="1" dirty="0">
-                <a:solidFill>
-                  <a:srgbClr val="2A8C85"/>
-                </a:solidFill>
-                <a:latin typeface="Calibri" pitchFamily="34" charset="0"/>
-                <a:ea typeface="Calibri" pitchFamily="34" charset="-122"/>
-                <a:cs typeface="Calibri" pitchFamily="34" charset="-120"/>
-              </a:rPr>
-              <a:t>QUIZ DA UNIDADE 3 · PERGUNTA 4 DE 5</a:t>
-            </a:r>
-            <a:endParaRPr lang="en-US" sz="1250" dirty="0"/>
-          </a:p>
-        </p:txBody>
-      </p:sp>
-      <p:sp>
-        <p:nvSpPr>
-          <p:cNvPr id="3" name="Text 1"/>
-          <p:cNvSpPr txBox="1"/>
-          <p:nvPr/>
-        </p:nvSpPr>
-        <p:spPr>
-          <a:xfrm>
-            <a:off x="731520" y="658368"/>
-            <a:ext cx="7680960" cy="960120"/>
-          </a:xfrm>
-          <a:prstGeom prst="rect">
-            <a:avLst/>
-          </a:prstGeom>
-          <a:noFill/>
-          <a:ln/>
-        </p:spPr>
-        <p:txBody>
-          <a:bodyPr wrap="square" lIns="0" tIns="0" rIns="0" bIns="0" rtlCol="0" anchor="ctr"/>
-          <a:lstStyle/>
-          <a:p>
-            <a:pPr algn="ctr" indent="0" marL="0">
-              <a:lnSpc>
-                <a:spcPct val="100000"/>
-              </a:lnSpc>
-              <a:buNone/>
-            </a:pPr>
-            <a:r>
-              <a:rPr lang="en-US" sz="1900" b="1" dirty="0">
-                <a:solidFill>
-                  <a:srgbClr val="13294B"/>
-                </a:solidFill>
-                <a:latin typeface="Calibri" pitchFamily="34" charset="0"/>
-                <a:ea typeface="Calibri" pitchFamily="34" charset="-122"/>
-                <a:cs typeface="Calibri" pitchFamily="34" charset="-120"/>
-              </a:rPr>
-              <a:t>Os primeiros seguros sociais estatais (doença, acidentes e velhice) foram criados:</a:t>
-            </a:r>
-            <a:endParaRPr lang="en-US" sz="1900" dirty="0"/>
-          </a:p>
-        </p:txBody>
-      </p:sp>
-      <p:sp>
-        <p:nvSpPr>
-          <p:cNvPr id="4" name="Shape 2"/>
-          <p:cNvSpPr/>
-          <p:nvPr/>
-        </p:nvSpPr>
-        <p:spPr>
-          <a:xfrm>
-            <a:off x="685800" y="1737360"/>
-            <a:ext cx="3794760" cy="914400"/>
-          </a:xfrm>
-          <a:prstGeom prst="roundRect">
-            <a:avLst>
-              <a:gd name="adj" fmla="val 8000"/>
-            </a:avLst>
-          </a:prstGeom>
-          <a:solidFill>
-            <a:srgbClr val="FFFFFF"/>
-          </a:solidFill>
-          <a:ln w="12700">
-            <a:solidFill>
-              <a:srgbClr val="DCD5C1"/>
-            </a:solidFill>
-            <a:prstDash val="solid"/>
-          </a:ln>
-        </p:spPr>
-      </p:sp>
-      <p:sp>
-        <p:nvSpPr>
-          <p:cNvPr id="5" name="Text 3"/>
-          <p:cNvSpPr txBox="1"/>
-          <p:nvPr/>
-        </p:nvSpPr>
-        <p:spPr>
-          <a:xfrm>
-            <a:off x="813816" y="1984248"/>
-            <a:ext cx="420624" cy="420624"/>
-          </a:xfrm>
-          <a:prstGeom prst="roundRect">
-            <a:avLst>
-              <a:gd name="adj" fmla="val 50000"/>
-            </a:avLst>
-          </a:prstGeom>
-          <a:solidFill>
-            <a:srgbClr val="13294B"/>
-          </a:solidFill>
-          <a:ln/>
-        </p:spPr>
-        <p:txBody>
-          <a:bodyPr wrap="square" lIns="0" tIns="0" rIns="0" bIns="0" rtlCol="0" anchor="ctr"/>
-          <a:lstStyle/>
-          <a:p>
-            <a:pPr algn="ctr" indent="0" marL="0">
-              <a:lnSpc>
-                <a:spcPct val="100000"/>
-              </a:lnSpc>
-              <a:buNone/>
-            </a:pPr>
-            <a:r>
-              <a:rPr lang="en-US" sz="1600" b="1" dirty="0">
-                <a:solidFill>
-                  <a:srgbClr val="FFFFFF"/>
-                </a:solidFill>
-                <a:latin typeface="Calibri" pitchFamily="34" charset="0"/>
-                <a:ea typeface="Calibri" pitchFamily="34" charset="-122"/>
-                <a:cs typeface="Calibri" pitchFamily="34" charset="-120"/>
-              </a:rPr>
-              <a:t>a</a:t>
-            </a:r>
-            <a:endParaRPr lang="en-US" sz="1600" dirty="0"/>
-          </a:p>
-        </p:txBody>
-      </p:sp>
-      <p:sp>
-        <p:nvSpPr>
-          <p:cNvPr id="6" name="Text 4"/>
-          <p:cNvSpPr txBox="1"/>
-          <p:nvPr/>
-        </p:nvSpPr>
-        <p:spPr>
-          <a:xfrm>
-            <a:off x="1344168" y="1773936"/>
-            <a:ext cx="3044952" cy="841248"/>
-          </a:xfrm>
-          <a:prstGeom prst="rect">
-            <a:avLst/>
-          </a:prstGeom>
-          <a:noFill/>
-          <a:ln/>
-        </p:spPr>
-        <p:txBody>
-          <a:bodyPr wrap="square" lIns="25400" tIns="25400" rIns="25400" bIns="25400" rtlCol="0" anchor="ctr"/>
-          <a:lstStyle/>
-          <a:p>
-            <a:pPr algn="l" indent="0" marL="0">
-              <a:lnSpc>
-                <a:spcPct val="100000"/>
-              </a:lnSpc>
-              <a:buNone/>
-            </a:pPr>
-            <a:r>
-              <a:rPr lang="en-US" sz="1400" dirty="0">
-                <a:solidFill>
-                  <a:srgbClr val="1F2A37"/>
-                </a:solidFill>
-                <a:latin typeface="Calibri" pitchFamily="34" charset="0"/>
-                <a:ea typeface="Calibri" pitchFamily="34" charset="-122"/>
-                <a:cs typeface="Calibri" pitchFamily="34" charset="-120"/>
-              </a:rPr>
-              <a:t>Na Inglaterra de Thatcher</a:t>
-            </a:r>
-            <a:endParaRPr lang="en-US" sz="1400" dirty="0"/>
-          </a:p>
-        </p:txBody>
-      </p:sp>
-      <p:sp>
-        <p:nvSpPr>
-          <p:cNvPr id="7" name="Shape 5"/>
-          <p:cNvSpPr/>
-          <p:nvPr/>
-        </p:nvSpPr>
-        <p:spPr>
-          <a:xfrm>
-            <a:off x="4663440" y="1737360"/>
-            <a:ext cx="3794760" cy="914400"/>
-          </a:xfrm>
-          <a:prstGeom prst="roundRect">
-            <a:avLst>
-              <a:gd name="adj" fmla="val 8000"/>
-            </a:avLst>
-          </a:prstGeom>
-          <a:solidFill>
-            <a:srgbClr val="FFFFFF"/>
-          </a:solidFill>
-          <a:ln w="12700">
-            <a:solidFill>
-              <a:srgbClr val="DCD5C1"/>
-            </a:solidFill>
-            <a:prstDash val="solid"/>
-          </a:ln>
-        </p:spPr>
-      </p:sp>
-      <p:sp>
-        <p:nvSpPr>
-          <p:cNvPr id="8" name="Text 6"/>
-          <p:cNvSpPr txBox="1"/>
-          <p:nvPr/>
-        </p:nvSpPr>
-        <p:spPr>
-          <a:xfrm>
-            <a:off x="4791456" y="1984248"/>
-            <a:ext cx="420624" cy="420624"/>
-          </a:xfrm>
-          <a:prstGeom prst="roundRect">
-            <a:avLst>
-              <a:gd name="adj" fmla="val 50000"/>
-            </a:avLst>
-          </a:prstGeom>
-          <a:solidFill>
-            <a:srgbClr val="13294B"/>
-          </a:solidFill>
-          <a:ln/>
-        </p:spPr>
-        <p:txBody>
-          <a:bodyPr wrap="square" lIns="0" tIns="0" rIns="0" bIns="0" rtlCol="0" anchor="ctr"/>
-          <a:lstStyle/>
-          <a:p>
-            <a:pPr algn="ctr" indent="0" marL="0">
-              <a:lnSpc>
-                <a:spcPct val="100000"/>
-              </a:lnSpc>
-              <a:buNone/>
-            </a:pPr>
-            <a:r>
-              <a:rPr lang="en-US" sz="1600" b="1" dirty="0">
-                <a:solidFill>
-                  <a:srgbClr val="FFFFFF"/>
-                </a:solidFill>
-                <a:latin typeface="Calibri" pitchFamily="34" charset="0"/>
-                <a:ea typeface="Calibri" pitchFamily="34" charset="-122"/>
-                <a:cs typeface="Calibri" pitchFamily="34" charset="-120"/>
-              </a:rPr>
-              <a:t>b</a:t>
-            </a:r>
-            <a:endParaRPr lang="en-US" sz="1600" dirty="0"/>
-          </a:p>
-        </p:txBody>
-      </p:sp>
-      <p:sp>
-        <p:nvSpPr>
-          <p:cNvPr id="9" name="Text 7"/>
-          <p:cNvSpPr txBox="1"/>
-          <p:nvPr/>
-        </p:nvSpPr>
-        <p:spPr>
-          <a:xfrm>
-            <a:off x="5321808" y="1773936"/>
-            <a:ext cx="3044952" cy="841248"/>
-          </a:xfrm>
-          <a:prstGeom prst="rect">
-            <a:avLst/>
-          </a:prstGeom>
-          <a:noFill/>
-          <a:ln/>
-        </p:spPr>
-        <p:txBody>
-          <a:bodyPr wrap="square" lIns="25400" tIns="25400" rIns="25400" bIns="25400" rtlCol="0" anchor="ctr"/>
-          <a:lstStyle/>
-          <a:p>
-            <a:pPr algn="l" indent="0" marL="0">
-              <a:lnSpc>
-                <a:spcPct val="100000"/>
-              </a:lnSpc>
-              <a:buNone/>
-            </a:pPr>
-            <a:r>
-              <a:rPr lang="en-US" sz="1400" dirty="0">
-                <a:solidFill>
-                  <a:srgbClr val="1F2A37"/>
-                </a:solidFill>
-                <a:latin typeface="Calibri" pitchFamily="34" charset="0"/>
-                <a:ea typeface="Calibri" pitchFamily="34" charset="-122"/>
-                <a:cs typeface="Calibri" pitchFamily="34" charset="-120"/>
-              </a:rPr>
-              <a:t>Na Alemanha de Bismarck</a:t>
-            </a:r>
-            <a:endParaRPr lang="en-US" sz="1400" dirty="0"/>
-          </a:p>
-        </p:txBody>
-      </p:sp>
-      <p:sp>
-        <p:nvSpPr>
-          <p:cNvPr id="10" name="Shape 8"/>
-          <p:cNvSpPr/>
-          <p:nvPr/>
-        </p:nvSpPr>
-        <p:spPr>
-          <a:xfrm>
-            <a:off x="685800" y="2798064"/>
-            <a:ext cx="3794760" cy="914400"/>
-          </a:xfrm>
-          <a:prstGeom prst="roundRect">
-            <a:avLst>
-              <a:gd name="adj" fmla="val 8000"/>
-            </a:avLst>
-          </a:prstGeom>
-          <a:solidFill>
-            <a:srgbClr val="FFFFFF"/>
-          </a:solidFill>
-          <a:ln w="12700">
-            <a:solidFill>
-              <a:srgbClr val="DCD5C1"/>
-            </a:solidFill>
-            <a:prstDash val="solid"/>
-          </a:ln>
-        </p:spPr>
-      </p:sp>
-      <p:sp>
-        <p:nvSpPr>
-          <p:cNvPr id="11" name="Text 9"/>
-          <p:cNvSpPr txBox="1"/>
-          <p:nvPr/>
-        </p:nvSpPr>
-        <p:spPr>
-          <a:xfrm>
-            <a:off x="813816" y="3044952"/>
-            <a:ext cx="420624" cy="420624"/>
-          </a:xfrm>
-          <a:prstGeom prst="roundRect">
-            <a:avLst>
-              <a:gd name="adj" fmla="val 50000"/>
-            </a:avLst>
-          </a:prstGeom>
-          <a:solidFill>
-            <a:srgbClr val="13294B"/>
-          </a:solidFill>
-          <a:ln/>
-        </p:spPr>
-        <p:txBody>
-          <a:bodyPr wrap="square" lIns="0" tIns="0" rIns="0" bIns="0" rtlCol="0" anchor="ctr"/>
-          <a:lstStyle/>
-          <a:p>
-            <a:pPr algn="ctr" indent="0" marL="0">
-              <a:lnSpc>
-                <a:spcPct val="100000"/>
-              </a:lnSpc>
-              <a:buNone/>
-            </a:pPr>
-            <a:r>
-              <a:rPr lang="en-US" sz="1600" b="1" dirty="0">
-                <a:solidFill>
-                  <a:srgbClr val="FFFFFF"/>
-                </a:solidFill>
-                <a:latin typeface="Calibri" pitchFamily="34" charset="0"/>
-                <a:ea typeface="Calibri" pitchFamily="34" charset="-122"/>
-                <a:cs typeface="Calibri" pitchFamily="34" charset="-120"/>
-              </a:rPr>
-              <a:t>c</a:t>
-            </a:r>
-            <a:endParaRPr lang="en-US" sz="1600" dirty="0"/>
-          </a:p>
-        </p:txBody>
-      </p:sp>
-      <p:sp>
-        <p:nvSpPr>
-          <p:cNvPr id="12" name="Text 10"/>
-          <p:cNvSpPr txBox="1"/>
-          <p:nvPr/>
-        </p:nvSpPr>
-        <p:spPr>
-          <a:xfrm>
-            <a:off x="1344168" y="2834640"/>
-            <a:ext cx="3044952" cy="841248"/>
-          </a:xfrm>
-          <a:prstGeom prst="rect">
-            <a:avLst/>
-          </a:prstGeom>
-          <a:noFill/>
-          <a:ln/>
-        </p:spPr>
-        <p:txBody>
-          <a:bodyPr wrap="square" lIns="25400" tIns="25400" rIns="25400" bIns="25400" rtlCol="0" anchor="ctr"/>
-          <a:lstStyle/>
-          <a:p>
-            <a:pPr algn="l" indent="0" marL="0">
-              <a:lnSpc>
-                <a:spcPct val="100000"/>
-              </a:lnSpc>
-              <a:buNone/>
-            </a:pPr>
-            <a:r>
-              <a:rPr lang="en-US" sz="1400" dirty="0">
-                <a:solidFill>
-                  <a:srgbClr val="1F2A37"/>
-                </a:solidFill>
-                <a:latin typeface="Calibri" pitchFamily="34" charset="0"/>
-                <a:ea typeface="Calibri" pitchFamily="34" charset="-122"/>
-                <a:cs typeface="Calibri" pitchFamily="34" charset="-120"/>
-              </a:rPr>
-              <a:t>Nos EUA de Roosevelt</a:t>
-            </a:r>
-            <a:endParaRPr lang="en-US" sz="1400" dirty="0"/>
-          </a:p>
-        </p:txBody>
-      </p:sp>
-      <p:sp>
-        <p:nvSpPr>
-          <p:cNvPr id="13" name="Shape 11"/>
-          <p:cNvSpPr/>
-          <p:nvPr/>
-        </p:nvSpPr>
-        <p:spPr>
-          <a:xfrm>
-            <a:off x="4663440" y="2798064"/>
-            <a:ext cx="3794760" cy="914400"/>
-          </a:xfrm>
-          <a:prstGeom prst="roundRect">
-            <a:avLst>
-              <a:gd name="adj" fmla="val 8000"/>
-            </a:avLst>
-          </a:prstGeom>
-          <a:solidFill>
-            <a:srgbClr val="FFFFFF"/>
-          </a:solidFill>
-          <a:ln w="12700">
-            <a:solidFill>
-              <a:srgbClr val="DCD5C1"/>
-            </a:solidFill>
-            <a:prstDash val="solid"/>
-          </a:ln>
-        </p:spPr>
-      </p:sp>
-      <p:sp>
-        <p:nvSpPr>
-          <p:cNvPr id="14" name="Text 12"/>
-          <p:cNvSpPr txBox="1"/>
-          <p:nvPr/>
-        </p:nvSpPr>
-        <p:spPr>
-          <a:xfrm>
-            <a:off x="4791456" y="3044952"/>
-            <a:ext cx="420624" cy="420624"/>
-          </a:xfrm>
-          <a:prstGeom prst="roundRect">
-            <a:avLst>
-              <a:gd name="adj" fmla="val 50000"/>
-            </a:avLst>
-          </a:prstGeom>
-          <a:solidFill>
-            <a:srgbClr val="13294B"/>
-          </a:solidFill>
-          <a:ln/>
-        </p:spPr>
-        <p:txBody>
-          <a:bodyPr wrap="square" lIns="0" tIns="0" rIns="0" bIns="0" rtlCol="0" anchor="ctr"/>
-          <a:lstStyle/>
-          <a:p>
-            <a:pPr algn="ctr" indent="0" marL="0">
-              <a:lnSpc>
-                <a:spcPct val="100000"/>
-              </a:lnSpc>
-              <a:buNone/>
-            </a:pPr>
-            <a:r>
-              <a:rPr lang="en-US" sz="1600" b="1" dirty="0">
-                <a:solidFill>
-                  <a:srgbClr val="FFFFFF"/>
-                </a:solidFill>
-                <a:latin typeface="Calibri" pitchFamily="34" charset="0"/>
-                <a:ea typeface="Calibri" pitchFamily="34" charset="-122"/>
-                <a:cs typeface="Calibri" pitchFamily="34" charset="-120"/>
-              </a:rPr>
-              <a:t>d</a:t>
-            </a:r>
-            <a:endParaRPr lang="en-US" sz="1600" dirty="0"/>
-          </a:p>
-        </p:txBody>
-      </p:sp>
-      <p:sp>
-        <p:nvSpPr>
-          <p:cNvPr id="15" name="Text 13"/>
-          <p:cNvSpPr txBox="1"/>
-          <p:nvPr/>
-        </p:nvSpPr>
-        <p:spPr>
-          <a:xfrm>
-            <a:off x="5321808" y="2834640"/>
-            <a:ext cx="3044952" cy="841248"/>
-          </a:xfrm>
-          <a:prstGeom prst="rect">
-            <a:avLst/>
-          </a:prstGeom>
-          <a:noFill/>
-          <a:ln/>
-        </p:spPr>
-        <p:txBody>
-          <a:bodyPr wrap="square" lIns="25400" tIns="25400" rIns="25400" bIns="25400" rtlCol="0" anchor="ctr"/>
-          <a:lstStyle/>
-          <a:p>
-            <a:pPr algn="l" indent="0" marL="0">
-              <a:lnSpc>
-                <a:spcPct val="100000"/>
-              </a:lnSpc>
-              <a:buNone/>
-            </a:pPr>
-            <a:r>
-              <a:rPr lang="en-US" sz="1400" dirty="0">
-                <a:solidFill>
-                  <a:srgbClr val="1F2A37"/>
-                </a:solidFill>
-                <a:latin typeface="Calibri" pitchFamily="34" charset="0"/>
-                <a:ea typeface="Calibri" pitchFamily="34" charset="-122"/>
-                <a:cs typeface="Calibri" pitchFamily="34" charset="-120"/>
-              </a:rPr>
-              <a:t>Na União Soviética</a:t>
-            </a:r>
-            <a:endParaRPr lang="en-US" sz="1400" dirty="0"/>
-          </a:p>
-        </p:txBody>
-      </p:sp>
-      <p:sp>
-        <p:nvSpPr>
-          <p:cNvPr id="16" name="Text 14"/>
-          <p:cNvSpPr txBox="1"/>
-          <p:nvPr/>
-        </p:nvSpPr>
-        <p:spPr>
-          <a:xfrm>
-            <a:off x="4206240" y="36576"/>
-            <a:ext cx="4800600" cy="219456"/>
-          </a:xfrm>
-          <a:prstGeom prst="rect">
-            <a:avLst/>
-          </a:prstGeom>
-          <a:noFill/>
-          <a:ln/>
-        </p:spPr>
-        <p:txBody>
-          <a:bodyPr wrap="square" lIns="0" tIns="0" rIns="0" bIns="0" rtlCol="0" anchor="ctr"/>
-          <a:lstStyle/>
-          <a:p>
-            <a:pPr algn="r" indent="0" marL="0">
-              <a:lnSpc>
-                <a:spcPct val="100000"/>
-              </a:lnSpc>
-              <a:buNone/>
-            </a:pPr>
-            <a:r>
-              <a:rPr lang="en-US" sz="950" dirty="0">
-                <a:solidFill>
-                  <a:srgbClr val="5B6770"/>
-                </a:solidFill>
-                <a:latin typeface="Calibri" pitchFamily="34" charset="0"/>
-                <a:ea typeface="Calibri" pitchFamily="34" charset="-122"/>
-                <a:cs typeface="Calibri" pitchFamily="34" charset="-120"/>
-              </a:rPr>
-              <a:t>Estado, Governo e Mercado · Unidade 3</a:t>
-            </a:r>
-            <a:endParaRPr lang="en-US" sz="950" dirty="0"/>
-          </a:p>
-        </p:txBody>
-      </p:sp>
-    </p:spTree>
-  </p:cSld>
-  <p:clrMapOvr>
-    <a:masterClrMapping/>
-  </p:clrMapOvr>
-</p:sld>
-</file>
-
-<file path=ppt/slides/slide27.xml><?xml version="1.0" encoding="utf-8"?>
-<p:sld xmlns:a="http://schemas.openxmlformats.org/drawingml/2006/main" xmlns:r="http://schemas.openxmlformats.org/officeDocument/2006/relationships" xmlns:p="http://schemas.openxmlformats.org/presentationml/2006/main">
-  <p:cSld name="Slide 27">
-    <p:bg>
-      <p:bgPr>
-        <a:blipFill dpi="0" rotWithShape="1">
-          <a:blip r:embed="rId1">
-            <a:lum/>
-          </a:blip>
-          <a:srcRect/>
-          <a:stretch>
-            <a:fillRect/>
-          </a:stretch>
-        </a:blipFill>
-        <a:effectLst/>
-      </p:bgPr>
-    </p:bg>
-    <p:spTree>
-      <p:nvGrpSpPr>
-        <p:cNvPr id="1" name=""/>
-        <p:cNvGrpSpPr/>
-        <p:nvPr/>
-      </p:nvGrpSpPr>
-      <p:grpSpPr>
-        <a:xfrm>
-          <a:off x="0" y="0"/>
-          <a:ext cx="0" cy="0"/>
-          <a:chOff x="0" y="0"/>
-          <a:chExt cx="0" cy="0"/>
-        </a:xfrm>
-      </p:grpSpPr>
-      <p:sp>
-        <p:nvSpPr>
-          <p:cNvPr id="2" name="Text 0"/>
-          <p:cNvSpPr txBox="1"/>
-          <p:nvPr/>
-        </p:nvSpPr>
-        <p:spPr>
-          <a:xfrm>
-            <a:off x="731520" y="274320"/>
-            <a:ext cx="7680960" cy="365760"/>
-          </a:xfrm>
-          <a:prstGeom prst="rect">
-            <a:avLst/>
-          </a:prstGeom>
-          <a:noFill/>
-          <a:ln/>
-        </p:spPr>
-        <p:txBody>
-          <a:bodyPr wrap="square" lIns="0" tIns="0" rIns="0" bIns="0" rtlCol="0" anchor="ctr"/>
-          <a:lstStyle/>
-          <a:p>
-            <a:pPr algn="ctr" indent="0" marL="0">
-              <a:lnSpc>
-                <a:spcPct val="100000"/>
-              </a:lnSpc>
-              <a:buNone/>
-            </a:pPr>
-            <a:r>
-              <a:rPr lang="en-US" sz="1250" b="1" dirty="0">
-                <a:solidFill>
-                  <a:srgbClr val="2A8C85"/>
-                </a:solidFill>
-                <a:latin typeface="Calibri" pitchFamily="34" charset="0"/>
-                <a:ea typeface="Calibri" pitchFamily="34" charset="-122"/>
-                <a:cs typeface="Calibri" pitchFamily="34" charset="-120"/>
-              </a:rPr>
-              <a:t>QUIZ DA UNIDADE 3 · PERGUNTA 4 DE 5 · RESPOSTA</a:t>
-            </a:r>
-            <a:endParaRPr lang="en-US" sz="1250" dirty="0"/>
-          </a:p>
-        </p:txBody>
-      </p:sp>
-      <p:sp>
-        <p:nvSpPr>
-          <p:cNvPr id="3" name="Text 1"/>
-          <p:cNvSpPr txBox="1"/>
-          <p:nvPr/>
-        </p:nvSpPr>
-        <p:spPr>
-          <a:xfrm>
-            <a:off x="731520" y="658368"/>
-            <a:ext cx="7680960" cy="960120"/>
-          </a:xfrm>
-          <a:prstGeom prst="rect">
-            <a:avLst/>
-          </a:prstGeom>
-          <a:noFill/>
-          <a:ln/>
-        </p:spPr>
-        <p:txBody>
-          <a:bodyPr wrap="square" lIns="0" tIns="0" rIns="0" bIns="0" rtlCol="0" anchor="ctr"/>
-          <a:lstStyle/>
-          <a:p>
-            <a:pPr algn="ctr" indent="0" marL="0">
-              <a:lnSpc>
-                <a:spcPct val="100000"/>
-              </a:lnSpc>
-              <a:buNone/>
-            </a:pPr>
-            <a:r>
-              <a:rPr lang="en-US" sz="1900" b="1" dirty="0">
-                <a:solidFill>
-                  <a:srgbClr val="13294B"/>
-                </a:solidFill>
-                <a:latin typeface="Calibri" pitchFamily="34" charset="0"/>
-                <a:ea typeface="Calibri" pitchFamily="34" charset="-122"/>
-                <a:cs typeface="Calibri" pitchFamily="34" charset="-120"/>
-              </a:rPr>
-              <a:t>Os primeiros seguros sociais estatais (doença, acidentes e velhice) foram criados:</a:t>
-            </a:r>
-            <a:endParaRPr lang="en-US" sz="1900" dirty="0"/>
-          </a:p>
-        </p:txBody>
-      </p:sp>
-      <p:sp>
-        <p:nvSpPr>
-          <p:cNvPr id="4" name="Shape 2"/>
-          <p:cNvSpPr/>
-          <p:nvPr/>
-        </p:nvSpPr>
-        <p:spPr>
-          <a:xfrm>
-            <a:off x="685800" y="1737360"/>
-            <a:ext cx="3794760" cy="749808"/>
-          </a:xfrm>
-          <a:prstGeom prst="roundRect">
-            <a:avLst>
-              <a:gd name="adj" fmla="val 9756"/>
-            </a:avLst>
-          </a:prstGeom>
-          <a:solidFill>
-            <a:srgbClr val="FFFFFF"/>
-          </a:solidFill>
-          <a:ln w="12700">
-            <a:solidFill>
-              <a:srgbClr val="DCD5C1"/>
-            </a:solidFill>
-            <a:prstDash val="solid"/>
-          </a:ln>
-        </p:spPr>
-      </p:sp>
-      <p:sp>
-        <p:nvSpPr>
-          <p:cNvPr id="5" name="Text 3"/>
-          <p:cNvSpPr txBox="1"/>
-          <p:nvPr/>
-        </p:nvSpPr>
-        <p:spPr>
-          <a:xfrm>
-            <a:off x="813816" y="1901952"/>
-            <a:ext cx="420624" cy="420624"/>
-          </a:xfrm>
-          <a:prstGeom prst="roundRect">
-            <a:avLst>
-              <a:gd name="adj" fmla="val 50000"/>
-            </a:avLst>
-          </a:prstGeom>
-          <a:solidFill>
-            <a:srgbClr val="9AA3AB"/>
-          </a:solidFill>
-          <a:ln/>
-        </p:spPr>
-        <p:txBody>
-          <a:bodyPr wrap="square" lIns="0" tIns="0" rIns="0" bIns="0" rtlCol="0" anchor="ctr"/>
-          <a:lstStyle/>
-          <a:p>
-            <a:pPr algn="ctr" indent="0" marL="0">
-              <a:lnSpc>
-                <a:spcPct val="100000"/>
-              </a:lnSpc>
-              <a:buNone/>
-            </a:pPr>
-            <a:r>
-              <a:rPr lang="en-US" sz="1600" b="1" dirty="0">
-                <a:solidFill>
-                  <a:srgbClr val="FFFFFF"/>
-                </a:solidFill>
-                <a:latin typeface="Calibri" pitchFamily="34" charset="0"/>
-                <a:ea typeface="Calibri" pitchFamily="34" charset="-122"/>
-                <a:cs typeface="Calibri" pitchFamily="34" charset="-120"/>
-              </a:rPr>
-              <a:t>a</a:t>
-            </a:r>
-            <a:endParaRPr lang="en-US" sz="1600" dirty="0"/>
-          </a:p>
-        </p:txBody>
-      </p:sp>
-      <p:sp>
-        <p:nvSpPr>
-          <p:cNvPr id="6" name="Text 4"/>
-          <p:cNvSpPr txBox="1"/>
-          <p:nvPr/>
-        </p:nvSpPr>
-        <p:spPr>
-          <a:xfrm>
-            <a:off x="1344168" y="1773936"/>
-            <a:ext cx="3044952" cy="676656"/>
-          </a:xfrm>
-          <a:prstGeom prst="rect">
-            <a:avLst/>
-          </a:prstGeom>
-          <a:noFill/>
-          <a:ln/>
-        </p:spPr>
-        <p:txBody>
-          <a:bodyPr wrap="square" lIns="25400" tIns="25400" rIns="25400" bIns="25400" rtlCol="0" anchor="ctr"/>
-          <a:lstStyle/>
-          <a:p>
-            <a:pPr algn="l" indent="0" marL="0">
-              <a:lnSpc>
-                <a:spcPct val="100000"/>
-              </a:lnSpc>
-              <a:buNone/>
-            </a:pPr>
-            <a:r>
-              <a:rPr lang="en-US" sz="1400" dirty="0">
-                <a:solidFill>
-                  <a:srgbClr val="5B6770"/>
-                </a:solidFill>
-                <a:latin typeface="Calibri" pitchFamily="34" charset="0"/>
-                <a:ea typeface="Calibri" pitchFamily="34" charset="-122"/>
-                <a:cs typeface="Calibri" pitchFamily="34" charset="-120"/>
-              </a:rPr>
-              <a:t>Na Inglaterra de Thatcher</a:t>
-            </a:r>
-            <a:endParaRPr lang="en-US" sz="1400" dirty="0"/>
-          </a:p>
-        </p:txBody>
-      </p:sp>
-      <p:sp>
-        <p:nvSpPr>
-          <p:cNvPr id="7" name="Shape 5"/>
-          <p:cNvSpPr/>
-          <p:nvPr/>
-        </p:nvSpPr>
-        <p:spPr>
-          <a:xfrm>
-            <a:off x="4663440" y="1737360"/>
-            <a:ext cx="3794760" cy="749808"/>
-          </a:xfrm>
-          <a:prstGeom prst="roundRect">
-            <a:avLst>
-              <a:gd name="adj" fmla="val 9756"/>
-            </a:avLst>
-          </a:prstGeom>
-          <a:solidFill>
-            <a:srgbClr val="E3F2E8"/>
-          </a:solidFill>
-          <a:ln w="25400">
-            <a:solidFill>
-              <a:srgbClr val="2E7D4F"/>
-            </a:solidFill>
-            <a:prstDash val="solid"/>
-          </a:ln>
-        </p:spPr>
-      </p:sp>
-      <p:sp>
-        <p:nvSpPr>
-          <p:cNvPr id="8" name="Text 6"/>
-          <p:cNvSpPr txBox="1"/>
-          <p:nvPr/>
-        </p:nvSpPr>
-        <p:spPr>
-          <a:xfrm>
-            <a:off x="4791456" y="1901952"/>
-            <a:ext cx="420624" cy="420624"/>
-          </a:xfrm>
-          <a:prstGeom prst="roundRect">
-            <a:avLst>
-              <a:gd name="adj" fmla="val 50000"/>
-            </a:avLst>
-          </a:prstGeom>
-          <a:solidFill>
-            <a:srgbClr val="2E7D4F"/>
-          </a:solidFill>
-          <a:ln/>
-        </p:spPr>
-        <p:txBody>
-          <a:bodyPr wrap="square" lIns="0" tIns="0" rIns="0" bIns="0" rtlCol="0" anchor="ctr"/>
-          <a:lstStyle/>
-          <a:p>
-            <a:pPr algn="ctr" indent="0" marL="0">
-              <a:lnSpc>
-                <a:spcPct val="100000"/>
-              </a:lnSpc>
-              <a:buNone/>
-            </a:pPr>
-            <a:r>
-              <a:rPr lang="en-US" sz="1600" b="1" dirty="0">
-                <a:solidFill>
-                  <a:srgbClr val="FFFFFF"/>
-                </a:solidFill>
-                <a:latin typeface="Calibri" pitchFamily="34" charset="0"/>
-                <a:ea typeface="Calibri" pitchFamily="34" charset="-122"/>
-                <a:cs typeface="Calibri" pitchFamily="34" charset="-120"/>
-              </a:rPr>
-              <a:t>b</a:t>
-            </a:r>
-            <a:endParaRPr lang="en-US" sz="1600" dirty="0"/>
-          </a:p>
-        </p:txBody>
-      </p:sp>
-      <p:sp>
-        <p:nvSpPr>
-          <p:cNvPr id="9" name="Text 7"/>
-          <p:cNvSpPr txBox="1"/>
-          <p:nvPr/>
-        </p:nvSpPr>
-        <p:spPr>
-          <a:xfrm>
-            <a:off x="5321808" y="1773936"/>
-            <a:ext cx="3044952" cy="676656"/>
-          </a:xfrm>
-          <a:prstGeom prst="rect">
-            <a:avLst/>
-          </a:prstGeom>
-          <a:noFill/>
-          <a:ln/>
-        </p:spPr>
-        <p:txBody>
-          <a:bodyPr wrap="square" lIns="25400" tIns="25400" rIns="25400" bIns="25400" rtlCol="0" anchor="ctr"/>
-          <a:lstStyle/>
-          <a:p>
-            <a:pPr algn="l" indent="0" marL="0">
-              <a:lnSpc>
-                <a:spcPct val="100000"/>
-              </a:lnSpc>
-              <a:buNone/>
-            </a:pPr>
-            <a:r>
-              <a:rPr lang="en-US" sz="1400" b="1" dirty="0">
-                <a:solidFill>
-                  <a:srgbClr val="1F2A37"/>
-                </a:solidFill>
-                <a:latin typeface="Calibri" pitchFamily="34" charset="0"/>
-                <a:ea typeface="Calibri" pitchFamily="34" charset="-122"/>
-                <a:cs typeface="Calibri" pitchFamily="34" charset="-120"/>
-              </a:rPr>
-              <a:t>Na Alemanha de Bismarck</a:t>
-            </a:r>
-            <a:endParaRPr lang="en-US" sz="1400" dirty="0"/>
-          </a:p>
-        </p:txBody>
-      </p:sp>
-      <p:sp>
-        <p:nvSpPr>
-          <p:cNvPr id="10" name="Shape 8"/>
-          <p:cNvSpPr/>
-          <p:nvPr/>
-        </p:nvSpPr>
-        <p:spPr>
-          <a:xfrm>
-            <a:off x="685800" y="2633472"/>
-            <a:ext cx="3794760" cy="749808"/>
-          </a:xfrm>
-          <a:prstGeom prst="roundRect">
-            <a:avLst>
-              <a:gd name="adj" fmla="val 9756"/>
-            </a:avLst>
-          </a:prstGeom>
-          <a:solidFill>
-            <a:srgbClr val="FFFFFF"/>
-          </a:solidFill>
-          <a:ln w="12700">
-            <a:solidFill>
-              <a:srgbClr val="DCD5C1"/>
-            </a:solidFill>
-            <a:prstDash val="solid"/>
-          </a:ln>
-        </p:spPr>
-      </p:sp>
-      <p:sp>
-        <p:nvSpPr>
-          <p:cNvPr id="11" name="Text 9"/>
-          <p:cNvSpPr txBox="1"/>
-          <p:nvPr/>
-        </p:nvSpPr>
-        <p:spPr>
-          <a:xfrm>
-            <a:off x="813816" y="2798064"/>
-            <a:ext cx="420624" cy="420624"/>
-          </a:xfrm>
-          <a:prstGeom prst="roundRect">
-            <a:avLst>
-              <a:gd name="adj" fmla="val 50000"/>
-            </a:avLst>
-          </a:prstGeom>
-          <a:solidFill>
-            <a:srgbClr val="9AA3AB"/>
-          </a:solidFill>
-          <a:ln/>
-        </p:spPr>
-        <p:txBody>
-          <a:bodyPr wrap="square" lIns="0" tIns="0" rIns="0" bIns="0" rtlCol="0" anchor="ctr"/>
-          <a:lstStyle/>
-          <a:p>
-            <a:pPr algn="ctr" indent="0" marL="0">
-              <a:lnSpc>
-                <a:spcPct val="100000"/>
-              </a:lnSpc>
-              <a:buNone/>
-            </a:pPr>
-            <a:r>
-              <a:rPr lang="en-US" sz="1600" b="1" dirty="0">
-                <a:solidFill>
-                  <a:srgbClr val="FFFFFF"/>
-                </a:solidFill>
-                <a:latin typeface="Calibri" pitchFamily="34" charset="0"/>
-                <a:ea typeface="Calibri" pitchFamily="34" charset="-122"/>
-                <a:cs typeface="Calibri" pitchFamily="34" charset="-120"/>
-              </a:rPr>
-              <a:t>c</a:t>
-            </a:r>
-            <a:endParaRPr lang="en-US" sz="1600" dirty="0"/>
-          </a:p>
-        </p:txBody>
-      </p:sp>
-      <p:sp>
-        <p:nvSpPr>
-          <p:cNvPr id="12" name="Text 10"/>
-          <p:cNvSpPr txBox="1"/>
-          <p:nvPr/>
-        </p:nvSpPr>
-        <p:spPr>
-          <a:xfrm>
-            <a:off x="1344168" y="2670048"/>
-            <a:ext cx="3044952" cy="676656"/>
-          </a:xfrm>
-          <a:prstGeom prst="rect">
-            <a:avLst/>
-          </a:prstGeom>
-          <a:noFill/>
-          <a:ln/>
-        </p:spPr>
-        <p:txBody>
-          <a:bodyPr wrap="square" lIns="25400" tIns="25400" rIns="25400" bIns="25400" rtlCol="0" anchor="ctr"/>
-          <a:lstStyle/>
-          <a:p>
-            <a:pPr algn="l" indent="0" marL="0">
-              <a:lnSpc>
-                <a:spcPct val="100000"/>
-              </a:lnSpc>
-              <a:buNone/>
-            </a:pPr>
-            <a:r>
-              <a:rPr lang="en-US" sz="1400" dirty="0">
-                <a:solidFill>
-                  <a:srgbClr val="5B6770"/>
-                </a:solidFill>
-                <a:latin typeface="Calibri" pitchFamily="34" charset="0"/>
-                <a:ea typeface="Calibri" pitchFamily="34" charset="-122"/>
-                <a:cs typeface="Calibri" pitchFamily="34" charset="-120"/>
-              </a:rPr>
-              <a:t>Nos EUA de Roosevelt</a:t>
-            </a:r>
-            <a:endParaRPr lang="en-US" sz="1400" dirty="0"/>
-          </a:p>
-        </p:txBody>
-      </p:sp>
-      <p:sp>
-        <p:nvSpPr>
-          <p:cNvPr id="13" name="Shape 11"/>
-          <p:cNvSpPr/>
-          <p:nvPr/>
-        </p:nvSpPr>
-        <p:spPr>
-          <a:xfrm>
-            <a:off x="4663440" y="2633472"/>
-            <a:ext cx="3794760" cy="749808"/>
-          </a:xfrm>
-          <a:prstGeom prst="roundRect">
-            <a:avLst>
-              <a:gd name="adj" fmla="val 9756"/>
-            </a:avLst>
-          </a:prstGeom>
-          <a:solidFill>
-            <a:srgbClr val="FFFFFF"/>
-          </a:solidFill>
-          <a:ln w="12700">
-            <a:solidFill>
-              <a:srgbClr val="DCD5C1"/>
-            </a:solidFill>
-            <a:prstDash val="solid"/>
-          </a:ln>
-        </p:spPr>
-      </p:sp>
-      <p:sp>
-        <p:nvSpPr>
-          <p:cNvPr id="14" name="Text 12"/>
-          <p:cNvSpPr txBox="1"/>
-          <p:nvPr/>
-        </p:nvSpPr>
-        <p:spPr>
-          <a:xfrm>
-            <a:off x="4791456" y="2798064"/>
-            <a:ext cx="420624" cy="420624"/>
-          </a:xfrm>
-          <a:prstGeom prst="roundRect">
-            <a:avLst>
-              <a:gd name="adj" fmla="val 50000"/>
-            </a:avLst>
-          </a:prstGeom>
-          <a:solidFill>
-            <a:srgbClr val="9AA3AB"/>
-          </a:solidFill>
-          <a:ln/>
-        </p:spPr>
-        <p:txBody>
-          <a:bodyPr wrap="square" lIns="0" tIns="0" rIns="0" bIns="0" rtlCol="0" anchor="ctr"/>
-          <a:lstStyle/>
-          <a:p>
-            <a:pPr algn="ctr" indent="0" marL="0">
-              <a:lnSpc>
-                <a:spcPct val="100000"/>
-              </a:lnSpc>
-              <a:buNone/>
-            </a:pPr>
-            <a:r>
-              <a:rPr lang="en-US" sz="1600" b="1" dirty="0">
-                <a:solidFill>
-                  <a:srgbClr val="FFFFFF"/>
-                </a:solidFill>
-                <a:latin typeface="Calibri" pitchFamily="34" charset="0"/>
-                <a:ea typeface="Calibri" pitchFamily="34" charset="-122"/>
-                <a:cs typeface="Calibri" pitchFamily="34" charset="-120"/>
-              </a:rPr>
-              <a:t>d</a:t>
-            </a:r>
-            <a:endParaRPr lang="en-US" sz="1600" dirty="0"/>
-          </a:p>
-        </p:txBody>
-      </p:sp>
-      <p:sp>
-        <p:nvSpPr>
-          <p:cNvPr id="15" name="Text 13"/>
-          <p:cNvSpPr txBox="1"/>
-          <p:nvPr/>
-        </p:nvSpPr>
-        <p:spPr>
-          <a:xfrm>
-            <a:off x="5321808" y="2670048"/>
-            <a:ext cx="3044952" cy="676656"/>
-          </a:xfrm>
-          <a:prstGeom prst="rect">
-            <a:avLst/>
-          </a:prstGeom>
-          <a:noFill/>
-          <a:ln/>
-        </p:spPr>
-        <p:txBody>
-          <a:bodyPr wrap="square" lIns="25400" tIns="25400" rIns="25400" bIns="25400" rtlCol="0" anchor="ctr"/>
-          <a:lstStyle/>
-          <a:p>
-            <a:pPr algn="l" indent="0" marL="0">
-              <a:lnSpc>
-                <a:spcPct val="100000"/>
-              </a:lnSpc>
-              <a:buNone/>
-            </a:pPr>
-            <a:r>
-              <a:rPr lang="en-US" sz="1400" dirty="0">
-                <a:solidFill>
-                  <a:srgbClr val="5B6770"/>
-                </a:solidFill>
-                <a:latin typeface="Calibri" pitchFamily="34" charset="0"/>
-                <a:ea typeface="Calibri" pitchFamily="34" charset="-122"/>
-                <a:cs typeface="Calibri" pitchFamily="34" charset="-120"/>
-              </a:rPr>
-              <a:t>Na União Soviética</a:t>
-            </a:r>
-            <a:endParaRPr lang="en-US" sz="1400" dirty="0"/>
-          </a:p>
-        </p:txBody>
-      </p:sp>
-      <p:sp>
-        <p:nvSpPr>
-          <p:cNvPr id="16" name="Text 14"/>
-          <p:cNvSpPr txBox="1"/>
-          <p:nvPr/>
-        </p:nvSpPr>
-        <p:spPr>
-          <a:xfrm>
-            <a:off x="685800" y="3566160"/>
-            <a:ext cx="7772400" cy="841248"/>
-          </a:xfrm>
-          <a:prstGeom prst="roundRect">
-            <a:avLst>
-              <a:gd name="adj" fmla="val 8696"/>
-            </a:avLst>
-          </a:prstGeom>
-          <a:solidFill>
-            <a:srgbClr val="E6F2F0"/>
-          </a:solidFill>
-          <a:ln/>
-        </p:spPr>
-        <p:txBody>
-          <a:bodyPr wrap="square" lIns="114300" tIns="114300" rIns="114300" bIns="114300" rtlCol="0" anchor="ctr"/>
-          <a:lstStyle/>
-          <a:p>
-            <a:pPr algn="l" indent="0" marL="0">
-              <a:lnSpc>
-                <a:spcPct val="100000"/>
-              </a:lnSpc>
-              <a:buNone/>
-            </a:pPr>
-            <a:r>
-              <a:rPr lang="en-US" sz="1350" b="1" dirty="0">
-                <a:solidFill>
-                  <a:srgbClr val="2E7D4F"/>
-                </a:solidFill>
-                <a:latin typeface="Calibri" pitchFamily="34" charset="0"/>
-                <a:ea typeface="Calibri" pitchFamily="34" charset="-122"/>
-                <a:cs typeface="Calibri" pitchFamily="34" charset="-120"/>
-              </a:rPr>
-              <a:t>Resposta: b) </a:t>
-            </a:r>
-            <a:pPr algn="l" indent="0" marL="0">
-              <a:lnSpc>
-                <a:spcPct val="100000"/>
-              </a:lnSpc>
-              <a:buNone/>
-            </a:pPr>
-            <a:r>
-              <a:rPr lang="en-US" sz="1350" dirty="0">
-                <a:solidFill>
-                  <a:srgbClr val="1F2A37"/>
-                </a:solidFill>
-                <a:latin typeface="Calibri" pitchFamily="34" charset="0"/>
-                <a:ea typeface="Calibri" pitchFamily="34" charset="-122"/>
-                <a:cs typeface="Calibri" pitchFamily="34" charset="-120"/>
-              </a:rPr>
-              <a:t>Entre 1883 e 1889, na Alemanha de Bismarck: marco inicial da proteção social pelo Estado.</a:t>
-            </a:r>
-            <a:endParaRPr lang="en-US" sz="1350" dirty="0"/>
-          </a:p>
-        </p:txBody>
-      </p:sp>
-      <p:sp>
-        <p:nvSpPr>
-          <p:cNvPr id="17" name="Text 15"/>
-          <p:cNvSpPr txBox="1"/>
-          <p:nvPr/>
-        </p:nvSpPr>
-        <p:spPr>
-          <a:xfrm>
-            <a:off x="4206240" y="36576"/>
-            <a:ext cx="4800600" cy="219456"/>
-          </a:xfrm>
-          <a:prstGeom prst="rect">
-            <a:avLst/>
-          </a:prstGeom>
-          <a:noFill/>
-          <a:ln/>
-        </p:spPr>
-        <p:txBody>
-          <a:bodyPr wrap="square" lIns="0" tIns="0" rIns="0" bIns="0" rtlCol="0" anchor="ctr"/>
-          <a:lstStyle/>
-          <a:p>
-            <a:pPr algn="r" indent="0" marL="0">
-              <a:lnSpc>
-                <a:spcPct val="100000"/>
-              </a:lnSpc>
-              <a:buNone/>
-            </a:pPr>
-            <a:r>
-              <a:rPr lang="en-US" sz="950" dirty="0">
-                <a:solidFill>
-                  <a:srgbClr val="5B6770"/>
-                </a:solidFill>
-                <a:latin typeface="Calibri" pitchFamily="34" charset="0"/>
-                <a:ea typeface="Calibri" pitchFamily="34" charset="-122"/>
-                <a:cs typeface="Calibri" pitchFamily="34" charset="-120"/>
-              </a:rPr>
-              <a:t>Estado, Governo e Mercado · Unidade 3</a:t>
-            </a:r>
-            <a:endParaRPr lang="en-US" sz="950" dirty="0"/>
-          </a:p>
-        </p:txBody>
-      </p:sp>
-    </p:spTree>
-  </p:cSld>
-  <p:clrMapOvr>
-    <a:masterClrMapping/>
-  </p:clrMapOvr>
-</p:sld>
-</file>
-
-<file path=ppt/slides/slide28.xml><?xml version="1.0" encoding="utf-8"?>
-<p:sld xmlns:a="http://schemas.openxmlformats.org/drawingml/2006/main" xmlns:r="http://schemas.openxmlformats.org/officeDocument/2006/relationships" xmlns:p="http://schemas.openxmlformats.org/presentationml/2006/main">
-  <p:cSld name="Slide 28">
-    <p:bg>
-      <p:bgPr>
-        <a:blipFill dpi="0" rotWithShape="1">
-          <a:blip r:embed="rId1">
-            <a:lum/>
-          </a:blip>
-          <a:srcRect/>
-          <a:stretch>
-            <a:fillRect/>
-          </a:stretch>
-        </a:blipFill>
-        <a:effectLst/>
-      </p:bgPr>
-    </p:bg>
-    <p:spTree>
-      <p:nvGrpSpPr>
-        <p:cNvPr id="1" name=""/>
-        <p:cNvGrpSpPr/>
-        <p:nvPr/>
-      </p:nvGrpSpPr>
-      <p:grpSpPr>
-        <a:xfrm>
-          <a:off x="0" y="0"/>
-          <a:ext cx="0" cy="0"/>
-          <a:chOff x="0" y="0"/>
-          <a:chExt cx="0" cy="0"/>
-        </a:xfrm>
-      </p:grpSpPr>
-      <p:sp>
-        <p:nvSpPr>
-          <p:cNvPr id="2" name="Text 0"/>
-          <p:cNvSpPr txBox="1"/>
-          <p:nvPr/>
-        </p:nvSpPr>
-        <p:spPr>
-          <a:xfrm>
-            <a:off x="731520" y="274320"/>
-            <a:ext cx="7680960" cy="365760"/>
-          </a:xfrm>
-          <a:prstGeom prst="rect">
-            <a:avLst/>
-          </a:prstGeom>
-          <a:noFill/>
-          <a:ln/>
-        </p:spPr>
-        <p:txBody>
-          <a:bodyPr wrap="square" lIns="0" tIns="0" rIns="0" bIns="0" rtlCol="0" anchor="ctr"/>
-          <a:lstStyle/>
-          <a:p>
-            <a:pPr algn="ctr" indent="0" marL="0">
-              <a:lnSpc>
-                <a:spcPct val="100000"/>
-              </a:lnSpc>
-              <a:buNone/>
-            </a:pPr>
-            <a:r>
-              <a:rPr lang="en-US" sz="1250" b="1" dirty="0">
-                <a:solidFill>
-                  <a:srgbClr val="2A8C85"/>
-                </a:solidFill>
-                <a:latin typeface="Calibri" pitchFamily="34" charset="0"/>
-                <a:ea typeface="Calibri" pitchFamily="34" charset="-122"/>
-                <a:cs typeface="Calibri" pitchFamily="34" charset="-120"/>
-              </a:rPr>
-              <a:t>QUIZ DA UNIDADE 3 · PERGUNTA 5 DE 5</a:t>
-            </a:r>
-            <a:endParaRPr lang="en-US" sz="1250" dirty="0"/>
-          </a:p>
-        </p:txBody>
-      </p:sp>
-      <p:sp>
-        <p:nvSpPr>
-          <p:cNvPr id="3" name="Text 1"/>
-          <p:cNvSpPr txBox="1"/>
-          <p:nvPr/>
-        </p:nvSpPr>
-        <p:spPr>
-          <a:xfrm>
-            <a:off x="731520" y="658368"/>
-            <a:ext cx="7680960" cy="960120"/>
-          </a:xfrm>
-          <a:prstGeom prst="rect">
-            <a:avLst/>
-          </a:prstGeom>
-          <a:noFill/>
-          <a:ln/>
-        </p:spPr>
-        <p:txBody>
-          <a:bodyPr wrap="square" lIns="0" tIns="0" rIns="0" bIns="0" rtlCol="0" anchor="ctr"/>
-          <a:lstStyle/>
-          <a:p>
-            <a:pPr algn="ctr" indent="0" marL="0">
-              <a:lnSpc>
-                <a:spcPct val="100000"/>
-              </a:lnSpc>
-              <a:buNone/>
-            </a:pPr>
-            <a:r>
-              <a:rPr lang="en-US" sz="1900" b="1" dirty="0">
-                <a:solidFill>
-                  <a:srgbClr val="13294B"/>
-                </a:solidFill>
-                <a:latin typeface="Calibri" pitchFamily="34" charset="0"/>
-                <a:ea typeface="Calibri" pitchFamily="34" charset="-122"/>
-                <a:cs typeface="Calibri" pitchFamily="34" charset="-120"/>
-              </a:rPr>
-              <a:t>Reformas graduais pela via eleitoral e revolução por um partido de vanguarda são, respectivamente, estratégias de:</a:t>
-            </a:r>
-            <a:endParaRPr lang="en-US" sz="1900" dirty="0"/>
-          </a:p>
-        </p:txBody>
-      </p:sp>
-      <p:sp>
-        <p:nvSpPr>
-          <p:cNvPr id="4" name="Shape 2"/>
-          <p:cNvSpPr/>
-          <p:nvPr/>
-        </p:nvSpPr>
-        <p:spPr>
-          <a:xfrm>
-            <a:off x="685800" y="1737360"/>
-            <a:ext cx="3794760" cy="914400"/>
-          </a:xfrm>
-          <a:prstGeom prst="roundRect">
-            <a:avLst>
-              <a:gd name="adj" fmla="val 8000"/>
-            </a:avLst>
-          </a:prstGeom>
-          <a:solidFill>
-            <a:srgbClr val="FFFFFF"/>
-          </a:solidFill>
-          <a:ln w="12700">
-            <a:solidFill>
-              <a:srgbClr val="DCD5C1"/>
-            </a:solidFill>
-            <a:prstDash val="solid"/>
-          </a:ln>
-        </p:spPr>
-      </p:sp>
-      <p:sp>
-        <p:nvSpPr>
-          <p:cNvPr id="5" name="Text 3"/>
-          <p:cNvSpPr txBox="1"/>
-          <p:nvPr/>
-        </p:nvSpPr>
-        <p:spPr>
-          <a:xfrm>
-            <a:off x="813816" y="1984248"/>
-            <a:ext cx="420624" cy="420624"/>
-          </a:xfrm>
-          <a:prstGeom prst="roundRect">
-            <a:avLst>
-              <a:gd name="adj" fmla="val 50000"/>
-            </a:avLst>
-          </a:prstGeom>
-          <a:solidFill>
-            <a:srgbClr val="13294B"/>
-          </a:solidFill>
-          <a:ln/>
-        </p:spPr>
-        <p:txBody>
-          <a:bodyPr wrap="square" lIns="0" tIns="0" rIns="0" bIns="0" rtlCol="0" anchor="ctr"/>
-          <a:lstStyle/>
-          <a:p>
-            <a:pPr algn="ctr" indent="0" marL="0">
-              <a:lnSpc>
-                <a:spcPct val="100000"/>
-              </a:lnSpc>
-              <a:buNone/>
-            </a:pPr>
-            <a:r>
-              <a:rPr lang="en-US" sz="1600" b="1" dirty="0">
-                <a:solidFill>
-                  <a:srgbClr val="FFFFFF"/>
-                </a:solidFill>
-                <a:latin typeface="Calibri" pitchFamily="34" charset="0"/>
-                <a:ea typeface="Calibri" pitchFamily="34" charset="-122"/>
-                <a:cs typeface="Calibri" pitchFamily="34" charset="-120"/>
-              </a:rPr>
-              <a:t>a</a:t>
-            </a:r>
-            <a:endParaRPr lang="en-US" sz="1600" dirty="0"/>
-          </a:p>
-        </p:txBody>
-      </p:sp>
-      <p:sp>
-        <p:nvSpPr>
-          <p:cNvPr id="6" name="Text 4"/>
-          <p:cNvSpPr txBox="1"/>
-          <p:nvPr/>
-        </p:nvSpPr>
-        <p:spPr>
-          <a:xfrm>
-            <a:off x="1344168" y="1773936"/>
-            <a:ext cx="3044952" cy="841248"/>
-          </a:xfrm>
-          <a:prstGeom prst="rect">
-            <a:avLst/>
-          </a:prstGeom>
-          <a:noFill/>
-          <a:ln/>
-        </p:spPr>
-        <p:txBody>
-          <a:bodyPr wrap="square" lIns="25400" tIns="25400" rIns="25400" bIns="25400" rtlCol="0" anchor="ctr"/>
-          <a:lstStyle/>
-          <a:p>
-            <a:pPr algn="l" indent="0" marL="0">
-              <a:lnSpc>
-                <a:spcPct val="100000"/>
-              </a:lnSpc>
-              <a:buNone/>
-            </a:pPr>
-            <a:r>
-              <a:rPr lang="en-US" sz="1400" dirty="0">
-                <a:solidFill>
-                  <a:srgbClr val="1F2A37"/>
-                </a:solidFill>
-                <a:latin typeface="Calibri" pitchFamily="34" charset="0"/>
-                <a:ea typeface="Calibri" pitchFamily="34" charset="-122"/>
-                <a:cs typeface="Calibri" pitchFamily="34" charset="-120"/>
-              </a:rPr>
-              <a:t>Bernstein e Lênin</a:t>
-            </a:r>
-            <a:endParaRPr lang="en-US" sz="1400" dirty="0"/>
-          </a:p>
-        </p:txBody>
-      </p:sp>
-      <p:sp>
-        <p:nvSpPr>
-          <p:cNvPr id="7" name="Shape 5"/>
-          <p:cNvSpPr/>
-          <p:nvPr/>
-        </p:nvSpPr>
-        <p:spPr>
-          <a:xfrm>
-            <a:off x="4663440" y="1737360"/>
-            <a:ext cx="3794760" cy="914400"/>
-          </a:xfrm>
-          <a:prstGeom prst="roundRect">
-            <a:avLst>
-              <a:gd name="adj" fmla="val 8000"/>
-            </a:avLst>
-          </a:prstGeom>
-          <a:solidFill>
-            <a:srgbClr val="FFFFFF"/>
-          </a:solidFill>
-          <a:ln w="12700">
-            <a:solidFill>
-              <a:srgbClr val="DCD5C1"/>
-            </a:solidFill>
-            <a:prstDash val="solid"/>
-          </a:ln>
-        </p:spPr>
-      </p:sp>
-      <p:sp>
-        <p:nvSpPr>
-          <p:cNvPr id="8" name="Text 6"/>
-          <p:cNvSpPr txBox="1"/>
-          <p:nvPr/>
-        </p:nvSpPr>
-        <p:spPr>
-          <a:xfrm>
-            <a:off x="4791456" y="1984248"/>
-            <a:ext cx="420624" cy="420624"/>
-          </a:xfrm>
-          <a:prstGeom prst="roundRect">
-            <a:avLst>
-              <a:gd name="adj" fmla="val 50000"/>
-            </a:avLst>
-          </a:prstGeom>
-          <a:solidFill>
-            <a:srgbClr val="13294B"/>
-          </a:solidFill>
-          <a:ln/>
-        </p:spPr>
-        <p:txBody>
-          <a:bodyPr wrap="square" lIns="0" tIns="0" rIns="0" bIns="0" rtlCol="0" anchor="ctr"/>
-          <a:lstStyle/>
-          <a:p>
-            <a:pPr algn="ctr" indent="0" marL="0">
-              <a:lnSpc>
-                <a:spcPct val="100000"/>
-              </a:lnSpc>
-              <a:buNone/>
-            </a:pPr>
-            <a:r>
-              <a:rPr lang="en-US" sz="1600" b="1" dirty="0">
-                <a:solidFill>
-                  <a:srgbClr val="FFFFFF"/>
-                </a:solidFill>
-                <a:latin typeface="Calibri" pitchFamily="34" charset="0"/>
-                <a:ea typeface="Calibri" pitchFamily="34" charset="-122"/>
-                <a:cs typeface="Calibri" pitchFamily="34" charset="-120"/>
-              </a:rPr>
-              <a:t>b</a:t>
-            </a:r>
-            <a:endParaRPr lang="en-US" sz="1600" dirty="0"/>
-          </a:p>
-        </p:txBody>
-      </p:sp>
-      <p:sp>
-        <p:nvSpPr>
-          <p:cNvPr id="9" name="Text 7"/>
-          <p:cNvSpPr txBox="1"/>
-          <p:nvPr/>
-        </p:nvSpPr>
-        <p:spPr>
-          <a:xfrm>
-            <a:off x="5321808" y="1773936"/>
-            <a:ext cx="3044952" cy="841248"/>
-          </a:xfrm>
-          <a:prstGeom prst="rect">
-            <a:avLst/>
-          </a:prstGeom>
-          <a:noFill/>
-          <a:ln/>
-        </p:spPr>
-        <p:txBody>
-          <a:bodyPr wrap="square" lIns="25400" tIns="25400" rIns="25400" bIns="25400" rtlCol="0" anchor="ctr"/>
-          <a:lstStyle/>
-          <a:p>
-            <a:pPr algn="l" indent="0" marL="0">
-              <a:lnSpc>
-                <a:spcPct val="100000"/>
-              </a:lnSpc>
-              <a:buNone/>
-            </a:pPr>
-            <a:r>
-              <a:rPr lang="en-US" sz="1400" dirty="0">
-                <a:solidFill>
-                  <a:srgbClr val="1F2A37"/>
-                </a:solidFill>
-                <a:latin typeface="Calibri" pitchFamily="34" charset="0"/>
-                <a:ea typeface="Calibri" pitchFamily="34" charset="-122"/>
-                <a:cs typeface="Calibri" pitchFamily="34" charset="-120"/>
-              </a:rPr>
-              <a:t>Lênin e Bernstein</a:t>
-            </a:r>
-            <a:endParaRPr lang="en-US" sz="1400" dirty="0"/>
-          </a:p>
-        </p:txBody>
-      </p:sp>
-      <p:sp>
-        <p:nvSpPr>
-          <p:cNvPr id="10" name="Shape 8"/>
-          <p:cNvSpPr/>
-          <p:nvPr/>
-        </p:nvSpPr>
-        <p:spPr>
-          <a:xfrm>
-            <a:off x="685800" y="2798064"/>
-            <a:ext cx="3794760" cy="914400"/>
-          </a:xfrm>
-          <a:prstGeom prst="roundRect">
-            <a:avLst>
-              <a:gd name="adj" fmla="val 8000"/>
-            </a:avLst>
-          </a:prstGeom>
-          <a:solidFill>
-            <a:srgbClr val="FFFFFF"/>
-          </a:solidFill>
-          <a:ln w="12700">
-            <a:solidFill>
-              <a:srgbClr val="DCD5C1"/>
-            </a:solidFill>
-            <a:prstDash val="solid"/>
-          </a:ln>
-        </p:spPr>
-      </p:sp>
-      <p:sp>
-        <p:nvSpPr>
-          <p:cNvPr id="11" name="Text 9"/>
-          <p:cNvSpPr txBox="1"/>
-          <p:nvPr/>
-        </p:nvSpPr>
-        <p:spPr>
-          <a:xfrm>
-            <a:off x="813816" y="3044952"/>
-            <a:ext cx="420624" cy="420624"/>
-          </a:xfrm>
-          <a:prstGeom prst="roundRect">
-            <a:avLst>
-              <a:gd name="adj" fmla="val 50000"/>
-            </a:avLst>
-          </a:prstGeom>
-          <a:solidFill>
-            <a:srgbClr val="13294B"/>
-          </a:solidFill>
-          <a:ln/>
-        </p:spPr>
-        <p:txBody>
-          <a:bodyPr wrap="square" lIns="0" tIns="0" rIns="0" bIns="0" rtlCol="0" anchor="ctr"/>
-          <a:lstStyle/>
-          <a:p>
-            <a:pPr algn="ctr" indent="0" marL="0">
-              <a:lnSpc>
-                <a:spcPct val="100000"/>
-              </a:lnSpc>
-              <a:buNone/>
-            </a:pPr>
-            <a:r>
-              <a:rPr lang="en-US" sz="1600" b="1" dirty="0">
-                <a:solidFill>
-                  <a:srgbClr val="FFFFFF"/>
-                </a:solidFill>
-                <a:latin typeface="Calibri" pitchFamily="34" charset="0"/>
-                <a:ea typeface="Calibri" pitchFamily="34" charset="-122"/>
-                <a:cs typeface="Calibri" pitchFamily="34" charset="-120"/>
-              </a:rPr>
-              <a:t>c</a:t>
-            </a:r>
-            <a:endParaRPr lang="en-US" sz="1600" dirty="0"/>
-          </a:p>
-        </p:txBody>
-      </p:sp>
-      <p:sp>
-        <p:nvSpPr>
-          <p:cNvPr id="12" name="Text 10"/>
-          <p:cNvSpPr txBox="1"/>
-          <p:nvPr/>
-        </p:nvSpPr>
-        <p:spPr>
-          <a:xfrm>
-            <a:off x="1344168" y="2834640"/>
-            <a:ext cx="3044952" cy="841248"/>
-          </a:xfrm>
-          <a:prstGeom prst="rect">
-            <a:avLst/>
-          </a:prstGeom>
-          <a:noFill/>
-          <a:ln/>
-        </p:spPr>
-        <p:txBody>
-          <a:bodyPr wrap="square" lIns="25400" tIns="25400" rIns="25400" bIns="25400" rtlCol="0" anchor="ctr"/>
-          <a:lstStyle/>
-          <a:p>
-            <a:pPr algn="l" indent="0" marL="0">
-              <a:lnSpc>
-                <a:spcPct val="100000"/>
-              </a:lnSpc>
-              <a:buNone/>
-            </a:pPr>
-            <a:r>
-              <a:rPr lang="en-US" sz="1400" dirty="0">
-                <a:solidFill>
-                  <a:srgbClr val="1F2A37"/>
-                </a:solidFill>
-                <a:latin typeface="Calibri" pitchFamily="34" charset="0"/>
-                <a:ea typeface="Calibri" pitchFamily="34" charset="-122"/>
-                <a:cs typeface="Calibri" pitchFamily="34" charset="-120"/>
-              </a:rPr>
-              <a:t>Smith e Marx</a:t>
-            </a:r>
-            <a:endParaRPr lang="en-US" sz="1400" dirty="0"/>
-          </a:p>
-        </p:txBody>
-      </p:sp>
-      <p:sp>
-        <p:nvSpPr>
-          <p:cNvPr id="13" name="Shape 11"/>
-          <p:cNvSpPr/>
-          <p:nvPr/>
-        </p:nvSpPr>
-        <p:spPr>
-          <a:xfrm>
-            <a:off x="4663440" y="2798064"/>
-            <a:ext cx="3794760" cy="914400"/>
-          </a:xfrm>
-          <a:prstGeom prst="roundRect">
-            <a:avLst>
-              <a:gd name="adj" fmla="val 8000"/>
-            </a:avLst>
-          </a:prstGeom>
-          <a:solidFill>
-            <a:srgbClr val="FFFFFF"/>
-          </a:solidFill>
-          <a:ln w="12700">
-            <a:solidFill>
-              <a:srgbClr val="DCD5C1"/>
-            </a:solidFill>
-            <a:prstDash val="solid"/>
-          </a:ln>
-        </p:spPr>
-      </p:sp>
-      <p:sp>
-        <p:nvSpPr>
-          <p:cNvPr id="14" name="Text 12"/>
-          <p:cNvSpPr txBox="1"/>
-          <p:nvPr/>
-        </p:nvSpPr>
-        <p:spPr>
-          <a:xfrm>
-            <a:off x="4791456" y="3044952"/>
-            <a:ext cx="420624" cy="420624"/>
-          </a:xfrm>
-          <a:prstGeom prst="roundRect">
-            <a:avLst>
-              <a:gd name="adj" fmla="val 50000"/>
-            </a:avLst>
-          </a:prstGeom>
-          <a:solidFill>
-            <a:srgbClr val="13294B"/>
-          </a:solidFill>
-          <a:ln/>
-        </p:spPr>
-        <p:txBody>
-          <a:bodyPr wrap="square" lIns="0" tIns="0" rIns="0" bIns="0" rtlCol="0" anchor="ctr"/>
-          <a:lstStyle/>
-          <a:p>
-            <a:pPr algn="ctr" indent="0" marL="0">
-              <a:lnSpc>
-                <a:spcPct val="100000"/>
-              </a:lnSpc>
-              <a:buNone/>
-            </a:pPr>
-            <a:r>
-              <a:rPr lang="en-US" sz="1600" b="1" dirty="0">
-                <a:solidFill>
-                  <a:srgbClr val="FFFFFF"/>
-                </a:solidFill>
-                <a:latin typeface="Calibri" pitchFamily="34" charset="0"/>
-                <a:ea typeface="Calibri" pitchFamily="34" charset="-122"/>
-                <a:cs typeface="Calibri" pitchFamily="34" charset="-120"/>
-              </a:rPr>
-              <a:t>d</a:t>
-            </a:r>
-            <a:endParaRPr lang="en-US" sz="1600" dirty="0"/>
-          </a:p>
-        </p:txBody>
-      </p:sp>
-      <p:sp>
-        <p:nvSpPr>
-          <p:cNvPr id="15" name="Text 13"/>
-          <p:cNvSpPr txBox="1"/>
-          <p:nvPr/>
-        </p:nvSpPr>
-        <p:spPr>
-          <a:xfrm>
-            <a:off x="5321808" y="2834640"/>
-            <a:ext cx="3044952" cy="841248"/>
-          </a:xfrm>
-          <a:prstGeom prst="rect">
-            <a:avLst/>
-          </a:prstGeom>
-          <a:noFill/>
-          <a:ln/>
-        </p:spPr>
-        <p:txBody>
-          <a:bodyPr wrap="square" lIns="25400" tIns="25400" rIns="25400" bIns="25400" rtlCol="0" anchor="ctr"/>
-          <a:lstStyle/>
-          <a:p>
-            <a:pPr algn="l" indent="0" marL="0">
-              <a:lnSpc>
-                <a:spcPct val="100000"/>
-              </a:lnSpc>
-              <a:buNone/>
-            </a:pPr>
-            <a:r>
-              <a:rPr lang="en-US" sz="1400" dirty="0">
-                <a:solidFill>
-                  <a:srgbClr val="1F2A37"/>
-                </a:solidFill>
-                <a:latin typeface="Calibri" pitchFamily="34" charset="0"/>
-                <a:ea typeface="Calibri" pitchFamily="34" charset="-122"/>
-                <a:cs typeface="Calibri" pitchFamily="34" charset="-120"/>
-              </a:rPr>
-              <a:t>Keynes e Hayek</a:t>
-            </a:r>
-            <a:endParaRPr lang="en-US" sz="1400" dirty="0"/>
-          </a:p>
-        </p:txBody>
-      </p:sp>
-      <p:sp>
-        <p:nvSpPr>
-          <p:cNvPr id="16" name="Text 14"/>
-          <p:cNvSpPr txBox="1"/>
-          <p:nvPr/>
-        </p:nvSpPr>
-        <p:spPr>
-          <a:xfrm>
-            <a:off x="4206240" y="36576"/>
-            <a:ext cx="4800600" cy="219456"/>
-          </a:xfrm>
-          <a:prstGeom prst="rect">
-            <a:avLst/>
-          </a:prstGeom>
-          <a:noFill/>
-          <a:ln/>
-        </p:spPr>
-        <p:txBody>
-          <a:bodyPr wrap="square" lIns="0" tIns="0" rIns="0" bIns="0" rtlCol="0" anchor="ctr"/>
-          <a:lstStyle/>
-          <a:p>
-            <a:pPr algn="r" indent="0" marL="0">
-              <a:lnSpc>
-                <a:spcPct val="100000"/>
-              </a:lnSpc>
-              <a:buNone/>
-            </a:pPr>
-            <a:r>
-              <a:rPr lang="en-US" sz="950" dirty="0">
-                <a:solidFill>
-                  <a:srgbClr val="5B6770"/>
-                </a:solidFill>
-                <a:latin typeface="Calibri" pitchFamily="34" charset="0"/>
-                <a:ea typeface="Calibri" pitchFamily="34" charset="-122"/>
-                <a:cs typeface="Calibri" pitchFamily="34" charset="-120"/>
-              </a:rPr>
-              <a:t>Estado, Governo e Mercado · Unidade 3</a:t>
-            </a:r>
-            <a:endParaRPr lang="en-US" sz="950" dirty="0"/>
-          </a:p>
-        </p:txBody>
-      </p:sp>
-    </p:spTree>
-  </p:cSld>
-  <p:clrMapOvr>
-    <a:masterClrMapping/>
-  </p:clrMapOvr>
-</p:sld>
-</file>
-
-<file path=ppt/slides/slide29.xml><?xml version="1.0" encoding="utf-8"?>
-<p:sld xmlns:a="http://schemas.openxmlformats.org/drawingml/2006/main" xmlns:r="http://schemas.openxmlformats.org/officeDocument/2006/relationships" xmlns:p="http://schemas.openxmlformats.org/presentationml/2006/main">
-  <p:cSld name="Slide 29">
-    <p:bg>
-      <p:bgPr>
-        <a:blipFill dpi="0" rotWithShape="1">
-          <a:blip r:embed="rId1">
-            <a:lum/>
-          </a:blip>
-          <a:srcRect/>
-          <a:stretch>
-            <a:fillRect/>
-          </a:stretch>
-        </a:blipFill>
-        <a:effectLst/>
-      </p:bgPr>
-    </p:bg>
-    <p:spTree>
-      <p:nvGrpSpPr>
-        <p:cNvPr id="1" name=""/>
-        <p:cNvGrpSpPr/>
-        <p:nvPr/>
-      </p:nvGrpSpPr>
-      <p:grpSpPr>
-        <a:xfrm>
-          <a:off x="0" y="0"/>
-          <a:ext cx="0" cy="0"/>
-          <a:chOff x="0" y="0"/>
-          <a:chExt cx="0" cy="0"/>
-        </a:xfrm>
-      </p:grpSpPr>
-      <p:sp>
-        <p:nvSpPr>
-          <p:cNvPr id="2" name="Text 0"/>
-          <p:cNvSpPr txBox="1"/>
-          <p:nvPr/>
-        </p:nvSpPr>
-        <p:spPr>
-          <a:xfrm>
-            <a:off x="731520" y="274320"/>
-            <a:ext cx="7680960" cy="365760"/>
-          </a:xfrm>
-          <a:prstGeom prst="rect">
-            <a:avLst/>
-          </a:prstGeom>
-          <a:noFill/>
-          <a:ln/>
-        </p:spPr>
-        <p:txBody>
-          <a:bodyPr wrap="square" lIns="0" tIns="0" rIns="0" bIns="0" rtlCol="0" anchor="ctr"/>
-          <a:lstStyle/>
-          <a:p>
-            <a:pPr algn="ctr" indent="0" marL="0">
-              <a:lnSpc>
-                <a:spcPct val="100000"/>
-              </a:lnSpc>
-              <a:buNone/>
-            </a:pPr>
-            <a:r>
-              <a:rPr lang="en-US" sz="1250" b="1" dirty="0">
-                <a:solidFill>
-                  <a:srgbClr val="2A8C85"/>
-                </a:solidFill>
-                <a:latin typeface="Calibri" pitchFamily="34" charset="0"/>
-                <a:ea typeface="Calibri" pitchFamily="34" charset="-122"/>
-                <a:cs typeface="Calibri" pitchFamily="34" charset="-120"/>
-              </a:rPr>
-              <a:t>QUIZ DA UNIDADE 3 · PERGUNTA 5 DE 5 · RESPOSTA</a:t>
-            </a:r>
-            <a:endParaRPr lang="en-US" sz="1250" dirty="0"/>
-          </a:p>
-        </p:txBody>
-      </p:sp>
-      <p:sp>
-        <p:nvSpPr>
-          <p:cNvPr id="3" name="Text 1"/>
-          <p:cNvSpPr txBox="1"/>
-          <p:nvPr/>
-        </p:nvSpPr>
-        <p:spPr>
-          <a:xfrm>
-            <a:off x="731520" y="658368"/>
-            <a:ext cx="7680960" cy="960120"/>
-          </a:xfrm>
-          <a:prstGeom prst="rect">
-            <a:avLst/>
-          </a:prstGeom>
-          <a:noFill/>
-          <a:ln/>
-        </p:spPr>
-        <p:txBody>
-          <a:bodyPr wrap="square" lIns="0" tIns="0" rIns="0" bIns="0" rtlCol="0" anchor="ctr"/>
-          <a:lstStyle/>
-          <a:p>
-            <a:pPr algn="ctr" indent="0" marL="0">
-              <a:lnSpc>
-                <a:spcPct val="100000"/>
-              </a:lnSpc>
-              <a:buNone/>
-            </a:pPr>
-            <a:r>
-              <a:rPr lang="en-US" sz="1900" b="1" dirty="0">
-                <a:solidFill>
-                  <a:srgbClr val="13294B"/>
-                </a:solidFill>
-                <a:latin typeface="Calibri" pitchFamily="34" charset="0"/>
-                <a:ea typeface="Calibri" pitchFamily="34" charset="-122"/>
-                <a:cs typeface="Calibri" pitchFamily="34" charset="-120"/>
-              </a:rPr>
-              <a:t>Reformas graduais pela via eleitoral e revolução por um partido de vanguarda são, respectivamente, estratégias de:</a:t>
-            </a:r>
-            <a:endParaRPr lang="en-US" sz="1900" dirty="0"/>
-          </a:p>
-        </p:txBody>
-      </p:sp>
-      <p:sp>
-        <p:nvSpPr>
-          <p:cNvPr id="4" name="Shape 2"/>
-          <p:cNvSpPr/>
-          <p:nvPr/>
-        </p:nvSpPr>
-        <p:spPr>
-          <a:xfrm>
-            <a:off x="685800" y="1737360"/>
-            <a:ext cx="3794760" cy="749808"/>
-          </a:xfrm>
-          <a:prstGeom prst="roundRect">
-            <a:avLst>
-              <a:gd name="adj" fmla="val 9756"/>
-            </a:avLst>
-          </a:prstGeom>
-          <a:solidFill>
-            <a:srgbClr val="E3F2E8"/>
-          </a:solidFill>
-          <a:ln w="25400">
-            <a:solidFill>
-              <a:srgbClr val="2E7D4F"/>
-            </a:solidFill>
-            <a:prstDash val="solid"/>
-          </a:ln>
-        </p:spPr>
-      </p:sp>
-      <p:sp>
-        <p:nvSpPr>
-          <p:cNvPr id="5" name="Text 3"/>
-          <p:cNvSpPr txBox="1"/>
-          <p:nvPr/>
-        </p:nvSpPr>
-        <p:spPr>
-          <a:xfrm>
-            <a:off x="813816" y="1901952"/>
-            <a:ext cx="420624" cy="420624"/>
-          </a:xfrm>
-          <a:prstGeom prst="roundRect">
-            <a:avLst>
-              <a:gd name="adj" fmla="val 50000"/>
-            </a:avLst>
-          </a:prstGeom>
-          <a:solidFill>
-            <a:srgbClr val="2E7D4F"/>
-          </a:solidFill>
-          <a:ln/>
-        </p:spPr>
-        <p:txBody>
-          <a:bodyPr wrap="square" lIns="0" tIns="0" rIns="0" bIns="0" rtlCol="0" anchor="ctr"/>
-          <a:lstStyle/>
-          <a:p>
-            <a:pPr algn="ctr" indent="0" marL="0">
-              <a:lnSpc>
-                <a:spcPct val="100000"/>
-              </a:lnSpc>
-              <a:buNone/>
-            </a:pPr>
-            <a:r>
-              <a:rPr lang="en-US" sz="1600" b="1" dirty="0">
-                <a:solidFill>
-                  <a:srgbClr val="FFFFFF"/>
-                </a:solidFill>
-                <a:latin typeface="Calibri" pitchFamily="34" charset="0"/>
-                <a:ea typeface="Calibri" pitchFamily="34" charset="-122"/>
-                <a:cs typeface="Calibri" pitchFamily="34" charset="-120"/>
-              </a:rPr>
-              <a:t>a</a:t>
-            </a:r>
-            <a:endParaRPr lang="en-US" sz="1600" dirty="0"/>
-          </a:p>
-        </p:txBody>
-      </p:sp>
-      <p:sp>
-        <p:nvSpPr>
-          <p:cNvPr id="6" name="Text 4"/>
-          <p:cNvSpPr txBox="1"/>
-          <p:nvPr/>
-        </p:nvSpPr>
-        <p:spPr>
-          <a:xfrm>
-            <a:off x="1344168" y="1773936"/>
-            <a:ext cx="3044952" cy="676656"/>
-          </a:xfrm>
-          <a:prstGeom prst="rect">
-            <a:avLst/>
-          </a:prstGeom>
-          <a:noFill/>
-          <a:ln/>
-        </p:spPr>
-        <p:txBody>
-          <a:bodyPr wrap="square" lIns="25400" tIns="25400" rIns="25400" bIns="25400" rtlCol="0" anchor="ctr"/>
-          <a:lstStyle/>
-          <a:p>
-            <a:pPr algn="l" indent="0" marL="0">
-              <a:lnSpc>
-                <a:spcPct val="100000"/>
-              </a:lnSpc>
-              <a:buNone/>
-            </a:pPr>
-            <a:r>
-              <a:rPr lang="en-US" sz="1400" b="1" dirty="0">
-                <a:solidFill>
-                  <a:srgbClr val="1F2A37"/>
-                </a:solidFill>
-                <a:latin typeface="Calibri" pitchFamily="34" charset="0"/>
-                <a:ea typeface="Calibri" pitchFamily="34" charset="-122"/>
-                <a:cs typeface="Calibri" pitchFamily="34" charset="-120"/>
-              </a:rPr>
-              <a:t>Bernstein e Lênin</a:t>
-            </a:r>
-            <a:endParaRPr lang="en-US" sz="1400" dirty="0"/>
-          </a:p>
-        </p:txBody>
-      </p:sp>
-      <p:sp>
-        <p:nvSpPr>
-          <p:cNvPr id="7" name="Shape 5"/>
-          <p:cNvSpPr/>
-          <p:nvPr/>
-        </p:nvSpPr>
-        <p:spPr>
-          <a:xfrm>
-            <a:off x="4663440" y="1737360"/>
-            <a:ext cx="3794760" cy="749808"/>
-          </a:xfrm>
-          <a:prstGeom prst="roundRect">
-            <a:avLst>
-              <a:gd name="adj" fmla="val 9756"/>
-            </a:avLst>
-          </a:prstGeom>
-          <a:solidFill>
-            <a:srgbClr val="FFFFFF"/>
-          </a:solidFill>
-          <a:ln w="12700">
-            <a:solidFill>
-              <a:srgbClr val="DCD5C1"/>
-            </a:solidFill>
-            <a:prstDash val="solid"/>
-          </a:ln>
-        </p:spPr>
-      </p:sp>
-      <p:sp>
-        <p:nvSpPr>
-          <p:cNvPr id="8" name="Text 6"/>
-          <p:cNvSpPr txBox="1"/>
-          <p:nvPr/>
-        </p:nvSpPr>
-        <p:spPr>
-          <a:xfrm>
-            <a:off x="4791456" y="1901952"/>
-            <a:ext cx="420624" cy="420624"/>
-          </a:xfrm>
-          <a:prstGeom prst="roundRect">
-            <a:avLst>
-              <a:gd name="adj" fmla="val 50000"/>
-            </a:avLst>
-          </a:prstGeom>
-          <a:solidFill>
-            <a:srgbClr val="9AA3AB"/>
-          </a:solidFill>
-          <a:ln/>
-        </p:spPr>
-        <p:txBody>
-          <a:bodyPr wrap="square" lIns="0" tIns="0" rIns="0" bIns="0" rtlCol="0" anchor="ctr"/>
-          <a:lstStyle/>
-          <a:p>
-            <a:pPr algn="ctr" indent="0" marL="0">
-              <a:lnSpc>
-                <a:spcPct val="100000"/>
-              </a:lnSpc>
-              <a:buNone/>
-            </a:pPr>
-            <a:r>
-              <a:rPr lang="en-US" sz="1600" b="1" dirty="0">
-                <a:solidFill>
-                  <a:srgbClr val="FFFFFF"/>
-                </a:solidFill>
-                <a:latin typeface="Calibri" pitchFamily="34" charset="0"/>
-                <a:ea typeface="Calibri" pitchFamily="34" charset="-122"/>
-                <a:cs typeface="Calibri" pitchFamily="34" charset="-120"/>
-              </a:rPr>
-              <a:t>b</a:t>
-            </a:r>
-            <a:endParaRPr lang="en-US" sz="1600" dirty="0"/>
-          </a:p>
-        </p:txBody>
-      </p:sp>
-      <p:sp>
-        <p:nvSpPr>
-          <p:cNvPr id="9" name="Text 7"/>
-          <p:cNvSpPr txBox="1"/>
-          <p:nvPr/>
-        </p:nvSpPr>
-        <p:spPr>
-          <a:xfrm>
-            <a:off x="5321808" y="1773936"/>
-            <a:ext cx="3044952" cy="676656"/>
-          </a:xfrm>
-          <a:prstGeom prst="rect">
-            <a:avLst/>
-          </a:prstGeom>
-          <a:noFill/>
-          <a:ln/>
-        </p:spPr>
-        <p:txBody>
-          <a:bodyPr wrap="square" lIns="25400" tIns="25400" rIns="25400" bIns="25400" rtlCol="0" anchor="ctr"/>
-          <a:lstStyle/>
-          <a:p>
-            <a:pPr algn="l" indent="0" marL="0">
-              <a:lnSpc>
-                <a:spcPct val="100000"/>
-              </a:lnSpc>
-              <a:buNone/>
-            </a:pPr>
-            <a:r>
-              <a:rPr lang="en-US" sz="1400" dirty="0">
-                <a:solidFill>
-                  <a:srgbClr val="5B6770"/>
-                </a:solidFill>
-                <a:latin typeface="Calibri" pitchFamily="34" charset="0"/>
-                <a:ea typeface="Calibri" pitchFamily="34" charset="-122"/>
-                <a:cs typeface="Calibri" pitchFamily="34" charset="-120"/>
-              </a:rPr>
-              <a:t>Lênin e Bernstein</a:t>
-            </a:r>
-            <a:endParaRPr lang="en-US" sz="1400" dirty="0"/>
-          </a:p>
-        </p:txBody>
-      </p:sp>
-      <p:sp>
-        <p:nvSpPr>
-          <p:cNvPr id="10" name="Shape 8"/>
-          <p:cNvSpPr/>
-          <p:nvPr/>
-        </p:nvSpPr>
-        <p:spPr>
-          <a:xfrm>
-            <a:off x="685800" y="2633472"/>
-            <a:ext cx="3794760" cy="749808"/>
-          </a:xfrm>
-          <a:prstGeom prst="roundRect">
-            <a:avLst>
-              <a:gd name="adj" fmla="val 9756"/>
-            </a:avLst>
-          </a:prstGeom>
-          <a:solidFill>
-            <a:srgbClr val="FFFFFF"/>
-          </a:solidFill>
-          <a:ln w="12700">
-            <a:solidFill>
-              <a:srgbClr val="DCD5C1"/>
-            </a:solidFill>
-            <a:prstDash val="solid"/>
-          </a:ln>
-        </p:spPr>
-      </p:sp>
-      <p:sp>
-        <p:nvSpPr>
-          <p:cNvPr id="11" name="Text 9"/>
-          <p:cNvSpPr txBox="1"/>
-          <p:nvPr/>
-        </p:nvSpPr>
-        <p:spPr>
-          <a:xfrm>
-            <a:off x="813816" y="2798064"/>
-            <a:ext cx="420624" cy="420624"/>
-          </a:xfrm>
-          <a:prstGeom prst="roundRect">
-            <a:avLst>
-              <a:gd name="adj" fmla="val 50000"/>
-            </a:avLst>
-          </a:prstGeom>
-          <a:solidFill>
-            <a:srgbClr val="9AA3AB"/>
-          </a:solidFill>
-          <a:ln/>
-        </p:spPr>
-        <p:txBody>
-          <a:bodyPr wrap="square" lIns="0" tIns="0" rIns="0" bIns="0" rtlCol="0" anchor="ctr"/>
-          <a:lstStyle/>
-          <a:p>
-            <a:pPr algn="ctr" indent="0" marL="0">
-              <a:lnSpc>
-                <a:spcPct val="100000"/>
-              </a:lnSpc>
-              <a:buNone/>
-            </a:pPr>
-            <a:r>
-              <a:rPr lang="en-US" sz="1600" b="1" dirty="0">
-                <a:solidFill>
-                  <a:srgbClr val="FFFFFF"/>
-                </a:solidFill>
-                <a:latin typeface="Calibri" pitchFamily="34" charset="0"/>
-                <a:ea typeface="Calibri" pitchFamily="34" charset="-122"/>
-                <a:cs typeface="Calibri" pitchFamily="34" charset="-120"/>
-              </a:rPr>
-              <a:t>c</a:t>
-            </a:r>
-            <a:endParaRPr lang="en-US" sz="1600" dirty="0"/>
-          </a:p>
-        </p:txBody>
-      </p:sp>
-      <p:sp>
-        <p:nvSpPr>
-          <p:cNvPr id="12" name="Text 10"/>
-          <p:cNvSpPr txBox="1"/>
-          <p:nvPr/>
-        </p:nvSpPr>
-        <p:spPr>
-          <a:xfrm>
-            <a:off x="1344168" y="2670048"/>
-            <a:ext cx="3044952" cy="676656"/>
-          </a:xfrm>
-          <a:prstGeom prst="rect">
-            <a:avLst/>
-          </a:prstGeom>
-          <a:noFill/>
-          <a:ln/>
-        </p:spPr>
-        <p:txBody>
-          <a:bodyPr wrap="square" lIns="25400" tIns="25400" rIns="25400" bIns="25400" rtlCol="0" anchor="ctr"/>
-          <a:lstStyle/>
-          <a:p>
-            <a:pPr algn="l" indent="0" marL="0">
-              <a:lnSpc>
-                <a:spcPct val="100000"/>
-              </a:lnSpc>
-              <a:buNone/>
-            </a:pPr>
-            <a:r>
-              <a:rPr lang="en-US" sz="1400" dirty="0">
-                <a:solidFill>
-                  <a:srgbClr val="5B6770"/>
-                </a:solidFill>
-                <a:latin typeface="Calibri" pitchFamily="34" charset="0"/>
-                <a:ea typeface="Calibri" pitchFamily="34" charset="-122"/>
-                <a:cs typeface="Calibri" pitchFamily="34" charset="-120"/>
-              </a:rPr>
-              <a:t>Smith e Marx</a:t>
-            </a:r>
-            <a:endParaRPr lang="en-US" sz="1400" dirty="0"/>
-          </a:p>
-        </p:txBody>
-      </p:sp>
-      <p:sp>
-        <p:nvSpPr>
-          <p:cNvPr id="13" name="Shape 11"/>
-          <p:cNvSpPr/>
-          <p:nvPr/>
-        </p:nvSpPr>
-        <p:spPr>
-          <a:xfrm>
-            <a:off x="4663440" y="2633472"/>
-            <a:ext cx="3794760" cy="749808"/>
-          </a:xfrm>
-          <a:prstGeom prst="roundRect">
-            <a:avLst>
-              <a:gd name="adj" fmla="val 9756"/>
-            </a:avLst>
-          </a:prstGeom>
-          <a:solidFill>
-            <a:srgbClr val="FFFFFF"/>
-          </a:solidFill>
-          <a:ln w="12700">
-            <a:solidFill>
-              <a:srgbClr val="DCD5C1"/>
-            </a:solidFill>
-            <a:prstDash val="solid"/>
-          </a:ln>
-        </p:spPr>
-      </p:sp>
-      <p:sp>
-        <p:nvSpPr>
-          <p:cNvPr id="14" name="Text 12"/>
-          <p:cNvSpPr txBox="1"/>
-          <p:nvPr/>
-        </p:nvSpPr>
-        <p:spPr>
-          <a:xfrm>
-            <a:off x="4791456" y="2798064"/>
-            <a:ext cx="420624" cy="420624"/>
-          </a:xfrm>
-          <a:prstGeom prst="roundRect">
-            <a:avLst>
-              <a:gd name="adj" fmla="val 50000"/>
-            </a:avLst>
-          </a:prstGeom>
-          <a:solidFill>
-            <a:srgbClr val="9AA3AB"/>
-          </a:solidFill>
-          <a:ln/>
-        </p:spPr>
-        <p:txBody>
-          <a:bodyPr wrap="square" lIns="0" tIns="0" rIns="0" bIns="0" rtlCol="0" anchor="ctr"/>
-          <a:lstStyle/>
-          <a:p>
-            <a:pPr algn="ctr" indent="0" marL="0">
-              <a:lnSpc>
-                <a:spcPct val="100000"/>
-              </a:lnSpc>
-              <a:buNone/>
-            </a:pPr>
-            <a:r>
-              <a:rPr lang="en-US" sz="1600" b="1" dirty="0">
-                <a:solidFill>
-                  <a:srgbClr val="FFFFFF"/>
-                </a:solidFill>
-                <a:latin typeface="Calibri" pitchFamily="34" charset="0"/>
-                <a:ea typeface="Calibri" pitchFamily="34" charset="-122"/>
-                <a:cs typeface="Calibri" pitchFamily="34" charset="-120"/>
-              </a:rPr>
-              <a:t>d</a:t>
-            </a:r>
-            <a:endParaRPr lang="en-US" sz="1600" dirty="0"/>
-          </a:p>
-        </p:txBody>
-      </p:sp>
-      <p:sp>
-        <p:nvSpPr>
-          <p:cNvPr id="15" name="Text 13"/>
-          <p:cNvSpPr txBox="1"/>
-          <p:nvPr/>
-        </p:nvSpPr>
-        <p:spPr>
-          <a:xfrm>
-            <a:off x="5321808" y="2670048"/>
-            <a:ext cx="3044952" cy="676656"/>
-          </a:xfrm>
-          <a:prstGeom prst="rect">
-            <a:avLst/>
-          </a:prstGeom>
-          <a:noFill/>
-          <a:ln/>
-        </p:spPr>
-        <p:txBody>
-          <a:bodyPr wrap="square" lIns="25400" tIns="25400" rIns="25400" bIns="25400" rtlCol="0" anchor="ctr"/>
-          <a:lstStyle/>
-          <a:p>
-            <a:pPr algn="l" indent="0" marL="0">
-              <a:lnSpc>
-                <a:spcPct val="100000"/>
-              </a:lnSpc>
-              <a:buNone/>
-            </a:pPr>
-            <a:r>
-              <a:rPr lang="en-US" sz="1400" dirty="0">
-                <a:solidFill>
-                  <a:srgbClr val="5B6770"/>
-                </a:solidFill>
-                <a:latin typeface="Calibri" pitchFamily="34" charset="0"/>
-                <a:ea typeface="Calibri" pitchFamily="34" charset="-122"/>
-                <a:cs typeface="Calibri" pitchFamily="34" charset="-120"/>
-              </a:rPr>
-              <a:t>Keynes e Hayek</a:t>
-            </a:r>
-            <a:endParaRPr lang="en-US" sz="1400" dirty="0"/>
-          </a:p>
-        </p:txBody>
-      </p:sp>
-      <p:sp>
-        <p:nvSpPr>
-          <p:cNvPr id="16" name="Text 14"/>
-          <p:cNvSpPr txBox="1"/>
-          <p:nvPr/>
-        </p:nvSpPr>
-        <p:spPr>
-          <a:xfrm>
-            <a:off x="685800" y="3566160"/>
-            <a:ext cx="7772400" cy="841248"/>
-          </a:xfrm>
-          <a:prstGeom prst="roundRect">
-            <a:avLst>
-              <a:gd name="adj" fmla="val 8696"/>
-            </a:avLst>
-          </a:prstGeom>
-          <a:solidFill>
-            <a:srgbClr val="E6F2F0"/>
-          </a:solidFill>
-          <a:ln/>
-        </p:spPr>
-        <p:txBody>
-          <a:bodyPr wrap="square" lIns="114300" tIns="114300" rIns="114300" bIns="114300" rtlCol="0" anchor="ctr"/>
-          <a:lstStyle/>
-          <a:p>
-            <a:pPr algn="l" indent="0" marL="0">
-              <a:lnSpc>
-                <a:spcPct val="100000"/>
-              </a:lnSpc>
-              <a:buNone/>
-            </a:pPr>
-            <a:r>
-              <a:rPr lang="en-US" sz="1350" b="1" dirty="0">
-                <a:solidFill>
-                  <a:srgbClr val="2E7D4F"/>
-                </a:solidFill>
-                <a:latin typeface="Calibri" pitchFamily="34" charset="0"/>
-                <a:ea typeface="Calibri" pitchFamily="34" charset="-122"/>
-                <a:cs typeface="Calibri" pitchFamily="34" charset="-120"/>
-              </a:rPr>
-              <a:t>Resposta: a) </a:t>
-            </a:r>
-            <a:pPr algn="l" indent="0" marL="0">
-              <a:lnSpc>
-                <a:spcPct val="100000"/>
-              </a:lnSpc>
-              <a:buNone/>
-            </a:pPr>
-            <a:r>
-              <a:rPr lang="en-US" sz="1350" dirty="0">
-                <a:solidFill>
-                  <a:srgbClr val="1F2A37"/>
-                </a:solidFill>
-                <a:latin typeface="Calibri" pitchFamily="34" charset="0"/>
-                <a:ea typeface="Calibri" pitchFamily="34" charset="-122"/>
-                <a:cs typeface="Calibri" pitchFamily="34" charset="-120"/>
-              </a:rPr>
-              <a:t>Bernstein representa o revisionismo social-democrata; Lênin, a via revolucionária.</a:t>
-            </a:r>
-            <a:endParaRPr lang="en-US" sz="1350" dirty="0"/>
-          </a:p>
-        </p:txBody>
-      </p:sp>
-      <p:sp>
-        <p:nvSpPr>
-          <p:cNvPr id="17" name="Text 15"/>
-          <p:cNvSpPr txBox="1"/>
-          <p:nvPr/>
-        </p:nvSpPr>
-        <p:spPr>
-          <a:xfrm>
-            <a:off x="4206240" y="36576"/>
-            <a:ext cx="4800600" cy="219456"/>
-          </a:xfrm>
-          <a:prstGeom prst="rect">
-            <a:avLst/>
-          </a:prstGeom>
-          <a:noFill/>
-          <a:ln/>
-        </p:spPr>
-        <p:txBody>
-          <a:bodyPr wrap="square" lIns="0" tIns="0" rIns="0" bIns="0" rtlCol="0" anchor="ctr"/>
-          <a:lstStyle/>
-          <a:p>
-            <a:pPr algn="r" indent="0" marL="0">
-              <a:lnSpc>
-                <a:spcPct val="100000"/>
-              </a:lnSpc>
-              <a:buNone/>
-            </a:pPr>
-            <a:r>
-              <a:rPr lang="en-US" sz="950" dirty="0">
-                <a:solidFill>
-                  <a:srgbClr val="5B6770"/>
-                </a:solidFill>
-                <a:latin typeface="Calibri" pitchFamily="34" charset="0"/>
-                <a:ea typeface="Calibri" pitchFamily="34" charset="-122"/>
-                <a:cs typeface="Calibri" pitchFamily="34" charset="-120"/>
-              </a:rPr>
-              <a:t>Estado, Governo e Mercado · Unidade 3</a:t>
-            </a:r>
-            <a:endParaRPr lang="en-US" sz="950" dirty="0"/>
-          </a:p>
-        </p:txBody>
-      </p:sp>
-    </p:spTree>
-  </p:cSld>
-  <p:clrMapOvr>
-    <a:masterClrMapping/>
-  </p:clrMapOvr>
-</p:sld>
-</file>
-
 <file path=ppt/slides/slide3.xml><?xml version="1.0" encoding="utf-8"?>
 <p:sld xmlns:a="http://schemas.openxmlformats.org/drawingml/2006/main" xmlns:r="http://schemas.openxmlformats.org/officeDocument/2006/relationships" xmlns:p="http://schemas.openxmlformats.org/presentationml/2006/main">
   <p:cSld name="Slide 3">
@@ -18987,581 +11945,6 @@
                 <a:cs typeface="Calibri" pitchFamily="34" charset="-120"/>
               </a:rPr>
               <a:t>Estado, Governo e Mercado · Unidade 3 · Tópico 5 do sumário</a:t>
-            </a:r>
-            <a:endParaRPr lang="en-US" sz="950" dirty="0"/>
-          </a:p>
-        </p:txBody>
-      </p:sp>
-    </p:spTree>
-  </p:cSld>
-  <p:clrMapOvr>
-    <a:masterClrMapping/>
-  </p:clrMapOvr>
-</p:sld>
-</file>
-
-<file path=ppt/slides/slide30.xml><?xml version="1.0" encoding="utf-8"?>
-<p:sld xmlns:a="http://schemas.openxmlformats.org/drawingml/2006/main" xmlns:r="http://schemas.openxmlformats.org/officeDocument/2006/relationships" xmlns:p="http://schemas.openxmlformats.org/presentationml/2006/main">
-  <p:cSld name="Slide 30">
-    <p:bg>
-      <p:bgPr>
-        <a:blipFill dpi="0" rotWithShape="1">
-          <a:blip r:embed="rId1">
-            <a:lum/>
-          </a:blip>
-          <a:srcRect/>
-          <a:stretch>
-            <a:fillRect/>
-          </a:stretch>
-        </a:blipFill>
-        <a:effectLst/>
-      </p:bgPr>
-    </p:bg>
-    <p:spTree>
-      <p:nvGrpSpPr>
-        <p:cNvPr id="1" name=""/>
-        <p:cNvGrpSpPr/>
-        <p:nvPr/>
-      </p:nvGrpSpPr>
-      <p:grpSpPr>
-        <a:xfrm>
-          <a:off x="0" y="0"/>
-          <a:ext cx="0" cy="0"/>
-          <a:chOff x="0" y="0"/>
-          <a:chExt cx="0" cy="0"/>
-        </a:xfrm>
-      </p:grpSpPr>
-      <p:sp>
-        <p:nvSpPr>
-          <p:cNvPr id="2" name="Text 0"/>
-          <p:cNvSpPr txBox="1"/>
-          <p:nvPr/>
-        </p:nvSpPr>
-        <p:spPr>
-          <a:xfrm>
-            <a:off x="731520" y="256032"/>
-            <a:ext cx="7680960" cy="566928"/>
-          </a:xfrm>
-          <a:prstGeom prst="rect">
-            <a:avLst/>
-          </a:prstGeom>
-          <a:noFill/>
-          <a:ln/>
-        </p:spPr>
-        <p:txBody>
-          <a:bodyPr wrap="square" lIns="0" tIns="0" rIns="0" bIns="0" rtlCol="0" anchor="ctr"/>
-          <a:lstStyle/>
-          <a:p>
-            <a:pPr algn="ctr" indent="0" marL="0">
-              <a:lnSpc>
-                <a:spcPct val="100000"/>
-              </a:lnSpc>
-              <a:buNone/>
-            </a:pPr>
-            <a:r>
-              <a:rPr lang="en-US" sz="2800" b="1" dirty="0">
-                <a:solidFill>
-                  <a:srgbClr val="13294B"/>
-                </a:solidFill>
-                <a:latin typeface="Calibri" pitchFamily="34" charset="0"/>
-                <a:ea typeface="Calibri" pitchFamily="34" charset="-122"/>
-                <a:cs typeface="Calibri" pitchFamily="34" charset="-120"/>
-              </a:rPr>
-              <a:t>Resumo da Unidade 3</a:t>
-            </a:r>
-            <a:endParaRPr lang="en-US" sz="2800" dirty="0"/>
-          </a:p>
-        </p:txBody>
-      </p:sp>
-      <p:sp>
-        <p:nvSpPr>
-          <p:cNvPr id="3" name="Text 1"/>
-          <p:cNvSpPr txBox="1"/>
-          <p:nvPr/>
-        </p:nvSpPr>
-        <p:spPr>
-          <a:xfrm>
-            <a:off x="1005840" y="804672"/>
-            <a:ext cx="7132320" cy="329184"/>
-          </a:xfrm>
-          <a:prstGeom prst="rect">
-            <a:avLst/>
-          </a:prstGeom>
-          <a:noFill/>
-          <a:ln/>
-        </p:spPr>
-        <p:txBody>
-          <a:bodyPr wrap="square" lIns="0" tIns="0" rIns="0" bIns="0" rtlCol="0" anchor="ctr"/>
-          <a:lstStyle/>
-          <a:p>
-            <a:pPr algn="ctr" indent="0" marL="0">
-              <a:lnSpc>
-                <a:spcPct val="100000"/>
-              </a:lnSpc>
-              <a:buNone/>
-            </a:pPr>
-            <a:r>
-              <a:rPr lang="en-US" sz="1400" dirty="0">
-                <a:solidFill>
-                  <a:srgbClr val="5B6770"/>
-                </a:solidFill>
-                <a:latin typeface="Calibri" pitchFamily="34" charset="0"/>
-                <a:ea typeface="Calibri" pitchFamily="34" charset="-122"/>
-                <a:cs typeface="Calibri" pitchFamily="34" charset="-120"/>
-              </a:rPr>
-              <a:t>O que discutimos nesta unidade</a:t>
-            </a:r>
-            <a:endParaRPr lang="en-US" sz="1400" dirty="0"/>
-          </a:p>
-        </p:txBody>
-      </p:sp>
-      <p:sp>
-        <p:nvSpPr>
-          <p:cNvPr id="4" name="Text 2"/>
-          <p:cNvSpPr txBox="1"/>
-          <p:nvPr/>
-        </p:nvSpPr>
-        <p:spPr>
-          <a:xfrm>
-            <a:off x="685800" y="1170432"/>
-            <a:ext cx="3794760" cy="2743200"/>
-          </a:xfrm>
-          <a:prstGeom prst="roundRect">
-            <a:avLst>
-              <a:gd name="adj" fmla="val 2000"/>
-            </a:avLst>
-          </a:prstGeom>
-          <a:solidFill>
-            <a:srgbClr val="FFFFFF"/>
-          </a:solidFill>
-          <a:ln w="12700">
-            <a:solidFill>
-              <a:srgbClr val="DCD5C1"/>
-            </a:solidFill>
-          </a:ln>
-        </p:spPr>
-        <p:txBody>
-          <a:bodyPr wrap="square" lIns="114300" tIns="114300" rIns="114300" bIns="114300" rtlCol="0" anchor="t"/>
-          <a:lstStyle/>
-          <a:p>
-            <a:pPr algn="l" indent="0" marL="0">
-              <a:lnSpc>
-                <a:spcPct val="100000"/>
-              </a:lnSpc>
-              <a:spcAft>
-                <a:spcPts val="200"/>
-              </a:spcAft>
-              <a:buNone/>
-            </a:pPr>
-            <a:r>
-              <a:rPr lang="en-US" sz="1100" b="1" dirty="0">
-                <a:solidFill>
-                  <a:srgbClr val="2A8C85"/>
-                </a:solidFill>
-                <a:latin typeface="Calibri" pitchFamily="34" charset="0"/>
-                <a:ea typeface="Calibri" pitchFamily="34" charset="-122"/>
-                <a:cs typeface="Calibri" pitchFamily="34" charset="-120"/>
-              </a:rPr>
-              <a:t>PARTE 1 · TÓPICO 5</a:t>
-            </a:r>
-            <a:endParaRPr lang="en-US" sz="1100" dirty="0"/>
-          </a:p>
-          <a:p>
-            <a:pPr algn="l" indent="0" marL="0">
-              <a:lnSpc>
-                <a:spcPct val="100000"/>
-              </a:lnSpc>
-              <a:spcAft>
-                <a:spcPts val="400"/>
-              </a:spcAft>
-              <a:buNone/>
-            </a:pPr>
-            <a:r>
-              <a:rPr lang="en-US" sz="1450" b="1" dirty="0">
-                <a:solidFill>
-                  <a:srgbClr val="13294B"/>
-                </a:solidFill>
-                <a:latin typeface="Calibri" pitchFamily="34" charset="0"/>
-                <a:ea typeface="Calibri" pitchFamily="34" charset="-122"/>
-                <a:cs typeface="Calibri" pitchFamily="34" charset="-120"/>
-              </a:rPr>
-              <a:t>A matriz marxista</a:t>
-            </a:r>
-            <a:endParaRPr lang="en-US" sz="1100" dirty="0"/>
-          </a:p>
-          <a:p>
-            <a:pPr algn="l" marL="177800" indent="-177800">
-              <a:lnSpc>
-                <a:spcPct val="100000"/>
-              </a:lnSpc>
-              <a:spcAft>
-                <a:spcPts val="300"/>
-              </a:spcAft>
-              <a:buSzPct val="100000"/>
-              <a:buChar char="•"/>
-            </a:pPr>
-            <a:r>
-              <a:rPr lang="en-US" sz="1200" dirty="0">
-                <a:solidFill>
-                  <a:srgbClr val="1F2A37"/>
-                </a:solidFill>
-                <a:latin typeface="Calibri" pitchFamily="34" charset="0"/>
-                <a:ea typeface="Calibri" pitchFamily="34" charset="-122"/>
-                <a:cs typeface="Calibri" pitchFamily="34" charset="-120"/>
-              </a:rPr>
-              <a:t>Marx e Engels: o capitalismo é um modo de produção histórico.</a:t>
-            </a:r>
-            <a:endParaRPr lang="en-US" sz="1100" dirty="0"/>
-          </a:p>
-          <a:p>
-            <a:pPr algn="l" marL="177800" indent="-177800">
-              <a:lnSpc>
-                <a:spcPct val="100000"/>
-              </a:lnSpc>
-              <a:spcAft>
-                <a:spcPts val="300"/>
-              </a:spcAft>
-              <a:buSzPct val="100000"/>
-              <a:buChar char="•"/>
-            </a:pPr>
-            <a:r>
-              <a:rPr lang="en-US" sz="1200" dirty="0">
-                <a:solidFill>
-                  <a:srgbClr val="1F2A37"/>
-                </a:solidFill>
-                <a:latin typeface="Calibri" pitchFamily="34" charset="0"/>
-                <a:ea typeface="Calibri" pitchFamily="34" charset="-122"/>
-                <a:cs typeface="Calibri" pitchFamily="34" charset="-120"/>
-              </a:rPr>
-              <a:t>Materialismo histórico, luta de classes e mais-valia (absoluta e relativa).</a:t>
-            </a:r>
-            <a:endParaRPr lang="en-US" sz="1100" dirty="0"/>
-          </a:p>
-          <a:p>
-            <a:pPr algn="l" marL="177800" indent="-177800">
-              <a:lnSpc>
-                <a:spcPct val="100000"/>
-              </a:lnSpc>
-              <a:spcAft>
-                <a:spcPts val="300"/>
-              </a:spcAft>
-              <a:buSzPct val="100000"/>
-              <a:buChar char="•"/>
-            </a:pPr>
-            <a:r>
-              <a:rPr lang="en-US" sz="1200" dirty="0">
-                <a:solidFill>
-                  <a:srgbClr val="1F2A37"/>
-                </a:solidFill>
-                <a:latin typeface="Calibri" pitchFamily="34" charset="0"/>
-                <a:ea typeface="Calibri" pitchFamily="34" charset="-122"/>
-                <a:cs typeface="Calibri" pitchFamily="34" charset="-120"/>
-              </a:rPr>
-              <a:t>O Estado como instrumento de dominação de classe; socialismo e comunismo.</a:t>
-            </a:r>
-            <a:endParaRPr lang="en-US" sz="1100" dirty="0"/>
-          </a:p>
-          <a:p>
-            <a:pPr algn="l" marL="177800" indent="-177800">
-              <a:lnSpc>
-                <a:spcPct val="100000"/>
-              </a:lnSpc>
-              <a:spcAft>
-                <a:spcPts val="300"/>
-              </a:spcAft>
-              <a:buSzPct val="100000"/>
-              <a:buChar char="•"/>
-            </a:pPr>
-            <a:r>
-              <a:rPr lang="en-US" sz="1200" dirty="0">
-                <a:solidFill>
-                  <a:srgbClr val="1F2A37"/>
-                </a:solidFill>
-                <a:latin typeface="Calibri" pitchFamily="34" charset="0"/>
-                <a:ea typeface="Calibri" pitchFamily="34" charset="-122"/>
-                <a:cs typeface="Calibri" pitchFamily="34" charset="-120"/>
-              </a:rPr>
-              <a:t>Liberais e marxistas fazem leituras opostas de uma mesma política.</a:t>
-            </a:r>
-            <a:endParaRPr lang="en-US" sz="1100" dirty="0"/>
-          </a:p>
-        </p:txBody>
-      </p:sp>
-      <p:sp>
-        <p:nvSpPr>
-          <p:cNvPr id="5" name="Text 3"/>
-          <p:cNvSpPr txBox="1"/>
-          <p:nvPr/>
-        </p:nvSpPr>
-        <p:spPr>
-          <a:xfrm>
-            <a:off x="4663440" y="1170432"/>
-            <a:ext cx="3794760" cy="2743200"/>
-          </a:xfrm>
-          <a:prstGeom prst="roundRect">
-            <a:avLst>
-              <a:gd name="adj" fmla="val 2000"/>
-            </a:avLst>
-          </a:prstGeom>
-          <a:solidFill>
-            <a:srgbClr val="E6F2F0"/>
-          </a:solidFill>
-          <a:ln/>
-        </p:spPr>
-        <p:txBody>
-          <a:bodyPr wrap="square" lIns="114300" tIns="114300" rIns="114300" bIns="114300" rtlCol="0" anchor="t"/>
-          <a:lstStyle/>
-          <a:p>
-            <a:pPr algn="l" indent="0" marL="0">
-              <a:lnSpc>
-                <a:spcPct val="100000"/>
-              </a:lnSpc>
-              <a:spcAft>
-                <a:spcPts val="200"/>
-              </a:spcAft>
-              <a:buNone/>
-            </a:pPr>
-            <a:r>
-              <a:rPr lang="en-US" sz="1100" b="1" dirty="0">
-                <a:solidFill>
-                  <a:srgbClr val="2A8C85"/>
-                </a:solidFill>
-                <a:latin typeface="Calibri" pitchFamily="34" charset="0"/>
-                <a:ea typeface="Calibri" pitchFamily="34" charset="-122"/>
-                <a:cs typeface="Calibri" pitchFamily="34" charset="-120"/>
-              </a:rPr>
-              <a:t>PARTE 2 · TÓPICO 6</a:t>
-            </a:r>
-            <a:endParaRPr lang="en-US" sz="1100" dirty="0"/>
-          </a:p>
-          <a:p>
-            <a:pPr algn="l" indent="0" marL="0">
-              <a:lnSpc>
-                <a:spcPct val="100000"/>
-              </a:lnSpc>
-              <a:spcAft>
-                <a:spcPts val="400"/>
-              </a:spcAft>
-              <a:buNone/>
-            </a:pPr>
-            <a:r>
-              <a:rPr lang="en-US" sz="1450" b="1" dirty="0">
-                <a:solidFill>
-                  <a:srgbClr val="13294B"/>
-                </a:solidFill>
-                <a:latin typeface="Calibri" pitchFamily="34" charset="0"/>
-                <a:ea typeface="Calibri" pitchFamily="34" charset="-122"/>
-                <a:cs typeface="Calibri" pitchFamily="34" charset="-120"/>
-              </a:rPr>
-              <a:t>As mudanças do final do século XIX</a:t>
-            </a:r>
-            <a:endParaRPr lang="en-US" sz="1100" dirty="0"/>
-          </a:p>
-          <a:p>
-            <a:pPr algn="l" marL="177800" indent="-177800">
-              <a:lnSpc>
-                <a:spcPct val="100000"/>
-              </a:lnSpc>
-              <a:spcAft>
-                <a:spcPts val="300"/>
-              </a:spcAft>
-              <a:buSzPct val="100000"/>
-              <a:buChar char="•"/>
-            </a:pPr>
-            <a:r>
-              <a:rPr lang="en-US" sz="1200" dirty="0">
-                <a:solidFill>
-                  <a:srgbClr val="1F2A37"/>
-                </a:solidFill>
-                <a:latin typeface="Calibri" pitchFamily="34" charset="0"/>
-                <a:ea typeface="Calibri" pitchFamily="34" charset="-122"/>
-                <a:cs typeface="Calibri" pitchFamily="34" charset="-120"/>
-              </a:rPr>
-              <a:t>Segunda Revolução Industrial, concentração e capital financeiro.</a:t>
-            </a:r>
-            <a:endParaRPr lang="en-US" sz="1100" dirty="0"/>
-          </a:p>
-          <a:p>
-            <a:pPr algn="l" marL="177800" indent="-177800">
-              <a:lnSpc>
-                <a:spcPct val="100000"/>
-              </a:lnSpc>
-              <a:spcAft>
-                <a:spcPts val="300"/>
-              </a:spcAft>
-              <a:buSzPct val="100000"/>
-              <a:buChar char="•"/>
-            </a:pPr>
-            <a:r>
-              <a:rPr lang="en-US" sz="1200" dirty="0">
-                <a:solidFill>
-                  <a:srgbClr val="1F2A37"/>
-                </a:solidFill>
-                <a:latin typeface="Calibri" pitchFamily="34" charset="0"/>
-                <a:ea typeface="Calibri" pitchFamily="34" charset="-122"/>
-                <a:cs typeface="Calibri" pitchFamily="34" charset="-120"/>
-              </a:rPr>
-              <a:t>Trabalhadores organizados e ampliação do voto.</a:t>
-            </a:r>
-            <a:endParaRPr lang="en-US" sz="1100" dirty="0"/>
-          </a:p>
-          <a:p>
-            <a:pPr algn="l" marL="177800" indent="-177800">
-              <a:lnSpc>
-                <a:spcPct val="100000"/>
-              </a:lnSpc>
-              <a:spcAft>
-                <a:spcPts val="300"/>
-              </a:spcAft>
-              <a:buSzPct val="100000"/>
-              <a:buChar char="•"/>
-            </a:pPr>
-            <a:r>
-              <a:rPr lang="en-US" sz="1200" dirty="0">
-                <a:solidFill>
-                  <a:srgbClr val="1F2A37"/>
-                </a:solidFill>
-                <a:latin typeface="Calibri" pitchFamily="34" charset="0"/>
-                <a:ea typeface="Calibri" pitchFamily="34" charset="-122"/>
-                <a:cs typeface="Calibri" pitchFamily="34" charset="-120"/>
-              </a:rPr>
-              <a:t>Seguros sociais de Bismarck; no Brasil, Lei Eloy Chaves e CLT.</a:t>
-            </a:r>
-            <a:endParaRPr lang="en-US" sz="1100" dirty="0"/>
-          </a:p>
-          <a:p>
-            <a:pPr algn="l" marL="177800" indent="-177800">
-              <a:lnSpc>
-                <a:spcPct val="100000"/>
-              </a:lnSpc>
-              <a:spcAft>
-                <a:spcPts val="300"/>
-              </a:spcAft>
-              <a:buSzPct val="100000"/>
-              <a:buChar char="•"/>
-            </a:pPr>
-            <a:r>
-              <a:rPr lang="en-US" sz="1200" dirty="0">
-                <a:solidFill>
-                  <a:srgbClr val="1F2A37"/>
-                </a:solidFill>
-                <a:latin typeface="Calibri" pitchFamily="34" charset="0"/>
-                <a:ea typeface="Calibri" pitchFamily="34" charset="-122"/>
-                <a:cs typeface="Calibri" pitchFamily="34" charset="-120"/>
-              </a:rPr>
-              <a:t>Liberalismo social e leis antitruste.</a:t>
-            </a:r>
-            <a:endParaRPr lang="en-US" sz="1100" dirty="0"/>
-          </a:p>
-          <a:p>
-            <a:pPr algn="l" marL="177800" indent="-177800">
-              <a:lnSpc>
-                <a:spcPct val="100000"/>
-              </a:lnSpc>
-              <a:spcAft>
-                <a:spcPts val="300"/>
-              </a:spcAft>
-              <a:buSzPct val="100000"/>
-              <a:buChar char="•"/>
-            </a:pPr>
-            <a:r>
-              <a:rPr lang="en-US" sz="1200" dirty="0">
-                <a:solidFill>
-                  <a:srgbClr val="1F2A37"/>
-                </a:solidFill>
-                <a:latin typeface="Calibri" pitchFamily="34" charset="0"/>
-                <a:ea typeface="Calibri" pitchFamily="34" charset="-122"/>
-                <a:cs typeface="Calibri" pitchFamily="34" charset="-120"/>
-              </a:rPr>
-              <a:t>Reforma (Bernstein) × revolução (Lênin).</a:t>
-            </a:r>
-            <a:endParaRPr lang="en-US" sz="1100" dirty="0"/>
-          </a:p>
-        </p:txBody>
-      </p:sp>
-      <p:sp>
-        <p:nvSpPr>
-          <p:cNvPr id="6" name="Text 4"/>
-          <p:cNvSpPr txBox="1"/>
-          <p:nvPr/>
-        </p:nvSpPr>
-        <p:spPr>
-          <a:xfrm>
-            <a:off x="685800" y="3995928"/>
-            <a:ext cx="7772400" cy="484632"/>
-          </a:xfrm>
-          <a:prstGeom prst="roundRect">
-            <a:avLst>
-              <a:gd name="adj" fmla="val 15094"/>
-            </a:avLst>
-          </a:prstGeom>
-          <a:solidFill>
-            <a:srgbClr val="E6F2F0"/>
-          </a:solidFill>
-          <a:ln/>
-        </p:spPr>
-        <p:txBody>
-          <a:bodyPr wrap="square" lIns="127000" tIns="127000" rIns="127000" bIns="127000" rtlCol="0" anchor="ctr"/>
-          <a:lstStyle/>
-          <a:p>
-            <a:pPr algn="ctr" indent="0" marL="0">
-              <a:lnSpc>
-                <a:spcPct val="100000"/>
-              </a:lnSpc>
-              <a:buNone/>
-            </a:pPr>
-            <a:r>
-              <a:rPr lang="en-US" sz="1300" b="1" dirty="0">
-                <a:solidFill>
-                  <a:srgbClr val="13294B"/>
-                </a:solidFill>
-                <a:latin typeface="Calibri" pitchFamily="34" charset="0"/>
-                <a:ea typeface="Calibri" pitchFamily="34" charset="-122"/>
-                <a:cs typeface="Calibri" pitchFamily="34" charset="-120"/>
-              </a:rPr>
-              <a:t>Próxima unidade: os modelos de Estado do século XX e o Estado brasileiro.</a:t>
-            </a:r>
-            <a:endParaRPr lang="en-US" sz="1300" dirty="0"/>
-          </a:p>
-        </p:txBody>
-      </p:sp>
-      <p:sp>
-        <p:nvSpPr>
-          <p:cNvPr id="7" name="Text 5"/>
-          <p:cNvSpPr txBox="1"/>
-          <p:nvPr/>
-        </p:nvSpPr>
-        <p:spPr>
-          <a:xfrm>
-            <a:off x="4206240" y="36576"/>
-            <a:ext cx="4800600" cy="219456"/>
-          </a:xfrm>
-          <a:prstGeom prst="rect">
-            <a:avLst/>
-          </a:prstGeom>
-          <a:noFill/>
-          <a:ln/>
-        </p:spPr>
-        <p:txBody>
-          <a:bodyPr wrap="square" lIns="0" tIns="0" rIns="0" bIns="0" rtlCol="0" anchor="ctr"/>
-          <a:lstStyle/>
-          <a:p>
-            <a:pPr algn="r" indent="0" marL="0">
-              <a:lnSpc>
-                <a:spcPct val="100000"/>
-              </a:lnSpc>
-              <a:buNone/>
-            </a:pPr>
-            <a:r>
-              <a:rPr lang="en-US" sz="950" dirty="0">
-                <a:solidFill>
-                  <a:srgbClr val="5B6770"/>
-                </a:solidFill>
-                <a:latin typeface="Calibri" pitchFamily="34" charset="0"/>
-                <a:ea typeface="Calibri" pitchFamily="34" charset="-122"/>
-                <a:cs typeface="Calibri" pitchFamily="34" charset="-120"/>
-              </a:rPr>
-              <a:t>Estado, Governo e Mercado · Unidade 3</a:t>
             </a:r>
             <a:endParaRPr lang="en-US" sz="950" dirty="0"/>
           </a:p>
